--- a/docs/test/stress/e2e-outputs/development_case12_yeoksam_dev_basic.pptx
+++ b/docs/test/stress/e2e-outputs/development_case12_yeoksam_dev_basic.pptx
@@ -4221,6 +4221,45 @@
         <p:spPr>
           <a:xfrm>
             <a:off x="6053328" y="1481328"/>
+            <a:ext cx="5571439" cy="237744"/>
+          </a:xfrm>
+          <a:prstGeom prst="rect">
+            <a:avLst/>
+          </a:prstGeom>
+          <a:noFill/>
+          <a:ln/>
+        </p:spPr>
+        <p:txBody>
+          <a:bodyPr wrap="square" lIns="0" tIns="0" rIns="0" bIns="0" rtlCol="0" anchor="ctr"/>
+          <a:lstStyle/>
+          <a:p>
+            <a:pPr indent="0" marL="0">
+              <a:buNone/>
+            </a:pPr>
+            <a:r>
+              <a:rPr lang="en-US" sz="1100" b="1" dirty="0">
+                <a:solidFill>
+                  <a:srgbClr val="0F172A"/>
+                </a:solidFill>
+                <a:latin typeface="Pretendard" pitchFamily="34" charset="0"/>
+                <a:ea typeface="Pretendard" pitchFamily="34" charset="-122"/>
+                <a:cs typeface="Pretendard" pitchFamily="34" charset="-120"/>
+              </a:rPr>
+              <a:t>교통 및 도로 접근성</a:t>
+            </a:r>
+            <a:endParaRPr lang="en-US" sz="1100" dirty="0"/>
+          </a:p>
+        </p:txBody>
+      </p:sp>
+      <p:sp>
+        <p:nvSpPr>
+          <p:cNvPr id="7" name="Text 4"/>
+          <p:cNvSpPr/>
+          <p:nvPr/>
+        </p:nvSpPr>
+        <p:spPr>
+          <a:xfrm>
+            <a:off x="6053328" y="1801368"/>
             <a:ext cx="2117147" cy="438912"/>
           </a:xfrm>
           <a:prstGeom prst="rect">
@@ -4248,7 +4287,7 @@
                 <a:ea typeface="Pretendard" pitchFamily="34" charset="-122"/>
                 <a:cs typeface="Pretendard" pitchFamily="34" charset="-120"/>
               </a:rPr>
-              <a:t>교통 접근성</a:t>
+              <a:t>지하철 접근성</a:t>
             </a:r>
             <a:endParaRPr lang="en-US" sz="1400" dirty="0"/>
           </a:p>
@@ -4256,13 +4295,13 @@
       </p:sp>
       <p:sp>
         <p:nvSpPr>
-          <p:cNvPr id="7" name="Text 4"/>
-          <p:cNvSpPr/>
-          <p:nvPr/>
-        </p:nvSpPr>
-        <p:spPr>
-          <a:xfrm>
-            <a:off x="8170475" y="1481328"/>
+          <p:cNvPr id="8" name="Text 5"/>
+          <p:cNvSpPr/>
+          <p:nvPr/>
+        </p:nvSpPr>
+        <p:spPr>
+          <a:xfrm>
+            <a:off x="8170475" y="1801368"/>
             <a:ext cx="3454292" cy="438912"/>
           </a:xfrm>
           <a:prstGeom prst="rect">
@@ -4290,7 +4329,7 @@
                 <a:ea typeface="Pretendard" pitchFamily="34" charset="-122"/>
                 <a:cs typeface="Pretendard" pitchFamily="34" charset="-120"/>
               </a:rPr>
-              <a:t>{"ok":true,"mocked":true,"extractedFields":{"area_signal":"역…</a:t>
+              <a:t>강남역(2호선·신분당선) 및 양재역(3호선) 더블역세권 도보 4분</a:t>
             </a:r>
             <a:endParaRPr lang="en-US" sz="1400" dirty="0"/>
           </a:p>
@@ -4298,7 +4337,542 @@
       </p:sp>
       <p:sp>
         <p:nvSpPr>
-          <p:cNvPr id="8" name="Text 5"/>
+          <p:cNvPr id="9" name="Shape 6"/>
+          <p:cNvSpPr/>
+          <p:nvPr/>
+        </p:nvSpPr>
+        <p:spPr>
+          <a:xfrm>
+            <a:off x="6053328" y="2240280"/>
+            <a:ext cx="5571439" cy="0"/>
+          </a:xfrm>
+          <a:prstGeom prst="line">
+            <a:avLst/>
+          </a:prstGeom>
+          <a:noFill/>
+          <a:ln w="3810">
+            <a:solidFill>
+              <a:srgbClr val="CBD5E1"/>
+            </a:solidFill>
+            <a:prstDash val="solid"/>
+          </a:ln>
+        </p:spPr>
+      </p:sp>
+      <p:sp>
+        <p:nvSpPr>
+          <p:cNvPr id="10" name="Text 7"/>
+          <p:cNvSpPr/>
+          <p:nvPr/>
+        </p:nvSpPr>
+        <p:spPr>
+          <a:xfrm>
+            <a:off x="6053328" y="2240280"/>
+            <a:ext cx="2117147" cy="438912"/>
+          </a:xfrm>
+          <a:prstGeom prst="rect">
+            <a:avLst/>
+          </a:prstGeom>
+          <a:noFill/>
+          <a:ln/>
+        </p:spPr>
+        <p:txBody>
+          <a:bodyPr wrap="square" lIns="0" tIns="0" rIns="0" bIns="0" rtlCol="0" anchor="ctr"/>
+          <a:lstStyle/>
+          <a:p>
+            <a:pPr indent="0" marL="0">
+              <a:lnSpc>
+                <a:spcPct val="120000"/>
+              </a:lnSpc>
+              <a:buNone/>
+            </a:pPr>
+            <a:r>
+              <a:rPr lang="en-US" sz="1400" dirty="0">
+                <a:solidFill>
+                  <a:srgbClr val="64748B"/>
+                </a:solidFill>
+                <a:latin typeface="Pretendard" pitchFamily="34" charset="0"/>
+                <a:ea typeface="Pretendard" pitchFamily="34" charset="-122"/>
+                <a:cs typeface="Pretendard" pitchFamily="34" charset="-120"/>
+              </a:rPr>
+              <a:t>도로 접면 조건</a:t>
+            </a:r>
+            <a:endParaRPr lang="en-US" sz="1400" dirty="0"/>
+          </a:p>
+        </p:txBody>
+      </p:sp>
+      <p:sp>
+        <p:nvSpPr>
+          <p:cNvPr id="11" name="Text 8"/>
+          <p:cNvSpPr/>
+          <p:nvPr/>
+        </p:nvSpPr>
+        <p:spPr>
+          <a:xfrm>
+            <a:off x="8170475" y="2240280"/>
+            <a:ext cx="3454292" cy="438912"/>
+          </a:xfrm>
+          <a:prstGeom prst="rect">
+            <a:avLst/>
+          </a:prstGeom>
+          <a:noFill/>
+          <a:ln/>
+        </p:spPr>
+        <p:txBody>
+          <a:bodyPr wrap="square" lIns="0" tIns="0" rIns="0" bIns="0" rtlCol="0" anchor="ctr"/>
+          <a:lstStyle/>
+          <a:p>
+            <a:pPr indent="0" marL="0">
+              <a:lnSpc>
+                <a:spcPct val="120000"/>
+              </a:lnSpc>
+              <a:buNone/>
+            </a:pPr>
+            <a:r>
+              <a:rPr lang="en-US" sz="1400" b="1" dirty="0">
+                <a:solidFill>
+                  <a:srgbClr val="0F172A"/>
+                </a:solidFill>
+                <a:latin typeface="Pretendard" pitchFamily="34" charset="0"/>
+                <a:ea typeface="Pretendard" pitchFamily="34" charset="-122"/>
+                <a:cs typeface="Pretendard" pitchFamily="34" charset="-120"/>
+              </a:rPr>
+              <a:t>서초대로 25m 메인 대로변 접면</a:t>
+            </a:r>
+            <a:endParaRPr lang="en-US" sz="1400" dirty="0"/>
+          </a:p>
+        </p:txBody>
+      </p:sp>
+      <p:sp>
+        <p:nvSpPr>
+          <p:cNvPr id="12" name="Shape 9"/>
+          <p:cNvSpPr/>
+          <p:nvPr/>
+        </p:nvSpPr>
+        <p:spPr>
+          <a:xfrm>
+            <a:off x="6053328" y="2679192"/>
+            <a:ext cx="5571439" cy="0"/>
+          </a:xfrm>
+          <a:prstGeom prst="line">
+            <a:avLst/>
+          </a:prstGeom>
+          <a:noFill/>
+          <a:ln w="3810">
+            <a:solidFill>
+              <a:srgbClr val="CBD5E1"/>
+            </a:solidFill>
+            <a:prstDash val="solid"/>
+          </a:ln>
+        </p:spPr>
+      </p:sp>
+      <p:sp>
+        <p:nvSpPr>
+          <p:cNvPr id="13" name="Text 10"/>
+          <p:cNvSpPr/>
+          <p:nvPr/>
+        </p:nvSpPr>
+        <p:spPr>
+          <a:xfrm>
+            <a:off x="6053328" y="2679192"/>
+            <a:ext cx="2117147" cy="438912"/>
+          </a:xfrm>
+          <a:prstGeom prst="rect">
+            <a:avLst/>
+          </a:prstGeom>
+          <a:noFill/>
+          <a:ln/>
+        </p:spPr>
+        <p:txBody>
+          <a:bodyPr wrap="square" lIns="0" tIns="0" rIns="0" bIns="0" rtlCol="0" anchor="ctr"/>
+          <a:lstStyle/>
+          <a:p>
+            <a:pPr indent="0" marL="0">
+              <a:lnSpc>
+                <a:spcPct val="120000"/>
+              </a:lnSpc>
+              <a:buNone/>
+            </a:pPr>
+            <a:r>
+              <a:rPr lang="en-US" sz="1400" dirty="0">
+                <a:solidFill>
+                  <a:srgbClr val="64748B"/>
+                </a:solidFill>
+                <a:latin typeface="Pretendard" pitchFamily="34" charset="0"/>
+                <a:ea typeface="Pretendard" pitchFamily="34" charset="-122"/>
+                <a:cs typeface="Pretendard" pitchFamily="34" charset="-120"/>
+              </a:rPr>
+              <a:t>차량 진출입</a:t>
+            </a:r>
+            <a:endParaRPr lang="en-US" sz="1400" dirty="0"/>
+          </a:p>
+        </p:txBody>
+      </p:sp>
+      <p:sp>
+        <p:nvSpPr>
+          <p:cNvPr id="14" name="Text 11"/>
+          <p:cNvSpPr/>
+          <p:nvPr/>
+        </p:nvSpPr>
+        <p:spPr>
+          <a:xfrm>
+            <a:off x="8170475" y="2679192"/>
+            <a:ext cx="3454292" cy="438912"/>
+          </a:xfrm>
+          <a:prstGeom prst="rect">
+            <a:avLst/>
+          </a:prstGeom>
+          <a:noFill/>
+          <a:ln/>
+        </p:spPr>
+        <p:txBody>
+          <a:bodyPr wrap="square" lIns="0" tIns="0" rIns="0" bIns="0" rtlCol="0" anchor="ctr"/>
+          <a:lstStyle/>
+          <a:p>
+            <a:pPr indent="0" marL="0">
+              <a:lnSpc>
+                <a:spcPct val="120000"/>
+              </a:lnSpc>
+              <a:buNone/>
+            </a:pPr>
+            <a:r>
+              <a:rPr lang="en-US" sz="1400" b="1" dirty="0">
+                <a:solidFill>
+                  <a:srgbClr val="0F172A"/>
+                </a:solidFill>
+                <a:latin typeface="Pretendard" pitchFamily="34" charset="0"/>
+                <a:ea typeface="Pretendard" pitchFamily="34" charset="-122"/>
+                <a:cs typeface="Pretendard" pitchFamily="34" charset="-120"/>
+              </a:rPr>
+              <a:t>경부고속도로 서초IC 및 테헤란로 3분 내 진입 가능</a:t>
+            </a:r>
+            <a:endParaRPr lang="en-US" sz="1400" dirty="0"/>
+          </a:p>
+        </p:txBody>
+      </p:sp>
+      <p:sp>
+        <p:nvSpPr>
+          <p:cNvPr id="15" name="Shape 12"/>
+          <p:cNvSpPr/>
+          <p:nvPr/>
+        </p:nvSpPr>
+        <p:spPr>
+          <a:xfrm>
+            <a:off x="6053328" y="3118104"/>
+            <a:ext cx="5571439" cy="0"/>
+          </a:xfrm>
+          <a:prstGeom prst="line">
+            <a:avLst/>
+          </a:prstGeom>
+          <a:noFill/>
+          <a:ln w="3810">
+            <a:solidFill>
+              <a:srgbClr val="CBD5E1"/>
+            </a:solidFill>
+            <a:prstDash val="solid"/>
+          </a:ln>
+        </p:spPr>
+      </p:sp>
+      <p:sp>
+        <p:nvSpPr>
+          <p:cNvPr id="16" name="Text 13"/>
+          <p:cNvSpPr/>
+          <p:nvPr/>
+        </p:nvSpPr>
+        <p:spPr>
+          <a:xfrm>
+            <a:off x="6053328" y="3118104"/>
+            <a:ext cx="2117147" cy="438912"/>
+          </a:xfrm>
+          <a:prstGeom prst="rect">
+            <a:avLst/>
+          </a:prstGeom>
+          <a:noFill/>
+          <a:ln/>
+        </p:spPr>
+        <p:txBody>
+          <a:bodyPr wrap="square" lIns="0" tIns="0" rIns="0" bIns="0" rtlCol="0" anchor="ctr"/>
+          <a:lstStyle/>
+          <a:p>
+            <a:pPr indent="0" marL="0">
+              <a:lnSpc>
+                <a:spcPct val="120000"/>
+              </a:lnSpc>
+              <a:buNone/>
+            </a:pPr>
+            <a:r>
+              <a:rPr lang="en-US" sz="1400" dirty="0">
+                <a:solidFill>
+                  <a:srgbClr val="64748B"/>
+                </a:solidFill>
+                <a:latin typeface="Pretendard" pitchFamily="34" charset="0"/>
+                <a:ea typeface="Pretendard" pitchFamily="34" charset="-122"/>
+                <a:cs typeface="Pretendard" pitchFamily="34" charset="-120"/>
+              </a:rPr>
+              <a:t>배후 수요</a:t>
+            </a:r>
+            <a:endParaRPr lang="en-US" sz="1400" dirty="0"/>
+          </a:p>
+        </p:txBody>
+      </p:sp>
+      <p:sp>
+        <p:nvSpPr>
+          <p:cNvPr id="17" name="Text 14"/>
+          <p:cNvSpPr/>
+          <p:nvPr/>
+        </p:nvSpPr>
+        <p:spPr>
+          <a:xfrm>
+            <a:off x="8170475" y="3118104"/>
+            <a:ext cx="3454292" cy="438912"/>
+          </a:xfrm>
+          <a:prstGeom prst="rect">
+            <a:avLst/>
+          </a:prstGeom>
+          <a:noFill/>
+          <a:ln/>
+        </p:spPr>
+        <p:txBody>
+          <a:bodyPr wrap="square" lIns="0" tIns="0" rIns="0" bIns="0" rtlCol="0" anchor="ctr"/>
+          <a:lstStyle/>
+          <a:p>
+            <a:pPr indent="0" marL="0">
+              <a:lnSpc>
+                <a:spcPct val="120000"/>
+              </a:lnSpc>
+              <a:buNone/>
+            </a:pPr>
+            <a:r>
+              <a:rPr lang="en-US" sz="1400" b="1" dirty="0">
+                <a:solidFill>
+                  <a:srgbClr val="0F172A"/>
+                </a:solidFill>
+                <a:latin typeface="Pretendard" pitchFamily="34" charset="0"/>
+                <a:ea typeface="Pretendard" pitchFamily="34" charset="-122"/>
+                <a:cs typeface="Pretendard" pitchFamily="34" charset="-120"/>
+              </a:rPr>
+              <a:t>강남 테헤란로 IT밸리 및 서초 법조타운 오피스 상주인구 30만 배후</a:t>
+            </a:r>
+            <a:endParaRPr lang="en-US" sz="1400" dirty="0"/>
+          </a:p>
+        </p:txBody>
+      </p:sp>
+      <p:sp>
+        <p:nvSpPr>
+          <p:cNvPr id="18" name="Shape 15"/>
+          <p:cNvSpPr/>
+          <p:nvPr/>
+        </p:nvSpPr>
+        <p:spPr>
+          <a:xfrm>
+            <a:off x="6053328" y="3557016"/>
+            <a:ext cx="5571439" cy="0"/>
+          </a:xfrm>
+          <a:prstGeom prst="line">
+            <a:avLst/>
+          </a:prstGeom>
+          <a:noFill/>
+          <a:ln w="3810">
+            <a:solidFill>
+              <a:srgbClr val="CBD5E1"/>
+            </a:solidFill>
+            <a:prstDash val="solid"/>
+          </a:ln>
+        </p:spPr>
+      </p:sp>
+      <p:sp>
+        <p:nvSpPr>
+          <p:cNvPr id="19" name="Text 16"/>
+          <p:cNvSpPr/>
+          <p:nvPr/>
+        </p:nvSpPr>
+        <p:spPr>
+          <a:xfrm>
+            <a:off x="6053328" y="3557016"/>
+            <a:ext cx="2117147" cy="438912"/>
+          </a:xfrm>
+          <a:prstGeom prst="rect">
+            <a:avLst/>
+          </a:prstGeom>
+          <a:noFill/>
+          <a:ln/>
+        </p:spPr>
+        <p:txBody>
+          <a:bodyPr wrap="square" lIns="0" tIns="0" rIns="0" bIns="0" rtlCol="0" anchor="ctr"/>
+          <a:lstStyle/>
+          <a:p>
+            <a:pPr indent="0" marL="0">
+              <a:lnSpc>
+                <a:spcPct val="120000"/>
+              </a:lnSpc>
+              <a:buNone/>
+            </a:pPr>
+            <a:r>
+              <a:rPr lang="en-US" sz="1400" dirty="0">
+                <a:solidFill>
+                  <a:srgbClr val="64748B"/>
+                </a:solidFill>
+                <a:latin typeface="Pretendard" pitchFamily="34" charset="0"/>
+                <a:ea typeface="Pretendard" pitchFamily="34" charset="-122"/>
+                <a:cs typeface="Pretendard" pitchFamily="34" charset="-120"/>
+              </a:rPr>
+              <a:t>의료 상권</a:t>
+            </a:r>
+            <a:endParaRPr lang="en-US" sz="1400" dirty="0"/>
+          </a:p>
+        </p:txBody>
+      </p:sp>
+      <p:sp>
+        <p:nvSpPr>
+          <p:cNvPr id="20" name="Text 17"/>
+          <p:cNvSpPr/>
+          <p:nvPr/>
+        </p:nvSpPr>
+        <p:spPr>
+          <a:xfrm>
+            <a:off x="8170475" y="3557016"/>
+            <a:ext cx="3454292" cy="438912"/>
+          </a:xfrm>
+          <a:prstGeom prst="rect">
+            <a:avLst/>
+          </a:prstGeom>
+          <a:noFill/>
+          <a:ln/>
+        </p:spPr>
+        <p:txBody>
+          <a:bodyPr wrap="square" lIns="0" tIns="0" rIns="0" bIns="0" rtlCol="0" anchor="ctr"/>
+          <a:lstStyle/>
+          <a:p>
+            <a:pPr indent="0" marL="0">
+              <a:lnSpc>
+                <a:spcPct val="120000"/>
+              </a:lnSpc>
+              <a:buNone/>
+            </a:pPr>
+            <a:r>
+              <a:rPr lang="en-US" sz="1400" b="1" dirty="0">
+                <a:solidFill>
+                  <a:srgbClr val="0F172A"/>
+                </a:solidFill>
+                <a:latin typeface="Pretendard" pitchFamily="34" charset="0"/>
+                <a:ea typeface="Pretendard" pitchFamily="34" charset="-122"/>
+                <a:cs typeface="Pretendard" pitchFamily="34" charset="-120"/>
+              </a:rPr>
+              <a:t>1층 약국 및 상층부 안과·피부과 전문의원 집적 의료 특화 상권</a:t>
+            </a:r>
+            <a:endParaRPr lang="en-US" sz="1400" dirty="0"/>
+          </a:p>
+        </p:txBody>
+      </p:sp>
+      <p:sp>
+        <p:nvSpPr>
+          <p:cNvPr id="21" name="Shape 18"/>
+          <p:cNvSpPr/>
+          <p:nvPr/>
+        </p:nvSpPr>
+        <p:spPr>
+          <a:xfrm>
+            <a:off x="6053328" y="3995928"/>
+            <a:ext cx="5571439" cy="0"/>
+          </a:xfrm>
+          <a:prstGeom prst="line">
+            <a:avLst/>
+          </a:prstGeom>
+          <a:noFill/>
+          <a:ln w="3810">
+            <a:solidFill>
+              <a:srgbClr val="CBD5E1"/>
+            </a:solidFill>
+            <a:prstDash val="solid"/>
+          </a:ln>
+        </p:spPr>
+      </p:sp>
+      <p:sp>
+        <p:nvSpPr>
+          <p:cNvPr id="22" name="Text 19"/>
+          <p:cNvSpPr/>
+          <p:nvPr/>
+        </p:nvSpPr>
+        <p:spPr>
+          <a:xfrm>
+            <a:off x="6053328" y="3995928"/>
+            <a:ext cx="2117147" cy="438912"/>
+          </a:xfrm>
+          <a:prstGeom prst="rect">
+            <a:avLst/>
+          </a:prstGeom>
+          <a:noFill/>
+          <a:ln/>
+        </p:spPr>
+        <p:txBody>
+          <a:bodyPr wrap="square" lIns="0" tIns="0" rIns="0" bIns="0" rtlCol="0" anchor="ctr"/>
+          <a:lstStyle/>
+          <a:p>
+            <a:pPr indent="0" marL="0">
+              <a:lnSpc>
+                <a:spcPct val="120000"/>
+              </a:lnSpc>
+              <a:buNone/>
+            </a:pPr>
+            <a:r>
+              <a:rPr lang="en-US" sz="1400" dirty="0">
+                <a:solidFill>
+                  <a:srgbClr val="64748B"/>
+                </a:solidFill>
+                <a:latin typeface="Pretendard" pitchFamily="34" charset="0"/>
+                <a:ea typeface="Pretendard" pitchFamily="34" charset="-122"/>
+                <a:cs typeface="Pretendard" pitchFamily="34" charset="-120"/>
+              </a:rPr>
+              <a:t>편의 인프라</a:t>
+            </a:r>
+            <a:endParaRPr lang="en-US" sz="1400" dirty="0"/>
+          </a:p>
+        </p:txBody>
+      </p:sp>
+      <p:sp>
+        <p:nvSpPr>
+          <p:cNvPr id="23" name="Text 20"/>
+          <p:cNvSpPr/>
+          <p:nvPr/>
+        </p:nvSpPr>
+        <p:spPr>
+          <a:xfrm>
+            <a:off x="8170475" y="3995928"/>
+            <a:ext cx="3454292" cy="438912"/>
+          </a:xfrm>
+          <a:prstGeom prst="rect">
+            <a:avLst/>
+          </a:prstGeom>
+          <a:noFill/>
+          <a:ln/>
+        </p:spPr>
+        <p:txBody>
+          <a:bodyPr wrap="square" lIns="0" tIns="0" rIns="0" bIns="0" rtlCol="0" anchor="ctr"/>
+          <a:lstStyle/>
+          <a:p>
+            <a:pPr indent="0" marL="0">
+              <a:lnSpc>
+                <a:spcPct val="120000"/>
+              </a:lnSpc>
+              <a:buNone/>
+            </a:pPr>
+            <a:r>
+              <a:rPr lang="en-US" sz="1400" b="1" dirty="0">
+                <a:solidFill>
+                  <a:srgbClr val="0F172A"/>
+                </a:solidFill>
+                <a:latin typeface="Pretendard" pitchFamily="34" charset="0"/>
+                <a:ea typeface="Pretendard" pitchFamily="34" charset="-122"/>
+                <a:cs typeface="Pretendard" pitchFamily="34" charset="-120"/>
+              </a:rPr>
+              <a:t>반경 300m 내 주요 임차 업종, 은행, 대형 베이커리 밀집</a:t>
+            </a:r>
+            <a:endParaRPr lang="en-US" sz="1400" dirty="0"/>
+          </a:p>
+        </p:txBody>
+      </p:sp>
+      <p:sp>
+        <p:nvSpPr>
+          <p:cNvPr id="24" name="Text 21"/>
           <p:cNvSpPr/>
           <p:nvPr/>
         </p:nvSpPr>
@@ -4337,7 +4911,7 @@
       </p:sp>
       <p:sp>
         <p:nvSpPr>
-          <p:cNvPr id="9" name="Shape 6"/>
+          <p:cNvPr id="25" name="Shape 22"/>
           <p:cNvSpPr/>
           <p:nvPr/>
         </p:nvSpPr>
@@ -4357,45 +4931,6 @@
             <a:prstDash val="solid"/>
           </a:ln>
         </p:spPr>
-      </p:sp>
-      <p:sp>
-        <p:nvSpPr>
-          <p:cNvPr id="10" name="Text 7"/>
-          <p:cNvSpPr/>
-          <p:nvPr/>
-        </p:nvSpPr>
-        <p:spPr>
-          <a:xfrm>
-            <a:off x="566928" y="1481328"/>
-            <a:ext cx="11057839" cy="9692640"/>
-          </a:xfrm>
-          <a:prstGeom prst="rect">
-            <a:avLst/>
-          </a:prstGeom>
-          <a:noFill/>
-          <a:ln/>
-        </p:spPr>
-        <p:txBody>
-          <a:bodyPr wrap="square" lIns="0" tIns="0" rIns="0" bIns="0" rtlCol="0" anchor="t"/>
-          <a:lstStyle/>
-          <a:p>
-            <a:pPr indent="0" marL="0">
-              <a:buNone/>
-            </a:pPr>
-            <a:r>
-              <a:rPr lang="en-US" sz="1000" dirty="0">
-                <a:solidFill>
-                  <a:srgbClr val="0F172A"/>
-                </a:solidFill>
-                <a:latin typeface="Pretendard" pitchFamily="34" charset="0"/>
-                <a:ea typeface="Pretendard" pitchFamily="34" charset="-122"/>
-                <a:cs typeface="Pretendard" pitchFamily="34" charset="-120"/>
-              </a:rPr>
-              <a:t>{"ok":true,"mocked":true,"extractedFields":{"area_signal":"역삼","asset_type":"오피스빌딩","price_band":"300억","size_signal":"3000평(약 9917.4㎡)"},"extractedFacts":{"region":"역삼","exactAddressCandidate":"역삼동 742-1","assetType":"오피스빌딩","priceText":"300억","sizeText":"3000평(약 9917.4㎡)","currentUse":"오피스","currentUseSignal":"근린생활시설","leaseSignal":"임대중","vacancySignal":"공실없음","tenantNames":["쿠팡","네이버"],"unitRentTexts":["301호: 1500만"],"sellerMotivationText":"자산 효율화","brokerNotes":["초역세권 매물"]},"detectedSensitiveFields":["exact_address","tenant_name"],"ambiguousFields":[],"warnings":[],"areaSignal":"역삼","assetType":"오피스빌딩","priceBand":"300억","sizeSignal":"3000평(약 9917.4㎡)","dealType":"매각","buildingName":"역삼 센트럴타워","exactAddress":"역삼동 742-1","totalFloorArea":9917.3,"buildYear":2015,"currentUseSignal":"근린생활시설","vacancySignal":"공실 없음","fitSummary":"초역세권 근생 빌딩으로 시행/사옥 매입에 최적화","cautionSummary":"주요 임차 업종 만기 조율 필요","hiddenFields":["exact_address","seller_motivation"],"confidence":{"areaSignal":"confirmed","assetType":"confirmed","priceBand":"ai_hypothesis","fitSummary":"ai_hypothesis"},"missingData":["sizeSignal"],"boundaryNote":"본 자료는 실거래 통계 기반 참고치입니다.","buyerType":"법인 사옥형","budgetRange":{"min":50,"max":80,"display":"50억~80억"},"preferredRegions":["강남","성수"],"assetTypes":["꼬마빌딩","사옥용"],"purchasePurpose":"사옥용 매입","mustHave":["초역세권","주차"],"niceToHave":["테라스","루프탑"],"riskTolerance":"medium","financingNote":"자본금 50% 준비","missingQuestions":["구체적인 입주 시기가 언제인가요?","선호하는 수익률이 있나요?"],"privacyNotes":["연락처 비공개"],"fitReasons":["매수자 예산(50-80억)에 부합하는 매물입니다.","요청하신 성수/강남 권역에 해당합니다."],"cautionReasons":["요청한 용도와 달리 명도 협의가 다소 필요합니다."],"recommendedNextAction":"현장 답사 제안","kakaoMessage":"안녕하세요! 요청하신 조건에 부합하는 추천 매물이 있어 안내해 드립니다. 확인해보시고 피드백 부탁드립니다.","title":"강남 역삼역 초역세권 오피스 사옥용 빌딩 매각","shortSummary":"역삼역 도보 5분 거리의 준신축급 대형 오피스빌딩입니다.","dealPoints":["초역세권","사옥 최적"],"cautionPoints":["명도 조율 필요"],"hiddenInfoNotice":["보증금 및 지번은 인가 후 확인 가능"],"gateMessage":"G1 등급 등록이 필요합니다.","kakaoText":"강남 역삼역 오피스 빌딩 매각 안내입니다.","exactUnitCandidate":"101호","floor":"1층","areaSqmText":"150㎡","spaceType":"office","depositText":"5000만","monthlyRentText":"400만","maintenanceFeeText":"50만","availableFromText":"즉시입주","leaseTermMonthsText":"24","incentivesText":"렌트프리 2개월","restrictions":[],"landlordIdentity":"김성수","currentTenant":"스타트업","vacancyReason":"이전 확장","rentNegotiation":"협의 가능","region":"성수동","areaSqm":150,"deposit":5000,"monthlyRent":400,"maintenanceFee":50,"availableFrom":"즉시입주","leaseTermMonths":24,"incentives":{"rentFreeMonths":2,"interiorSupport":"일부 인테리어 지원","freeRentDetail":"렌트프리 2개월 지원"},"shortSummaryLease":"성수역 도보 5분 거리 1층 리테일 상가 매물입니다."}</a:t>
-            </a:r>
-            <a:endParaRPr lang="en-US" sz="1000" dirty="0"/>
-          </a:p>
-        </p:txBody>
       </p:sp>
     </p:spTree>
   </p:cSld>
@@ -7226,7 +7761,7 @@
         <p:spPr>
           <a:xfrm>
             <a:off x="566928" y="384048"/>
-            <a:ext cx="45720" cy="566928"/>
+            <a:ext cx="45720" cy="786384"/>
           </a:xfrm>
           <a:prstGeom prst="rect">
             <a:avLst/>
@@ -7317,13 +7852,688 @@
       </p:sp>
       <p:sp>
         <p:nvSpPr>
-          <p:cNvPr id="5" name="Shape 3"/>
-          <p:cNvSpPr/>
-          <p:nvPr/>
-        </p:nvSpPr>
-        <p:spPr>
-          <a:xfrm>
-            <a:off x="566928" y="4983480"/>
+          <p:cNvPr id="5" name="Text 3"/>
+          <p:cNvSpPr/>
+          <p:nvPr/>
+        </p:nvSpPr>
+        <p:spPr>
+          <a:xfrm>
+            <a:off x="749808" y="950976"/>
+            <a:ext cx="10874959" cy="219456"/>
+          </a:xfrm>
+          <a:prstGeom prst="rect">
+            <a:avLst/>
+          </a:prstGeom>
+          <a:noFill/>
+          <a:ln/>
+        </p:spPr>
+        <p:txBody>
+          <a:bodyPr wrap="square" lIns="0" tIns="0" rIns="0" bIns="0" rtlCol="0" anchor="ctr"/>
+          <a:lstStyle/>
+          <a:p>
+            <a:pPr indent="0" marL="0">
+              <a:buNone/>
+            </a:pPr>
+            <a:r>
+              <a:rPr lang="en-US" sz="1050" dirty="0">
+                <a:solidFill>
+                  <a:srgbClr val="64748B"/>
+                </a:solidFill>
+                <a:latin typeface="Pretendard" pitchFamily="34" charset="0"/>
+                <a:ea typeface="Pretendard" pitchFamily="34" charset="-122"/>
+                <a:cs typeface="Pretendard" pitchFamily="34" charset="-120"/>
+              </a:rPr>
+              <a:t>3대 핵심 투자 포인트 (Investment Highlights)</a:t>
+            </a:r>
+            <a:endParaRPr lang="en-US" sz="1050" dirty="0"/>
+          </a:p>
+        </p:txBody>
+      </p:sp>
+      <p:sp>
+        <p:nvSpPr>
+          <p:cNvPr id="6" name="Shape 4"/>
+          <p:cNvSpPr/>
+          <p:nvPr/>
+        </p:nvSpPr>
+        <p:spPr>
+          <a:xfrm>
+            <a:off x="566928" y="1481328"/>
+            <a:ext cx="3472586" cy="3474720"/>
+          </a:xfrm>
+          <a:prstGeom prst="roundRect">
+            <a:avLst>
+              <a:gd name="adj" fmla="val 2107"/>
+            </a:avLst>
+          </a:prstGeom>
+          <a:solidFill>
+            <a:srgbClr val="F8FAFC"/>
+          </a:solidFill>
+          <a:ln w="10160">
+            <a:solidFill>
+              <a:srgbClr val="CBD5E1"/>
+            </a:solidFill>
+            <a:prstDash val="solid"/>
+          </a:ln>
+        </p:spPr>
+      </p:sp>
+      <p:sp>
+        <p:nvSpPr>
+          <p:cNvPr id="7" name="Shape 5"/>
+          <p:cNvSpPr/>
+          <p:nvPr/>
+        </p:nvSpPr>
+        <p:spPr>
+          <a:xfrm>
+            <a:off x="566928" y="1481328"/>
+            <a:ext cx="3472586" cy="54864"/>
+          </a:xfrm>
+          <a:prstGeom prst="rect">
+            <a:avLst/>
+          </a:prstGeom>
+          <a:solidFill>
+            <a:srgbClr val="6B8E00"/>
+          </a:solidFill>
+          <a:ln/>
+        </p:spPr>
+      </p:sp>
+      <p:sp>
+        <p:nvSpPr>
+          <p:cNvPr id="8" name="Shape 6"/>
+          <p:cNvSpPr/>
+          <p:nvPr/>
+        </p:nvSpPr>
+        <p:spPr>
+          <a:xfrm>
+            <a:off x="795528" y="1755648"/>
+            <a:ext cx="475488" cy="292608"/>
+          </a:xfrm>
+          <a:prstGeom prst="roundRect">
+            <a:avLst>
+              <a:gd name="adj" fmla="val 12500"/>
+            </a:avLst>
+          </a:prstGeom>
+          <a:solidFill>
+            <a:srgbClr val="A3D900"/>
+          </a:solidFill>
+          <a:ln/>
+        </p:spPr>
+      </p:sp>
+      <p:sp>
+        <p:nvSpPr>
+          <p:cNvPr id="9" name="Text 7"/>
+          <p:cNvSpPr/>
+          <p:nvPr/>
+        </p:nvSpPr>
+        <p:spPr>
+          <a:xfrm>
+            <a:off x="795528" y="1755648"/>
+            <a:ext cx="475488" cy="292608"/>
+          </a:xfrm>
+          <a:prstGeom prst="rect">
+            <a:avLst/>
+          </a:prstGeom>
+          <a:noFill/>
+          <a:ln/>
+        </p:spPr>
+        <p:txBody>
+          <a:bodyPr wrap="square" lIns="0" tIns="0" rIns="0" bIns="0" rtlCol="0" anchor="ctr"/>
+          <a:lstStyle/>
+          <a:p>
+            <a:pPr algn="ctr" indent="0" marL="0">
+              <a:buNone/>
+            </a:pPr>
+            <a:r>
+              <a:rPr lang="en-US" sz="1100" b="1" dirty="0">
+                <a:solidFill>
+                  <a:srgbClr val="4F6A00"/>
+                </a:solidFill>
+                <a:latin typeface="Arial" pitchFamily="34" charset="0"/>
+                <a:ea typeface="Arial" pitchFamily="34" charset="-122"/>
+                <a:cs typeface="Arial" pitchFamily="34" charset="-120"/>
+              </a:rPr>
+              <a:t>01</a:t>
+            </a:r>
+            <a:endParaRPr lang="en-US" sz="1100" dirty="0"/>
+          </a:p>
+        </p:txBody>
+      </p:sp>
+      <p:sp>
+        <p:nvSpPr>
+          <p:cNvPr id="10" name="Text 8"/>
+          <p:cNvSpPr/>
+          <p:nvPr/>
+        </p:nvSpPr>
+        <p:spPr>
+          <a:xfrm>
+            <a:off x="795528" y="2194560"/>
+            <a:ext cx="3015386" cy="365760"/>
+          </a:xfrm>
+          <a:prstGeom prst="rect">
+            <a:avLst/>
+          </a:prstGeom>
+          <a:noFill/>
+          <a:ln/>
+        </p:spPr>
+        <p:txBody>
+          <a:bodyPr wrap="square" lIns="0" tIns="0" rIns="0" bIns="0" rtlCol="0" anchor="t"/>
+          <a:lstStyle/>
+          <a:p>
+            <a:pPr indent="0" marL="0">
+              <a:buNone/>
+            </a:pPr>
+            <a:r>
+              <a:rPr lang="en-US" sz="1500" b="1" dirty="0">
+                <a:solidFill>
+                  <a:srgbClr val="0F172A"/>
+                </a:solidFill>
+                <a:latin typeface="Pretendard" pitchFamily="34" charset="0"/>
+                <a:ea typeface="Pretendard" pitchFamily="34" charset="-122"/>
+                <a:cs typeface="Pretendard" pitchFamily="34" charset="-120"/>
+              </a:rPr>
+              <a:t>원금 안전판 확보</a:t>
+            </a:r>
+            <a:endParaRPr lang="en-US" sz="1500" dirty="0"/>
+          </a:p>
+        </p:txBody>
+      </p:sp>
+      <p:sp>
+        <p:nvSpPr>
+          <p:cNvPr id="11" name="Shape 9"/>
+          <p:cNvSpPr/>
+          <p:nvPr/>
+        </p:nvSpPr>
+        <p:spPr>
+          <a:xfrm>
+            <a:off x="795528" y="2624328"/>
+            <a:ext cx="3015386" cy="0"/>
+          </a:xfrm>
+          <a:prstGeom prst="line">
+            <a:avLst/>
+          </a:prstGeom>
+          <a:noFill/>
+          <a:ln w="6350">
+            <a:solidFill>
+              <a:srgbClr val="CBD5E1"/>
+            </a:solidFill>
+            <a:prstDash val="solid"/>
+          </a:ln>
+        </p:spPr>
+      </p:sp>
+      <p:sp>
+        <p:nvSpPr>
+          <p:cNvPr id="12" name="Text 10"/>
+          <p:cNvSpPr/>
+          <p:nvPr/>
+        </p:nvSpPr>
+        <p:spPr>
+          <a:xfrm>
+            <a:off x="795528" y="2779776"/>
+            <a:ext cx="3015386" cy="1965960"/>
+          </a:xfrm>
+          <a:prstGeom prst="rect">
+            <a:avLst/>
+          </a:prstGeom>
+          <a:noFill/>
+          <a:ln/>
+        </p:spPr>
+        <p:txBody>
+          <a:bodyPr wrap="square" lIns="0" tIns="0" rIns="0" bIns="0" rtlCol="0" anchor="t"/>
+          <a:lstStyle/>
+          <a:p>
+            <a:pPr indent="0" marL="0">
+              <a:lnSpc>
+                <a:spcPct val="130000"/>
+              </a:lnSpc>
+              <a:buNone/>
+            </a:pPr>
+            <a:r>
+              <a:rPr lang="en-US" sz="1200" dirty="0">
+                <a:solidFill>
+                  <a:srgbClr val="0F172A"/>
+                </a:solidFill>
+                <a:latin typeface="Pretendard" pitchFamily="34" charset="0"/>
+                <a:ea typeface="Pretendard" pitchFamily="34" charset="-122"/>
+                <a:cs typeface="Pretendard" pitchFamily="34" charset="-120"/>
+              </a:rPr>
+              <a:t>강남권역의 핵심 입지로, 우량한 대지 지분 가치가 하방 경직성을 강력히 지지합니다.</a:t>
+            </a:r>
+            <a:endParaRPr lang="en-US" sz="1200" dirty="0"/>
+          </a:p>
+        </p:txBody>
+      </p:sp>
+      <p:sp>
+        <p:nvSpPr>
+          <p:cNvPr id="13" name="Shape 11"/>
+          <p:cNvSpPr/>
+          <p:nvPr/>
+        </p:nvSpPr>
+        <p:spPr>
+          <a:xfrm>
+            <a:off x="4359554" y="1481328"/>
+            <a:ext cx="3472586" cy="3474720"/>
+          </a:xfrm>
+          <a:prstGeom prst="roundRect">
+            <a:avLst>
+              <a:gd name="adj" fmla="val 2107"/>
+            </a:avLst>
+          </a:prstGeom>
+          <a:solidFill>
+            <a:srgbClr val="F8FAFC"/>
+          </a:solidFill>
+          <a:ln w="10160">
+            <a:solidFill>
+              <a:srgbClr val="CBD5E1"/>
+            </a:solidFill>
+            <a:prstDash val="solid"/>
+          </a:ln>
+        </p:spPr>
+      </p:sp>
+      <p:sp>
+        <p:nvSpPr>
+          <p:cNvPr id="14" name="Shape 12"/>
+          <p:cNvSpPr/>
+          <p:nvPr/>
+        </p:nvSpPr>
+        <p:spPr>
+          <a:xfrm>
+            <a:off x="4359554" y="1481328"/>
+            <a:ext cx="3472586" cy="54864"/>
+          </a:xfrm>
+          <a:prstGeom prst="rect">
+            <a:avLst/>
+          </a:prstGeom>
+          <a:solidFill>
+            <a:srgbClr val="6B8E00"/>
+          </a:solidFill>
+          <a:ln/>
+        </p:spPr>
+      </p:sp>
+      <p:sp>
+        <p:nvSpPr>
+          <p:cNvPr id="15" name="Shape 13"/>
+          <p:cNvSpPr/>
+          <p:nvPr/>
+        </p:nvSpPr>
+        <p:spPr>
+          <a:xfrm>
+            <a:off x="4588154" y="1755648"/>
+            <a:ext cx="475488" cy="292608"/>
+          </a:xfrm>
+          <a:prstGeom prst="roundRect">
+            <a:avLst>
+              <a:gd name="adj" fmla="val 12500"/>
+            </a:avLst>
+          </a:prstGeom>
+          <a:solidFill>
+            <a:srgbClr val="A3D900"/>
+          </a:solidFill>
+          <a:ln/>
+        </p:spPr>
+      </p:sp>
+      <p:sp>
+        <p:nvSpPr>
+          <p:cNvPr id="16" name="Text 14"/>
+          <p:cNvSpPr/>
+          <p:nvPr/>
+        </p:nvSpPr>
+        <p:spPr>
+          <a:xfrm>
+            <a:off x="4588154" y="1755648"/>
+            <a:ext cx="475488" cy="292608"/>
+          </a:xfrm>
+          <a:prstGeom prst="rect">
+            <a:avLst/>
+          </a:prstGeom>
+          <a:noFill/>
+          <a:ln/>
+        </p:spPr>
+        <p:txBody>
+          <a:bodyPr wrap="square" lIns="0" tIns="0" rIns="0" bIns="0" rtlCol="0" anchor="ctr"/>
+          <a:lstStyle/>
+          <a:p>
+            <a:pPr algn="ctr" indent="0" marL="0">
+              <a:buNone/>
+            </a:pPr>
+            <a:r>
+              <a:rPr lang="en-US" sz="1100" b="1" dirty="0">
+                <a:solidFill>
+                  <a:srgbClr val="4F6A00"/>
+                </a:solidFill>
+                <a:latin typeface="Arial" pitchFamily="34" charset="0"/>
+                <a:ea typeface="Arial" pitchFamily="34" charset="-122"/>
+                <a:cs typeface="Arial" pitchFamily="34" charset="-120"/>
+              </a:rPr>
+              <a:t>02</a:t>
+            </a:r>
+            <a:endParaRPr lang="en-US" sz="1100" dirty="0"/>
+          </a:p>
+        </p:txBody>
+      </p:sp>
+      <p:sp>
+        <p:nvSpPr>
+          <p:cNvPr id="17" name="Text 15"/>
+          <p:cNvSpPr/>
+          <p:nvPr/>
+        </p:nvSpPr>
+        <p:spPr>
+          <a:xfrm>
+            <a:off x="4588154" y="2194560"/>
+            <a:ext cx="3015386" cy="365760"/>
+          </a:xfrm>
+          <a:prstGeom prst="rect">
+            <a:avLst/>
+          </a:prstGeom>
+          <a:noFill/>
+          <a:ln/>
+        </p:spPr>
+        <p:txBody>
+          <a:bodyPr wrap="square" lIns="0" tIns="0" rIns="0" bIns="0" rtlCol="0" anchor="t"/>
+          <a:lstStyle/>
+          <a:p>
+            <a:pPr indent="0" marL="0">
+              <a:buNone/>
+            </a:pPr>
+            <a:r>
+              <a:rPr lang="en-US" sz="1500" b="1" dirty="0">
+                <a:solidFill>
+                  <a:srgbClr val="0F172A"/>
+                </a:solidFill>
+                <a:latin typeface="Pretendard" pitchFamily="34" charset="0"/>
+                <a:ea typeface="Pretendard" pitchFamily="34" charset="-122"/>
+                <a:cs typeface="Pretendard" pitchFamily="34" charset="-120"/>
+              </a:rPr>
+              <a:t>확실한 월 현금흐름</a:t>
+            </a:r>
+            <a:endParaRPr lang="en-US" sz="1500" dirty="0"/>
+          </a:p>
+        </p:txBody>
+      </p:sp>
+      <p:sp>
+        <p:nvSpPr>
+          <p:cNvPr id="18" name="Shape 16"/>
+          <p:cNvSpPr/>
+          <p:nvPr/>
+        </p:nvSpPr>
+        <p:spPr>
+          <a:xfrm>
+            <a:off x="4588154" y="2624328"/>
+            <a:ext cx="3015386" cy="0"/>
+          </a:xfrm>
+          <a:prstGeom prst="line">
+            <a:avLst/>
+          </a:prstGeom>
+          <a:noFill/>
+          <a:ln w="6350">
+            <a:solidFill>
+              <a:srgbClr val="CBD5E1"/>
+            </a:solidFill>
+            <a:prstDash val="solid"/>
+          </a:ln>
+        </p:spPr>
+      </p:sp>
+      <p:sp>
+        <p:nvSpPr>
+          <p:cNvPr id="19" name="Text 17"/>
+          <p:cNvSpPr/>
+          <p:nvPr/>
+        </p:nvSpPr>
+        <p:spPr>
+          <a:xfrm>
+            <a:off x="4588154" y="2779776"/>
+            <a:ext cx="3015386" cy="1965960"/>
+          </a:xfrm>
+          <a:prstGeom prst="rect">
+            <a:avLst/>
+          </a:prstGeom>
+          <a:noFill/>
+          <a:ln/>
+        </p:spPr>
+        <p:txBody>
+          <a:bodyPr wrap="square" lIns="0" tIns="0" rIns="0" bIns="0" rtlCol="0" anchor="t"/>
+          <a:lstStyle/>
+          <a:p>
+            <a:pPr indent="0" marL="0">
+              <a:lnSpc>
+                <a:spcPct val="130000"/>
+              </a:lnSpc>
+              <a:buNone/>
+            </a:pPr>
+            <a:r>
+              <a:rPr lang="en-US" sz="1200" dirty="0">
+                <a:solidFill>
+                  <a:srgbClr val="0F172A"/>
+                </a:solidFill>
+                <a:latin typeface="Pretendard" pitchFamily="34" charset="0"/>
+                <a:ea typeface="Pretendard" pitchFamily="34" charset="-122"/>
+                <a:cs typeface="Pretendard" pitchFamily="34" charset="-120"/>
+              </a:rPr>
+              <a:t>우량 테넌트 만실 운영 및 장기 계약 구조를 통해 매월 안정적인 순수익 창출이 검토 여지가 있으나, 관련 법규·인허가·시설 요건의 현장 확인이 필요합니다..</a:t>
+            </a:r>
+            <a:endParaRPr lang="en-US" sz="1200" dirty="0"/>
+          </a:p>
+        </p:txBody>
+      </p:sp>
+      <p:sp>
+        <p:nvSpPr>
+          <p:cNvPr id="20" name="Shape 18"/>
+          <p:cNvSpPr/>
+          <p:nvPr/>
+        </p:nvSpPr>
+        <p:spPr>
+          <a:xfrm>
+            <a:off x="8152181" y="1481328"/>
+            <a:ext cx="3472586" cy="3474720"/>
+          </a:xfrm>
+          <a:prstGeom prst="roundRect">
+            <a:avLst>
+              <a:gd name="adj" fmla="val 2107"/>
+            </a:avLst>
+          </a:prstGeom>
+          <a:solidFill>
+            <a:srgbClr val="F8FAFC"/>
+          </a:solidFill>
+          <a:ln w="10160">
+            <a:solidFill>
+              <a:srgbClr val="CBD5E1"/>
+            </a:solidFill>
+            <a:prstDash val="solid"/>
+          </a:ln>
+        </p:spPr>
+      </p:sp>
+      <p:sp>
+        <p:nvSpPr>
+          <p:cNvPr id="21" name="Shape 19"/>
+          <p:cNvSpPr/>
+          <p:nvPr/>
+        </p:nvSpPr>
+        <p:spPr>
+          <a:xfrm>
+            <a:off x="8152181" y="1481328"/>
+            <a:ext cx="3472586" cy="54864"/>
+          </a:xfrm>
+          <a:prstGeom prst="rect">
+            <a:avLst/>
+          </a:prstGeom>
+          <a:solidFill>
+            <a:srgbClr val="6B8E00"/>
+          </a:solidFill>
+          <a:ln/>
+        </p:spPr>
+      </p:sp>
+      <p:sp>
+        <p:nvSpPr>
+          <p:cNvPr id="22" name="Shape 20"/>
+          <p:cNvSpPr/>
+          <p:nvPr/>
+        </p:nvSpPr>
+        <p:spPr>
+          <a:xfrm>
+            <a:off x="8380781" y="1755648"/>
+            <a:ext cx="475488" cy="292608"/>
+          </a:xfrm>
+          <a:prstGeom prst="roundRect">
+            <a:avLst>
+              <a:gd name="adj" fmla="val 12500"/>
+            </a:avLst>
+          </a:prstGeom>
+          <a:solidFill>
+            <a:srgbClr val="A3D900"/>
+          </a:solidFill>
+          <a:ln/>
+        </p:spPr>
+      </p:sp>
+      <p:sp>
+        <p:nvSpPr>
+          <p:cNvPr id="23" name="Text 21"/>
+          <p:cNvSpPr/>
+          <p:nvPr/>
+        </p:nvSpPr>
+        <p:spPr>
+          <a:xfrm>
+            <a:off x="8380781" y="1755648"/>
+            <a:ext cx="475488" cy="292608"/>
+          </a:xfrm>
+          <a:prstGeom prst="rect">
+            <a:avLst/>
+          </a:prstGeom>
+          <a:noFill/>
+          <a:ln/>
+        </p:spPr>
+        <p:txBody>
+          <a:bodyPr wrap="square" lIns="0" tIns="0" rIns="0" bIns="0" rtlCol="0" anchor="ctr"/>
+          <a:lstStyle/>
+          <a:p>
+            <a:pPr algn="ctr" indent="0" marL="0">
+              <a:buNone/>
+            </a:pPr>
+            <a:r>
+              <a:rPr lang="en-US" sz="1100" b="1" dirty="0">
+                <a:solidFill>
+                  <a:srgbClr val="4F6A00"/>
+                </a:solidFill>
+                <a:latin typeface="Arial" pitchFamily="34" charset="0"/>
+                <a:ea typeface="Arial" pitchFamily="34" charset="-122"/>
+                <a:cs typeface="Arial" pitchFamily="34" charset="-120"/>
+              </a:rPr>
+              <a:t>03</a:t>
+            </a:r>
+            <a:endParaRPr lang="en-US" sz="1100" dirty="0"/>
+          </a:p>
+        </p:txBody>
+      </p:sp>
+      <p:sp>
+        <p:nvSpPr>
+          <p:cNvPr id="24" name="Text 22"/>
+          <p:cNvSpPr/>
+          <p:nvPr/>
+        </p:nvSpPr>
+        <p:spPr>
+          <a:xfrm>
+            <a:off x="8380781" y="2194560"/>
+            <a:ext cx="3015386" cy="365760"/>
+          </a:xfrm>
+          <a:prstGeom prst="rect">
+            <a:avLst/>
+          </a:prstGeom>
+          <a:noFill/>
+          <a:ln/>
+        </p:spPr>
+        <p:txBody>
+          <a:bodyPr wrap="square" lIns="0" tIns="0" rIns="0" bIns="0" rtlCol="0" anchor="t"/>
+          <a:lstStyle/>
+          <a:p>
+            <a:pPr indent="0" marL="0">
+              <a:buNone/>
+            </a:pPr>
+            <a:r>
+              <a:rPr lang="en-US" sz="1500" b="1" dirty="0">
+                <a:solidFill>
+                  <a:srgbClr val="0F172A"/>
+                </a:solidFill>
+                <a:latin typeface="Pretendard" pitchFamily="34" charset="0"/>
+                <a:ea typeface="Pretendard" pitchFamily="34" charset="-122"/>
+                <a:cs typeface="Pretendard" pitchFamily="34" charset="-120"/>
+              </a:rPr>
+              <a:t>가치 상승 및 출구 전략</a:t>
+            </a:r>
+            <a:endParaRPr lang="en-US" sz="1500" dirty="0"/>
+          </a:p>
+        </p:txBody>
+      </p:sp>
+      <p:sp>
+        <p:nvSpPr>
+          <p:cNvPr id="25" name="Shape 23"/>
+          <p:cNvSpPr/>
+          <p:nvPr/>
+        </p:nvSpPr>
+        <p:spPr>
+          <a:xfrm>
+            <a:off x="8380781" y="2624328"/>
+            <a:ext cx="3015386" cy="0"/>
+          </a:xfrm>
+          <a:prstGeom prst="line">
+            <a:avLst/>
+          </a:prstGeom>
+          <a:noFill/>
+          <a:ln w="6350">
+            <a:solidFill>
+              <a:srgbClr val="CBD5E1"/>
+            </a:solidFill>
+            <a:prstDash val="solid"/>
+          </a:ln>
+        </p:spPr>
+      </p:sp>
+      <p:sp>
+        <p:nvSpPr>
+          <p:cNvPr id="26" name="Text 24"/>
+          <p:cNvSpPr/>
+          <p:nvPr/>
+        </p:nvSpPr>
+        <p:spPr>
+          <a:xfrm>
+            <a:off x="8380781" y="2779776"/>
+            <a:ext cx="3015386" cy="1965960"/>
+          </a:xfrm>
+          <a:prstGeom prst="rect">
+            <a:avLst/>
+          </a:prstGeom>
+          <a:noFill/>
+          <a:ln/>
+        </p:spPr>
+        <p:txBody>
+          <a:bodyPr wrap="square" lIns="0" tIns="0" rIns="0" bIns="0" rtlCol="0" anchor="t"/>
+          <a:lstStyle/>
+          <a:p>
+            <a:pPr indent="0" marL="0">
+              <a:lnSpc>
+                <a:spcPct val="130000"/>
+              </a:lnSpc>
+              <a:buNone/>
+            </a:pPr>
+            <a:r>
+              <a:rPr lang="en-US" sz="1200" dirty="0">
+                <a:solidFill>
+                  <a:srgbClr val="0F172A"/>
+                </a:solidFill>
+                <a:latin typeface="Pretendard" pitchFamily="34" charset="0"/>
+                <a:ea typeface="Pretendard" pitchFamily="34" charset="-122"/>
+                <a:cs typeface="Pretendard" pitchFamily="34" charset="-120"/>
+              </a:rPr>
+              <a:t>현행 공법 여력을 활용한 밸류업 기회와 더불어 향후 권역 지가 상승에 따른 시세차익 실현이 유력합니다.</a:t>
+            </a:r>
+            <a:endParaRPr lang="en-US" sz="1200" dirty="0"/>
+          </a:p>
+        </p:txBody>
+      </p:sp>
+      <p:sp>
+        <p:nvSpPr>
+          <p:cNvPr id="27" name="Shape 25"/>
+          <p:cNvSpPr/>
+          <p:nvPr/>
+        </p:nvSpPr>
+        <p:spPr>
+          <a:xfrm>
+            <a:off x="566928" y="5138928"/>
             <a:ext cx="11057839" cy="804672"/>
           </a:xfrm>
           <a:prstGeom prst="roundRect">
@@ -7344,13 +8554,13 @@
       </p:sp>
       <p:sp>
         <p:nvSpPr>
-          <p:cNvPr id="6" name="Text 4"/>
-          <p:cNvSpPr/>
-          <p:nvPr/>
-        </p:nvSpPr>
-        <p:spPr>
-          <a:xfrm>
-            <a:off x="749808" y="5093208"/>
+          <p:cNvPr id="28" name="Text 26"/>
+          <p:cNvSpPr/>
+          <p:nvPr/>
+        </p:nvSpPr>
+        <p:spPr>
+          <a:xfrm>
+            <a:off x="749808" y="5248656"/>
             <a:ext cx="1645920" cy="219456"/>
           </a:xfrm>
           <a:prstGeom prst="rect">
@@ -7383,13 +8593,13 @@
       </p:sp>
       <p:sp>
         <p:nvSpPr>
-          <p:cNvPr id="7" name="Text 5"/>
-          <p:cNvSpPr/>
-          <p:nvPr/>
-        </p:nvSpPr>
-        <p:spPr>
-          <a:xfrm>
-            <a:off x="2441448" y="5074920"/>
+          <p:cNvPr id="29" name="Text 27"/>
+          <p:cNvSpPr/>
+          <p:nvPr/>
+        </p:nvSpPr>
+        <p:spPr>
+          <a:xfrm>
+            <a:off x="2441448" y="5230368"/>
             <a:ext cx="9000439" cy="621792"/>
           </a:xfrm>
           <a:prstGeom prst="rect">
@@ -7417,7 +8627,7 @@
                 <a:ea typeface="Pretendard" pitchFamily="34" charset="-122"/>
                 <a:cs typeface="Pretendard" pitchFamily="34" charset="-120"/>
               </a:rPr>
-              <a:t>{"ok":true,"mocked":true,"extractedFields":{"area_signal":"역삼","asset_type":"오피스빌딩","price_band":"300억","size_signal":"3000평(약 9917.4㎡)"},"extractedFacts":{"region":"역삼","exactAddressCandidate":"역삼동 742-1","assetType":"오피스빌딩","priceText":"300억","sizeText":"3000평(약 9917.4㎡)","currentUse":"오피스","currentUseSignal":"근린생활시설","leaseSignal":"임대중","vacancySignal":"공실없음","tenantNames":["쿠팡","네이버"],"unitRentTexts":["301호: 1500만"],"sellerMotivationText":"자산 효율화","brokerNotes":["초역세권 매물"]},"detectedSensitiveFields":["exact_address","tenant_name"],"ambiguousFields":[],"warnings":[],"areaSignal":"역삼","assetType":"오피스빌딩","priceBand":"300억","sizeSignal":"3000평(약 9917.4㎡)","dealType":"매각","buildingName":"역삼 센트럴타워","exactAddress":"역삼동 742-1","totalFloorArea":9917.3,"buildYear":2015,"currentUseSignal":"근린생활시설","vacancySignal":"공실 없음","fitSummary":"초역세권 근생 빌딩으로 시행/사옥 매입에 최적화","cautionSummary":"주요 임차 업종 만기 조율 필요","hiddenFields":["exact_address","seller_motivation"],"confidence":{"areaSignal":"confirmed","assetType":"confirmed","priceBand":"ai_hypothesis","fitSummary":"ai_hypothesis"},"missingData":["sizeSignal"],"boundaryNote":"본 자료는 실거래 통계 기반 참고치입니다.","buyerType":"법인 사옥형","budgetRange":{"min":50,"max":80,"display":"50억~80억"},"preferredRegions":["강남","성수"],"assetTypes":["꼬마빌딩","사옥용"],"purchasePurpose":"사옥용 매입","mustHave":["초역세권","주차"],"niceToHave":["테라스","루프탑"],"riskTolerance":"medium","financingNote":"자본금 50% 준비","missingQuestions":["구체적인 입주 시기가 언제인가요?","선호하는 수익률이 있나요?"],"privacyNotes":["연락처 비공개"],"fitReasons":["매수자 예산(50-80억)에 부합하는 매물입니다.","요청하신 성수/강남 권역에 해당합니다."],"cautionReasons":["요청한 용도와 달리 명도 협의가 다소 필요합니다."],"recommendedNextAction":"현장 답사 제안","kakaoMessage":"안녕하세요! 요청하신 조건에 부합하는 추천 매물이 있어 안내해 드립니다. 확인해보시고 피드백 부탁드립니다.","title":"강남 역삼역 초역세권 오피스 사옥용 빌딩 매각","shortSummary":"역삼역 도보 5분 거리의 준신축급 대형 오피스빌딩입니다.","dealPoints":["초역세권","사옥 최적"],"cautionPoints":["명도 조율 필요"],"hiddenInfoNotice":["보증금 및 지번은 인가 후 확인 가능"],"gateMessage":"G1 등급 등록이 필요합니다.","kakaoText":"강남 역삼역 오피스 빌딩 매각 안내입니다.","exactUnitCandidate":"101호","floor":"1층","areaSqmText":"150㎡","spaceType":"office","depositText":"5000만","monthlyRentText":"400만","maintenanceFeeText":"50만","availableFromText":"즉시입주","leaseTermMonthsText":"24","incentivesText":"렌트프리 2개월","restrictions":[],"landlordIdentity":"김성수","currentTenant":"스타트업","vacancyReason":"이전 확장","rentNegotiation":"협의 가능","region":"성수동","areaSqm":150,"deposit":5000,"monthlyRent":400,"maintenanceFee":50,"availableFrom":"즉시입주","leaseTermMonths":24,"incentives":{"rentFreeMonths":2,"interiorSupport":"일부 인테리어 지원","freeRentDetail":"렌트프리 2개월 지원"},"shortSummaryLease":"성수역 도보 5분 거리 1층 리테일 상가 매물입니다."}</a:t>
+              <a:t>본 자산의 3대 핵심 투자 포인트와 예상 매수자 유형 분석입니다.</a:t>
             </a:r>
             <a:endParaRPr lang="en-US" sz="1000" dirty="0"/>
           </a:p>
@@ -7425,7 +8635,7 @@
       </p:sp>
       <p:sp>
         <p:nvSpPr>
-          <p:cNvPr id="8" name="Text 6"/>
+          <p:cNvPr id="30" name="Text 28"/>
           <p:cNvSpPr/>
           <p:nvPr/>
         </p:nvSpPr>
@@ -7464,7 +8674,7 @@
       </p:sp>
       <p:sp>
         <p:nvSpPr>
-          <p:cNvPr id="9" name="Shape 7"/>
+          <p:cNvPr id="31" name="Shape 29"/>
           <p:cNvSpPr/>
           <p:nvPr/>
         </p:nvSpPr>
@@ -7624,7 +8834,7 @@
         <p:spPr>
           <a:xfrm>
             <a:off x="566928" y="1572768"/>
-            <a:ext cx="11057839" cy="3200400"/>
+            <a:ext cx="3442106" cy="3200400"/>
           </a:xfrm>
           <a:prstGeom prst="rect">
             <a:avLst/>
@@ -7649,7 +8859,7 @@
         <p:spPr>
           <a:xfrm>
             <a:off x="566928" y="1572768"/>
-            <a:ext cx="11057839" cy="36576"/>
+            <a:ext cx="3442106" cy="36576"/>
           </a:xfrm>
           <a:prstGeom prst="rect">
             <a:avLst/>
@@ -7728,7 +8938,7 @@
         <p:spPr>
           <a:xfrm>
             <a:off x="786384" y="2304288"/>
-            <a:ext cx="10618927" cy="365760"/>
+            <a:ext cx="3003194" cy="365760"/>
           </a:xfrm>
           <a:prstGeom prst="rect">
             <a:avLst/>
@@ -7752,7 +8962,7 @@
                 <a:ea typeface="Pretendard" pitchFamily="34" charset="-122"/>
                 <a:cs typeface="Pretendard" pitchFamily="34" charset="-120"/>
               </a:rPr>
-              <a:t>{"ok"</a:t>
+              <a:t>초기 관심 표명 → 담당자 연락</a:t>
             </a:r>
             <a:endParaRPr lang="en-US" sz="1600" dirty="0"/>
           </a:p>
@@ -7767,7 +8977,7 @@
         <p:spPr>
           <a:xfrm>
             <a:off x="786384" y="2761488"/>
-            <a:ext cx="10618927" cy="1828800"/>
+            <a:ext cx="3003194" cy="1828800"/>
           </a:xfrm>
           <a:prstGeom prst="rect">
             <a:avLst/>
@@ -7782,8 +8992,165 @@
             <a:pPr indent="0" marL="0">
               <a:buNone/>
             </a:pPr>
-            <a:r>
-              <a:rPr lang="en-US" sz="1100" dirty="0">
+            <a:endParaRPr lang="en-US" sz="1100" dirty="0"/>
+          </a:p>
+        </p:txBody>
+      </p:sp>
+      <p:sp>
+        <p:nvSpPr>
+          <p:cNvPr id="11" name="Shape 9"/>
+          <p:cNvSpPr/>
+          <p:nvPr/>
+        </p:nvSpPr>
+        <p:spPr>
+          <a:xfrm>
+            <a:off x="4100474" y="3035808"/>
+            <a:ext cx="182880" cy="274320"/>
+          </a:xfrm>
+          <a:prstGeom prst="rightArrow">
+            <a:avLst/>
+          </a:prstGeom>
+          <a:solidFill>
+            <a:srgbClr val="CBD5E1"/>
+          </a:solidFill>
+          <a:ln w="6350">
+            <a:solidFill>
+              <a:srgbClr val="64748B"/>
+            </a:solidFill>
+            <a:prstDash val="solid"/>
+          </a:ln>
+        </p:spPr>
+      </p:sp>
+      <p:sp>
+        <p:nvSpPr>
+          <p:cNvPr id="12" name="Shape 10"/>
+          <p:cNvSpPr/>
+          <p:nvPr/>
+        </p:nvSpPr>
+        <p:spPr>
+          <a:xfrm>
+            <a:off x="4374794" y="1572768"/>
+            <a:ext cx="3442106" cy="3200400"/>
+          </a:xfrm>
+          <a:prstGeom prst="rect">
+            <a:avLst/>
+          </a:prstGeom>
+          <a:solidFill>
+            <a:srgbClr val="F8FAFC"/>
+          </a:solidFill>
+          <a:ln w="3810">
+            <a:solidFill>
+              <a:srgbClr val="CBD5E1"/>
+            </a:solidFill>
+            <a:prstDash val="solid"/>
+          </a:ln>
+        </p:spPr>
+      </p:sp>
+      <p:sp>
+        <p:nvSpPr>
+          <p:cNvPr id="13" name="Shape 11"/>
+          <p:cNvSpPr/>
+          <p:nvPr/>
+        </p:nvSpPr>
+        <p:spPr>
+          <a:xfrm>
+            <a:off x="4374794" y="1572768"/>
+            <a:ext cx="3442106" cy="36576"/>
+          </a:xfrm>
+          <a:prstGeom prst="rect">
+            <a:avLst/>
+          </a:prstGeom>
+          <a:solidFill>
+            <a:srgbClr val="6B8E00"/>
+          </a:solidFill>
+          <a:ln/>
+        </p:spPr>
+      </p:sp>
+      <p:sp>
+        <p:nvSpPr>
+          <p:cNvPr id="14" name="Shape 12"/>
+          <p:cNvSpPr/>
+          <p:nvPr/>
+        </p:nvSpPr>
+        <p:spPr>
+          <a:xfrm>
+            <a:off x="4594250" y="1792224"/>
+            <a:ext cx="384048" cy="384048"/>
+          </a:xfrm>
+          <a:prstGeom prst="ellipse">
+            <a:avLst/>
+          </a:prstGeom>
+          <a:solidFill>
+            <a:srgbClr val="6B8E00"/>
+          </a:solidFill>
+          <a:ln/>
+        </p:spPr>
+      </p:sp>
+      <p:sp>
+        <p:nvSpPr>
+          <p:cNvPr id="15" name="Text 13"/>
+          <p:cNvSpPr/>
+          <p:nvPr/>
+        </p:nvSpPr>
+        <p:spPr>
+          <a:xfrm>
+            <a:off x="4594250" y="1792224"/>
+            <a:ext cx="384048" cy="384048"/>
+          </a:xfrm>
+          <a:prstGeom prst="rect">
+            <a:avLst/>
+          </a:prstGeom>
+          <a:noFill/>
+          <a:ln/>
+        </p:spPr>
+        <p:txBody>
+          <a:bodyPr wrap="square" lIns="0" tIns="0" rIns="0" bIns="0" rtlCol="0" anchor="ctr"/>
+          <a:lstStyle/>
+          <a:p>
+            <a:pPr algn="ctr" indent="0" marL="0">
+              <a:buNone/>
+            </a:pPr>
+            <a:r>
+              <a:rPr lang="en-US" sz="1300" b="1" dirty="0">
+                <a:solidFill>
+                  <a:srgbClr val="FFFFFF"/>
+                </a:solidFill>
+                <a:latin typeface="Arial" pitchFamily="34" charset="0"/>
+                <a:ea typeface="Arial" pitchFamily="34" charset="-122"/>
+                <a:cs typeface="Arial" pitchFamily="34" charset="-120"/>
+              </a:rPr>
+              <a:t>STEP 2</a:t>
+            </a:r>
+            <a:endParaRPr lang="en-US" sz="1300" dirty="0"/>
+          </a:p>
+        </p:txBody>
+      </p:sp>
+      <p:sp>
+        <p:nvSpPr>
+          <p:cNvPr id="16" name="Text 14"/>
+          <p:cNvSpPr/>
+          <p:nvPr/>
+        </p:nvSpPr>
+        <p:spPr>
+          <a:xfrm>
+            <a:off x="4594250" y="2304288"/>
+            <a:ext cx="3003194" cy="365760"/>
+          </a:xfrm>
+          <a:prstGeom prst="rect">
+            <a:avLst/>
+          </a:prstGeom>
+          <a:noFill/>
+          <a:ln/>
+        </p:spPr>
+        <p:txBody>
+          <a:bodyPr wrap="square" rtlCol="0" anchor="ctr"/>
+          <a:lstStyle/>
+          <a:p>
+            <a:pPr indent="0" marL="0">
+              <a:buNone/>
+            </a:pPr>
+            <a:r>
+              <a:rPr lang="en-US" sz="1600" b="1" dirty="0">
                 <a:solidFill>
                   <a:srgbClr val="0F172A"/>
                 </a:solidFill>
@@ -7791,15 +9158,239 @@
                 <a:ea typeface="Pretendard" pitchFamily="34" charset="-122"/>
                 <a:cs typeface="Pretendard" pitchFamily="34" charset="-120"/>
               </a:rPr>
-              <a:t>true,"mocked":true,"extractedFields":{"area_signal":"역삼","asset_type":"오피스빌딩","price_band":"300억","size_signal":"3000평(약 9917.4㎡)"},"extractedFacts":{"region":"역삼","exactAddressCandidate":"역삼동 742-1","assetType":"오피스빌딩","priceText":"300억","sizeText":"3000평(약 9917.4㎡)","currentUse":"오피스","currentUseSignal":"근린생활시설","leaseSignal":"임대중","vacancySignal":"공실없음","tenantNames":["쿠팡","네이버"],"unitRentTexts":["301호: 1500만"],"sellerMotivationText":"자산 효율화","brokerNotes":["초역세권 매물"]},"detectedSensitiveFields":["exact_address","tenant_name"],"ambiguousFields":[],"warnings":[],"areaSignal":"역삼","assetType":"오피스빌딩","priceBand":"300억","sizeSignal":"3000평(약 9917.4㎡)","dealType":"매각","buildingName":"역삼 센트럴타워","exactAddress":"역삼동 742-1","totalFloorArea":9917.3,"buildYear":2015,"currentUseSignal":"근린생활시설","vacancySignal":"공실 없음","fitSummary":"초역세권 근생 빌딩으로 시행/사옥 매입에 최적화","cautionSummary":"주요 임차 업종 만기 조율 필요","hiddenFields":["exact_address","seller_motivation"],"confidence":{"areaSignal":"confirmed","assetType":"confirmed","priceBand":"ai_hypothesis","fitSummary":"ai_hypothesis"},"missingData":["sizeSignal"],"boundaryNote":"본 자료는 실거래 통계 기반 참고치입니다.","buyerType":"법인 사옥형","budgetRange":{"min":50,"max":80,"display":"50억~80억"},"preferredRegions":["강남","성수"],"assetTypes":["꼬마빌딩","사옥용"],"purchasePurpose":"사옥용 매입","mustHave":["초역세권","주차"],"niceToHave":["테라스","루프탑"],"riskTolerance":"medium","financingNote":"자본금 50% 준비","missingQuestions":["구체적인 입주 시기가 언제인가요?","선호하는 수익률이 있나요?"],"privacyNotes":["연락처 비공개"],"fitReasons":["매수자 예산(50-80억)에 부합하는 매물입니다.","요청하신 성수/강남 권역에 해당합니다."],"cautionReasons":["요청한 용도와 달리 명도 협의가 다소 필요합니다."],"recommendedNextAction":"현장 답사 제안","kakaoMessage":"안녕하세요! 요청하신 조건에 부합하는 추천 매물이 있어 안내해 드립니다. 확인해보시고 피드백 부탁드립니다.","title":"강남 역삼역 초역세권 오피스 사옥용 빌딩 매각","shortSummary":"역삼역 도보 5분 거리의 준신축급 대형 오피스빌딩입니다.","dealPoints":["초역세권","사옥 최적"],"cautionPoints":["명도 조율 필요"],"hiddenInfoNotice":["보증금 및 지번은 인가 후 확인 가능"],"gateMessage":"G1 등급 등록이 필요합니다.","kakaoText":"강남 역삼역 오피스 빌딩 매각 안내입니다.","exactUnitCandidate":"101호","floor":"1층","areaSqmText":"150㎡","spaceType":"office","depositText":"5000만","monthlyRentText":"400만","maintenanceFeeText":"50만","availableFromText":"즉시입주","leaseTermMonthsText":"24","incentivesText":"렌트프리 2개월","restrictions":[],"landlordIdentity":"김성수","currentTenant":"스타트업","vacancyReason":"이전 확장","rentNegotiation":"협의 가능","region":"성수동","areaSqm":150,"deposit":5000,"monthlyRent":400,"maintenanceFee":50,"availableFrom":"즉시입주","leaseTermMonths":24,"incentives":{"rentFreeMonths":2,"interiorSupport":"일부 인테리어 지원","freeRentDetail":"렌트프리 2개월 지원"},"shortSummaryLease":"성수역 도보 5분 거리 1층 리테일 상가 매물입니다."}</a:t>
-            </a:r>
+              <a:t>NDA 체결 → 임차인 정보 및 임대차계약서 제공</a:t>
+            </a:r>
+            <a:endParaRPr lang="en-US" sz="1600" dirty="0"/>
+          </a:p>
+        </p:txBody>
+      </p:sp>
+      <p:sp>
+        <p:nvSpPr>
+          <p:cNvPr id="17" name="Text 15"/>
+          <p:cNvSpPr/>
+          <p:nvPr/>
+        </p:nvSpPr>
+        <p:spPr>
+          <a:xfrm>
+            <a:off x="4594250" y="2761488"/>
+            <a:ext cx="3003194" cy="1828800"/>
+          </a:xfrm>
+          <a:prstGeom prst="rect">
+            <a:avLst/>
+          </a:prstGeom>
+          <a:noFill/>
+          <a:ln/>
+        </p:spPr>
+        <p:txBody>
+          <a:bodyPr wrap="square" rtlCol="0" anchor="t"/>
+          <a:lstStyle/>
+          <a:p>
+            <a:pPr indent="0" marL="0">
+              <a:buNone/>
+            </a:pPr>
             <a:endParaRPr lang="en-US" sz="1100" dirty="0"/>
           </a:p>
         </p:txBody>
       </p:sp>
       <p:sp>
         <p:nvSpPr>
-          <p:cNvPr id="11" name="Text 9"/>
+          <p:cNvPr id="18" name="Shape 16"/>
+          <p:cNvSpPr/>
+          <p:nvPr/>
+        </p:nvSpPr>
+        <p:spPr>
+          <a:xfrm>
+            <a:off x="7908341" y="3035808"/>
+            <a:ext cx="182880" cy="274320"/>
+          </a:xfrm>
+          <a:prstGeom prst="rightArrow">
+            <a:avLst/>
+          </a:prstGeom>
+          <a:solidFill>
+            <a:srgbClr val="CBD5E1"/>
+          </a:solidFill>
+          <a:ln w="6350">
+            <a:solidFill>
+              <a:srgbClr val="64748B"/>
+            </a:solidFill>
+            <a:prstDash val="solid"/>
+          </a:ln>
+        </p:spPr>
+      </p:sp>
+      <p:sp>
+        <p:nvSpPr>
+          <p:cNvPr id="19" name="Shape 17"/>
+          <p:cNvSpPr/>
+          <p:nvPr/>
+        </p:nvSpPr>
+        <p:spPr>
+          <a:xfrm>
+            <a:off x="8182661" y="1572768"/>
+            <a:ext cx="3442106" cy="3200400"/>
+          </a:xfrm>
+          <a:prstGeom prst="rect">
+            <a:avLst/>
+          </a:prstGeom>
+          <a:solidFill>
+            <a:srgbClr val="F8FAFC"/>
+          </a:solidFill>
+          <a:ln w="3810">
+            <a:solidFill>
+              <a:srgbClr val="CBD5E1"/>
+            </a:solidFill>
+            <a:prstDash val="solid"/>
+          </a:ln>
+        </p:spPr>
+      </p:sp>
+      <p:sp>
+        <p:nvSpPr>
+          <p:cNvPr id="20" name="Shape 18"/>
+          <p:cNvSpPr/>
+          <p:nvPr/>
+        </p:nvSpPr>
+        <p:spPr>
+          <a:xfrm>
+            <a:off x="8182661" y="1572768"/>
+            <a:ext cx="3442106" cy="36576"/>
+          </a:xfrm>
+          <a:prstGeom prst="rect">
+            <a:avLst/>
+          </a:prstGeom>
+          <a:solidFill>
+            <a:srgbClr val="6B8E00"/>
+          </a:solidFill>
+          <a:ln/>
+        </p:spPr>
+      </p:sp>
+      <p:sp>
+        <p:nvSpPr>
+          <p:cNvPr id="21" name="Shape 19"/>
+          <p:cNvSpPr/>
+          <p:nvPr/>
+        </p:nvSpPr>
+        <p:spPr>
+          <a:xfrm>
+            <a:off x="8402117" y="1792224"/>
+            <a:ext cx="384048" cy="384048"/>
+          </a:xfrm>
+          <a:prstGeom prst="ellipse">
+            <a:avLst/>
+          </a:prstGeom>
+          <a:solidFill>
+            <a:srgbClr val="6B8E00"/>
+          </a:solidFill>
+          <a:ln/>
+        </p:spPr>
+      </p:sp>
+      <p:sp>
+        <p:nvSpPr>
+          <p:cNvPr id="22" name="Text 20"/>
+          <p:cNvSpPr/>
+          <p:nvPr/>
+        </p:nvSpPr>
+        <p:spPr>
+          <a:xfrm>
+            <a:off x="8402117" y="1792224"/>
+            <a:ext cx="384048" cy="384048"/>
+          </a:xfrm>
+          <a:prstGeom prst="rect">
+            <a:avLst/>
+          </a:prstGeom>
+          <a:noFill/>
+          <a:ln/>
+        </p:spPr>
+        <p:txBody>
+          <a:bodyPr wrap="square" lIns="0" tIns="0" rIns="0" bIns="0" rtlCol="0" anchor="ctr"/>
+          <a:lstStyle/>
+          <a:p>
+            <a:pPr algn="ctr" indent="0" marL="0">
+              <a:buNone/>
+            </a:pPr>
+            <a:r>
+              <a:rPr lang="en-US" sz="1300" b="1" dirty="0">
+                <a:solidFill>
+                  <a:srgbClr val="FFFFFF"/>
+                </a:solidFill>
+                <a:latin typeface="Arial" pitchFamily="34" charset="0"/>
+                <a:ea typeface="Arial" pitchFamily="34" charset="-122"/>
+                <a:cs typeface="Arial" pitchFamily="34" charset="-120"/>
+              </a:rPr>
+              <a:t>STEP 3</a:t>
+            </a:r>
+            <a:endParaRPr lang="en-US" sz="1300" dirty="0"/>
+          </a:p>
+        </p:txBody>
+      </p:sp>
+      <p:sp>
+        <p:nvSpPr>
+          <p:cNvPr id="23" name="Text 21"/>
+          <p:cNvSpPr/>
+          <p:nvPr/>
+        </p:nvSpPr>
+        <p:spPr>
+          <a:xfrm>
+            <a:off x="8402117" y="2304288"/>
+            <a:ext cx="3003194" cy="365760"/>
+          </a:xfrm>
+          <a:prstGeom prst="rect">
+            <a:avLst/>
+          </a:prstGeom>
+          <a:noFill/>
+          <a:ln/>
+        </p:spPr>
+        <p:txBody>
+          <a:bodyPr wrap="square" rtlCol="0" anchor="ctr"/>
+          <a:lstStyle/>
+          <a:p>
+            <a:pPr indent="0" marL="0">
+              <a:buNone/>
+            </a:pPr>
+            <a:r>
+              <a:rPr lang="en-US" sz="1600" b="1" dirty="0">
+                <a:solidFill>
+                  <a:srgbClr val="0F172A"/>
+                </a:solidFill>
+                <a:latin typeface="Pretendard" pitchFamily="34" charset="0"/>
+                <a:ea typeface="Pretendard" pitchFamily="34" charset="-122"/>
+                <a:cs typeface="Pretendard" pitchFamily="34" charset="-120"/>
+              </a:rPr>
+              <a:t>현장 실사 일정 조율 → 건물 컨디션 및 설비 직접 확인</a:t>
+            </a:r>
+            <a:endParaRPr lang="en-US" sz="1600" dirty="0"/>
+          </a:p>
+        </p:txBody>
+      </p:sp>
+      <p:sp>
+        <p:nvSpPr>
+          <p:cNvPr id="24" name="Text 22"/>
+          <p:cNvSpPr/>
+          <p:nvPr/>
+        </p:nvSpPr>
+        <p:spPr>
+          <a:xfrm>
+            <a:off x="8402117" y="2761488"/>
+            <a:ext cx="3003194" cy="1828800"/>
+          </a:xfrm>
+          <a:prstGeom prst="rect">
+            <a:avLst/>
+          </a:prstGeom>
+          <a:noFill/>
+          <a:ln/>
+        </p:spPr>
+        <p:txBody>
+          <a:bodyPr wrap="square" rtlCol="0" anchor="t"/>
+          <a:lstStyle/>
+          <a:p>
+            <a:pPr indent="0" marL="0">
+              <a:buNone/>
+            </a:pPr>
+            <a:endParaRPr lang="en-US" sz="1100" dirty="0"/>
+          </a:p>
+        </p:txBody>
+      </p:sp>
+      <p:sp>
+        <p:nvSpPr>
+          <p:cNvPr id="25" name="Text 23"/>
           <p:cNvSpPr/>
           <p:nvPr/>
         </p:nvSpPr>
@@ -7838,7 +9429,7 @@
       </p:sp>
       <p:sp>
         <p:nvSpPr>
-          <p:cNvPr id="12" name="Shape 10"/>
+          <p:cNvPr id="26" name="Shape 24"/>
           <p:cNvSpPr/>
           <p:nvPr/>
         </p:nvSpPr>

--- a/docs/test/stress/e2e-outputs/development_case12_yeoksam_dev_basic.pptx
+++ b/docs/test/stress/e2e-outputs/development_case12_yeoksam_dev_basic.pptx
@@ -5596,7 +5596,7 @@
                 <a:ea typeface="Pretendard" pitchFamily="34" charset="-122"/>
                 <a:cs typeface="Pretendard" pitchFamily="34" charset="-120"/>
               </a:rPr>
-              <a:t>소재지</a:t>
+              <a:t>{"ok"</a:t>
             </a:r>
             <a:endParaRPr lang="en-US" sz="1400" dirty="0"/>
           </a:p>
@@ -5638,7 +5638,7 @@
                 <a:ea typeface="Pretendard" pitchFamily="34" charset="-122"/>
                 <a:cs typeface="Pretendard" pitchFamily="34" charset="-120"/>
               </a:rPr>
-              <a:t>강남권역</a:t>
+              <a:t>true,"mocked":true,"extractedFields":{"area_signal":"역삼","asset_type":"오피스빌딩","price_band":"300억","size_signal":"3000평(약 9917.4㎡)"},"extractedFacts":{"region":"역삼","exactAddressCandidate":"역삼동 742-1","assetType":"오피스빌딩","priceText":"300억","sizeText":"3000평(약 9917.4㎡)","currentUse":"오피스","currentUseSignal":"근린생활시설","leaseSignal":"임대중","vacancySignal":"공실없음","tenantNames":"쿠팡","네이버","unitRentTexts":"301호: 1500만","sellerMotivationText":"자산 효율화","brokerNotes":"초역세권 매물"},"detectedSensitiveFields":"exact_address","tenant_name","ambiguousFields":,"warnings":,"areaSignal":"역삼","assetType":"오피스빌딩","priceBand":"300억","sizeSignal":"3000평(약 9917.4㎡)","dealType":"매각","buildingName":"역삼 센트럴타워","exactAddress":"역삼동 742-1","totalFloorArea":9917.3,"buildYear":2015,"currentUseSignal":"근린생활시설","vacancySignal":"공실 없음","fitSummary":"초역세권 근생 빌딩으로 시행/사옥 매입에 최적화","cautionSummary":"주요 임차 업종 만기 조율 필요","hiddenFields":"exact_address","seller_motivation","confidence":{"areaSignal":"confirmed","assetType":"confirmed","priceBand":"ai_hypothesis","fitSummary":"ai_hypothesis"},"missingData":"sizeSignal","boundaryNote":"본 자료는 실거래 통계 기반 참고치입니다.","buyerType":"법인 사옥형","budgetRange":{"min":50,"max":80,"display":"50억~80억"},"preferredRegions":"강남","성수","assetTypes":"꼬마빌딩","사옥용","purchasePurpose":"사옥용 매입","mustHave":"초역세권","주차","niceToHave":"테라스","루프탑","riskTolerance":"medium","financingNote":"자본금 50% 준비","missingQuestions":"구체적인 입주 시기가 언제인가요?","선호하는 수익률이 있나요?","privacyNotes":"연락처 비공개","fitReasons":"매수자 예산(50-80억)에 부합하는 매물입니다.","요청하신 성수/강남 권역에 해당합니다.","cautionReasons":"요청한 용도와 달리 명도 협의가 다소 필요합니다.","recommendedNextAction":"현장 답사 제안","kakaoMessage":"안녕하세요! 요청하신 조건에 부합하는 추천 매물이 있어 안내해 드립니다. 확인해보시고 피드백 부탁드립니다.","title":"강남 역삼역 초역세권 오피스 사옥용 빌딩 매각","shortSummary":"역삼역 도보 5분 거리의 준신축급 대형 오피스빌딩입니다.","dealPoints":"초역세권","사옥 최적","cautionPoints":"명도 조율 필요","hiddenInfoNotice":"보증금 및 지번은 인가 후 확인 가능","gateMessage":"G1 등급 등록이 필요합니다.","kakaoText":"강남 역삼역 오피스 빌딩 매각 안내입니다.","exactUnitCandidate":"101호","floor":"1층","areaSqmText":"150㎡","spaceType":"office","depositText":"5000만","monthlyRentText":"400만","maintenanceFeeText":"50만","availableFromText":"즉시입주","leaseTermMonthsText":"24","incentivesText":"렌트프리 2개월","restrictions":,"landlordIdentity":"김성수","currentTenant":"스타트업","vacancyReason":"이전 확장","rentNegotiation":"협의 가능","region":"성수동","areaSqm":150,"deposit":5000,"monthlyRent":400,"maintenanceFee":50,"availableFrom":"즉시입주","leaseTermMonths":24,"incentives":{"rentFreeMonths":2,"interiorSupport":"일부 인테리어 지원","freeRentDetail":"렌트프리 2개월 지원"},"shortSummaryLease":"성수역 도보 5분 거리 1층 리테일 상가 매물입니다."}</a:t>
             </a:r>
             <a:endParaRPr lang="en-US" sz="1400" dirty="0"/>
           </a:p>
@@ -5647,862 +5647,6 @@
       <p:sp>
         <p:nvSpPr>
           <p:cNvPr id="9" name="Shape 7"/>
-          <p:cNvSpPr/>
-          <p:nvPr/>
-        </p:nvSpPr>
-        <p:spPr>
-          <a:xfrm>
-            <a:off x="566928" y="2048256"/>
-            <a:ext cx="6858000" cy="0"/>
-          </a:xfrm>
-          <a:prstGeom prst="line">
-            <a:avLst/>
-          </a:prstGeom>
-          <a:noFill/>
-          <a:ln w="3810">
-            <a:solidFill>
-              <a:srgbClr val="CBD5E0"/>
-            </a:solidFill>
-            <a:prstDash val="solid"/>
-          </a:ln>
-        </p:spPr>
-      </p:sp>
-      <p:sp>
-        <p:nvSpPr>
-          <p:cNvPr id="10" name="Text 8"/>
-          <p:cNvSpPr/>
-          <p:nvPr/>
-        </p:nvSpPr>
-        <p:spPr>
-          <a:xfrm>
-            <a:off x="566928" y="2048256"/>
-            <a:ext cx="2606040" cy="402336"/>
-          </a:xfrm>
-          <a:prstGeom prst="rect">
-            <a:avLst/>
-          </a:prstGeom>
-          <a:noFill/>
-          <a:ln/>
-        </p:spPr>
-        <p:txBody>
-          <a:bodyPr wrap="square" lIns="0" tIns="0" rIns="0" bIns="0" rtlCol="0" anchor="ctr"/>
-          <a:lstStyle/>
-          <a:p>
-            <a:pPr indent="0" marL="0">
-              <a:lnSpc>
-                <a:spcPct val="120000"/>
-              </a:lnSpc>
-              <a:buNone/>
-            </a:pPr>
-            <a:r>
-              <a:rPr lang="en-US" sz="1400" dirty="0">
-                <a:solidFill>
-                  <a:srgbClr val="718096"/>
-                </a:solidFill>
-                <a:latin typeface="Pretendard" pitchFamily="34" charset="0"/>
-                <a:ea typeface="Pretendard" pitchFamily="34" charset="-122"/>
-                <a:cs typeface="Pretendard" pitchFamily="34" charset="-120"/>
-              </a:rPr>
-              <a:t>주요 용도</a:t>
-            </a:r>
-            <a:endParaRPr lang="en-US" sz="1400" dirty="0"/>
-          </a:p>
-        </p:txBody>
-      </p:sp>
-      <p:sp>
-        <p:nvSpPr>
-          <p:cNvPr id="11" name="Text 9"/>
-          <p:cNvSpPr/>
-          <p:nvPr/>
-        </p:nvSpPr>
-        <p:spPr>
-          <a:xfrm>
-            <a:off x="3172968" y="2048256"/>
-            <a:ext cx="4251960" cy="402336"/>
-          </a:xfrm>
-          <a:prstGeom prst="rect">
-            <a:avLst/>
-          </a:prstGeom>
-          <a:noFill/>
-          <a:ln/>
-        </p:spPr>
-        <p:txBody>
-          <a:bodyPr wrap="square" lIns="0" tIns="0" rIns="0" bIns="0" rtlCol="0" anchor="ctr"/>
-          <a:lstStyle/>
-          <a:p>
-            <a:pPr indent="0" marL="0">
-              <a:lnSpc>
-                <a:spcPct val="120000"/>
-              </a:lnSpc>
-              <a:buNone/>
-            </a:pPr>
-            <a:r>
-              <a:rPr lang="en-US" sz="1400" b="1" dirty="0">
-                <a:solidFill>
-                  <a:srgbClr val="10161F"/>
-                </a:solidFill>
-                <a:latin typeface="Pretendard" pitchFamily="34" charset="0"/>
-                <a:ea typeface="Pretendard" pitchFamily="34" charset="-122"/>
-                <a:cs typeface="Pretendard" pitchFamily="34" charset="-120"/>
-              </a:rPr>
-              <a:t>근린생활시설</a:t>
-            </a:r>
-            <a:endParaRPr lang="en-US" sz="1400" dirty="0"/>
-          </a:p>
-        </p:txBody>
-      </p:sp>
-      <p:sp>
-        <p:nvSpPr>
-          <p:cNvPr id="12" name="Shape 10"/>
-          <p:cNvSpPr/>
-          <p:nvPr/>
-        </p:nvSpPr>
-        <p:spPr>
-          <a:xfrm>
-            <a:off x="566928" y="2450592"/>
-            <a:ext cx="6858000" cy="0"/>
-          </a:xfrm>
-          <a:prstGeom prst="line">
-            <a:avLst/>
-          </a:prstGeom>
-          <a:noFill/>
-          <a:ln w="3810">
-            <a:solidFill>
-              <a:srgbClr val="CBD5E0"/>
-            </a:solidFill>
-            <a:prstDash val="solid"/>
-          </a:ln>
-        </p:spPr>
-      </p:sp>
-      <p:sp>
-        <p:nvSpPr>
-          <p:cNvPr id="13" name="Text 11"/>
-          <p:cNvSpPr/>
-          <p:nvPr/>
-        </p:nvSpPr>
-        <p:spPr>
-          <a:xfrm>
-            <a:off x="566928" y="2450592"/>
-            <a:ext cx="2606040" cy="402336"/>
-          </a:xfrm>
-          <a:prstGeom prst="rect">
-            <a:avLst/>
-          </a:prstGeom>
-          <a:noFill/>
-          <a:ln/>
-        </p:spPr>
-        <p:txBody>
-          <a:bodyPr wrap="square" lIns="0" tIns="0" rIns="0" bIns="0" rtlCol="0" anchor="ctr"/>
-          <a:lstStyle/>
-          <a:p>
-            <a:pPr indent="0" marL="0">
-              <a:lnSpc>
-                <a:spcPct val="120000"/>
-              </a:lnSpc>
-              <a:buNone/>
-            </a:pPr>
-            <a:r>
-              <a:rPr lang="en-US" sz="1400" dirty="0">
-                <a:solidFill>
-                  <a:srgbClr val="718096"/>
-                </a:solidFill>
-                <a:latin typeface="Pretendard" pitchFamily="34" charset="0"/>
-                <a:ea typeface="Pretendard" pitchFamily="34" charset="-122"/>
-                <a:cs typeface="Pretendard" pitchFamily="34" charset="-120"/>
-              </a:rPr>
-              <a:t>연면적</a:t>
-            </a:r>
-            <a:endParaRPr lang="en-US" sz="1400" dirty="0"/>
-          </a:p>
-        </p:txBody>
-      </p:sp>
-      <p:sp>
-        <p:nvSpPr>
-          <p:cNvPr id="14" name="Text 12"/>
-          <p:cNvSpPr/>
-          <p:nvPr/>
-        </p:nvSpPr>
-        <p:spPr>
-          <a:xfrm>
-            <a:off x="3172968" y="2450592"/>
-            <a:ext cx="4251960" cy="402336"/>
-          </a:xfrm>
-          <a:prstGeom prst="rect">
-            <a:avLst/>
-          </a:prstGeom>
-          <a:noFill/>
-          <a:ln/>
-        </p:spPr>
-        <p:txBody>
-          <a:bodyPr wrap="square" lIns="0" tIns="0" rIns="0" bIns="0" rtlCol="0" anchor="ctr"/>
-          <a:lstStyle/>
-          <a:p>
-            <a:pPr indent="0" marL="0">
-              <a:lnSpc>
-                <a:spcPct val="120000"/>
-              </a:lnSpc>
-              <a:buNone/>
-            </a:pPr>
-            <a:r>
-              <a:rPr lang="en-US" sz="1400" b="1" dirty="0">
-                <a:solidFill>
-                  <a:srgbClr val="10161F"/>
-                </a:solidFill>
-                <a:latin typeface="Pretendard" pitchFamily="34" charset="0"/>
-                <a:ea typeface="Pretendard" pitchFamily="34" charset="-122"/>
-                <a:cs typeface="Pretendard" pitchFamily="34" charset="-120"/>
-              </a:rPr>
-              <a:t>5,000㎡ (약 1513평(약 5001.7㎡))</a:t>
-            </a:r>
-            <a:endParaRPr lang="en-US" sz="1400" dirty="0"/>
-          </a:p>
-        </p:txBody>
-      </p:sp>
-      <p:sp>
-        <p:nvSpPr>
-          <p:cNvPr id="15" name="Shape 13"/>
-          <p:cNvSpPr/>
-          <p:nvPr/>
-        </p:nvSpPr>
-        <p:spPr>
-          <a:xfrm>
-            <a:off x="566928" y="2852928"/>
-            <a:ext cx="6858000" cy="0"/>
-          </a:xfrm>
-          <a:prstGeom prst="line">
-            <a:avLst/>
-          </a:prstGeom>
-          <a:noFill/>
-          <a:ln w="3810">
-            <a:solidFill>
-              <a:srgbClr val="CBD5E0"/>
-            </a:solidFill>
-            <a:prstDash val="solid"/>
-          </a:ln>
-        </p:spPr>
-      </p:sp>
-      <p:sp>
-        <p:nvSpPr>
-          <p:cNvPr id="16" name="Text 14"/>
-          <p:cNvSpPr/>
-          <p:nvPr/>
-        </p:nvSpPr>
-        <p:spPr>
-          <a:xfrm>
-            <a:off x="566928" y="2852928"/>
-            <a:ext cx="2606040" cy="402336"/>
-          </a:xfrm>
-          <a:prstGeom prst="rect">
-            <a:avLst/>
-          </a:prstGeom>
-          <a:noFill/>
-          <a:ln/>
-        </p:spPr>
-        <p:txBody>
-          <a:bodyPr wrap="square" lIns="0" tIns="0" rIns="0" bIns="0" rtlCol="0" anchor="ctr"/>
-          <a:lstStyle/>
-          <a:p>
-            <a:pPr indent="0" marL="0">
-              <a:lnSpc>
-                <a:spcPct val="120000"/>
-              </a:lnSpc>
-              <a:buNone/>
-            </a:pPr>
-            <a:r>
-              <a:rPr lang="en-US" sz="1400" dirty="0">
-                <a:solidFill>
-                  <a:srgbClr val="718096"/>
-                </a:solidFill>
-                <a:latin typeface="Pretendard" pitchFamily="34" charset="0"/>
-                <a:ea typeface="Pretendard" pitchFamily="34" charset="-122"/>
-                <a:cs typeface="Pretendard" pitchFamily="34" charset="-120"/>
-              </a:rPr>
-              <a:t>대지면적</a:t>
-            </a:r>
-            <a:endParaRPr lang="en-US" sz="1400" dirty="0"/>
-          </a:p>
-        </p:txBody>
-      </p:sp>
-      <p:sp>
-        <p:nvSpPr>
-          <p:cNvPr id="17" name="Text 15"/>
-          <p:cNvSpPr/>
-          <p:nvPr/>
-        </p:nvSpPr>
-        <p:spPr>
-          <a:xfrm>
-            <a:off x="3172968" y="2852928"/>
-            <a:ext cx="4251960" cy="402336"/>
-          </a:xfrm>
-          <a:prstGeom prst="rect">
-            <a:avLst/>
-          </a:prstGeom>
-          <a:noFill/>
-          <a:ln/>
-        </p:spPr>
-        <p:txBody>
-          <a:bodyPr wrap="square" lIns="0" tIns="0" rIns="0" bIns="0" rtlCol="0" anchor="ctr"/>
-          <a:lstStyle/>
-          <a:p>
-            <a:pPr indent="0" marL="0">
-              <a:lnSpc>
-                <a:spcPct val="120000"/>
-              </a:lnSpc>
-              <a:buNone/>
-            </a:pPr>
-            <a:r>
-              <a:rPr lang="en-US" sz="1400" b="1" dirty="0">
-                <a:solidFill>
-                  <a:srgbClr val="10161F"/>
-                </a:solidFill>
-                <a:latin typeface="Pretendard" pitchFamily="34" charset="0"/>
-                <a:ea typeface="Pretendard" pitchFamily="34" charset="-122"/>
-                <a:cs typeface="Pretendard" pitchFamily="34" charset="-120"/>
-              </a:rPr>
-              <a:t>1,000㎡ (약 303평(약 1001.7㎡))</a:t>
-            </a:r>
-            <a:endParaRPr lang="en-US" sz="1400" dirty="0"/>
-          </a:p>
-        </p:txBody>
-      </p:sp>
-      <p:sp>
-        <p:nvSpPr>
-          <p:cNvPr id="18" name="Shape 16"/>
-          <p:cNvSpPr/>
-          <p:nvPr/>
-        </p:nvSpPr>
-        <p:spPr>
-          <a:xfrm>
-            <a:off x="566928" y="3255264"/>
-            <a:ext cx="6858000" cy="0"/>
-          </a:xfrm>
-          <a:prstGeom prst="line">
-            <a:avLst/>
-          </a:prstGeom>
-          <a:noFill/>
-          <a:ln w="3810">
-            <a:solidFill>
-              <a:srgbClr val="CBD5E0"/>
-            </a:solidFill>
-            <a:prstDash val="solid"/>
-          </a:ln>
-        </p:spPr>
-      </p:sp>
-      <p:sp>
-        <p:nvSpPr>
-          <p:cNvPr id="19" name="Text 17"/>
-          <p:cNvSpPr/>
-          <p:nvPr/>
-        </p:nvSpPr>
-        <p:spPr>
-          <a:xfrm>
-            <a:off x="566928" y="3255264"/>
-            <a:ext cx="2606040" cy="402336"/>
-          </a:xfrm>
-          <a:prstGeom prst="rect">
-            <a:avLst/>
-          </a:prstGeom>
-          <a:noFill/>
-          <a:ln/>
-        </p:spPr>
-        <p:txBody>
-          <a:bodyPr wrap="square" lIns="0" tIns="0" rIns="0" bIns="0" rtlCol="0" anchor="ctr"/>
-          <a:lstStyle/>
-          <a:p>
-            <a:pPr indent="0" marL="0">
-              <a:lnSpc>
-                <a:spcPct val="120000"/>
-              </a:lnSpc>
-              <a:buNone/>
-            </a:pPr>
-            <a:r>
-              <a:rPr lang="en-US" sz="1400" dirty="0">
-                <a:solidFill>
-                  <a:srgbClr val="718096"/>
-                </a:solidFill>
-                <a:latin typeface="Pretendard" pitchFamily="34" charset="0"/>
-                <a:ea typeface="Pretendard" pitchFamily="34" charset="-122"/>
-                <a:cs typeface="Pretendard" pitchFamily="34" charset="-120"/>
-              </a:rPr>
-              <a:t>용도지역</a:t>
-            </a:r>
-            <a:endParaRPr lang="en-US" sz="1400" dirty="0"/>
-          </a:p>
-        </p:txBody>
-      </p:sp>
-      <p:sp>
-        <p:nvSpPr>
-          <p:cNvPr id="20" name="Text 18"/>
-          <p:cNvSpPr/>
-          <p:nvPr/>
-        </p:nvSpPr>
-        <p:spPr>
-          <a:xfrm>
-            <a:off x="3172968" y="3255264"/>
-            <a:ext cx="4251960" cy="402336"/>
-          </a:xfrm>
-          <a:prstGeom prst="rect">
-            <a:avLst/>
-          </a:prstGeom>
-          <a:noFill/>
-          <a:ln/>
-        </p:spPr>
-        <p:txBody>
-          <a:bodyPr wrap="square" lIns="0" tIns="0" rIns="0" bIns="0" rtlCol="0" anchor="ctr"/>
-          <a:lstStyle/>
-          <a:p>
-            <a:pPr indent="0" marL="0">
-              <a:lnSpc>
-                <a:spcPct val="120000"/>
-              </a:lnSpc>
-              <a:buNone/>
-            </a:pPr>
-            <a:r>
-              <a:rPr lang="en-US" sz="1400" b="1" dirty="0">
-                <a:solidFill>
-                  <a:srgbClr val="10161F"/>
-                </a:solidFill>
-                <a:latin typeface="Pretendard" pitchFamily="34" charset="0"/>
-                <a:ea typeface="Pretendard" pitchFamily="34" charset="-122"/>
-                <a:cs typeface="Pretendard" pitchFamily="34" charset="-120"/>
-              </a:rPr>
-              <a:t>일반상업지역</a:t>
-            </a:r>
-            <a:endParaRPr lang="en-US" sz="1400" dirty="0"/>
-          </a:p>
-        </p:txBody>
-      </p:sp>
-      <p:sp>
-        <p:nvSpPr>
-          <p:cNvPr id="21" name="Shape 19"/>
-          <p:cNvSpPr/>
-          <p:nvPr/>
-        </p:nvSpPr>
-        <p:spPr>
-          <a:xfrm>
-            <a:off x="566928" y="3657600"/>
-            <a:ext cx="6858000" cy="0"/>
-          </a:xfrm>
-          <a:prstGeom prst="line">
-            <a:avLst/>
-          </a:prstGeom>
-          <a:noFill/>
-          <a:ln w="3810">
-            <a:solidFill>
-              <a:srgbClr val="CBD5E0"/>
-            </a:solidFill>
-            <a:prstDash val="solid"/>
-          </a:ln>
-        </p:spPr>
-      </p:sp>
-      <p:sp>
-        <p:nvSpPr>
-          <p:cNvPr id="22" name="Text 20"/>
-          <p:cNvSpPr/>
-          <p:nvPr/>
-        </p:nvSpPr>
-        <p:spPr>
-          <a:xfrm>
-            <a:off x="566928" y="3657600"/>
-            <a:ext cx="2606040" cy="402336"/>
-          </a:xfrm>
-          <a:prstGeom prst="rect">
-            <a:avLst/>
-          </a:prstGeom>
-          <a:noFill/>
-          <a:ln/>
-        </p:spPr>
-        <p:txBody>
-          <a:bodyPr wrap="square" lIns="0" tIns="0" rIns="0" bIns="0" rtlCol="0" anchor="ctr"/>
-          <a:lstStyle/>
-          <a:p>
-            <a:pPr indent="0" marL="0">
-              <a:lnSpc>
-                <a:spcPct val="120000"/>
-              </a:lnSpc>
-              <a:buNone/>
-            </a:pPr>
-            <a:r>
-              <a:rPr lang="en-US" sz="1400" dirty="0">
-                <a:solidFill>
-                  <a:srgbClr val="718096"/>
-                </a:solidFill>
-                <a:latin typeface="Pretendard" pitchFamily="34" charset="0"/>
-                <a:ea typeface="Pretendard" pitchFamily="34" charset="-122"/>
-                <a:cs typeface="Pretendard" pitchFamily="34" charset="-120"/>
-              </a:rPr>
-              <a:t>승강기</a:t>
-            </a:r>
-            <a:endParaRPr lang="en-US" sz="1400" dirty="0"/>
-          </a:p>
-        </p:txBody>
-      </p:sp>
-      <p:sp>
-        <p:nvSpPr>
-          <p:cNvPr id="23" name="Text 21"/>
-          <p:cNvSpPr/>
-          <p:nvPr/>
-        </p:nvSpPr>
-        <p:spPr>
-          <a:xfrm>
-            <a:off x="3172968" y="3657600"/>
-            <a:ext cx="4251960" cy="402336"/>
-          </a:xfrm>
-          <a:prstGeom prst="rect">
-            <a:avLst/>
-          </a:prstGeom>
-          <a:noFill/>
-          <a:ln/>
-        </p:spPr>
-        <p:txBody>
-          <a:bodyPr wrap="square" lIns="0" tIns="0" rIns="0" bIns="0" rtlCol="0" anchor="ctr"/>
-          <a:lstStyle/>
-          <a:p>
-            <a:pPr indent="0" marL="0">
-              <a:lnSpc>
-                <a:spcPct val="120000"/>
-              </a:lnSpc>
-              <a:buNone/>
-            </a:pPr>
-            <a:r>
-              <a:rPr lang="en-US" sz="1400" b="1" dirty="0">
-                <a:solidFill>
-                  <a:srgbClr val="10161F"/>
-                </a:solidFill>
-                <a:latin typeface="Pretendard" pitchFamily="34" charset="0"/>
-                <a:ea typeface="Pretendard" pitchFamily="34" charset="-122"/>
-                <a:cs typeface="Pretendard" pitchFamily="34" charset="-120"/>
-              </a:rPr>
-              <a:t>1대 (15인승 침대용)</a:t>
-            </a:r>
-            <a:endParaRPr lang="en-US" sz="1400" dirty="0"/>
-          </a:p>
-        </p:txBody>
-      </p:sp>
-      <p:sp>
-        <p:nvSpPr>
-          <p:cNvPr id="24" name="Shape 22"/>
-          <p:cNvSpPr/>
-          <p:nvPr/>
-        </p:nvSpPr>
-        <p:spPr>
-          <a:xfrm>
-            <a:off x="566928" y="4059936"/>
-            <a:ext cx="6858000" cy="0"/>
-          </a:xfrm>
-          <a:prstGeom prst="line">
-            <a:avLst/>
-          </a:prstGeom>
-          <a:noFill/>
-          <a:ln w="3810">
-            <a:solidFill>
-              <a:srgbClr val="CBD5E0"/>
-            </a:solidFill>
-            <a:prstDash val="solid"/>
-          </a:ln>
-        </p:spPr>
-      </p:sp>
-      <p:sp>
-        <p:nvSpPr>
-          <p:cNvPr id="25" name="Text 23"/>
-          <p:cNvSpPr/>
-          <p:nvPr/>
-        </p:nvSpPr>
-        <p:spPr>
-          <a:xfrm>
-            <a:off x="566928" y="4059936"/>
-            <a:ext cx="2606040" cy="402336"/>
-          </a:xfrm>
-          <a:prstGeom prst="rect">
-            <a:avLst/>
-          </a:prstGeom>
-          <a:noFill/>
-          <a:ln/>
-        </p:spPr>
-        <p:txBody>
-          <a:bodyPr wrap="square" lIns="0" tIns="0" rIns="0" bIns="0" rtlCol="0" anchor="ctr"/>
-          <a:lstStyle/>
-          <a:p>
-            <a:pPr indent="0" marL="0">
-              <a:lnSpc>
-                <a:spcPct val="120000"/>
-              </a:lnSpc>
-              <a:buNone/>
-            </a:pPr>
-            <a:r>
-              <a:rPr lang="en-US" sz="1400" dirty="0">
-                <a:solidFill>
-                  <a:srgbClr val="718096"/>
-                </a:solidFill>
-                <a:latin typeface="Pretendard" pitchFamily="34" charset="0"/>
-                <a:ea typeface="Pretendard" pitchFamily="34" charset="-122"/>
-                <a:cs typeface="Pretendard" pitchFamily="34" charset="-120"/>
-              </a:rPr>
-              <a:t>주차 대수</a:t>
-            </a:r>
-            <a:endParaRPr lang="en-US" sz="1400" dirty="0"/>
-          </a:p>
-        </p:txBody>
-      </p:sp>
-      <p:sp>
-        <p:nvSpPr>
-          <p:cNvPr id="26" name="Text 24"/>
-          <p:cNvSpPr/>
-          <p:nvPr/>
-        </p:nvSpPr>
-        <p:spPr>
-          <a:xfrm>
-            <a:off x="3172968" y="4059936"/>
-            <a:ext cx="4251960" cy="402336"/>
-          </a:xfrm>
-          <a:prstGeom prst="rect">
-            <a:avLst/>
-          </a:prstGeom>
-          <a:noFill/>
-          <a:ln/>
-        </p:spPr>
-        <p:txBody>
-          <a:bodyPr wrap="square" lIns="0" tIns="0" rIns="0" bIns="0" rtlCol="0" anchor="ctr"/>
-          <a:lstStyle/>
-          <a:p>
-            <a:pPr indent="0" marL="0">
-              <a:lnSpc>
-                <a:spcPct val="120000"/>
-              </a:lnSpc>
-              <a:buNone/>
-            </a:pPr>
-            <a:r>
-              <a:rPr lang="en-US" sz="1400" b="1" dirty="0">
-                <a:solidFill>
-                  <a:srgbClr val="10161F"/>
-                </a:solidFill>
-                <a:latin typeface="Pretendard" pitchFamily="34" charset="0"/>
-                <a:ea typeface="Pretendard" pitchFamily="34" charset="-122"/>
-                <a:cs typeface="Pretendard" pitchFamily="34" charset="-120"/>
-              </a:rPr>
-              <a:t>18대 (자주식 완비)</a:t>
-            </a:r>
-            <a:endParaRPr lang="en-US" sz="1400" dirty="0"/>
-          </a:p>
-        </p:txBody>
-      </p:sp>
-      <p:sp>
-        <p:nvSpPr>
-          <p:cNvPr id="27" name="Shape 25"/>
-          <p:cNvSpPr/>
-          <p:nvPr/>
-        </p:nvSpPr>
-        <p:spPr>
-          <a:xfrm>
-            <a:off x="566928" y="4462272"/>
-            <a:ext cx="6858000" cy="0"/>
-          </a:xfrm>
-          <a:prstGeom prst="line">
-            <a:avLst/>
-          </a:prstGeom>
-          <a:noFill/>
-          <a:ln w="3810">
-            <a:solidFill>
-              <a:srgbClr val="CBD5E0"/>
-            </a:solidFill>
-            <a:prstDash val="solid"/>
-          </a:ln>
-        </p:spPr>
-      </p:sp>
-      <p:sp>
-        <p:nvSpPr>
-          <p:cNvPr id="28" name="Text 26"/>
-          <p:cNvSpPr/>
-          <p:nvPr/>
-        </p:nvSpPr>
-        <p:spPr>
-          <a:xfrm>
-            <a:off x="566928" y="4462272"/>
-            <a:ext cx="2606040" cy="402336"/>
-          </a:xfrm>
-          <a:prstGeom prst="rect">
-            <a:avLst/>
-          </a:prstGeom>
-          <a:noFill/>
-          <a:ln/>
-        </p:spPr>
-        <p:txBody>
-          <a:bodyPr wrap="square" lIns="0" tIns="0" rIns="0" bIns="0" rtlCol="0" anchor="ctr"/>
-          <a:lstStyle/>
-          <a:p>
-            <a:pPr indent="0" marL="0">
-              <a:lnSpc>
-                <a:spcPct val="120000"/>
-              </a:lnSpc>
-              <a:buNone/>
-            </a:pPr>
-            <a:r>
-              <a:rPr lang="en-US" sz="1400" dirty="0">
-                <a:solidFill>
-                  <a:srgbClr val="718096"/>
-                </a:solidFill>
-                <a:latin typeface="Pretendard" pitchFamily="34" charset="0"/>
-                <a:ea typeface="Pretendard" pitchFamily="34" charset="-122"/>
-                <a:cs typeface="Pretendard" pitchFamily="34" charset="-120"/>
-              </a:rPr>
-              <a:t>주구조</a:t>
-            </a:r>
-            <a:endParaRPr lang="en-US" sz="1400" dirty="0"/>
-          </a:p>
-        </p:txBody>
-      </p:sp>
-      <p:sp>
-        <p:nvSpPr>
-          <p:cNvPr id="29" name="Text 27"/>
-          <p:cNvSpPr/>
-          <p:nvPr/>
-        </p:nvSpPr>
-        <p:spPr>
-          <a:xfrm>
-            <a:off x="3172968" y="4462272"/>
-            <a:ext cx="4251960" cy="402336"/>
-          </a:xfrm>
-          <a:prstGeom prst="rect">
-            <a:avLst/>
-          </a:prstGeom>
-          <a:noFill/>
-          <a:ln/>
-        </p:spPr>
-        <p:txBody>
-          <a:bodyPr wrap="square" lIns="0" tIns="0" rIns="0" bIns="0" rtlCol="0" anchor="ctr"/>
-          <a:lstStyle/>
-          <a:p>
-            <a:pPr indent="0" marL="0">
-              <a:lnSpc>
-                <a:spcPct val="120000"/>
-              </a:lnSpc>
-              <a:buNone/>
-            </a:pPr>
-            <a:r>
-              <a:rPr lang="en-US" sz="1400" b="1" dirty="0">
-                <a:solidFill>
-                  <a:srgbClr val="10161F"/>
-                </a:solidFill>
-                <a:latin typeface="Pretendard" pitchFamily="34" charset="0"/>
-                <a:ea typeface="Pretendard" pitchFamily="34" charset="-122"/>
-                <a:cs typeface="Pretendard" pitchFamily="34" charset="-120"/>
-              </a:rPr>
-              <a:t>철근콘크리트구조</a:t>
-            </a:r>
-            <a:endParaRPr lang="en-US" sz="1400" dirty="0"/>
-          </a:p>
-        </p:txBody>
-      </p:sp>
-      <p:sp>
-        <p:nvSpPr>
-          <p:cNvPr id="30" name="Shape 28"/>
-          <p:cNvSpPr/>
-          <p:nvPr/>
-        </p:nvSpPr>
-        <p:spPr>
-          <a:xfrm>
-            <a:off x="566928" y="4864608"/>
-            <a:ext cx="6858000" cy="0"/>
-          </a:xfrm>
-          <a:prstGeom prst="line">
-            <a:avLst/>
-          </a:prstGeom>
-          <a:noFill/>
-          <a:ln w="3810">
-            <a:solidFill>
-              <a:srgbClr val="CBD5E0"/>
-            </a:solidFill>
-            <a:prstDash val="solid"/>
-          </a:ln>
-        </p:spPr>
-      </p:sp>
-      <p:sp>
-        <p:nvSpPr>
-          <p:cNvPr id="31" name="Text 29"/>
-          <p:cNvSpPr/>
-          <p:nvPr/>
-        </p:nvSpPr>
-        <p:spPr>
-          <a:xfrm>
-            <a:off x="566928" y="4864608"/>
-            <a:ext cx="2606040" cy="402336"/>
-          </a:xfrm>
-          <a:prstGeom prst="rect">
-            <a:avLst/>
-          </a:prstGeom>
-          <a:noFill/>
-          <a:ln/>
-        </p:spPr>
-        <p:txBody>
-          <a:bodyPr wrap="square" lIns="0" tIns="0" rIns="0" bIns="0" rtlCol="0" anchor="ctr"/>
-          <a:lstStyle/>
-          <a:p>
-            <a:pPr indent="0" marL="0">
-              <a:lnSpc>
-                <a:spcPct val="120000"/>
-              </a:lnSpc>
-              <a:buNone/>
-            </a:pPr>
-            <a:r>
-              <a:rPr lang="en-US" sz="1400" dirty="0">
-                <a:solidFill>
-                  <a:srgbClr val="718096"/>
-                </a:solidFill>
-                <a:latin typeface="Pretendard" pitchFamily="34" charset="0"/>
-                <a:ea typeface="Pretendard" pitchFamily="34" charset="-122"/>
-                <a:cs typeface="Pretendard" pitchFamily="34" charset="-120"/>
-              </a:rPr>
-              <a:t>매매 희망가</a:t>
-            </a:r>
-            <a:endParaRPr lang="en-US" sz="1400" dirty="0"/>
-          </a:p>
-        </p:txBody>
-      </p:sp>
-      <p:sp>
-        <p:nvSpPr>
-          <p:cNvPr id="32" name="Text 30"/>
-          <p:cNvSpPr/>
-          <p:nvPr/>
-        </p:nvSpPr>
-        <p:spPr>
-          <a:xfrm>
-            <a:off x="3172968" y="4864608"/>
-            <a:ext cx="4251960" cy="402336"/>
-          </a:xfrm>
-          <a:prstGeom prst="rect">
-            <a:avLst/>
-          </a:prstGeom>
-          <a:noFill/>
-          <a:ln/>
-        </p:spPr>
-        <p:txBody>
-          <a:bodyPr wrap="square" lIns="0" tIns="0" rIns="0" bIns="0" rtlCol="0" anchor="ctr"/>
-          <a:lstStyle/>
-          <a:p>
-            <a:pPr indent="0" marL="0">
-              <a:lnSpc>
-                <a:spcPct val="120000"/>
-              </a:lnSpc>
-              <a:buNone/>
-            </a:pPr>
-            <a:r>
-              <a:rPr lang="en-US" sz="1400" b="1" dirty="0">
-                <a:solidFill>
-                  <a:srgbClr val="10161F"/>
-                </a:solidFill>
-                <a:latin typeface="Pretendard" pitchFamily="34" charset="0"/>
-                <a:ea typeface="Pretendard" pitchFamily="34" charset="-122"/>
-                <a:cs typeface="Pretendard" pitchFamily="34" charset="-120"/>
-              </a:rPr>
-              <a:t>210억</a:t>
-            </a:r>
-            <a:endParaRPr lang="en-US" sz="1400" dirty="0"/>
-          </a:p>
-        </p:txBody>
-      </p:sp>
-      <p:sp>
-        <p:nvSpPr>
-          <p:cNvPr id="33" name="Shape 31"/>
           <p:cNvSpPr/>
           <p:nvPr/>
         </p:nvSpPr>
@@ -6525,49 +5669,49 @@
       </p:sp>
       <p:sp>
         <p:nvSpPr>
-          <p:cNvPr id="34" name="Shape 32"/>
+          <p:cNvPr id="10" name="Shape 8"/>
           <p:cNvSpPr/>
           <p:nvPr/>
         </p:nvSpPr>
         <p:spPr>
           <a:xfrm>
             <a:off x="7784287" y="1645920"/>
-            <a:ext cx="3840480" cy="1645920"/>
+            <a:ext cx="3840480" cy="2103120"/>
           </a:xfrm>
           <a:prstGeom prst="roundRect">
             <a:avLst>
-              <a:gd name="adj" fmla="val 3333"/>
+              <a:gd name="adj" fmla="val 2609"/>
             </a:avLst>
           </a:prstGeom>
           <a:solidFill>
-            <a:srgbClr val="BEE3F8"/>
+            <a:srgbClr val="F3EBDA"/>
           </a:solidFill>
           <a:ln/>
         </p:spPr>
       </p:sp>
       <p:sp>
         <p:nvSpPr>
-          <p:cNvPr id="35" name="Shape 33"/>
+          <p:cNvPr id="11" name="Shape 9"/>
           <p:cNvSpPr/>
           <p:nvPr/>
         </p:nvSpPr>
         <p:spPr>
           <a:xfrm>
             <a:off x="7784287" y="1700784"/>
-            <a:ext cx="36576" cy="1536192"/>
+            <a:ext cx="36576" cy="1993392"/>
           </a:xfrm>
           <a:prstGeom prst="rect">
             <a:avLst/>
           </a:prstGeom>
           <a:solidFill>
-            <a:srgbClr val="2B6CB0"/>
+            <a:srgbClr val="977024"/>
           </a:solidFill>
           <a:ln/>
         </p:spPr>
       </p:sp>
       <p:sp>
         <p:nvSpPr>
-          <p:cNvPr id="36" name="Text 34"/>
+          <p:cNvPr id="12" name="Text 10"/>
           <p:cNvSpPr/>
           <p:nvPr/>
         </p:nvSpPr>
@@ -6595,14 +5739,14 @@
       </p:sp>
       <p:sp>
         <p:nvSpPr>
-          <p:cNvPr id="37" name="Text 35"/>
+          <p:cNvPr id="13" name="Text 11"/>
           <p:cNvSpPr/>
           <p:nvPr/>
         </p:nvSpPr>
         <p:spPr>
           <a:xfrm>
             <a:off x="7967167" y="1975104"/>
-            <a:ext cx="3511296" cy="1243584"/>
+            <a:ext cx="3511296" cy="1700784"/>
           </a:xfrm>
           <a:prstGeom prst="rect">
             <a:avLst/>
@@ -6629,7 +5773,7 @@
                 <a:ea typeface="Pretendard" pitchFamily="34" charset="-122"/>
                 <a:cs typeface="Pretendard" pitchFamily="34" charset="-120"/>
               </a:rPr>
-              <a:t>본 매물은 강남권역 입지의 안정적 운영 자산입니다.</a:t>
+              <a:t>{"ok":true,"mocked":true,"extractedFields":{"area_signal":"역삼","asset_type":"오피스빌딩","price_band":"300억","size_signal":"3</a:t>
             </a:r>
             <a:endParaRPr lang="en-US" sz="930" dirty="0"/>
           </a:p>
@@ -6637,7 +5781,7 @@
       </p:sp>
       <p:sp>
         <p:nvSpPr>
-          <p:cNvPr id="38" name="Text 36"/>
+          <p:cNvPr id="14" name="Text 12"/>
           <p:cNvSpPr/>
           <p:nvPr/>
         </p:nvSpPr>
@@ -6676,7 +5820,7 @@
       </p:sp>
       <p:sp>
         <p:nvSpPr>
-          <p:cNvPr id="39" name="Text 37"/>
+          <p:cNvPr id="15" name="Text 13"/>
           <p:cNvSpPr/>
           <p:nvPr/>
         </p:nvSpPr>
@@ -6915,7 +6059,7 @@
                 <a:ea typeface="Pretendard" pitchFamily="34" charset="-122"/>
                 <a:cs typeface="Pretendard" pitchFamily="34" charset="-120"/>
               </a:rPr>
-              <a:t>대지 및 신축 개발 여력 분석</a:t>
+              <a:t>건축물 개요 및 물리 스펙</a:t>
             </a:r>
             <a:endParaRPr lang="en-US" sz="1100" dirty="0"/>
           </a:p>
@@ -6957,7 +6101,7 @@
                 <a:ea typeface="Pretendard" pitchFamily="34" charset="-122"/>
                 <a:cs typeface="Pretendard" pitchFamily="34" charset="-120"/>
               </a:rPr>
-              <a:t>대지면적</a:t>
+              <a:t>{"ok"</a:t>
             </a:r>
             <a:endParaRPr lang="en-US" sz="1400" dirty="0"/>
           </a:p>
@@ -6999,7 +6143,7 @@
                 <a:ea typeface="Pretendard" pitchFamily="34" charset="-122"/>
                 <a:cs typeface="Pretendard" pitchFamily="34" charset="-120"/>
               </a:rPr>
-              <a:t>1000㎡</a:t>
+              <a:t>true,"mocked":true,"extractedFields":{"area_signal":"역삼","asset_type":"오피스빌딩","price_band":"300억","size_signal":"3000평(약 9917.4㎡)"},"extractedFacts":{"region":"역삼","exactAddressCandidate":"역삼동 742-1","assetType":"오피스빌딩","priceText":"300억","sizeText":"3000평(약 9917.4㎡)","currentUse":"오피스","currentUseSignal":"근린생활시설","leaseSignal":"임대중","vacancySignal":"공실없음","tenantNames":"쿠팡","네이버","unitRentTexts":"301호: 1500만","sellerMotivationText":"자산 효율화","brokerNotes":"초역세권 매물"},"detectedSensitiveFields":"exact_address","tenant_name","ambiguousFields":,"warnings":,"areaSignal":"역삼","assetType":"오피스빌딩","priceBand":"300억","sizeSignal":"3000평(약 9917.4㎡)","dealType":"매각","buildingName":"역삼 센트럴타워","exactAddress":"역삼동 742-1","totalFloorArea":9917.3,"buildYear":2015,"currentUseSignal":"근린생활시설","vacancySignal":"공실 없음","fitSummary":"초역세권 근생 빌딩으로 시행/사옥 매입에 최적화","cautionSummary":"주요 임차 업종 만기 조율 필요","hiddenFields":"exact_address","seller_motivation","confidence":{"areaSignal":"confirmed","assetType":"confirmed","priceBand":"ai_hypothesis","fitSummary":"ai_hypothesis"},"missingData":"sizeSignal","boundaryNote":"본 자료는 실거래 통계 기반 참고치입니다.","buyerType":"법인 사옥형","budgetRange":{"min":50,"max":80,"display":"50억~80억"},"preferredRegions":"강남","성수","assetTypes":"꼬마빌딩","사옥용","purchasePurpose":"사옥용 매입","mustHave":"초역세권","주차","niceToHave":"테라스","루프탑","riskTolerance":"medium","financingNote":"자본금 50% 준비","missingQuestions":"구체적인 입주 시기가 언제인가요?","선호하는 수익률이 있나요?","privacyNotes":"연락처 비공개","fitReasons":"매수자 예산(50-80억)에 부합하는 매물입니다.","요청하신 성수/강남 권역에 해당합니다.","cautionReasons":"요청한 용도와 달리 명도 협의가 다소 필요합니다.","recommendedNextAction":"현장 답사 제안","kakaoMessage":"안녕하세요! 요청하신 조건에 부합하는 추천 매물이 있어 안내해 드립니다. 확인해보시고 피드백 부탁드립니다.","title":"강남 역삼역 초역세권 오피스 사옥용 빌딩 매각","shortSummary":"역삼역 도보 5분 거리의 준신축급 대형 오피스빌딩입니다.","dealPoints":"초역세권","사옥 최적","cautionPoints":"명도 조율 필요","hiddenInfoNotice":"보증금 및 지번은 인가 후 확인 가능","gateMessage":"G1 등급 등록이 필요합니다.","kakaoText":"강남 역삼역 오피스 빌딩 매각 안내입니다.","exactUnitCandidate":"101호","floor":"1층","areaSqmText":"150㎡","spaceType":"office","depositText":"5000만","monthlyRentText":"400만","maintenanceFeeText":"50만","availableFromText":"즉시입주","leaseTermMonthsText":"24","incentivesText":"렌트프리 2개월","restrictions":,"landlordIdentity":"김성수","currentTenant":"스타트업","vacancyReason":"이전 확장","rentNegotiation":"협의 가능","region":"성수동","areaSqm":150,"deposit":5000,"monthlyRent":400,"maintenanceFee":50,"availableFrom":"즉시입주","leaseTermMonths":24,"incentives":{"rentFreeMonths":2,"interiorSupport":"일부 인테리어 지원","freeRentDetail":"렌트프리 2개월 지원"},"shortSummaryLease":"성수역 도보 5분 거리 1층 리테일 상가 매물입니다."}</a:t>
             </a:r>
             <a:endParaRPr lang="en-US" sz="1400" dirty="0"/>
           </a:p>
@@ -7008,327 +6152,6 @@
       <p:sp>
         <p:nvSpPr>
           <p:cNvPr id="9" name="Shape 7"/>
-          <p:cNvSpPr/>
-          <p:nvPr/>
-        </p:nvSpPr>
-        <p:spPr>
-          <a:xfrm>
-            <a:off x="566928" y="2048256"/>
-            <a:ext cx="6858000" cy="0"/>
-          </a:xfrm>
-          <a:prstGeom prst="line">
-            <a:avLst/>
-          </a:prstGeom>
-          <a:noFill/>
-          <a:ln w="3810">
-            <a:solidFill>
-              <a:srgbClr val="CBD5E0"/>
-            </a:solidFill>
-            <a:prstDash val="solid"/>
-          </a:ln>
-        </p:spPr>
-      </p:sp>
-      <p:sp>
-        <p:nvSpPr>
-          <p:cNvPr id="10" name="Text 8"/>
-          <p:cNvSpPr/>
-          <p:nvPr/>
-        </p:nvSpPr>
-        <p:spPr>
-          <a:xfrm>
-            <a:off x="566928" y="2048256"/>
-            <a:ext cx="2606040" cy="402336"/>
-          </a:xfrm>
-          <a:prstGeom prst="rect">
-            <a:avLst/>
-          </a:prstGeom>
-          <a:noFill/>
-          <a:ln/>
-        </p:spPr>
-        <p:txBody>
-          <a:bodyPr wrap="square" lIns="0" tIns="0" rIns="0" bIns="0" rtlCol="0" anchor="ctr"/>
-          <a:lstStyle/>
-          <a:p>
-            <a:pPr indent="0" marL="0">
-              <a:lnSpc>
-                <a:spcPct val="120000"/>
-              </a:lnSpc>
-              <a:buNone/>
-            </a:pPr>
-            <a:r>
-              <a:rPr lang="en-US" sz="1400" dirty="0">
-                <a:solidFill>
-                  <a:srgbClr val="718096"/>
-                </a:solidFill>
-                <a:latin typeface="Pretendard" pitchFamily="34" charset="0"/>
-                <a:ea typeface="Pretendard" pitchFamily="34" charset="-122"/>
-                <a:cs typeface="Pretendard" pitchFamily="34" charset="-120"/>
-              </a:rPr>
-              <a:t>용도지역</a:t>
-            </a:r>
-            <a:endParaRPr lang="en-US" sz="1400" dirty="0"/>
-          </a:p>
-        </p:txBody>
-      </p:sp>
-      <p:sp>
-        <p:nvSpPr>
-          <p:cNvPr id="11" name="Text 9"/>
-          <p:cNvSpPr/>
-          <p:nvPr/>
-        </p:nvSpPr>
-        <p:spPr>
-          <a:xfrm>
-            <a:off x="3172968" y="2048256"/>
-            <a:ext cx="4251960" cy="402336"/>
-          </a:xfrm>
-          <a:prstGeom prst="rect">
-            <a:avLst/>
-          </a:prstGeom>
-          <a:noFill/>
-          <a:ln/>
-        </p:spPr>
-        <p:txBody>
-          <a:bodyPr wrap="square" lIns="0" tIns="0" rIns="0" bIns="0" rtlCol="0" anchor="ctr"/>
-          <a:lstStyle/>
-          <a:p>
-            <a:pPr indent="0" marL="0">
-              <a:lnSpc>
-                <a:spcPct val="120000"/>
-              </a:lnSpc>
-              <a:buNone/>
-            </a:pPr>
-            <a:r>
-              <a:rPr lang="en-US" sz="1400" b="1" dirty="0">
-                <a:solidFill>
-                  <a:srgbClr val="10161F"/>
-                </a:solidFill>
-                <a:latin typeface="Pretendard" pitchFamily="34" charset="0"/>
-                <a:ea typeface="Pretendard" pitchFamily="34" charset="-122"/>
-                <a:cs typeface="Pretendard" pitchFamily="34" charset="-120"/>
-              </a:rPr>
-              <a:t>일반상업지역</a:t>
-            </a:r>
-            <a:endParaRPr lang="en-US" sz="1400" dirty="0"/>
-          </a:p>
-        </p:txBody>
-      </p:sp>
-      <p:sp>
-        <p:nvSpPr>
-          <p:cNvPr id="12" name="Shape 10"/>
-          <p:cNvSpPr/>
-          <p:nvPr/>
-        </p:nvSpPr>
-        <p:spPr>
-          <a:xfrm>
-            <a:off x="566928" y="2450592"/>
-            <a:ext cx="6858000" cy="0"/>
-          </a:xfrm>
-          <a:prstGeom prst="line">
-            <a:avLst/>
-          </a:prstGeom>
-          <a:noFill/>
-          <a:ln w="3810">
-            <a:solidFill>
-              <a:srgbClr val="CBD5E0"/>
-            </a:solidFill>
-            <a:prstDash val="solid"/>
-          </a:ln>
-        </p:spPr>
-      </p:sp>
-      <p:sp>
-        <p:nvSpPr>
-          <p:cNvPr id="13" name="Text 11"/>
-          <p:cNvSpPr/>
-          <p:nvPr/>
-        </p:nvSpPr>
-        <p:spPr>
-          <a:xfrm>
-            <a:off x="566928" y="2450592"/>
-            <a:ext cx="2606040" cy="402336"/>
-          </a:xfrm>
-          <a:prstGeom prst="rect">
-            <a:avLst/>
-          </a:prstGeom>
-          <a:noFill/>
-          <a:ln/>
-        </p:spPr>
-        <p:txBody>
-          <a:bodyPr wrap="square" lIns="0" tIns="0" rIns="0" bIns="0" rtlCol="0" anchor="ctr"/>
-          <a:lstStyle/>
-          <a:p>
-            <a:pPr indent="0" marL="0">
-              <a:lnSpc>
-                <a:spcPct val="120000"/>
-              </a:lnSpc>
-              <a:buNone/>
-            </a:pPr>
-            <a:r>
-              <a:rPr lang="en-US" sz="1400" dirty="0">
-                <a:solidFill>
-                  <a:srgbClr val="718096"/>
-                </a:solidFill>
-                <a:latin typeface="Pretendard" pitchFamily="34" charset="0"/>
-                <a:ea typeface="Pretendard" pitchFamily="34" charset="-122"/>
-                <a:cs typeface="Pretendard" pitchFamily="34" charset="-120"/>
-              </a:rPr>
-              <a:t>명도 상태</a:t>
-            </a:r>
-            <a:endParaRPr lang="en-US" sz="1400" dirty="0"/>
-          </a:p>
-        </p:txBody>
-      </p:sp>
-      <p:sp>
-        <p:nvSpPr>
-          <p:cNvPr id="14" name="Text 12"/>
-          <p:cNvSpPr/>
-          <p:nvPr/>
-        </p:nvSpPr>
-        <p:spPr>
-          <a:xfrm>
-            <a:off x="3172968" y="2450592"/>
-            <a:ext cx="4251960" cy="402336"/>
-          </a:xfrm>
-          <a:prstGeom prst="rect">
-            <a:avLst/>
-          </a:prstGeom>
-          <a:noFill/>
-          <a:ln/>
-        </p:spPr>
-        <p:txBody>
-          <a:bodyPr wrap="square" lIns="0" tIns="0" rIns="0" bIns="0" rtlCol="0" anchor="ctr"/>
-          <a:lstStyle/>
-          <a:p>
-            <a:pPr indent="0" marL="0">
-              <a:lnSpc>
-                <a:spcPct val="120000"/>
-              </a:lnSpc>
-              <a:buNone/>
-            </a:pPr>
-            <a:r>
-              <a:rPr lang="en-US" sz="1400" b="1" dirty="0">
-                <a:solidFill>
-                  <a:srgbClr val="10161F"/>
-                </a:solidFill>
-                <a:latin typeface="Pretendard" pitchFamily="34" charset="0"/>
-                <a:ea typeface="Pretendard" pitchFamily="34" charset="-122"/>
-                <a:cs typeface="Pretendard" pitchFamily="34" charset="-120"/>
-              </a:rPr>
-              <a:t>기존 주요 임차 업종 현황</a:t>
-            </a:r>
-            <a:endParaRPr lang="en-US" sz="1400" dirty="0"/>
-          </a:p>
-        </p:txBody>
-      </p:sp>
-      <p:sp>
-        <p:nvSpPr>
-          <p:cNvPr id="15" name="Shape 13"/>
-          <p:cNvSpPr/>
-          <p:nvPr/>
-        </p:nvSpPr>
-        <p:spPr>
-          <a:xfrm>
-            <a:off x="566928" y="2852928"/>
-            <a:ext cx="6858000" cy="0"/>
-          </a:xfrm>
-          <a:prstGeom prst="line">
-            <a:avLst/>
-          </a:prstGeom>
-          <a:noFill/>
-          <a:ln w="3810">
-            <a:solidFill>
-              <a:srgbClr val="CBD5E0"/>
-            </a:solidFill>
-            <a:prstDash val="solid"/>
-          </a:ln>
-        </p:spPr>
-      </p:sp>
-      <p:sp>
-        <p:nvSpPr>
-          <p:cNvPr id="16" name="Text 14"/>
-          <p:cNvSpPr/>
-          <p:nvPr/>
-        </p:nvSpPr>
-        <p:spPr>
-          <a:xfrm>
-            <a:off x="566928" y="2852928"/>
-            <a:ext cx="2606040" cy="402336"/>
-          </a:xfrm>
-          <a:prstGeom prst="rect">
-            <a:avLst/>
-          </a:prstGeom>
-          <a:noFill/>
-          <a:ln/>
-        </p:spPr>
-        <p:txBody>
-          <a:bodyPr wrap="square" lIns="0" tIns="0" rIns="0" bIns="0" rtlCol="0" anchor="ctr"/>
-          <a:lstStyle/>
-          <a:p>
-            <a:pPr indent="0" marL="0">
-              <a:lnSpc>
-                <a:spcPct val="120000"/>
-              </a:lnSpc>
-              <a:buNone/>
-            </a:pPr>
-            <a:r>
-              <a:rPr lang="en-US" sz="1400" dirty="0">
-                <a:solidFill>
-                  <a:srgbClr val="718096"/>
-                </a:solidFill>
-                <a:latin typeface="Pretendard" pitchFamily="34" charset="0"/>
-                <a:ea typeface="Pretendard" pitchFamily="34" charset="-122"/>
-                <a:cs typeface="Pretendard" pitchFamily="34" charset="-120"/>
-              </a:rPr>
-              <a:t>개발 잠재력</a:t>
-            </a:r>
-            <a:endParaRPr lang="en-US" sz="1400" dirty="0"/>
-          </a:p>
-        </p:txBody>
-      </p:sp>
-      <p:sp>
-        <p:nvSpPr>
-          <p:cNvPr id="17" name="Text 15"/>
-          <p:cNvSpPr/>
-          <p:nvPr/>
-        </p:nvSpPr>
-        <p:spPr>
-          <a:xfrm>
-            <a:off x="3172968" y="2852928"/>
-            <a:ext cx="4251960" cy="402336"/>
-          </a:xfrm>
-          <a:prstGeom prst="rect">
-            <a:avLst/>
-          </a:prstGeom>
-          <a:noFill/>
-          <a:ln/>
-        </p:spPr>
-        <p:txBody>
-          <a:bodyPr wrap="square" lIns="0" tIns="0" rIns="0" bIns="0" rtlCol="0" anchor="ctr"/>
-          <a:lstStyle/>
-          <a:p>
-            <a:pPr indent="0" marL="0">
-              <a:lnSpc>
-                <a:spcPct val="120000"/>
-              </a:lnSpc>
-              <a:buNone/>
-            </a:pPr>
-            <a:r>
-              <a:rPr lang="en-US" sz="1400" b="1" dirty="0">
-                <a:solidFill>
-                  <a:srgbClr val="10161F"/>
-                </a:solidFill>
-                <a:latin typeface="Pretendard" pitchFamily="34" charset="0"/>
-                <a:ea typeface="Pretendard" pitchFamily="34" charset="-122"/>
-                <a:cs typeface="Pretendard" pitchFamily="34" charset="-120"/>
-              </a:rPr>
-              <a:t>신축 시 연면적 증대 가능</a:t>
-            </a:r>
-            <a:endParaRPr lang="en-US" sz="1400" dirty="0"/>
-          </a:p>
-        </p:txBody>
-      </p:sp>
-      <p:sp>
-        <p:nvSpPr>
-          <p:cNvPr id="18" name="Shape 16"/>
           <p:cNvSpPr/>
           <p:nvPr/>
         </p:nvSpPr>
@@ -7351,18 +6174,18 @@
       </p:sp>
       <p:sp>
         <p:nvSpPr>
-          <p:cNvPr id="19" name="Shape 17"/>
+          <p:cNvPr id="10" name="Shape 8"/>
           <p:cNvSpPr/>
           <p:nvPr/>
         </p:nvSpPr>
         <p:spPr>
           <a:xfrm>
             <a:off x="7784287" y="1645920"/>
-            <a:ext cx="3840480" cy="1645920"/>
+            <a:ext cx="3840480" cy="2103120"/>
           </a:xfrm>
           <a:prstGeom prst="roundRect">
             <a:avLst>
-              <a:gd name="adj" fmla="val 3333"/>
+              <a:gd name="adj" fmla="val 2609"/>
             </a:avLst>
           </a:prstGeom>
           <a:solidFill>
@@ -7373,14 +6196,14 @@
       </p:sp>
       <p:sp>
         <p:nvSpPr>
-          <p:cNvPr id="20" name="Shape 18"/>
+          <p:cNvPr id="11" name="Shape 9"/>
           <p:cNvSpPr/>
           <p:nvPr/>
         </p:nvSpPr>
         <p:spPr>
           <a:xfrm>
             <a:off x="7784287" y="1700784"/>
-            <a:ext cx="36576" cy="1536192"/>
+            <a:ext cx="36576" cy="1993392"/>
           </a:xfrm>
           <a:prstGeom prst="rect">
             <a:avLst/>
@@ -7393,7 +6216,7 @@
       </p:sp>
       <p:sp>
         <p:nvSpPr>
-          <p:cNvPr id="21" name="Text 19"/>
+          <p:cNvPr id="12" name="Text 10"/>
           <p:cNvSpPr/>
           <p:nvPr/>
         </p:nvSpPr>
@@ -7421,14 +6244,14 @@
       </p:sp>
       <p:sp>
         <p:nvSpPr>
-          <p:cNvPr id="22" name="Text 20"/>
+          <p:cNvPr id="13" name="Text 11"/>
           <p:cNvSpPr/>
           <p:nvPr/>
         </p:nvSpPr>
         <p:spPr>
           <a:xfrm>
             <a:off x="7967167" y="1975104"/>
-            <a:ext cx="3511296" cy="1243584"/>
+            <a:ext cx="3511296" cy="1700784"/>
           </a:xfrm>
           <a:prstGeom prst="rect">
             <a:avLst/>
@@ -7455,7 +6278,7 @@
                 <a:ea typeface="Pretendard" pitchFamily="34" charset="-122"/>
                 <a:cs typeface="Pretendard" pitchFamily="34" charset="-120"/>
               </a:rPr>
-              <a:t>본 자산은 대지면적 약 303평(약 1001.7㎡), 용도지역 일반상업지역에 위치하여 신축 및 재건축 개발 가치가 매우 높습니다.</a:t>
+              <a:t>{"ok":true,"mocked":true,"extractedFields":{"area_signal":"역삼","asset_type":"오피스빌딩","price_band":"300억","size_signal":"3</a:t>
             </a:r>
             <a:endParaRPr lang="en-US" sz="930" dirty="0"/>
           </a:p>
@@ -7463,119 +6286,7 @@
       </p:sp>
       <p:sp>
         <p:nvSpPr>
-          <p:cNvPr id="23" name="Shape 21"/>
-          <p:cNvSpPr/>
-          <p:nvPr/>
-        </p:nvSpPr>
-        <p:spPr>
-          <a:xfrm>
-            <a:off x="7784287" y="3493008"/>
-            <a:ext cx="3840480" cy="1645920"/>
-          </a:xfrm>
-          <a:prstGeom prst="roundRect">
-            <a:avLst>
-              <a:gd name="adj" fmla="val 3333"/>
-            </a:avLst>
-          </a:prstGeom>
-          <a:solidFill>
-            <a:srgbClr val="BEE3F8"/>
-          </a:solidFill>
-          <a:ln/>
-        </p:spPr>
-      </p:sp>
-      <p:sp>
-        <p:nvSpPr>
-          <p:cNvPr id="24" name="Shape 22"/>
-          <p:cNvSpPr/>
-          <p:nvPr/>
-        </p:nvSpPr>
-        <p:spPr>
-          <a:xfrm>
-            <a:off x="7784287" y="3547872"/>
-            <a:ext cx="36576" cy="1536192"/>
-          </a:xfrm>
-          <a:prstGeom prst="rect">
-            <a:avLst/>
-          </a:prstGeom>
-          <a:solidFill>
-            <a:srgbClr val="2B6CB0"/>
-          </a:solidFill>
-          <a:ln/>
-        </p:spPr>
-      </p:sp>
-      <p:sp>
-        <p:nvSpPr>
-          <p:cNvPr id="25" name="Text 23"/>
-          <p:cNvSpPr/>
-          <p:nvPr/>
-        </p:nvSpPr>
-        <p:spPr>
-          <a:xfrm>
-            <a:off x="7967167" y="3602736"/>
-            <a:ext cx="3511296" cy="201168"/>
-          </a:xfrm>
-          <a:prstGeom prst="rect">
-            <a:avLst/>
-          </a:prstGeom>
-          <a:noFill/>
-          <a:ln/>
-        </p:spPr>
-        <p:txBody>
-          <a:bodyPr wrap="square" lIns="0" tIns="0" rIns="0" bIns="0" rtlCol="0" anchor="ctr"/>
-          <a:lstStyle/>
-          <a:p>
-            <a:pPr indent="0" marL="0">
-              <a:buNone/>
-            </a:pPr>
-            <a:endParaRPr lang="en-US" sz="1050" dirty="0"/>
-          </a:p>
-        </p:txBody>
-      </p:sp>
-      <p:sp>
-        <p:nvSpPr>
-          <p:cNvPr id="26" name="Text 24"/>
-          <p:cNvSpPr/>
-          <p:nvPr/>
-        </p:nvSpPr>
-        <p:spPr>
-          <a:xfrm>
-            <a:off x="7967167" y="3822192"/>
-            <a:ext cx="3511296" cy="1243584"/>
-          </a:xfrm>
-          <a:prstGeom prst="rect">
-            <a:avLst/>
-          </a:prstGeom>
-          <a:noFill/>
-          <a:ln/>
-        </p:spPr>
-        <p:txBody>
-          <a:bodyPr wrap="square" lIns="0" tIns="0" rIns="0" bIns="0" rtlCol="0" anchor="t"/>
-          <a:lstStyle/>
-          <a:p>
-            <a:pPr indent="0" marL="0">
-              <a:lnSpc>
-                <a:spcPct val="120000"/>
-              </a:lnSpc>
-              <a:buNone/>
-            </a:pPr>
-            <a:r>
-              <a:rPr lang="en-US" sz="930" dirty="0">
-                <a:solidFill>
-                  <a:srgbClr val="10161F"/>
-                </a:solidFill>
-                <a:latin typeface="Pretendard" pitchFamily="34" charset="0"/>
-                <a:ea typeface="Pretendard" pitchFamily="34" charset="-122"/>
-                <a:cs typeface="Pretendard" pitchFamily="34" charset="-120"/>
-              </a:rPr>
-              <a:t>[임대] 건축물대장 및 토지이용계획확인서 기준 | 신축 설계 검토 필요</a:t>
-            </a:r>
-            <a:endParaRPr lang="en-US" sz="930" dirty="0"/>
-          </a:p>
-        </p:txBody>
-      </p:sp>
-      <p:sp>
-        <p:nvSpPr>
-          <p:cNvPr id="27" name="Text 25"/>
+          <p:cNvPr id="14" name="Text 12"/>
           <p:cNvSpPr/>
           <p:nvPr/>
         </p:nvSpPr>
@@ -7614,7 +6325,7 @@
       </p:sp>
       <p:sp>
         <p:nvSpPr>
-          <p:cNvPr id="28" name="Text 26"/>
+          <p:cNvPr id="15" name="Text 13"/>
           <p:cNvSpPr/>
           <p:nvPr/>
         </p:nvSpPr>
@@ -9731,11 +8442,11 @@
         <p:spPr>
           <a:xfrm>
             <a:off x="566928" y="1572768"/>
-            <a:ext cx="2490140" cy="3200400"/>
+            <a:ext cx="11057839" cy="3200400"/>
           </a:xfrm>
           <a:prstGeom prst="roundRect">
             <a:avLst>
-              <a:gd name="adj" fmla="val 2203"/>
+              <a:gd name="adj" fmla="val 1714"/>
             </a:avLst>
           </a:prstGeom>
           <a:solidFill>
@@ -9817,7 +8528,7 @@
         <p:spPr>
           <a:xfrm>
             <a:off x="786384" y="2304288"/>
-            <a:ext cx="2051228" cy="365760"/>
+            <a:ext cx="10618927" cy="365760"/>
           </a:xfrm>
           <a:prstGeom prst="rect">
             <a:avLst/>
@@ -9841,7 +8552,7 @@
                 <a:ea typeface="Pretendard" pitchFamily="34" charset="-122"/>
                 <a:cs typeface="Pretendard" pitchFamily="34" charset="-120"/>
               </a:rPr>
-              <a:t>초기 관심 표명 → 담당자 연락</a:t>
+              <a:t>{"ok"</a:t>
             </a:r>
             <a:endParaRPr lang="en-US" sz="1600" dirty="0"/>
           </a:p>
@@ -9856,7 +8567,7 @@
         <p:spPr>
           <a:xfrm>
             <a:off x="786384" y="2761488"/>
-            <a:ext cx="2051228" cy="1828800"/>
+            <a:ext cx="10618927" cy="1828800"/>
           </a:xfrm>
           <a:prstGeom prst="rect">
             <a:avLst/>
@@ -9871,547 +8582,24 @@
             <a:pPr indent="0" marL="0">
               <a:buNone/>
             </a:pPr>
+            <a:r>
+              <a:rPr lang="en-US" sz="1100" dirty="0">
+                <a:solidFill>
+                  <a:srgbClr val="10161F"/>
+                </a:solidFill>
+                <a:latin typeface="Pretendard" pitchFamily="34" charset="0"/>
+                <a:ea typeface="Pretendard" pitchFamily="34" charset="-122"/>
+                <a:cs typeface="Pretendard" pitchFamily="34" charset="-120"/>
+              </a:rPr>
+              <a:t>true,"mocked":true,"extractedFields":{"area_signal":"역삼","asset_type":"오피스빌딩","price_band":"300억","size_signal":"3000평(약 9917.4㎡)"},"extractedFacts":{"region":"역삼","exactAddressCandidate":"역삼동 742-1","assetType":"오피스빌딩","priceText":"300억","sizeText":"3000평(약 9917.4㎡)","currentUse":"오피스","currentUseSignal":"근린생활시설","leaseSignal":"임대중","vacancySignal":"공실없음","tenantNames":["쿠팡","네이버"],"unitRentTexts":["301호: 1500만"],"sellerMotivationText":"자산 효율화","brokerNotes":["초역세권 매물"]},"detectedSensitiveFields":["exact_address","tenant_name"],"ambiguousFields":[],"warnings":[],"areaSignal":"역삼","assetType":"오피스빌딩","priceBand":"300억","sizeSignal":"3000평(약 9917.4㎡)","dealType":"매각","buildingName":"역삼 센트럴타워","exactAddress":"역삼동 742-1","totalFloorArea":9917.3,"buildYear":2015,"currentUseSignal":"근린생활시설","vacancySignal":"공실 없음","fitSummary":"초역세권 근생 빌딩으로 시행/사옥 매입에 최적화","cautionSummary":"주요 임차 업종 만기 조율 필요","hiddenFields":["exact_address","seller_motivation"],"confidence":{"areaSignal":"confirmed","assetType":"confirmed","priceBand":"ai_hypothesis","fitSummary":"ai_hypothesis"},"missingData":["sizeSignal"],"boundaryNote":"본 자료는 실거래 통계 기반 참고치입니다.","buyerType":"법인 사옥형","budgetRange":{"min":50,"max":80,"display":"50억~80억"},"preferredRegions":["강남","성수"],"assetTypes":["꼬마빌딩","사옥용"],"purchasePurpose":"사옥용 매입","mustHave":["초역세권","주차"],"niceToHave":["테라스","루프탑"],"riskTolerance":"medium","financingNote":"자본금 50% 준비","missingQuestions":["구체적인 입주 시기가 언제인가요?","선호하는 수익률이 있나요?"],"privacyNotes":["연락처 비공개"],"fitReasons":["매수자 예산(50-80억)에 부합하는 매물입니다.","요청하신 성수/강남 권역에 해당합니다."],"cautionReasons":["요청한 용도와 달리 명도 협의가 다소 필요합니다."],"recommendedNextAction":"현장 답사 제안","kakaoMessage":"안녕하세요! 요청하신 조건에 부합하는 추천 매물이 있어 안내해 드립니다. 확인해보시고 피드백 부탁드립니다.","title":"강남 역삼역 초역세권 오피스 사옥용 빌딩 매각","shortSummary":"역삼역 도보 5분 거리의 준신축급 대형 오피스빌딩입니다.","dealPoints":["초역세권","사옥 최적"],"cautionPoints":["명도 조율 필요"],"hiddenInfoNotice":["보증금 및 지번은 인가 후 확인 가능"],"gateMessage":"G1 등급 등록이 필요합니다.","kakaoText":"강남 역삼역 오피스 빌딩 매각 안내입니다.","exactUnitCandidate":"101호","floor":"1층","areaSqmText":"150㎡","spaceType":"office","depositText":"5000만","monthlyRentText":"400만","maintenanceFeeText":"50만","availableFromText":"즉시입주","leaseTermMonthsText":"24","incentivesText":"렌트프리 2개월","restrictions":[],"landlordIdentity":"김성수","currentTenant":"스타트업","vacancyReason":"이전 확장","rentNegotiation":"협의 가능","region":"성수동","areaSqm":150,"deposit":5000,"monthlyRent":400,"maintenanceFee":50,"availableFrom":"즉시입주","leaseTermMonths":24,"incentives":{"rentFreeMonths":2,"interiorSupport":"일부 인테리어 지원","freeRentDetail":"렌트프리 2개월 지원"},"shortSummaryLease":"성수역 도보 5분 거리 1층 리테일 상가 매물입니다."}</a:t>
+            </a:r>
             <a:endParaRPr lang="en-US" sz="1100" dirty="0"/>
           </a:p>
         </p:txBody>
       </p:sp>
       <p:sp>
         <p:nvSpPr>
-          <p:cNvPr id="11" name="Shape 9"/>
-          <p:cNvSpPr/>
-          <p:nvPr/>
-        </p:nvSpPr>
-        <p:spPr>
-          <a:xfrm>
-            <a:off x="3148508" y="3035808"/>
-            <a:ext cx="182880" cy="274320"/>
-          </a:xfrm>
-          <a:prstGeom prst="rightArrow">
-            <a:avLst/>
-          </a:prstGeom>
-          <a:solidFill>
-            <a:srgbClr val="CBD5E0"/>
-          </a:solidFill>
-          <a:ln w="6350">
-            <a:solidFill>
-              <a:srgbClr val="718096"/>
-            </a:solidFill>
-            <a:prstDash val="solid"/>
-          </a:ln>
-        </p:spPr>
-      </p:sp>
-      <p:sp>
-        <p:nvSpPr>
-          <p:cNvPr id="12" name="Shape 10"/>
-          <p:cNvSpPr/>
-          <p:nvPr/>
-        </p:nvSpPr>
-        <p:spPr>
-          <a:xfrm>
-            <a:off x="3422828" y="1572768"/>
-            <a:ext cx="2490140" cy="3200400"/>
-          </a:xfrm>
-          <a:prstGeom prst="roundRect">
-            <a:avLst>
-              <a:gd name="adj" fmla="val 2203"/>
-            </a:avLst>
-          </a:prstGeom>
-          <a:solidFill>
-            <a:srgbClr val="F7FAFC"/>
-          </a:solidFill>
-          <a:ln w="6350">
-            <a:solidFill>
-              <a:srgbClr val="CBD5E0"/>
-            </a:solidFill>
-            <a:prstDash val="solid"/>
-          </a:ln>
-        </p:spPr>
-      </p:sp>
-      <p:sp>
-        <p:nvSpPr>
-          <p:cNvPr id="13" name="Shape 11"/>
-          <p:cNvSpPr/>
-          <p:nvPr/>
-        </p:nvSpPr>
-        <p:spPr>
-          <a:xfrm>
-            <a:off x="3642284" y="1792224"/>
-            <a:ext cx="384048" cy="384048"/>
-          </a:xfrm>
-          <a:prstGeom prst="ellipse">
-            <a:avLst/>
-          </a:prstGeom>
-          <a:solidFill>
-            <a:srgbClr val="B98A2E"/>
-          </a:solidFill>
-          <a:ln/>
-        </p:spPr>
-      </p:sp>
-      <p:sp>
-        <p:nvSpPr>
-          <p:cNvPr id="14" name="Text 12"/>
-          <p:cNvSpPr/>
-          <p:nvPr/>
-        </p:nvSpPr>
-        <p:spPr>
-          <a:xfrm>
-            <a:off x="3642284" y="1792224"/>
-            <a:ext cx="384048" cy="384048"/>
-          </a:xfrm>
-          <a:prstGeom prst="rect">
-            <a:avLst/>
-          </a:prstGeom>
-          <a:noFill/>
-          <a:ln/>
-        </p:spPr>
-        <p:txBody>
-          <a:bodyPr wrap="square" lIns="0" tIns="0" rIns="0" bIns="0" rtlCol="0" anchor="ctr"/>
-          <a:lstStyle/>
-          <a:p>
-            <a:pPr algn="ctr" indent="0" marL="0">
-              <a:buNone/>
-            </a:pPr>
-            <a:r>
-              <a:rPr lang="en-US" sz="1300" b="1" dirty="0">
-                <a:solidFill>
-                  <a:srgbClr val="FFFFFF"/>
-                </a:solidFill>
-                <a:latin typeface="Arial" pitchFamily="34" charset="0"/>
-                <a:ea typeface="Arial" pitchFamily="34" charset="-122"/>
-                <a:cs typeface="Arial" pitchFamily="34" charset="-120"/>
-              </a:rPr>
-              <a:t>STEP 2</a:t>
-            </a:r>
-            <a:endParaRPr lang="en-US" sz="1300" dirty="0"/>
-          </a:p>
-        </p:txBody>
-      </p:sp>
-      <p:sp>
-        <p:nvSpPr>
-          <p:cNvPr id="15" name="Text 13"/>
-          <p:cNvSpPr/>
-          <p:nvPr/>
-        </p:nvSpPr>
-        <p:spPr>
-          <a:xfrm>
-            <a:off x="3642284" y="2304288"/>
-            <a:ext cx="2051228" cy="365760"/>
-          </a:xfrm>
-          <a:prstGeom prst="rect">
-            <a:avLst/>
-          </a:prstGeom>
-          <a:noFill/>
-          <a:ln/>
-        </p:spPr>
-        <p:txBody>
-          <a:bodyPr wrap="square" rtlCol="0" anchor="ctr"/>
-          <a:lstStyle/>
-          <a:p>
-            <a:pPr indent="0" marL="0">
-              <a:buNone/>
-            </a:pPr>
-            <a:r>
-              <a:rPr lang="en-US" sz="1600" b="1" dirty="0">
-                <a:solidFill>
-                  <a:srgbClr val="10161F"/>
-                </a:solidFill>
-                <a:latin typeface="Pretendard" pitchFamily="34" charset="0"/>
-                <a:ea typeface="Pretendard" pitchFamily="34" charset="-122"/>
-                <a:cs typeface="Pretendard" pitchFamily="34" charset="-120"/>
-              </a:rPr>
-              <a:t>NDA 체결 → 임차인 정보 및 임대차계약서 제공</a:t>
-            </a:r>
-            <a:endParaRPr lang="en-US" sz="1600" dirty="0"/>
-          </a:p>
-        </p:txBody>
-      </p:sp>
-      <p:sp>
-        <p:nvSpPr>
-          <p:cNvPr id="16" name="Text 14"/>
-          <p:cNvSpPr/>
-          <p:nvPr/>
-        </p:nvSpPr>
-        <p:spPr>
-          <a:xfrm>
-            <a:off x="3642284" y="2761488"/>
-            <a:ext cx="2051228" cy="1828800"/>
-          </a:xfrm>
-          <a:prstGeom prst="rect">
-            <a:avLst/>
-          </a:prstGeom>
-          <a:noFill/>
-          <a:ln/>
-        </p:spPr>
-        <p:txBody>
-          <a:bodyPr wrap="square" rtlCol="0" anchor="t"/>
-          <a:lstStyle/>
-          <a:p>
-            <a:pPr indent="0" marL="0">
-              <a:buNone/>
-            </a:pPr>
-            <a:endParaRPr lang="en-US" sz="1100" dirty="0"/>
-          </a:p>
-        </p:txBody>
-      </p:sp>
-      <p:sp>
-        <p:nvSpPr>
-          <p:cNvPr id="17" name="Shape 15"/>
-          <p:cNvSpPr/>
-          <p:nvPr/>
-        </p:nvSpPr>
-        <p:spPr>
-          <a:xfrm>
-            <a:off x="6004408" y="3035808"/>
-            <a:ext cx="182880" cy="274320"/>
-          </a:xfrm>
-          <a:prstGeom prst="rightArrow">
-            <a:avLst/>
-          </a:prstGeom>
-          <a:solidFill>
-            <a:srgbClr val="CBD5E0"/>
-          </a:solidFill>
-          <a:ln w="6350">
-            <a:solidFill>
-              <a:srgbClr val="718096"/>
-            </a:solidFill>
-            <a:prstDash val="solid"/>
-          </a:ln>
-        </p:spPr>
-      </p:sp>
-      <p:sp>
-        <p:nvSpPr>
-          <p:cNvPr id="18" name="Shape 16"/>
-          <p:cNvSpPr/>
-          <p:nvPr/>
-        </p:nvSpPr>
-        <p:spPr>
-          <a:xfrm>
-            <a:off x="6278728" y="1572768"/>
-            <a:ext cx="2490140" cy="3200400"/>
-          </a:xfrm>
-          <a:prstGeom prst="roundRect">
-            <a:avLst>
-              <a:gd name="adj" fmla="val 2203"/>
-            </a:avLst>
-          </a:prstGeom>
-          <a:solidFill>
-            <a:srgbClr val="F7FAFC"/>
-          </a:solidFill>
-          <a:ln w="6350">
-            <a:solidFill>
-              <a:srgbClr val="CBD5E0"/>
-            </a:solidFill>
-            <a:prstDash val="solid"/>
-          </a:ln>
-        </p:spPr>
-      </p:sp>
-      <p:sp>
-        <p:nvSpPr>
-          <p:cNvPr id="19" name="Shape 17"/>
-          <p:cNvSpPr/>
-          <p:nvPr/>
-        </p:nvSpPr>
-        <p:spPr>
-          <a:xfrm>
-            <a:off x="6498184" y="1792224"/>
-            <a:ext cx="384048" cy="384048"/>
-          </a:xfrm>
-          <a:prstGeom prst="ellipse">
-            <a:avLst/>
-          </a:prstGeom>
-          <a:solidFill>
-            <a:srgbClr val="B98A2E"/>
-          </a:solidFill>
-          <a:ln/>
-        </p:spPr>
-      </p:sp>
-      <p:sp>
-        <p:nvSpPr>
-          <p:cNvPr id="20" name="Text 18"/>
-          <p:cNvSpPr/>
-          <p:nvPr/>
-        </p:nvSpPr>
-        <p:spPr>
-          <a:xfrm>
-            <a:off x="6498184" y="1792224"/>
-            <a:ext cx="384048" cy="384048"/>
-          </a:xfrm>
-          <a:prstGeom prst="rect">
-            <a:avLst/>
-          </a:prstGeom>
-          <a:noFill/>
-          <a:ln/>
-        </p:spPr>
-        <p:txBody>
-          <a:bodyPr wrap="square" lIns="0" tIns="0" rIns="0" bIns="0" rtlCol="0" anchor="ctr"/>
-          <a:lstStyle/>
-          <a:p>
-            <a:pPr algn="ctr" indent="0" marL="0">
-              <a:buNone/>
-            </a:pPr>
-            <a:r>
-              <a:rPr lang="en-US" sz="1300" b="1" dirty="0">
-                <a:solidFill>
-                  <a:srgbClr val="FFFFFF"/>
-                </a:solidFill>
-                <a:latin typeface="Arial" pitchFamily="34" charset="0"/>
-                <a:ea typeface="Arial" pitchFamily="34" charset="-122"/>
-                <a:cs typeface="Arial" pitchFamily="34" charset="-120"/>
-              </a:rPr>
-              <a:t>STEP 3</a:t>
-            </a:r>
-            <a:endParaRPr lang="en-US" sz="1300" dirty="0"/>
-          </a:p>
-        </p:txBody>
-      </p:sp>
-      <p:sp>
-        <p:nvSpPr>
-          <p:cNvPr id="21" name="Text 19"/>
-          <p:cNvSpPr/>
-          <p:nvPr/>
-        </p:nvSpPr>
-        <p:spPr>
-          <a:xfrm>
-            <a:off x="6498184" y="2304288"/>
-            <a:ext cx="2051228" cy="365760"/>
-          </a:xfrm>
-          <a:prstGeom prst="rect">
-            <a:avLst/>
-          </a:prstGeom>
-          <a:noFill/>
-          <a:ln/>
-        </p:spPr>
-        <p:txBody>
-          <a:bodyPr wrap="square" rtlCol="0" anchor="ctr"/>
-          <a:lstStyle/>
-          <a:p>
-            <a:pPr indent="0" marL="0">
-              <a:buNone/>
-            </a:pPr>
-            <a:r>
-              <a:rPr lang="en-US" sz="1600" b="1" dirty="0">
-                <a:solidFill>
-                  <a:srgbClr val="10161F"/>
-                </a:solidFill>
-                <a:latin typeface="Pretendard" pitchFamily="34" charset="0"/>
-                <a:ea typeface="Pretendard" pitchFamily="34" charset="-122"/>
-                <a:cs typeface="Pretendard" pitchFamily="34" charset="-120"/>
-              </a:rPr>
-              <a:t>현장 실사 일정 조율 → 건물 컨디션 및 설비 직접 확인</a:t>
-            </a:r>
-            <a:endParaRPr lang="en-US" sz="1600" dirty="0"/>
-          </a:p>
-        </p:txBody>
-      </p:sp>
-      <p:sp>
-        <p:nvSpPr>
-          <p:cNvPr id="22" name="Text 20"/>
-          <p:cNvSpPr/>
-          <p:nvPr/>
-        </p:nvSpPr>
-        <p:spPr>
-          <a:xfrm>
-            <a:off x="6498184" y="2761488"/>
-            <a:ext cx="2051228" cy="1828800"/>
-          </a:xfrm>
-          <a:prstGeom prst="rect">
-            <a:avLst/>
-          </a:prstGeom>
-          <a:noFill/>
-          <a:ln/>
-        </p:spPr>
-        <p:txBody>
-          <a:bodyPr wrap="square" rtlCol="0" anchor="t"/>
-          <a:lstStyle/>
-          <a:p>
-            <a:pPr indent="0" marL="0">
-              <a:buNone/>
-            </a:pPr>
-            <a:endParaRPr lang="en-US" sz="1100" dirty="0"/>
-          </a:p>
-        </p:txBody>
-      </p:sp>
-      <p:sp>
-        <p:nvSpPr>
-          <p:cNvPr id="23" name="Shape 21"/>
-          <p:cNvSpPr/>
-          <p:nvPr/>
-        </p:nvSpPr>
-        <p:spPr>
-          <a:xfrm>
-            <a:off x="8860307" y="3035808"/>
-            <a:ext cx="182880" cy="274320"/>
-          </a:xfrm>
-          <a:prstGeom prst="rightArrow">
-            <a:avLst/>
-          </a:prstGeom>
-          <a:solidFill>
-            <a:srgbClr val="CBD5E0"/>
-          </a:solidFill>
-          <a:ln w="6350">
-            <a:solidFill>
-              <a:srgbClr val="718096"/>
-            </a:solidFill>
-            <a:prstDash val="solid"/>
-          </a:ln>
-        </p:spPr>
-      </p:sp>
-      <p:sp>
-        <p:nvSpPr>
-          <p:cNvPr id="24" name="Shape 22"/>
-          <p:cNvSpPr/>
-          <p:nvPr/>
-        </p:nvSpPr>
-        <p:spPr>
-          <a:xfrm>
-            <a:off x="9134627" y="1572768"/>
-            <a:ext cx="2490140" cy="3200400"/>
-          </a:xfrm>
-          <a:prstGeom prst="roundRect">
-            <a:avLst>
-              <a:gd name="adj" fmla="val 2203"/>
-            </a:avLst>
-          </a:prstGeom>
-          <a:solidFill>
-            <a:srgbClr val="F7FAFC"/>
-          </a:solidFill>
-          <a:ln w="6350">
-            <a:solidFill>
-              <a:srgbClr val="CBD5E0"/>
-            </a:solidFill>
-            <a:prstDash val="solid"/>
-          </a:ln>
-        </p:spPr>
-      </p:sp>
-      <p:sp>
-        <p:nvSpPr>
-          <p:cNvPr id="25" name="Shape 23"/>
-          <p:cNvSpPr/>
-          <p:nvPr/>
-        </p:nvSpPr>
-        <p:spPr>
-          <a:xfrm>
-            <a:off x="9354083" y="1792224"/>
-            <a:ext cx="384048" cy="384048"/>
-          </a:xfrm>
-          <a:prstGeom prst="ellipse">
-            <a:avLst/>
-          </a:prstGeom>
-          <a:solidFill>
-            <a:srgbClr val="B98A2E"/>
-          </a:solidFill>
-          <a:ln/>
-        </p:spPr>
-      </p:sp>
-      <p:sp>
-        <p:nvSpPr>
-          <p:cNvPr id="26" name="Text 24"/>
-          <p:cNvSpPr/>
-          <p:nvPr/>
-        </p:nvSpPr>
-        <p:spPr>
-          <a:xfrm>
-            <a:off x="9354083" y="1792224"/>
-            <a:ext cx="384048" cy="384048"/>
-          </a:xfrm>
-          <a:prstGeom prst="rect">
-            <a:avLst/>
-          </a:prstGeom>
-          <a:noFill/>
-          <a:ln/>
-        </p:spPr>
-        <p:txBody>
-          <a:bodyPr wrap="square" lIns="0" tIns="0" rIns="0" bIns="0" rtlCol="0" anchor="ctr"/>
-          <a:lstStyle/>
-          <a:p>
-            <a:pPr algn="ctr" indent="0" marL="0">
-              <a:buNone/>
-            </a:pPr>
-            <a:r>
-              <a:rPr lang="en-US" sz="1300" b="1" dirty="0">
-                <a:solidFill>
-                  <a:srgbClr val="FFFFFF"/>
-                </a:solidFill>
-                <a:latin typeface="Arial" pitchFamily="34" charset="0"/>
-                <a:ea typeface="Arial" pitchFamily="34" charset="-122"/>
-                <a:cs typeface="Arial" pitchFamily="34" charset="-120"/>
-              </a:rPr>
-              <a:t>STEP 4</a:t>
-            </a:r>
-            <a:endParaRPr lang="en-US" sz="1300" dirty="0"/>
-          </a:p>
-        </p:txBody>
-      </p:sp>
-      <p:sp>
-        <p:nvSpPr>
-          <p:cNvPr id="27" name="Text 25"/>
-          <p:cNvSpPr/>
-          <p:nvPr/>
-        </p:nvSpPr>
-        <p:spPr>
-          <a:xfrm>
-            <a:off x="9354083" y="2304288"/>
-            <a:ext cx="2051228" cy="365760"/>
-          </a:xfrm>
-          <a:prstGeom prst="rect">
-            <a:avLst/>
-          </a:prstGeom>
-          <a:noFill/>
-          <a:ln/>
-        </p:spPr>
-        <p:txBody>
-          <a:bodyPr wrap="square" rtlCol="0" anchor="ctr"/>
-          <a:lstStyle/>
-          <a:p>
-            <a:pPr indent="0" marL="0">
-              <a:buNone/>
-            </a:pPr>
-            <a:r>
-              <a:rPr lang="en-US" sz="1600" b="1" dirty="0">
-                <a:solidFill>
-                  <a:srgbClr val="10161F"/>
-                </a:solidFill>
-                <a:latin typeface="Pretendard" pitchFamily="34" charset="0"/>
-                <a:ea typeface="Pretendard" pitchFamily="34" charset="-122"/>
-                <a:cs typeface="Pretendard" pitchFamily="34" charset="-120"/>
-              </a:rPr>
-              <a:t>LOI(투자의향서) 제출 → 가격 협의 개시</a:t>
-            </a:r>
-            <a:endParaRPr lang="en-US" sz="1600" dirty="0"/>
-          </a:p>
-        </p:txBody>
-      </p:sp>
-      <p:sp>
-        <p:nvSpPr>
-          <p:cNvPr id="28" name="Text 26"/>
-          <p:cNvSpPr/>
-          <p:nvPr/>
-        </p:nvSpPr>
-        <p:spPr>
-          <a:xfrm>
-            <a:off x="9354083" y="2761488"/>
-            <a:ext cx="2051228" cy="1828800"/>
-          </a:xfrm>
-          <a:prstGeom prst="rect">
-            <a:avLst/>
-          </a:prstGeom>
-          <a:noFill/>
-          <a:ln/>
-        </p:spPr>
-        <p:txBody>
-          <a:bodyPr wrap="square" rtlCol="0" anchor="t"/>
-          <a:lstStyle/>
-          <a:p>
-            <a:pPr indent="0" marL="0">
-              <a:buNone/>
-            </a:pPr>
-            <a:endParaRPr lang="en-US" sz="1100" dirty="0"/>
-          </a:p>
-        </p:txBody>
-      </p:sp>
-      <p:sp>
-        <p:nvSpPr>
-          <p:cNvPr id="29" name="Text 27"/>
+          <p:cNvPr id="11" name="Text 9"/>
           <p:cNvSpPr/>
           <p:nvPr/>
         </p:nvSpPr>
@@ -10450,7 +8638,7 @@
       </p:sp>
       <p:sp>
         <p:nvSpPr>
-          <p:cNvPr id="30" name="Text 28"/>
+          <p:cNvPr id="12" name="Text 10"/>
           <p:cNvSpPr/>
           <p:nvPr/>
         </p:nvSpPr>

--- a/docs/test/stress/e2e-outputs/development_case12_yeoksam_dev_basic.pptx
+++ b/docs/test/stress/e2e-outputs/development_case12_yeoksam_dev_basic.pptx
@@ -4332,7 +4332,7 @@
                 <a:ea typeface="Arial" pitchFamily="34" charset="-122"/>
                 <a:cs typeface="Arial" pitchFamily="34" charset="-120"/>
               </a:rPr>
-              <a:t>233.3%</a:t>
+              <a:t>215.3%</a:t>
             </a:r>
             <a:endParaRPr lang="en-US" sz="2000" dirty="0"/>
           </a:p>
@@ -5596,7 +5596,7 @@
                 <a:ea typeface="Pretendard" pitchFamily="34" charset="-122"/>
                 <a:cs typeface="Pretendard" pitchFamily="34" charset="-120"/>
               </a:rPr>
-              <a:t>{"ok"</a:t>
+              <a:t>소재지</a:t>
             </a:r>
             <a:endParaRPr lang="en-US" sz="1400" dirty="0"/>
           </a:p>
@@ -5638,7 +5638,7 @@
                 <a:ea typeface="Pretendard" pitchFamily="34" charset="-122"/>
                 <a:cs typeface="Pretendard" pitchFamily="34" charset="-120"/>
               </a:rPr>
-              <a:t>true,"mocked":true,"extractedFields":{"area_signal":"역삼","asset_type":"오피스빌딩","price_band":"300억","size_signal":"3000평(약 9917.4㎡)"},"extractedFacts":{"region":"역삼","exactAddressCandidate":"역삼동 742-1","assetType":"오피스빌딩","priceText":"300억","sizeText":"3000평(약 9917.4㎡)","currentUse":"오피스","currentUseSignal":"근린생활시설","leaseSignal":"임대중","vacancySignal":"공실없음","tenantNames":"쿠팡","네이버","unitRentTexts":"301호: 1500만","sellerMotivationText":"자산 효율화","brokerNotes":"초역세권 매물"},"detectedSensitiveFields":"exact_address","tenant_name","ambiguousFields":,"warnings":,"areaSignal":"역삼","assetType":"오피스빌딩","priceBand":"300억","sizeSignal":"3000평(약 9917.4㎡)","dealType":"매각","buildingName":"역삼 센트럴타워","exactAddress":"역삼동 742-1","totalFloorArea":9917.3,"buildYear":2015,"currentUseSignal":"근린생활시설","vacancySignal":"공실 없음","fitSummary":"초역세권 근생 빌딩으로 시행/사옥 매입에 최적화","cautionSummary":"주요 임차 업종 만기 조율 필요","hiddenFields":"exact_address","seller_motivation","confidence":{"areaSignal":"confirmed","assetType":"confirmed","priceBand":"ai_hypothesis","fitSummary":"ai_hypothesis"},"missingData":"sizeSignal","boundaryNote":"본 자료는 실거래 통계 기반 참고치입니다.","buyerType":"법인 사옥형","budgetRange":{"min":50,"max":80,"display":"50억~80억"},"preferredRegions":"강남","성수","assetTypes":"꼬마빌딩","사옥용","purchasePurpose":"사옥용 매입","mustHave":"초역세권","주차","niceToHave":"테라스","루프탑","riskTolerance":"medium","financingNote":"자본금 50% 준비","missingQuestions":"구체적인 입주 시기가 언제인가요?","선호하는 수익률이 있나요?","privacyNotes":"연락처 비공개","fitReasons":"매수자 예산(50-80억)에 부합하는 매물입니다.","요청하신 성수/강남 권역에 해당합니다.","cautionReasons":"요청한 용도와 달리 명도 협의가 다소 필요합니다.","recommendedNextAction":"현장 답사 제안","kakaoMessage":"안녕하세요! 요청하신 조건에 부합하는 추천 매물이 있어 안내해 드립니다. 확인해보시고 피드백 부탁드립니다.","title":"강남 역삼역 초역세권 오피스 사옥용 빌딩 매각","shortSummary":"역삼역 도보 5분 거리의 준신축급 대형 오피스빌딩입니다.","dealPoints":"초역세권","사옥 최적","cautionPoints":"명도 조율 필요","hiddenInfoNotice":"보증금 및 지번은 인가 후 확인 가능","gateMessage":"G1 등급 등록이 필요합니다.","kakaoText":"강남 역삼역 오피스 빌딩 매각 안내입니다.","exactUnitCandidate":"101호","floor":"1층","areaSqmText":"150㎡","spaceType":"office","depositText":"5000만","monthlyRentText":"400만","maintenanceFeeText":"50만","availableFromText":"즉시입주","leaseTermMonthsText":"24","incentivesText":"렌트프리 2개월","restrictions":,"landlordIdentity":"김성수","currentTenant":"스타트업","vacancyReason":"이전 확장","rentNegotiation":"협의 가능","region":"성수동","areaSqm":150,"deposit":5000,"monthlyRent":400,"maintenanceFee":50,"availableFrom":"즉시입주","leaseTermMonths":24,"incentives":{"rentFreeMonths":2,"interiorSupport":"일부 인테리어 지원","freeRentDetail":"렌트프리 2개월 지원"},"shortSummaryLease":"성수역 도보 5분 거리 1층 리테일 상가 매물입니다."}</a:t>
+              <a:t>강남권역</a:t>
             </a:r>
             <a:endParaRPr lang="en-US" sz="1400" dirty="0"/>
           </a:p>
@@ -5647,6 +5647,862 @@
       <p:sp>
         <p:nvSpPr>
           <p:cNvPr id="9" name="Shape 7"/>
+          <p:cNvSpPr/>
+          <p:nvPr/>
+        </p:nvSpPr>
+        <p:spPr>
+          <a:xfrm>
+            <a:off x="566928" y="2048256"/>
+            <a:ext cx="6858000" cy="0"/>
+          </a:xfrm>
+          <a:prstGeom prst="line">
+            <a:avLst/>
+          </a:prstGeom>
+          <a:noFill/>
+          <a:ln w="3810">
+            <a:solidFill>
+              <a:srgbClr val="CBD5E0"/>
+            </a:solidFill>
+            <a:prstDash val="solid"/>
+          </a:ln>
+        </p:spPr>
+      </p:sp>
+      <p:sp>
+        <p:nvSpPr>
+          <p:cNvPr id="10" name="Text 8"/>
+          <p:cNvSpPr/>
+          <p:nvPr/>
+        </p:nvSpPr>
+        <p:spPr>
+          <a:xfrm>
+            <a:off x="566928" y="2048256"/>
+            <a:ext cx="2606040" cy="402336"/>
+          </a:xfrm>
+          <a:prstGeom prst="rect">
+            <a:avLst/>
+          </a:prstGeom>
+          <a:noFill/>
+          <a:ln/>
+        </p:spPr>
+        <p:txBody>
+          <a:bodyPr wrap="square" lIns="0" tIns="0" rIns="0" bIns="0" rtlCol="0" anchor="ctr"/>
+          <a:lstStyle/>
+          <a:p>
+            <a:pPr indent="0" marL="0">
+              <a:lnSpc>
+                <a:spcPct val="120000"/>
+              </a:lnSpc>
+              <a:buNone/>
+            </a:pPr>
+            <a:r>
+              <a:rPr lang="en-US" sz="1400" dirty="0">
+                <a:solidFill>
+                  <a:srgbClr val="718096"/>
+                </a:solidFill>
+                <a:latin typeface="Pretendard" pitchFamily="34" charset="0"/>
+                <a:ea typeface="Pretendard" pitchFamily="34" charset="-122"/>
+                <a:cs typeface="Pretendard" pitchFamily="34" charset="-120"/>
+              </a:rPr>
+              <a:t>주요 용도</a:t>
+            </a:r>
+            <a:endParaRPr lang="en-US" sz="1400" dirty="0"/>
+          </a:p>
+        </p:txBody>
+      </p:sp>
+      <p:sp>
+        <p:nvSpPr>
+          <p:cNvPr id="11" name="Text 9"/>
+          <p:cNvSpPr/>
+          <p:nvPr/>
+        </p:nvSpPr>
+        <p:spPr>
+          <a:xfrm>
+            <a:off x="3172968" y="2048256"/>
+            <a:ext cx="4251960" cy="402336"/>
+          </a:xfrm>
+          <a:prstGeom prst="rect">
+            <a:avLst/>
+          </a:prstGeom>
+          <a:noFill/>
+          <a:ln/>
+        </p:spPr>
+        <p:txBody>
+          <a:bodyPr wrap="square" lIns="0" tIns="0" rIns="0" bIns="0" rtlCol="0" anchor="ctr"/>
+          <a:lstStyle/>
+          <a:p>
+            <a:pPr indent="0" marL="0">
+              <a:lnSpc>
+                <a:spcPct val="120000"/>
+              </a:lnSpc>
+              <a:buNone/>
+            </a:pPr>
+            <a:r>
+              <a:rPr lang="en-US" sz="1400" b="1" dirty="0">
+                <a:solidFill>
+                  <a:srgbClr val="10161F"/>
+                </a:solidFill>
+                <a:latin typeface="Pretendard" pitchFamily="34" charset="0"/>
+                <a:ea typeface="Pretendard" pitchFamily="34" charset="-122"/>
+                <a:cs typeface="Pretendard" pitchFamily="34" charset="-120"/>
+              </a:rPr>
+              <a:t>근린생활시설</a:t>
+            </a:r>
+            <a:endParaRPr lang="en-US" sz="1400" dirty="0"/>
+          </a:p>
+        </p:txBody>
+      </p:sp>
+      <p:sp>
+        <p:nvSpPr>
+          <p:cNvPr id="12" name="Shape 10"/>
+          <p:cNvSpPr/>
+          <p:nvPr/>
+        </p:nvSpPr>
+        <p:spPr>
+          <a:xfrm>
+            <a:off x="566928" y="2450592"/>
+            <a:ext cx="6858000" cy="0"/>
+          </a:xfrm>
+          <a:prstGeom prst="line">
+            <a:avLst/>
+          </a:prstGeom>
+          <a:noFill/>
+          <a:ln w="3810">
+            <a:solidFill>
+              <a:srgbClr val="CBD5E0"/>
+            </a:solidFill>
+            <a:prstDash val="solid"/>
+          </a:ln>
+        </p:spPr>
+      </p:sp>
+      <p:sp>
+        <p:nvSpPr>
+          <p:cNvPr id="13" name="Text 11"/>
+          <p:cNvSpPr/>
+          <p:nvPr/>
+        </p:nvSpPr>
+        <p:spPr>
+          <a:xfrm>
+            <a:off x="566928" y="2450592"/>
+            <a:ext cx="2606040" cy="402336"/>
+          </a:xfrm>
+          <a:prstGeom prst="rect">
+            <a:avLst/>
+          </a:prstGeom>
+          <a:noFill/>
+          <a:ln/>
+        </p:spPr>
+        <p:txBody>
+          <a:bodyPr wrap="square" lIns="0" tIns="0" rIns="0" bIns="0" rtlCol="0" anchor="ctr"/>
+          <a:lstStyle/>
+          <a:p>
+            <a:pPr indent="0" marL="0">
+              <a:lnSpc>
+                <a:spcPct val="120000"/>
+              </a:lnSpc>
+              <a:buNone/>
+            </a:pPr>
+            <a:r>
+              <a:rPr lang="en-US" sz="1400" dirty="0">
+                <a:solidFill>
+                  <a:srgbClr val="718096"/>
+                </a:solidFill>
+                <a:latin typeface="Pretendard" pitchFamily="34" charset="0"/>
+                <a:ea typeface="Pretendard" pitchFamily="34" charset="-122"/>
+                <a:cs typeface="Pretendard" pitchFamily="34" charset="-120"/>
+              </a:rPr>
+              <a:t>연면적</a:t>
+            </a:r>
+            <a:endParaRPr lang="en-US" sz="1400" dirty="0"/>
+          </a:p>
+        </p:txBody>
+      </p:sp>
+      <p:sp>
+        <p:nvSpPr>
+          <p:cNvPr id="14" name="Text 12"/>
+          <p:cNvSpPr/>
+          <p:nvPr/>
+        </p:nvSpPr>
+        <p:spPr>
+          <a:xfrm>
+            <a:off x="3172968" y="2450592"/>
+            <a:ext cx="4251960" cy="402336"/>
+          </a:xfrm>
+          <a:prstGeom prst="rect">
+            <a:avLst/>
+          </a:prstGeom>
+          <a:noFill/>
+          <a:ln/>
+        </p:spPr>
+        <p:txBody>
+          <a:bodyPr wrap="square" lIns="0" tIns="0" rIns="0" bIns="0" rtlCol="0" anchor="ctr"/>
+          <a:lstStyle/>
+          <a:p>
+            <a:pPr indent="0" marL="0">
+              <a:lnSpc>
+                <a:spcPct val="120000"/>
+              </a:lnSpc>
+              <a:buNone/>
+            </a:pPr>
+            <a:r>
+              <a:rPr lang="en-US" sz="1400" b="1" dirty="0">
+                <a:solidFill>
+                  <a:srgbClr val="10161F"/>
+                </a:solidFill>
+                <a:latin typeface="Pretendard" pitchFamily="34" charset="0"/>
+                <a:ea typeface="Pretendard" pitchFamily="34" charset="-122"/>
+                <a:cs typeface="Pretendard" pitchFamily="34" charset="-120"/>
+              </a:rPr>
+              <a:t>5,000㎡ (약 1513평(약 5001.7㎡))</a:t>
+            </a:r>
+            <a:endParaRPr lang="en-US" sz="1400" dirty="0"/>
+          </a:p>
+        </p:txBody>
+      </p:sp>
+      <p:sp>
+        <p:nvSpPr>
+          <p:cNvPr id="15" name="Shape 13"/>
+          <p:cNvSpPr/>
+          <p:nvPr/>
+        </p:nvSpPr>
+        <p:spPr>
+          <a:xfrm>
+            <a:off x="566928" y="2852928"/>
+            <a:ext cx="6858000" cy="0"/>
+          </a:xfrm>
+          <a:prstGeom prst="line">
+            <a:avLst/>
+          </a:prstGeom>
+          <a:noFill/>
+          <a:ln w="3810">
+            <a:solidFill>
+              <a:srgbClr val="CBD5E0"/>
+            </a:solidFill>
+            <a:prstDash val="solid"/>
+          </a:ln>
+        </p:spPr>
+      </p:sp>
+      <p:sp>
+        <p:nvSpPr>
+          <p:cNvPr id="16" name="Text 14"/>
+          <p:cNvSpPr/>
+          <p:nvPr/>
+        </p:nvSpPr>
+        <p:spPr>
+          <a:xfrm>
+            <a:off x="566928" y="2852928"/>
+            <a:ext cx="2606040" cy="402336"/>
+          </a:xfrm>
+          <a:prstGeom prst="rect">
+            <a:avLst/>
+          </a:prstGeom>
+          <a:noFill/>
+          <a:ln/>
+        </p:spPr>
+        <p:txBody>
+          <a:bodyPr wrap="square" lIns="0" tIns="0" rIns="0" bIns="0" rtlCol="0" anchor="ctr"/>
+          <a:lstStyle/>
+          <a:p>
+            <a:pPr indent="0" marL="0">
+              <a:lnSpc>
+                <a:spcPct val="120000"/>
+              </a:lnSpc>
+              <a:buNone/>
+            </a:pPr>
+            <a:r>
+              <a:rPr lang="en-US" sz="1400" dirty="0">
+                <a:solidFill>
+                  <a:srgbClr val="718096"/>
+                </a:solidFill>
+                <a:latin typeface="Pretendard" pitchFamily="34" charset="0"/>
+                <a:ea typeface="Pretendard" pitchFamily="34" charset="-122"/>
+                <a:cs typeface="Pretendard" pitchFamily="34" charset="-120"/>
+              </a:rPr>
+              <a:t>대지면적</a:t>
+            </a:r>
+            <a:endParaRPr lang="en-US" sz="1400" dirty="0"/>
+          </a:p>
+        </p:txBody>
+      </p:sp>
+      <p:sp>
+        <p:nvSpPr>
+          <p:cNvPr id="17" name="Text 15"/>
+          <p:cNvSpPr/>
+          <p:nvPr/>
+        </p:nvSpPr>
+        <p:spPr>
+          <a:xfrm>
+            <a:off x="3172968" y="2852928"/>
+            <a:ext cx="4251960" cy="402336"/>
+          </a:xfrm>
+          <a:prstGeom prst="rect">
+            <a:avLst/>
+          </a:prstGeom>
+          <a:noFill/>
+          <a:ln/>
+        </p:spPr>
+        <p:txBody>
+          <a:bodyPr wrap="square" lIns="0" tIns="0" rIns="0" bIns="0" rtlCol="0" anchor="ctr"/>
+          <a:lstStyle/>
+          <a:p>
+            <a:pPr indent="0" marL="0">
+              <a:lnSpc>
+                <a:spcPct val="120000"/>
+              </a:lnSpc>
+              <a:buNone/>
+            </a:pPr>
+            <a:r>
+              <a:rPr lang="en-US" sz="1400" b="1" dirty="0">
+                <a:solidFill>
+                  <a:srgbClr val="10161F"/>
+                </a:solidFill>
+                <a:latin typeface="Pretendard" pitchFamily="34" charset="0"/>
+                <a:ea typeface="Pretendard" pitchFamily="34" charset="-122"/>
+                <a:cs typeface="Pretendard" pitchFamily="34" charset="-120"/>
+              </a:rPr>
+              <a:t>1,000㎡ (약 303평(약 1001.7㎡))</a:t>
+            </a:r>
+            <a:endParaRPr lang="en-US" sz="1400" dirty="0"/>
+          </a:p>
+        </p:txBody>
+      </p:sp>
+      <p:sp>
+        <p:nvSpPr>
+          <p:cNvPr id="18" name="Shape 16"/>
+          <p:cNvSpPr/>
+          <p:nvPr/>
+        </p:nvSpPr>
+        <p:spPr>
+          <a:xfrm>
+            <a:off x="566928" y="3255264"/>
+            <a:ext cx="6858000" cy="0"/>
+          </a:xfrm>
+          <a:prstGeom prst="line">
+            <a:avLst/>
+          </a:prstGeom>
+          <a:noFill/>
+          <a:ln w="3810">
+            <a:solidFill>
+              <a:srgbClr val="CBD5E0"/>
+            </a:solidFill>
+            <a:prstDash val="solid"/>
+          </a:ln>
+        </p:spPr>
+      </p:sp>
+      <p:sp>
+        <p:nvSpPr>
+          <p:cNvPr id="19" name="Text 17"/>
+          <p:cNvSpPr/>
+          <p:nvPr/>
+        </p:nvSpPr>
+        <p:spPr>
+          <a:xfrm>
+            <a:off x="566928" y="3255264"/>
+            <a:ext cx="2606040" cy="402336"/>
+          </a:xfrm>
+          <a:prstGeom prst="rect">
+            <a:avLst/>
+          </a:prstGeom>
+          <a:noFill/>
+          <a:ln/>
+        </p:spPr>
+        <p:txBody>
+          <a:bodyPr wrap="square" lIns="0" tIns="0" rIns="0" bIns="0" rtlCol="0" anchor="ctr"/>
+          <a:lstStyle/>
+          <a:p>
+            <a:pPr indent="0" marL="0">
+              <a:lnSpc>
+                <a:spcPct val="120000"/>
+              </a:lnSpc>
+              <a:buNone/>
+            </a:pPr>
+            <a:r>
+              <a:rPr lang="en-US" sz="1400" dirty="0">
+                <a:solidFill>
+                  <a:srgbClr val="718096"/>
+                </a:solidFill>
+                <a:latin typeface="Pretendard" pitchFamily="34" charset="0"/>
+                <a:ea typeface="Pretendard" pitchFamily="34" charset="-122"/>
+                <a:cs typeface="Pretendard" pitchFamily="34" charset="-120"/>
+              </a:rPr>
+              <a:t>용도지역</a:t>
+            </a:r>
+            <a:endParaRPr lang="en-US" sz="1400" dirty="0"/>
+          </a:p>
+        </p:txBody>
+      </p:sp>
+      <p:sp>
+        <p:nvSpPr>
+          <p:cNvPr id="20" name="Text 18"/>
+          <p:cNvSpPr/>
+          <p:nvPr/>
+        </p:nvSpPr>
+        <p:spPr>
+          <a:xfrm>
+            <a:off x="3172968" y="3255264"/>
+            <a:ext cx="4251960" cy="402336"/>
+          </a:xfrm>
+          <a:prstGeom prst="rect">
+            <a:avLst/>
+          </a:prstGeom>
+          <a:noFill/>
+          <a:ln/>
+        </p:spPr>
+        <p:txBody>
+          <a:bodyPr wrap="square" lIns="0" tIns="0" rIns="0" bIns="0" rtlCol="0" anchor="ctr"/>
+          <a:lstStyle/>
+          <a:p>
+            <a:pPr indent="0" marL="0">
+              <a:lnSpc>
+                <a:spcPct val="120000"/>
+              </a:lnSpc>
+              <a:buNone/>
+            </a:pPr>
+            <a:r>
+              <a:rPr lang="en-US" sz="1400" b="1" dirty="0">
+                <a:solidFill>
+                  <a:srgbClr val="10161F"/>
+                </a:solidFill>
+                <a:latin typeface="Pretendard" pitchFamily="34" charset="0"/>
+                <a:ea typeface="Pretendard" pitchFamily="34" charset="-122"/>
+                <a:cs typeface="Pretendard" pitchFamily="34" charset="-120"/>
+              </a:rPr>
+              <a:t>일반상업지역</a:t>
+            </a:r>
+            <a:endParaRPr lang="en-US" sz="1400" dirty="0"/>
+          </a:p>
+        </p:txBody>
+      </p:sp>
+      <p:sp>
+        <p:nvSpPr>
+          <p:cNvPr id="21" name="Shape 19"/>
+          <p:cNvSpPr/>
+          <p:nvPr/>
+        </p:nvSpPr>
+        <p:spPr>
+          <a:xfrm>
+            <a:off x="566928" y="3657600"/>
+            <a:ext cx="6858000" cy="0"/>
+          </a:xfrm>
+          <a:prstGeom prst="line">
+            <a:avLst/>
+          </a:prstGeom>
+          <a:noFill/>
+          <a:ln w="3810">
+            <a:solidFill>
+              <a:srgbClr val="CBD5E0"/>
+            </a:solidFill>
+            <a:prstDash val="solid"/>
+          </a:ln>
+        </p:spPr>
+      </p:sp>
+      <p:sp>
+        <p:nvSpPr>
+          <p:cNvPr id="22" name="Text 20"/>
+          <p:cNvSpPr/>
+          <p:nvPr/>
+        </p:nvSpPr>
+        <p:spPr>
+          <a:xfrm>
+            <a:off x="566928" y="3657600"/>
+            <a:ext cx="2606040" cy="402336"/>
+          </a:xfrm>
+          <a:prstGeom prst="rect">
+            <a:avLst/>
+          </a:prstGeom>
+          <a:noFill/>
+          <a:ln/>
+        </p:spPr>
+        <p:txBody>
+          <a:bodyPr wrap="square" lIns="0" tIns="0" rIns="0" bIns="0" rtlCol="0" anchor="ctr"/>
+          <a:lstStyle/>
+          <a:p>
+            <a:pPr indent="0" marL="0">
+              <a:lnSpc>
+                <a:spcPct val="120000"/>
+              </a:lnSpc>
+              <a:buNone/>
+            </a:pPr>
+            <a:r>
+              <a:rPr lang="en-US" sz="1400" dirty="0">
+                <a:solidFill>
+                  <a:srgbClr val="718096"/>
+                </a:solidFill>
+                <a:latin typeface="Pretendard" pitchFamily="34" charset="0"/>
+                <a:ea typeface="Pretendard" pitchFamily="34" charset="-122"/>
+                <a:cs typeface="Pretendard" pitchFamily="34" charset="-120"/>
+              </a:rPr>
+              <a:t>승강기</a:t>
+            </a:r>
+            <a:endParaRPr lang="en-US" sz="1400" dirty="0"/>
+          </a:p>
+        </p:txBody>
+      </p:sp>
+      <p:sp>
+        <p:nvSpPr>
+          <p:cNvPr id="23" name="Text 21"/>
+          <p:cNvSpPr/>
+          <p:nvPr/>
+        </p:nvSpPr>
+        <p:spPr>
+          <a:xfrm>
+            <a:off x="3172968" y="3657600"/>
+            <a:ext cx="4251960" cy="402336"/>
+          </a:xfrm>
+          <a:prstGeom prst="rect">
+            <a:avLst/>
+          </a:prstGeom>
+          <a:noFill/>
+          <a:ln/>
+        </p:spPr>
+        <p:txBody>
+          <a:bodyPr wrap="square" lIns="0" tIns="0" rIns="0" bIns="0" rtlCol="0" anchor="ctr"/>
+          <a:lstStyle/>
+          <a:p>
+            <a:pPr indent="0" marL="0">
+              <a:lnSpc>
+                <a:spcPct val="120000"/>
+              </a:lnSpc>
+              <a:buNone/>
+            </a:pPr>
+            <a:r>
+              <a:rPr lang="en-US" sz="1400" b="1" dirty="0">
+                <a:solidFill>
+                  <a:srgbClr val="10161F"/>
+                </a:solidFill>
+                <a:latin typeface="Pretendard" pitchFamily="34" charset="0"/>
+                <a:ea typeface="Pretendard" pitchFamily="34" charset="-122"/>
+                <a:cs typeface="Pretendard" pitchFamily="34" charset="-120"/>
+              </a:rPr>
+              <a:t>1대 (15인승 침대용)</a:t>
+            </a:r>
+            <a:endParaRPr lang="en-US" sz="1400" dirty="0"/>
+          </a:p>
+        </p:txBody>
+      </p:sp>
+      <p:sp>
+        <p:nvSpPr>
+          <p:cNvPr id="24" name="Shape 22"/>
+          <p:cNvSpPr/>
+          <p:nvPr/>
+        </p:nvSpPr>
+        <p:spPr>
+          <a:xfrm>
+            <a:off x="566928" y="4059936"/>
+            <a:ext cx="6858000" cy="0"/>
+          </a:xfrm>
+          <a:prstGeom prst="line">
+            <a:avLst/>
+          </a:prstGeom>
+          <a:noFill/>
+          <a:ln w="3810">
+            <a:solidFill>
+              <a:srgbClr val="CBD5E0"/>
+            </a:solidFill>
+            <a:prstDash val="solid"/>
+          </a:ln>
+        </p:spPr>
+      </p:sp>
+      <p:sp>
+        <p:nvSpPr>
+          <p:cNvPr id="25" name="Text 23"/>
+          <p:cNvSpPr/>
+          <p:nvPr/>
+        </p:nvSpPr>
+        <p:spPr>
+          <a:xfrm>
+            <a:off x="566928" y="4059936"/>
+            <a:ext cx="2606040" cy="402336"/>
+          </a:xfrm>
+          <a:prstGeom prst="rect">
+            <a:avLst/>
+          </a:prstGeom>
+          <a:noFill/>
+          <a:ln/>
+        </p:spPr>
+        <p:txBody>
+          <a:bodyPr wrap="square" lIns="0" tIns="0" rIns="0" bIns="0" rtlCol="0" anchor="ctr"/>
+          <a:lstStyle/>
+          <a:p>
+            <a:pPr indent="0" marL="0">
+              <a:lnSpc>
+                <a:spcPct val="120000"/>
+              </a:lnSpc>
+              <a:buNone/>
+            </a:pPr>
+            <a:r>
+              <a:rPr lang="en-US" sz="1400" dirty="0">
+                <a:solidFill>
+                  <a:srgbClr val="718096"/>
+                </a:solidFill>
+                <a:latin typeface="Pretendard" pitchFamily="34" charset="0"/>
+                <a:ea typeface="Pretendard" pitchFamily="34" charset="-122"/>
+                <a:cs typeface="Pretendard" pitchFamily="34" charset="-120"/>
+              </a:rPr>
+              <a:t>주차 대수</a:t>
+            </a:r>
+            <a:endParaRPr lang="en-US" sz="1400" dirty="0"/>
+          </a:p>
+        </p:txBody>
+      </p:sp>
+      <p:sp>
+        <p:nvSpPr>
+          <p:cNvPr id="26" name="Text 24"/>
+          <p:cNvSpPr/>
+          <p:nvPr/>
+        </p:nvSpPr>
+        <p:spPr>
+          <a:xfrm>
+            <a:off x="3172968" y="4059936"/>
+            <a:ext cx="4251960" cy="402336"/>
+          </a:xfrm>
+          <a:prstGeom prst="rect">
+            <a:avLst/>
+          </a:prstGeom>
+          <a:noFill/>
+          <a:ln/>
+        </p:spPr>
+        <p:txBody>
+          <a:bodyPr wrap="square" lIns="0" tIns="0" rIns="0" bIns="0" rtlCol="0" anchor="ctr"/>
+          <a:lstStyle/>
+          <a:p>
+            <a:pPr indent="0" marL="0">
+              <a:lnSpc>
+                <a:spcPct val="120000"/>
+              </a:lnSpc>
+              <a:buNone/>
+            </a:pPr>
+            <a:r>
+              <a:rPr lang="en-US" sz="1400" b="1" dirty="0">
+                <a:solidFill>
+                  <a:srgbClr val="10161F"/>
+                </a:solidFill>
+                <a:latin typeface="Pretendard" pitchFamily="34" charset="0"/>
+                <a:ea typeface="Pretendard" pitchFamily="34" charset="-122"/>
+                <a:cs typeface="Pretendard" pitchFamily="34" charset="-120"/>
+              </a:rPr>
+              <a:t>18대 (자주식 완비)</a:t>
+            </a:r>
+            <a:endParaRPr lang="en-US" sz="1400" dirty="0"/>
+          </a:p>
+        </p:txBody>
+      </p:sp>
+      <p:sp>
+        <p:nvSpPr>
+          <p:cNvPr id="27" name="Shape 25"/>
+          <p:cNvSpPr/>
+          <p:nvPr/>
+        </p:nvSpPr>
+        <p:spPr>
+          <a:xfrm>
+            <a:off x="566928" y="4462272"/>
+            <a:ext cx="6858000" cy="0"/>
+          </a:xfrm>
+          <a:prstGeom prst="line">
+            <a:avLst/>
+          </a:prstGeom>
+          <a:noFill/>
+          <a:ln w="3810">
+            <a:solidFill>
+              <a:srgbClr val="CBD5E0"/>
+            </a:solidFill>
+            <a:prstDash val="solid"/>
+          </a:ln>
+        </p:spPr>
+      </p:sp>
+      <p:sp>
+        <p:nvSpPr>
+          <p:cNvPr id="28" name="Text 26"/>
+          <p:cNvSpPr/>
+          <p:nvPr/>
+        </p:nvSpPr>
+        <p:spPr>
+          <a:xfrm>
+            <a:off x="566928" y="4462272"/>
+            <a:ext cx="2606040" cy="402336"/>
+          </a:xfrm>
+          <a:prstGeom prst="rect">
+            <a:avLst/>
+          </a:prstGeom>
+          <a:noFill/>
+          <a:ln/>
+        </p:spPr>
+        <p:txBody>
+          <a:bodyPr wrap="square" lIns="0" tIns="0" rIns="0" bIns="0" rtlCol="0" anchor="ctr"/>
+          <a:lstStyle/>
+          <a:p>
+            <a:pPr indent="0" marL="0">
+              <a:lnSpc>
+                <a:spcPct val="120000"/>
+              </a:lnSpc>
+              <a:buNone/>
+            </a:pPr>
+            <a:r>
+              <a:rPr lang="en-US" sz="1400" dirty="0">
+                <a:solidFill>
+                  <a:srgbClr val="718096"/>
+                </a:solidFill>
+                <a:latin typeface="Pretendard" pitchFamily="34" charset="0"/>
+                <a:ea typeface="Pretendard" pitchFamily="34" charset="-122"/>
+                <a:cs typeface="Pretendard" pitchFamily="34" charset="-120"/>
+              </a:rPr>
+              <a:t>주구조</a:t>
+            </a:r>
+            <a:endParaRPr lang="en-US" sz="1400" dirty="0"/>
+          </a:p>
+        </p:txBody>
+      </p:sp>
+      <p:sp>
+        <p:nvSpPr>
+          <p:cNvPr id="29" name="Text 27"/>
+          <p:cNvSpPr/>
+          <p:nvPr/>
+        </p:nvSpPr>
+        <p:spPr>
+          <a:xfrm>
+            <a:off x="3172968" y="4462272"/>
+            <a:ext cx="4251960" cy="402336"/>
+          </a:xfrm>
+          <a:prstGeom prst="rect">
+            <a:avLst/>
+          </a:prstGeom>
+          <a:noFill/>
+          <a:ln/>
+        </p:spPr>
+        <p:txBody>
+          <a:bodyPr wrap="square" lIns="0" tIns="0" rIns="0" bIns="0" rtlCol="0" anchor="ctr"/>
+          <a:lstStyle/>
+          <a:p>
+            <a:pPr indent="0" marL="0">
+              <a:lnSpc>
+                <a:spcPct val="120000"/>
+              </a:lnSpc>
+              <a:buNone/>
+            </a:pPr>
+            <a:r>
+              <a:rPr lang="en-US" sz="1400" b="1" dirty="0">
+                <a:solidFill>
+                  <a:srgbClr val="10161F"/>
+                </a:solidFill>
+                <a:latin typeface="Pretendard" pitchFamily="34" charset="0"/>
+                <a:ea typeface="Pretendard" pitchFamily="34" charset="-122"/>
+                <a:cs typeface="Pretendard" pitchFamily="34" charset="-120"/>
+              </a:rPr>
+              <a:t>철근콘크리트구조</a:t>
+            </a:r>
+            <a:endParaRPr lang="en-US" sz="1400" dirty="0"/>
+          </a:p>
+        </p:txBody>
+      </p:sp>
+      <p:sp>
+        <p:nvSpPr>
+          <p:cNvPr id="30" name="Shape 28"/>
+          <p:cNvSpPr/>
+          <p:nvPr/>
+        </p:nvSpPr>
+        <p:spPr>
+          <a:xfrm>
+            <a:off x="566928" y="4864608"/>
+            <a:ext cx="6858000" cy="0"/>
+          </a:xfrm>
+          <a:prstGeom prst="line">
+            <a:avLst/>
+          </a:prstGeom>
+          <a:noFill/>
+          <a:ln w="3810">
+            <a:solidFill>
+              <a:srgbClr val="CBD5E0"/>
+            </a:solidFill>
+            <a:prstDash val="solid"/>
+          </a:ln>
+        </p:spPr>
+      </p:sp>
+      <p:sp>
+        <p:nvSpPr>
+          <p:cNvPr id="31" name="Text 29"/>
+          <p:cNvSpPr/>
+          <p:nvPr/>
+        </p:nvSpPr>
+        <p:spPr>
+          <a:xfrm>
+            <a:off x="566928" y="4864608"/>
+            <a:ext cx="2606040" cy="402336"/>
+          </a:xfrm>
+          <a:prstGeom prst="rect">
+            <a:avLst/>
+          </a:prstGeom>
+          <a:noFill/>
+          <a:ln/>
+        </p:spPr>
+        <p:txBody>
+          <a:bodyPr wrap="square" lIns="0" tIns="0" rIns="0" bIns="0" rtlCol="0" anchor="ctr"/>
+          <a:lstStyle/>
+          <a:p>
+            <a:pPr indent="0" marL="0">
+              <a:lnSpc>
+                <a:spcPct val="120000"/>
+              </a:lnSpc>
+              <a:buNone/>
+            </a:pPr>
+            <a:r>
+              <a:rPr lang="en-US" sz="1400" dirty="0">
+                <a:solidFill>
+                  <a:srgbClr val="718096"/>
+                </a:solidFill>
+                <a:latin typeface="Pretendard" pitchFamily="34" charset="0"/>
+                <a:ea typeface="Pretendard" pitchFamily="34" charset="-122"/>
+                <a:cs typeface="Pretendard" pitchFamily="34" charset="-120"/>
+              </a:rPr>
+              <a:t>매매 희망가</a:t>
+            </a:r>
+            <a:endParaRPr lang="en-US" sz="1400" dirty="0"/>
+          </a:p>
+        </p:txBody>
+      </p:sp>
+      <p:sp>
+        <p:nvSpPr>
+          <p:cNvPr id="32" name="Text 30"/>
+          <p:cNvSpPr/>
+          <p:nvPr/>
+        </p:nvSpPr>
+        <p:spPr>
+          <a:xfrm>
+            <a:off x="3172968" y="4864608"/>
+            <a:ext cx="4251960" cy="402336"/>
+          </a:xfrm>
+          <a:prstGeom prst="rect">
+            <a:avLst/>
+          </a:prstGeom>
+          <a:noFill/>
+          <a:ln/>
+        </p:spPr>
+        <p:txBody>
+          <a:bodyPr wrap="square" lIns="0" tIns="0" rIns="0" bIns="0" rtlCol="0" anchor="ctr"/>
+          <a:lstStyle/>
+          <a:p>
+            <a:pPr indent="0" marL="0">
+              <a:lnSpc>
+                <a:spcPct val="120000"/>
+              </a:lnSpc>
+              <a:buNone/>
+            </a:pPr>
+            <a:r>
+              <a:rPr lang="en-US" sz="1400" b="1" dirty="0">
+                <a:solidFill>
+                  <a:srgbClr val="10161F"/>
+                </a:solidFill>
+                <a:latin typeface="Pretendard" pitchFamily="34" charset="0"/>
+                <a:ea typeface="Pretendard" pitchFamily="34" charset="-122"/>
+                <a:cs typeface="Pretendard" pitchFamily="34" charset="-120"/>
+              </a:rPr>
+              <a:t>210억</a:t>
+            </a:r>
+            <a:endParaRPr lang="en-US" sz="1400" dirty="0"/>
+          </a:p>
+        </p:txBody>
+      </p:sp>
+      <p:sp>
+        <p:nvSpPr>
+          <p:cNvPr id="33" name="Shape 31"/>
           <p:cNvSpPr/>
           <p:nvPr/>
         </p:nvSpPr>
@@ -5669,49 +6525,49 @@
       </p:sp>
       <p:sp>
         <p:nvSpPr>
-          <p:cNvPr id="10" name="Shape 8"/>
+          <p:cNvPr id="34" name="Shape 32"/>
           <p:cNvSpPr/>
           <p:nvPr/>
         </p:nvSpPr>
         <p:spPr>
           <a:xfrm>
             <a:off x="7784287" y="1645920"/>
-            <a:ext cx="3840480" cy="2103120"/>
+            <a:ext cx="3840480" cy="1645920"/>
           </a:xfrm>
           <a:prstGeom prst="roundRect">
             <a:avLst>
-              <a:gd name="adj" fmla="val 2609"/>
+              <a:gd name="adj" fmla="val 3333"/>
             </a:avLst>
           </a:prstGeom>
           <a:solidFill>
-            <a:srgbClr val="F3EBDA"/>
+            <a:srgbClr val="BEE3F8"/>
           </a:solidFill>
           <a:ln/>
         </p:spPr>
       </p:sp>
       <p:sp>
         <p:nvSpPr>
-          <p:cNvPr id="11" name="Shape 9"/>
+          <p:cNvPr id="35" name="Shape 33"/>
           <p:cNvSpPr/>
           <p:nvPr/>
         </p:nvSpPr>
         <p:spPr>
           <a:xfrm>
             <a:off x="7784287" y="1700784"/>
-            <a:ext cx="36576" cy="1993392"/>
+            <a:ext cx="36576" cy="1536192"/>
           </a:xfrm>
           <a:prstGeom prst="rect">
             <a:avLst/>
           </a:prstGeom>
           <a:solidFill>
-            <a:srgbClr val="977024"/>
+            <a:srgbClr val="2B6CB0"/>
           </a:solidFill>
           <a:ln/>
         </p:spPr>
       </p:sp>
       <p:sp>
         <p:nvSpPr>
-          <p:cNvPr id="12" name="Text 10"/>
+          <p:cNvPr id="36" name="Text 34"/>
           <p:cNvSpPr/>
           <p:nvPr/>
         </p:nvSpPr>
@@ -5739,14 +6595,14 @@
       </p:sp>
       <p:sp>
         <p:nvSpPr>
-          <p:cNvPr id="13" name="Text 11"/>
+          <p:cNvPr id="37" name="Text 35"/>
           <p:cNvSpPr/>
           <p:nvPr/>
         </p:nvSpPr>
         <p:spPr>
           <a:xfrm>
             <a:off x="7967167" y="1975104"/>
-            <a:ext cx="3511296" cy="1700784"/>
+            <a:ext cx="3511296" cy="1243584"/>
           </a:xfrm>
           <a:prstGeom prst="rect">
             <a:avLst/>
@@ -5773,7 +6629,7 @@
                 <a:ea typeface="Pretendard" pitchFamily="34" charset="-122"/>
                 <a:cs typeface="Pretendard" pitchFamily="34" charset="-120"/>
               </a:rPr>
-              <a:t>{"ok":true,"mocked":true,"extractedFields":{"area_signal":"역삼","asset_type":"오피스빌딩","price_band":"300억","size_signal":"3</a:t>
+              <a:t>본 매물은 강남권역 입지의 안정적 운영 자산입니다.</a:t>
             </a:r>
             <a:endParaRPr lang="en-US" sz="930" dirty="0"/>
           </a:p>
@@ -5781,7 +6637,7 @@
       </p:sp>
       <p:sp>
         <p:nvSpPr>
-          <p:cNvPr id="14" name="Text 12"/>
+          <p:cNvPr id="38" name="Text 36"/>
           <p:cNvSpPr/>
           <p:nvPr/>
         </p:nvSpPr>
@@ -5820,7 +6676,7 @@
       </p:sp>
       <p:sp>
         <p:nvSpPr>
-          <p:cNvPr id="15" name="Text 13"/>
+          <p:cNvPr id="39" name="Text 37"/>
           <p:cNvSpPr/>
           <p:nvPr/>
         </p:nvSpPr>
@@ -6020,7 +6876,7 @@
                 <a:ea typeface="Pretendard" pitchFamily="34" charset="-122"/>
                 <a:cs typeface="Pretendard" pitchFamily="34" charset="-120"/>
               </a:rPr>
-              <a:t>개발 부지로서 대지 조건은 어떠한가</a:t>
+              <a:t>토지</a:t>
             </a:r>
             <a:endParaRPr lang="en-US" sz="2300" dirty="0"/>
           </a:p>
@@ -6059,7 +6915,7 @@
                 <a:ea typeface="Pretendard" pitchFamily="34" charset="-122"/>
                 <a:cs typeface="Pretendard" pitchFamily="34" charset="-120"/>
               </a:rPr>
-              <a:t>건축물 개요 및 물리 스펙</a:t>
+              <a:t>토지 현황</a:t>
             </a:r>
             <a:endParaRPr lang="en-US" sz="1100" dirty="0"/>
           </a:p>
@@ -6101,7 +6957,7 @@
                 <a:ea typeface="Pretendard" pitchFamily="34" charset="-122"/>
                 <a:cs typeface="Pretendard" pitchFamily="34" charset="-120"/>
               </a:rPr>
-              <a:t>{"ok"</a:t>
+              <a:t>연면적</a:t>
             </a:r>
             <a:endParaRPr lang="en-US" sz="1400" dirty="0"/>
           </a:p>
@@ -6143,7 +6999,7 @@
                 <a:ea typeface="Pretendard" pitchFamily="34" charset="-122"/>
                 <a:cs typeface="Pretendard" pitchFamily="34" charset="-120"/>
               </a:rPr>
-              <a:t>true,"mocked":true,"extractedFields":{"area_signal":"역삼","asset_type":"오피스빌딩","price_band":"300억","size_signal":"3000평(약 9917.4㎡)"},"extractedFacts":{"region":"역삼","exactAddressCandidate":"역삼동 742-1","assetType":"오피스빌딩","priceText":"300억","sizeText":"3000평(약 9917.4㎡)","currentUse":"오피스","currentUseSignal":"근린생활시설","leaseSignal":"임대중","vacancySignal":"공실없음","tenantNames":"쿠팡","네이버","unitRentTexts":"301호: 1500만","sellerMotivationText":"자산 효율화","brokerNotes":"초역세권 매물"},"detectedSensitiveFields":"exact_address","tenant_name","ambiguousFields":,"warnings":,"areaSignal":"역삼","assetType":"오피스빌딩","priceBand":"300억","sizeSignal":"3000평(약 9917.4㎡)","dealType":"매각","buildingName":"역삼 센트럴타워","exactAddress":"역삼동 742-1","totalFloorArea":9917.3,"buildYear":2015,"currentUseSignal":"근린생활시설","vacancySignal":"공실 없음","fitSummary":"초역세권 근생 빌딩으로 시행/사옥 매입에 최적화","cautionSummary":"주요 임차 업종 만기 조율 필요","hiddenFields":"exact_address","seller_motivation","confidence":{"areaSignal":"confirmed","assetType":"confirmed","priceBand":"ai_hypothesis","fitSummary":"ai_hypothesis"},"missingData":"sizeSignal","boundaryNote":"본 자료는 실거래 통계 기반 참고치입니다.","buyerType":"법인 사옥형","budgetRange":{"min":50,"max":80,"display":"50억~80억"},"preferredRegions":"강남","성수","assetTypes":"꼬마빌딩","사옥용","purchasePurpose":"사옥용 매입","mustHave":"초역세권","주차","niceToHave":"테라스","루프탑","riskTolerance":"medium","financingNote":"자본금 50% 준비","missingQuestions":"구체적인 입주 시기가 언제인가요?","선호하는 수익률이 있나요?","privacyNotes":"연락처 비공개","fitReasons":"매수자 예산(50-80억)에 부합하는 매물입니다.","요청하신 성수/강남 권역에 해당합니다.","cautionReasons":"요청한 용도와 달리 명도 협의가 다소 필요합니다.","recommendedNextAction":"현장 답사 제안","kakaoMessage":"안녕하세요! 요청하신 조건에 부합하는 추천 매물이 있어 안내해 드립니다. 확인해보시고 피드백 부탁드립니다.","title":"강남 역삼역 초역세권 오피스 사옥용 빌딩 매각","shortSummary":"역삼역 도보 5분 거리의 준신축급 대형 오피스빌딩입니다.","dealPoints":"초역세권","사옥 최적","cautionPoints":"명도 조율 필요","hiddenInfoNotice":"보증금 및 지번은 인가 후 확인 가능","gateMessage":"G1 등급 등록이 필요합니다.","kakaoText":"강남 역삼역 오피스 빌딩 매각 안내입니다.","exactUnitCandidate":"101호","floor":"1층","areaSqmText":"150㎡","spaceType":"office","depositText":"5000만","monthlyRentText":"400만","maintenanceFeeText":"50만","availableFromText":"즉시입주","leaseTermMonthsText":"24","incentivesText":"렌트프리 2개월","restrictions":,"landlordIdentity":"김성수","currentTenant":"스타트업","vacancyReason":"이전 확장","rentNegotiation":"협의 가능","region":"성수동","areaSqm":150,"deposit":5000,"monthlyRent":400,"maintenanceFee":50,"availableFrom":"즉시입주","leaseTermMonths":24,"incentives":{"rentFreeMonths":2,"interiorSupport":"일부 인테리어 지원","freeRentDetail":"렌트프리 2개월 지원"},"shortSummaryLease":"성수역 도보 5분 거리 1층 리테일 상가 매물입니다."}</a:t>
+              <a:t>5,000㎡ (약 1513평(약 5001.7㎡))</a:t>
             </a:r>
             <a:endParaRPr lang="en-US" sz="1400" dirty="0"/>
           </a:p>
@@ -6152,6 +7008,220 @@
       <p:sp>
         <p:nvSpPr>
           <p:cNvPr id="9" name="Shape 7"/>
+          <p:cNvSpPr/>
+          <p:nvPr/>
+        </p:nvSpPr>
+        <p:spPr>
+          <a:xfrm>
+            <a:off x="566928" y="2048256"/>
+            <a:ext cx="6858000" cy="0"/>
+          </a:xfrm>
+          <a:prstGeom prst="line">
+            <a:avLst/>
+          </a:prstGeom>
+          <a:noFill/>
+          <a:ln w="3810">
+            <a:solidFill>
+              <a:srgbClr val="CBD5E0"/>
+            </a:solidFill>
+            <a:prstDash val="solid"/>
+          </a:ln>
+        </p:spPr>
+      </p:sp>
+      <p:sp>
+        <p:nvSpPr>
+          <p:cNvPr id="10" name="Text 8"/>
+          <p:cNvSpPr/>
+          <p:nvPr/>
+        </p:nvSpPr>
+        <p:spPr>
+          <a:xfrm>
+            <a:off x="566928" y="2048256"/>
+            <a:ext cx="2606040" cy="402336"/>
+          </a:xfrm>
+          <a:prstGeom prst="rect">
+            <a:avLst/>
+          </a:prstGeom>
+          <a:noFill/>
+          <a:ln/>
+        </p:spPr>
+        <p:txBody>
+          <a:bodyPr wrap="square" lIns="0" tIns="0" rIns="0" bIns="0" rtlCol="0" anchor="ctr"/>
+          <a:lstStyle/>
+          <a:p>
+            <a:pPr indent="0" marL="0">
+              <a:lnSpc>
+                <a:spcPct val="120000"/>
+              </a:lnSpc>
+              <a:buNone/>
+            </a:pPr>
+            <a:r>
+              <a:rPr lang="en-US" sz="1400" dirty="0">
+                <a:solidFill>
+                  <a:srgbClr val="718096"/>
+                </a:solidFill>
+                <a:latin typeface="Pretendard" pitchFamily="34" charset="0"/>
+                <a:ea typeface="Pretendard" pitchFamily="34" charset="-122"/>
+                <a:cs typeface="Pretendard" pitchFamily="34" charset="-120"/>
+              </a:rPr>
+              <a:t>대지면적</a:t>
+            </a:r>
+            <a:endParaRPr lang="en-US" sz="1400" dirty="0"/>
+          </a:p>
+        </p:txBody>
+      </p:sp>
+      <p:sp>
+        <p:nvSpPr>
+          <p:cNvPr id="11" name="Text 9"/>
+          <p:cNvSpPr/>
+          <p:nvPr/>
+        </p:nvSpPr>
+        <p:spPr>
+          <a:xfrm>
+            <a:off x="3172968" y="2048256"/>
+            <a:ext cx="4251960" cy="402336"/>
+          </a:xfrm>
+          <a:prstGeom prst="rect">
+            <a:avLst/>
+          </a:prstGeom>
+          <a:noFill/>
+          <a:ln/>
+        </p:spPr>
+        <p:txBody>
+          <a:bodyPr wrap="square" lIns="0" tIns="0" rIns="0" bIns="0" rtlCol="0" anchor="ctr"/>
+          <a:lstStyle/>
+          <a:p>
+            <a:pPr indent="0" marL="0">
+              <a:lnSpc>
+                <a:spcPct val="120000"/>
+              </a:lnSpc>
+              <a:buNone/>
+            </a:pPr>
+            <a:r>
+              <a:rPr lang="en-US" sz="1400" b="1" dirty="0">
+                <a:solidFill>
+                  <a:srgbClr val="10161F"/>
+                </a:solidFill>
+                <a:latin typeface="Pretendard" pitchFamily="34" charset="0"/>
+                <a:ea typeface="Pretendard" pitchFamily="34" charset="-122"/>
+                <a:cs typeface="Pretendard" pitchFamily="34" charset="-120"/>
+              </a:rPr>
+              <a:t>1,000㎡ (약 303평(약 1001.7㎡))</a:t>
+            </a:r>
+            <a:endParaRPr lang="en-US" sz="1400" dirty="0"/>
+          </a:p>
+        </p:txBody>
+      </p:sp>
+      <p:sp>
+        <p:nvSpPr>
+          <p:cNvPr id="12" name="Shape 10"/>
+          <p:cNvSpPr/>
+          <p:nvPr/>
+        </p:nvSpPr>
+        <p:spPr>
+          <a:xfrm>
+            <a:off x="566928" y="2450592"/>
+            <a:ext cx="6858000" cy="0"/>
+          </a:xfrm>
+          <a:prstGeom prst="line">
+            <a:avLst/>
+          </a:prstGeom>
+          <a:noFill/>
+          <a:ln w="3810">
+            <a:solidFill>
+              <a:srgbClr val="CBD5E0"/>
+            </a:solidFill>
+            <a:prstDash val="solid"/>
+          </a:ln>
+        </p:spPr>
+      </p:sp>
+      <p:sp>
+        <p:nvSpPr>
+          <p:cNvPr id="13" name="Text 11"/>
+          <p:cNvSpPr/>
+          <p:nvPr/>
+        </p:nvSpPr>
+        <p:spPr>
+          <a:xfrm>
+            <a:off x="566928" y="2450592"/>
+            <a:ext cx="2606040" cy="402336"/>
+          </a:xfrm>
+          <a:prstGeom prst="rect">
+            <a:avLst/>
+          </a:prstGeom>
+          <a:noFill/>
+          <a:ln/>
+        </p:spPr>
+        <p:txBody>
+          <a:bodyPr wrap="square" lIns="0" tIns="0" rIns="0" bIns="0" rtlCol="0" anchor="ctr"/>
+          <a:lstStyle/>
+          <a:p>
+            <a:pPr indent="0" marL="0">
+              <a:lnSpc>
+                <a:spcPct val="120000"/>
+              </a:lnSpc>
+              <a:buNone/>
+            </a:pPr>
+            <a:r>
+              <a:rPr lang="en-US" sz="1400" dirty="0">
+                <a:solidFill>
+                  <a:srgbClr val="718096"/>
+                </a:solidFill>
+                <a:latin typeface="Pretendard" pitchFamily="34" charset="0"/>
+                <a:ea typeface="Pretendard" pitchFamily="34" charset="-122"/>
+                <a:cs typeface="Pretendard" pitchFamily="34" charset="-120"/>
+              </a:rPr>
+              <a:t>용도지역</a:t>
+            </a:r>
+            <a:endParaRPr lang="en-US" sz="1400" dirty="0"/>
+          </a:p>
+        </p:txBody>
+      </p:sp>
+      <p:sp>
+        <p:nvSpPr>
+          <p:cNvPr id="14" name="Text 12"/>
+          <p:cNvSpPr/>
+          <p:nvPr/>
+        </p:nvSpPr>
+        <p:spPr>
+          <a:xfrm>
+            <a:off x="3172968" y="2450592"/>
+            <a:ext cx="4251960" cy="402336"/>
+          </a:xfrm>
+          <a:prstGeom prst="rect">
+            <a:avLst/>
+          </a:prstGeom>
+          <a:noFill/>
+          <a:ln/>
+        </p:spPr>
+        <p:txBody>
+          <a:bodyPr wrap="square" lIns="0" tIns="0" rIns="0" bIns="0" rtlCol="0" anchor="ctr"/>
+          <a:lstStyle/>
+          <a:p>
+            <a:pPr indent="0" marL="0">
+              <a:lnSpc>
+                <a:spcPct val="120000"/>
+              </a:lnSpc>
+              <a:buNone/>
+            </a:pPr>
+            <a:r>
+              <a:rPr lang="en-US" sz="1400" b="1" dirty="0">
+                <a:solidFill>
+                  <a:srgbClr val="10161F"/>
+                </a:solidFill>
+                <a:latin typeface="Pretendard" pitchFamily="34" charset="0"/>
+                <a:ea typeface="Pretendard" pitchFamily="34" charset="-122"/>
+                <a:cs typeface="Pretendard" pitchFamily="34" charset="-120"/>
+              </a:rPr>
+              <a:t>일반상업지역</a:t>
+            </a:r>
+            <a:endParaRPr lang="en-US" sz="1400" dirty="0"/>
+          </a:p>
+        </p:txBody>
+      </p:sp>
+      <p:sp>
+        <p:nvSpPr>
+          <p:cNvPr id="15" name="Shape 13"/>
           <p:cNvSpPr/>
           <p:nvPr/>
         </p:nvSpPr>
@@ -6174,7 +7244,7 @@
       </p:sp>
       <p:sp>
         <p:nvSpPr>
-          <p:cNvPr id="10" name="Shape 8"/>
+          <p:cNvPr id="16" name="Shape 14"/>
           <p:cNvSpPr/>
           <p:nvPr/>
         </p:nvSpPr>
@@ -6189,14 +7259,14 @@
             </a:avLst>
           </a:prstGeom>
           <a:solidFill>
-            <a:srgbClr val="F3EBDA"/>
+            <a:srgbClr val="BEE3F8"/>
           </a:solidFill>
           <a:ln/>
         </p:spPr>
       </p:sp>
       <p:sp>
         <p:nvSpPr>
-          <p:cNvPr id="11" name="Shape 9"/>
+          <p:cNvPr id="17" name="Shape 15"/>
           <p:cNvSpPr/>
           <p:nvPr/>
         </p:nvSpPr>
@@ -6209,14 +7279,14 @@
             <a:avLst/>
           </a:prstGeom>
           <a:solidFill>
-            <a:srgbClr val="977024"/>
+            <a:srgbClr val="2B6CB0"/>
           </a:solidFill>
           <a:ln/>
         </p:spPr>
       </p:sp>
       <p:sp>
         <p:nvSpPr>
-          <p:cNvPr id="12" name="Text 10"/>
+          <p:cNvPr id="18" name="Text 16"/>
           <p:cNvSpPr/>
           <p:nvPr/>
         </p:nvSpPr>
@@ -6238,13 +7308,24 @@
             <a:pPr indent="0" marL="0">
               <a:buNone/>
             </a:pPr>
+            <a:r>
+              <a:rPr lang="en-US" sz="1050" b="1" dirty="0">
+                <a:solidFill>
+                  <a:srgbClr val="2B6CB0"/>
+                </a:solidFill>
+                <a:latin typeface="Pretendard" pitchFamily="34" charset="0"/>
+                <a:ea typeface="Pretendard" pitchFamily="34" charset="-122"/>
+                <a:cs typeface="Pretendard" pitchFamily="34" charset="-120"/>
+              </a:rPr>
+              <a:t>토지 및 건물 분석 포인트</a:t>
+            </a:r>
             <a:endParaRPr lang="en-US" sz="1050" dirty="0"/>
           </a:p>
         </p:txBody>
       </p:sp>
       <p:sp>
         <p:nvSpPr>
-          <p:cNvPr id="13" name="Text 11"/>
+          <p:cNvPr id="19" name="Text 17"/>
           <p:cNvSpPr/>
           <p:nvPr/>
         </p:nvSpPr>
@@ -6263,11 +7344,12 @@
           <a:bodyPr wrap="square" lIns="0" tIns="0" rIns="0" bIns="0" rtlCol="0" anchor="t"/>
           <a:lstStyle/>
           <a:p>
-            <a:pPr indent="0" marL="0">
+            <a:pPr marL="342900" indent="-342900">
               <a:lnSpc>
                 <a:spcPct val="120000"/>
               </a:lnSpc>
-              <a:buNone/>
+              <a:buSzPct val="100000"/>
+              <a:buChar char="•"/>
             </a:pPr>
             <a:r>
               <a:rPr lang="en-US" sz="930" dirty="0">
@@ -6278,15 +7360,223 @@
                 <a:ea typeface="Pretendard" pitchFamily="34" charset="-122"/>
                 <a:cs typeface="Pretendard" pitchFamily="34" charset="-120"/>
               </a:rPr>
-              <a:t>{"ok":true,"mocked":true,"extractedFields":{"area_signal":"역삼","asset_type":"오피스빌딩","price_band":"300억","size_signal":"3</a:t>
+              <a:t>물건 접면 도로 및 교통 여건은 현장 확인 사항입니다</a:t>
             </a:r>
             <a:endParaRPr lang="en-US" sz="930" dirty="0"/>
           </a:p>
-        </p:txBody>
-      </p:sp>
-      <p:sp>
-        <p:nvSpPr>
-          <p:cNvPr id="14" name="Text 12"/>
+          <a:p>
+            <a:pPr marL="342900" indent="-342900">
+              <a:lnSpc>
+                <a:spcPct val="120000"/>
+              </a:lnSpc>
+              <a:buSzPct val="100000"/>
+              <a:buChar char="•"/>
+            </a:pPr>
+            <a:r>
+              <a:rPr lang="en-US" sz="930" dirty="0">
+                <a:solidFill>
+                  <a:srgbClr val="10161F"/>
+                </a:solidFill>
+                <a:latin typeface="Pretendard" pitchFamily="34" charset="0"/>
+                <a:ea typeface="Pretendard" pitchFamily="34" charset="-122"/>
+                <a:cs typeface="Pretendard" pitchFamily="34" charset="-120"/>
+              </a:rPr>
+              <a:t>상세 건물 제원은 실사 자료를 참조하시기 바랍니다</a:t>
+            </a:r>
+            <a:endParaRPr lang="en-US" sz="930" dirty="0"/>
+          </a:p>
+          <a:p>
+            <a:pPr marL="342900" indent="-342900">
+              <a:lnSpc>
+                <a:spcPct val="120000"/>
+              </a:lnSpc>
+              <a:buSzPct val="100000"/>
+              <a:buChar char="•"/>
+            </a:pPr>
+            <a:r>
+              <a:rPr lang="en-US" sz="930" dirty="0">
+                <a:solidFill>
+                  <a:srgbClr val="10161F"/>
+                </a:solidFill>
+                <a:latin typeface="Pretendard" pitchFamily="34" charset="0"/>
+                <a:ea typeface="Pretendard" pitchFamily="34" charset="-122"/>
+                <a:cs typeface="Pretendard" pitchFamily="34" charset="-120"/>
+              </a:rPr>
+              <a:t>건물 현황 및 규모는 첨부 대장을 기준으로 합니다</a:t>
+            </a:r>
+            <a:endParaRPr lang="en-US" sz="930" dirty="0"/>
+          </a:p>
+        </p:txBody>
+      </p:sp>
+      <p:sp>
+        <p:nvSpPr>
+          <p:cNvPr id="20" name="Shape 18"/>
+          <p:cNvSpPr/>
+          <p:nvPr/>
+        </p:nvSpPr>
+        <p:spPr>
+          <a:xfrm>
+            <a:off x="7784287" y="3977640"/>
+            <a:ext cx="3840480" cy="2148840"/>
+          </a:xfrm>
+          <a:prstGeom prst="roundRect">
+            <a:avLst>
+              <a:gd name="adj" fmla="val 2553"/>
+            </a:avLst>
+          </a:prstGeom>
+          <a:solidFill>
+            <a:srgbClr val="BEE3F8"/>
+          </a:solidFill>
+          <a:ln/>
+        </p:spPr>
+      </p:sp>
+      <p:sp>
+        <p:nvSpPr>
+          <p:cNvPr id="21" name="Shape 19"/>
+          <p:cNvSpPr/>
+          <p:nvPr/>
+        </p:nvSpPr>
+        <p:spPr>
+          <a:xfrm>
+            <a:off x="7784287" y="4032504"/>
+            <a:ext cx="36576" cy="2039112"/>
+          </a:xfrm>
+          <a:prstGeom prst="rect">
+            <a:avLst/>
+          </a:prstGeom>
+          <a:solidFill>
+            <a:srgbClr val="2B6CB0"/>
+          </a:solidFill>
+          <a:ln/>
+        </p:spPr>
+      </p:sp>
+      <p:sp>
+        <p:nvSpPr>
+          <p:cNvPr id="22" name="Text 20"/>
+          <p:cNvSpPr/>
+          <p:nvPr/>
+        </p:nvSpPr>
+        <p:spPr>
+          <a:xfrm>
+            <a:off x="7967167" y="4087368"/>
+            <a:ext cx="3511296" cy="201168"/>
+          </a:xfrm>
+          <a:prstGeom prst="rect">
+            <a:avLst/>
+          </a:prstGeom>
+          <a:noFill/>
+          <a:ln/>
+        </p:spPr>
+        <p:txBody>
+          <a:bodyPr wrap="square" lIns="0" tIns="0" rIns="0" bIns="0" rtlCol="0" anchor="ctr"/>
+          <a:lstStyle/>
+          <a:p>
+            <a:pPr indent="0" marL="0">
+              <a:buNone/>
+            </a:pPr>
+            <a:r>
+              <a:rPr lang="en-US" sz="1050" b="1" dirty="0">
+                <a:solidFill>
+                  <a:srgbClr val="2B6CB0"/>
+                </a:solidFill>
+                <a:latin typeface="Pretendard" pitchFamily="34" charset="0"/>
+                <a:ea typeface="Pretendard" pitchFamily="34" charset="-122"/>
+                <a:cs typeface="Pretendard" pitchFamily="34" charset="-120"/>
+              </a:rPr>
+              <a:t>물건 실사 및 관리 상태</a:t>
+            </a:r>
+            <a:endParaRPr lang="en-US" sz="1050" dirty="0"/>
+          </a:p>
+        </p:txBody>
+      </p:sp>
+      <p:sp>
+        <p:nvSpPr>
+          <p:cNvPr id="23" name="Text 21"/>
+          <p:cNvSpPr/>
+          <p:nvPr/>
+        </p:nvSpPr>
+        <p:spPr>
+          <a:xfrm>
+            <a:off x="7967167" y="4306824"/>
+            <a:ext cx="3511296" cy="1746504"/>
+          </a:xfrm>
+          <a:prstGeom prst="rect">
+            <a:avLst/>
+          </a:prstGeom>
+          <a:noFill/>
+          <a:ln/>
+        </p:spPr>
+        <p:txBody>
+          <a:bodyPr wrap="square" lIns="0" tIns="0" rIns="0" bIns="0" rtlCol="0" anchor="t"/>
+          <a:lstStyle/>
+          <a:p>
+            <a:pPr marL="342900" indent="-342900">
+              <a:lnSpc>
+                <a:spcPct val="120000"/>
+              </a:lnSpc>
+              <a:buSzPct val="100000"/>
+              <a:buChar char="•"/>
+            </a:pPr>
+            <a:r>
+              <a:rPr lang="en-US" sz="930" dirty="0">
+                <a:solidFill>
+                  <a:srgbClr val="10161F"/>
+                </a:solidFill>
+                <a:latin typeface="Pretendard" pitchFamily="34" charset="0"/>
+                <a:ea typeface="Pretendard" pitchFamily="34" charset="-122"/>
+                <a:cs typeface="Pretendard" pitchFamily="34" charset="-120"/>
+              </a:rPr>
+              <a:t>건물 상태 및 설비 현황은 실사 보고서를 참조하십시오</a:t>
+            </a:r>
+            <a:endParaRPr lang="en-US" sz="930" dirty="0"/>
+          </a:p>
+          <a:p>
+            <a:pPr marL="342900" indent="-342900">
+              <a:lnSpc>
+                <a:spcPct val="120000"/>
+              </a:lnSpc>
+              <a:buSzPct val="100000"/>
+              <a:buChar char="•"/>
+            </a:pPr>
+            <a:r>
+              <a:rPr lang="en-US" sz="930" dirty="0">
+                <a:solidFill>
+                  <a:srgbClr val="10161F"/>
+                </a:solidFill>
+                <a:latin typeface="Pretendard" pitchFamily="34" charset="0"/>
+                <a:ea typeface="Pretendard" pitchFamily="34" charset="-122"/>
+                <a:cs typeface="Pretendard" pitchFamily="34" charset="-120"/>
+              </a:rPr>
+              <a:t>자금 조달 및 대출 조건은 금융 자문 후 확정됩니다</a:t>
+            </a:r>
+            <a:endParaRPr lang="en-US" sz="930" dirty="0"/>
+          </a:p>
+          <a:p>
+            <a:pPr marL="342900" indent="-342900">
+              <a:lnSpc>
+                <a:spcPct val="120000"/>
+              </a:lnSpc>
+              <a:buSzPct val="100000"/>
+              <a:buChar char="•"/>
+            </a:pPr>
+            <a:r>
+              <a:rPr lang="en-US" sz="930" dirty="0">
+                <a:solidFill>
+                  <a:srgbClr val="10161F"/>
+                </a:solidFill>
+                <a:latin typeface="Pretendard" pitchFamily="34" charset="0"/>
+                <a:ea typeface="Pretendard" pitchFamily="34" charset="-122"/>
+                <a:cs typeface="Pretendard" pitchFamily="34" charset="-120"/>
+              </a:rPr>
+              <a:t>상세 실사 단계에서 구체적인 계약 조건 및 세무 검토가 진행됩니다</a:t>
+            </a:r>
+            <a:endParaRPr lang="en-US" sz="930" dirty="0"/>
+          </a:p>
+        </p:txBody>
+      </p:sp>
+      <p:sp>
+        <p:nvSpPr>
+          <p:cNvPr id="24" name="Text 22"/>
           <p:cNvSpPr/>
           <p:nvPr/>
         </p:nvSpPr>
@@ -6325,7 +7615,7 @@
       </p:sp>
       <p:sp>
         <p:nvSpPr>
-          <p:cNvPr id="15" name="Text 13"/>
+          <p:cNvPr id="25" name="Text 23"/>
           <p:cNvSpPr/>
           <p:nvPr/>
         </p:nvSpPr>
@@ -6533,52 +7823,13 @@
       </p:sp>
       <p:sp>
         <p:nvSpPr>
-          <p:cNvPr id="6" name="Text 4"/>
+          <p:cNvPr id="6" name="Shape 4"/>
           <p:cNvSpPr/>
           <p:nvPr/>
         </p:nvSpPr>
         <p:spPr>
           <a:xfrm>
             <a:off x="566928" y="1325880"/>
-            <a:ext cx="11057839" cy="237744"/>
-          </a:xfrm>
-          <a:prstGeom prst="rect">
-            <a:avLst/>
-          </a:prstGeom>
-          <a:noFill/>
-          <a:ln/>
-        </p:spPr>
-        <p:txBody>
-          <a:bodyPr wrap="square" lIns="0" tIns="0" rIns="0" bIns="0" rtlCol="0" anchor="ctr"/>
-          <a:lstStyle/>
-          <a:p>
-            <a:pPr indent="0" marL="0">
-              <a:buNone/>
-            </a:pPr>
-            <a:r>
-              <a:rPr lang="en-US" sz="1100" b="1" dirty="0">
-                <a:solidFill>
-                  <a:srgbClr val="10161F"/>
-                </a:solidFill>
-                <a:latin typeface="Pretendard" pitchFamily="34" charset="0"/>
-                <a:ea typeface="Pretendard" pitchFamily="34" charset="-122"/>
-                <a:cs typeface="Pretendard" pitchFamily="34" charset="-120"/>
-              </a:rPr>
-              <a:t>신축 사업수지 및 개발 타당성 분석</a:t>
-            </a:r>
-            <a:endParaRPr lang="en-US" sz="1100" dirty="0"/>
-          </a:p>
-        </p:txBody>
-      </p:sp>
-      <p:sp>
-        <p:nvSpPr>
-          <p:cNvPr id="7" name="Shape 5"/>
-          <p:cNvSpPr/>
-          <p:nvPr/>
-        </p:nvSpPr>
-        <p:spPr>
-          <a:xfrm>
-            <a:off x="566928" y="1737360"/>
             <a:ext cx="11057839" cy="0"/>
           </a:xfrm>
           <a:prstGeom prst="line">
@@ -6595,598 +7846,14 @@
       </p:sp>
       <p:sp>
         <p:nvSpPr>
-          <p:cNvPr id="8" name="Shape 6"/>
-          <p:cNvSpPr/>
-          <p:nvPr/>
-        </p:nvSpPr>
-        <p:spPr>
-          <a:xfrm>
-            <a:off x="566928" y="1965960"/>
-            <a:ext cx="3576218" cy="1188720"/>
-          </a:xfrm>
-          <a:prstGeom prst="roundRect">
-            <a:avLst>
-              <a:gd name="adj" fmla="val 4615"/>
-            </a:avLst>
-          </a:prstGeom>
-          <a:solidFill>
-            <a:srgbClr val="F7FAFC"/>
-          </a:solidFill>
-          <a:ln w="6350">
-            <a:solidFill>
-              <a:srgbClr val="CBD5E0"/>
-            </a:solidFill>
-            <a:prstDash val="solid"/>
-          </a:ln>
-        </p:spPr>
-      </p:sp>
-      <p:sp>
-        <p:nvSpPr>
-          <p:cNvPr id="9" name="Text 7"/>
-          <p:cNvSpPr/>
-          <p:nvPr/>
-        </p:nvSpPr>
-        <p:spPr>
-          <a:xfrm>
-            <a:off x="731520" y="2093976"/>
-            <a:ext cx="3247034" cy="201168"/>
-          </a:xfrm>
-          <a:prstGeom prst="rect">
-            <a:avLst/>
-          </a:prstGeom>
-          <a:noFill/>
-          <a:ln/>
-        </p:spPr>
-        <p:txBody>
-          <a:bodyPr wrap="square" lIns="0" tIns="0" rIns="0" bIns="0" rtlCol="0" anchor="ctr"/>
-          <a:lstStyle/>
-          <a:p>
-            <a:pPr indent="0" marL="0">
-              <a:buNone/>
-            </a:pPr>
-            <a:r>
-              <a:rPr lang="en-US" sz="950" dirty="0">
-                <a:solidFill>
-                  <a:srgbClr val="718096"/>
-                </a:solidFill>
-                <a:latin typeface="Pretendard" pitchFamily="34" charset="0"/>
-                <a:ea typeface="Pretendard" pitchFamily="34" charset="-122"/>
-                <a:cs typeface="Pretendard" pitchFamily="34" charset="-120"/>
-              </a:rPr>
-              <a:t>토지 매입비</a:t>
-            </a:r>
-            <a:endParaRPr lang="en-US" sz="950" dirty="0"/>
-          </a:p>
-        </p:txBody>
-      </p:sp>
-      <p:sp>
-        <p:nvSpPr>
-          <p:cNvPr id="10" name="Text 8"/>
-          <p:cNvSpPr/>
-          <p:nvPr/>
-        </p:nvSpPr>
-        <p:spPr>
-          <a:xfrm>
-            <a:off x="731520" y="2276856"/>
-            <a:ext cx="3247034" cy="402336"/>
-          </a:xfrm>
-          <a:prstGeom prst="rect">
-            <a:avLst/>
-          </a:prstGeom>
-          <a:noFill/>
-          <a:ln/>
-        </p:spPr>
-        <p:txBody>
-          <a:bodyPr wrap="square" lIns="0" tIns="0" rIns="0" bIns="0" rtlCol="0" anchor="ctr">
-            <a:normAutofit/>
-          </a:bodyPr>
-          <a:lstStyle/>
-          <a:p>
-            <a:pPr indent="0" marL="0">
-              <a:buNone/>
-            </a:pPr>
-            <a:r>
-              <a:rPr lang="en-US" sz="2200" b="1" dirty="0">
-                <a:solidFill>
-                  <a:srgbClr val="10161F"/>
-                </a:solidFill>
-                <a:latin typeface="Pretendard" pitchFamily="34" charset="0"/>
-                <a:ea typeface="Pretendard" pitchFamily="34" charset="-122"/>
-                <a:cs typeface="Pretendard" pitchFamily="34" charset="-120"/>
-              </a:rPr>
-              <a:t>희망가 기준</a:t>
-            </a:r>
-            <a:endParaRPr lang="en-US" sz="2200" dirty="0"/>
-          </a:p>
-        </p:txBody>
-      </p:sp>
-      <p:sp>
-        <p:nvSpPr>
-          <p:cNvPr id="11" name="Text 9"/>
-          <p:cNvSpPr/>
-          <p:nvPr/>
-        </p:nvSpPr>
-        <p:spPr>
-          <a:xfrm>
-            <a:off x="731520" y="2642616"/>
-            <a:ext cx="3247034" cy="164592"/>
-          </a:xfrm>
-          <a:prstGeom prst="rect">
-            <a:avLst/>
-          </a:prstGeom>
-          <a:noFill/>
-          <a:ln/>
-        </p:spPr>
-        <p:txBody>
-          <a:bodyPr wrap="square" lIns="0" tIns="0" rIns="0" bIns="0" rtlCol="0" anchor="ctr"/>
-          <a:lstStyle/>
-          <a:p>
-            <a:pPr indent="0" marL="0">
-              <a:buNone/>
-            </a:pPr>
-            <a:r>
-              <a:rPr lang="en-US" sz="880" dirty="0">
-                <a:solidFill>
-                  <a:srgbClr val="718096"/>
-                </a:solidFill>
-                <a:latin typeface="Pretendard" pitchFamily="34" charset="0"/>
-                <a:ea typeface="Pretendard" pitchFamily="34" charset="-122"/>
-                <a:cs typeface="Pretendard" pitchFamily="34" charset="-120"/>
-              </a:rPr>
-              <a:t>사업비 내 비중 산출</a:t>
-            </a:r>
-            <a:endParaRPr lang="en-US" sz="880" dirty="0"/>
-          </a:p>
-        </p:txBody>
-      </p:sp>
-      <p:sp>
-        <p:nvSpPr>
-          <p:cNvPr id="12" name="Shape 10"/>
-          <p:cNvSpPr/>
-          <p:nvPr/>
-        </p:nvSpPr>
-        <p:spPr>
-          <a:xfrm>
-            <a:off x="4307738" y="1965960"/>
-            <a:ext cx="3576218" cy="1188720"/>
-          </a:xfrm>
-          <a:prstGeom prst="roundRect">
-            <a:avLst>
-              <a:gd name="adj" fmla="val 4615"/>
-            </a:avLst>
-          </a:prstGeom>
-          <a:solidFill>
-            <a:srgbClr val="F7FAFC"/>
-          </a:solidFill>
-          <a:ln w="6350">
-            <a:solidFill>
-              <a:srgbClr val="CBD5E0"/>
-            </a:solidFill>
-            <a:prstDash val="solid"/>
-          </a:ln>
-        </p:spPr>
-      </p:sp>
-      <p:sp>
-        <p:nvSpPr>
-          <p:cNvPr id="13" name="Text 11"/>
-          <p:cNvSpPr/>
-          <p:nvPr/>
-        </p:nvSpPr>
-        <p:spPr>
-          <a:xfrm>
-            <a:off x="4472330" y="2093976"/>
-            <a:ext cx="3247034" cy="201168"/>
-          </a:xfrm>
-          <a:prstGeom prst="rect">
-            <a:avLst/>
-          </a:prstGeom>
-          <a:noFill/>
-          <a:ln/>
-        </p:spPr>
-        <p:txBody>
-          <a:bodyPr wrap="square" lIns="0" tIns="0" rIns="0" bIns="0" rtlCol="0" anchor="ctr"/>
-          <a:lstStyle/>
-          <a:p>
-            <a:pPr indent="0" marL="0">
-              <a:buNone/>
-            </a:pPr>
-            <a:r>
-              <a:rPr lang="en-US" sz="950" dirty="0">
-                <a:solidFill>
-                  <a:srgbClr val="718096"/>
-                </a:solidFill>
-                <a:latin typeface="Pretendard" pitchFamily="34" charset="0"/>
-                <a:ea typeface="Pretendard" pitchFamily="34" charset="-122"/>
-                <a:cs typeface="Pretendard" pitchFamily="34" charset="-120"/>
-              </a:rPr>
-              <a:t>추정 신축 공사비</a:t>
-            </a:r>
-            <a:endParaRPr lang="en-US" sz="950" dirty="0"/>
-          </a:p>
-        </p:txBody>
-      </p:sp>
-      <p:sp>
-        <p:nvSpPr>
-          <p:cNvPr id="14" name="Text 12"/>
-          <p:cNvSpPr/>
-          <p:nvPr/>
-        </p:nvSpPr>
-        <p:spPr>
-          <a:xfrm>
-            <a:off x="4472330" y="2276856"/>
-            <a:ext cx="3247034" cy="402336"/>
-          </a:xfrm>
-          <a:prstGeom prst="rect">
-            <a:avLst/>
-          </a:prstGeom>
-          <a:noFill/>
-          <a:ln/>
-        </p:spPr>
-        <p:txBody>
-          <a:bodyPr wrap="square" lIns="0" tIns="0" rIns="0" bIns="0" rtlCol="0" anchor="ctr">
-            <a:normAutofit/>
-          </a:bodyPr>
-          <a:lstStyle/>
-          <a:p>
-            <a:pPr indent="0" marL="0">
-              <a:buNone/>
-            </a:pPr>
-            <a:r>
-              <a:rPr lang="en-US" sz="2200" b="1" dirty="0">
-                <a:solidFill>
-                  <a:srgbClr val="10161F"/>
-                </a:solidFill>
-                <a:latin typeface="Pretendard" pitchFamily="34" charset="0"/>
-                <a:ea typeface="Pretendard" pitchFamily="34" charset="-122"/>
-                <a:cs typeface="Pretendard" pitchFamily="34" charset="-120"/>
-              </a:rPr>
-              <a:t>평당 공사비 산정</a:t>
-            </a:r>
-            <a:endParaRPr lang="en-US" sz="2200" dirty="0"/>
-          </a:p>
-        </p:txBody>
-      </p:sp>
-      <p:sp>
-        <p:nvSpPr>
-          <p:cNvPr id="15" name="Text 13"/>
-          <p:cNvSpPr/>
-          <p:nvPr/>
-        </p:nvSpPr>
-        <p:spPr>
-          <a:xfrm>
-            <a:off x="4472330" y="2642616"/>
-            <a:ext cx="3247034" cy="164592"/>
-          </a:xfrm>
-          <a:prstGeom prst="rect">
-            <a:avLst/>
-          </a:prstGeom>
-          <a:noFill/>
-          <a:ln/>
-        </p:spPr>
-        <p:txBody>
-          <a:bodyPr wrap="square" lIns="0" tIns="0" rIns="0" bIns="0" rtlCol="0" anchor="ctr"/>
-          <a:lstStyle/>
-          <a:p>
-            <a:pPr indent="0" marL="0">
-              <a:buNone/>
-            </a:pPr>
-            <a:r>
-              <a:rPr lang="en-US" sz="880" dirty="0">
-                <a:solidFill>
-                  <a:srgbClr val="718096"/>
-                </a:solidFill>
-                <a:latin typeface="Pretendard" pitchFamily="34" charset="0"/>
-                <a:ea typeface="Pretendard" pitchFamily="34" charset="-122"/>
-                <a:cs typeface="Pretendard" pitchFamily="34" charset="-120"/>
-              </a:rPr>
-              <a:t>신축 연면적 기준</a:t>
-            </a:r>
-            <a:endParaRPr lang="en-US" sz="880" dirty="0"/>
-          </a:p>
-        </p:txBody>
-      </p:sp>
-      <p:sp>
-        <p:nvSpPr>
-          <p:cNvPr id="16" name="Shape 14"/>
-          <p:cNvSpPr/>
-          <p:nvPr/>
-        </p:nvSpPr>
-        <p:spPr>
-          <a:xfrm>
-            <a:off x="8048549" y="1965960"/>
-            <a:ext cx="3576218" cy="1188720"/>
-          </a:xfrm>
-          <a:prstGeom prst="roundRect">
-            <a:avLst>
-              <a:gd name="adj" fmla="val 4615"/>
-            </a:avLst>
-          </a:prstGeom>
-          <a:solidFill>
-            <a:srgbClr val="F7FAFC"/>
-          </a:solidFill>
-          <a:ln w="6350">
-            <a:solidFill>
-              <a:srgbClr val="CBD5E0"/>
-            </a:solidFill>
-            <a:prstDash val="solid"/>
-          </a:ln>
-        </p:spPr>
-      </p:sp>
-      <p:sp>
-        <p:nvSpPr>
-          <p:cNvPr id="17" name="Text 15"/>
-          <p:cNvSpPr/>
-          <p:nvPr/>
-        </p:nvSpPr>
-        <p:spPr>
-          <a:xfrm>
-            <a:off x="8213141" y="2093976"/>
-            <a:ext cx="3247034" cy="201168"/>
-          </a:xfrm>
-          <a:prstGeom prst="rect">
-            <a:avLst/>
-          </a:prstGeom>
-          <a:noFill/>
-          <a:ln/>
-        </p:spPr>
-        <p:txBody>
-          <a:bodyPr wrap="square" lIns="0" tIns="0" rIns="0" bIns="0" rtlCol="0" anchor="ctr"/>
-          <a:lstStyle/>
-          <a:p>
-            <a:pPr indent="0" marL="0">
-              <a:buNone/>
-            </a:pPr>
-            <a:r>
-              <a:rPr lang="en-US" sz="950" dirty="0">
-                <a:solidFill>
-                  <a:srgbClr val="718096"/>
-                </a:solidFill>
-                <a:latin typeface="Pretendard" pitchFamily="34" charset="0"/>
-                <a:ea typeface="Pretendard" pitchFamily="34" charset="-122"/>
-                <a:cs typeface="Pretendard" pitchFamily="34" charset="-120"/>
-              </a:rPr>
-              <a:t>예상 총 사업비</a:t>
-            </a:r>
-            <a:endParaRPr lang="en-US" sz="950" dirty="0"/>
-          </a:p>
-        </p:txBody>
-      </p:sp>
-      <p:sp>
-        <p:nvSpPr>
-          <p:cNvPr id="18" name="Text 16"/>
-          <p:cNvSpPr/>
-          <p:nvPr/>
-        </p:nvSpPr>
-        <p:spPr>
-          <a:xfrm>
-            <a:off x="8213141" y="2276856"/>
-            <a:ext cx="3247034" cy="402336"/>
-          </a:xfrm>
-          <a:prstGeom prst="rect">
-            <a:avLst/>
-          </a:prstGeom>
-          <a:noFill/>
-          <a:ln/>
-        </p:spPr>
-        <p:txBody>
-          <a:bodyPr wrap="square" lIns="0" tIns="0" rIns="0" bIns="0" rtlCol="0" anchor="ctr">
-            <a:normAutofit/>
-          </a:bodyPr>
-          <a:lstStyle/>
-          <a:p>
-            <a:pPr indent="0" marL="0">
-              <a:buNone/>
-            </a:pPr>
-            <a:r>
-              <a:rPr lang="en-US" sz="2200" b="1" dirty="0">
-                <a:solidFill>
-                  <a:srgbClr val="10161F"/>
-                </a:solidFill>
-                <a:latin typeface="Pretendard" pitchFamily="34" charset="0"/>
-                <a:ea typeface="Pretendard" pitchFamily="34" charset="-122"/>
-                <a:cs typeface="Pretendard" pitchFamily="34" charset="-120"/>
-              </a:rPr>
-              <a:t>토지비 + 공사비 + 금융/기타</a:t>
-            </a:r>
-            <a:endParaRPr lang="en-US" sz="2200" dirty="0"/>
-          </a:p>
-        </p:txBody>
-      </p:sp>
-      <p:sp>
-        <p:nvSpPr>
-          <p:cNvPr id="19" name="Text 17"/>
-          <p:cNvSpPr/>
-          <p:nvPr/>
-        </p:nvSpPr>
-        <p:spPr>
-          <a:xfrm>
-            <a:off x="8213141" y="2642616"/>
-            <a:ext cx="3247034" cy="164592"/>
-          </a:xfrm>
-          <a:prstGeom prst="rect">
-            <a:avLst/>
-          </a:prstGeom>
-          <a:noFill/>
-          <a:ln/>
-        </p:spPr>
-        <p:txBody>
-          <a:bodyPr wrap="square" lIns="0" tIns="0" rIns="0" bIns="0" rtlCol="0" anchor="ctr"/>
-          <a:lstStyle/>
-          <a:p>
-            <a:pPr indent="0" marL="0">
-              <a:buNone/>
-            </a:pPr>
-            <a:r>
-              <a:rPr lang="en-US" sz="880" dirty="0">
-                <a:solidFill>
-                  <a:srgbClr val="718096"/>
-                </a:solidFill>
-                <a:latin typeface="Pretendard" pitchFamily="34" charset="0"/>
-                <a:ea typeface="Pretendard" pitchFamily="34" charset="-122"/>
-                <a:cs typeface="Pretendard" pitchFamily="34" charset="-120"/>
-              </a:rPr>
-              <a:t>총 투자금</a:t>
-            </a:r>
-            <a:endParaRPr lang="en-US" sz="880" dirty="0"/>
-          </a:p>
-        </p:txBody>
-      </p:sp>
-      <p:sp>
-        <p:nvSpPr>
-          <p:cNvPr id="20" name="Shape 18"/>
-          <p:cNvSpPr/>
-          <p:nvPr/>
-        </p:nvSpPr>
-        <p:spPr>
-          <a:xfrm>
-            <a:off x="566928" y="3319272"/>
-            <a:ext cx="3576218" cy="1051560"/>
-          </a:xfrm>
-          <a:prstGeom prst="roundRect">
-            <a:avLst>
-              <a:gd name="adj" fmla="val 5217"/>
-            </a:avLst>
-          </a:prstGeom>
-          <a:solidFill>
-            <a:srgbClr val="F7FAFC"/>
-          </a:solidFill>
-          <a:ln w="6350">
-            <a:solidFill>
-              <a:srgbClr val="CBD5E0"/>
-            </a:solidFill>
-            <a:prstDash val="solid"/>
-          </a:ln>
-        </p:spPr>
-      </p:sp>
-      <p:sp>
-        <p:nvSpPr>
-          <p:cNvPr id="21" name="Text 19"/>
-          <p:cNvSpPr/>
-          <p:nvPr/>
-        </p:nvSpPr>
-        <p:spPr>
-          <a:xfrm>
-            <a:off x="731520" y="3447288"/>
-            <a:ext cx="3247034" cy="201168"/>
-          </a:xfrm>
-          <a:prstGeom prst="rect">
-            <a:avLst/>
-          </a:prstGeom>
-          <a:noFill/>
-          <a:ln/>
-        </p:spPr>
-        <p:txBody>
-          <a:bodyPr wrap="square" lIns="0" tIns="0" rIns="0" bIns="0" rtlCol="0" anchor="ctr"/>
-          <a:lstStyle/>
-          <a:p>
-            <a:pPr indent="0" marL="0">
-              <a:buNone/>
-            </a:pPr>
-            <a:r>
-              <a:rPr lang="en-US" sz="950" dirty="0">
-                <a:solidFill>
-                  <a:srgbClr val="718096"/>
-                </a:solidFill>
-                <a:latin typeface="Pretendard" pitchFamily="34" charset="0"/>
-                <a:ea typeface="Pretendard" pitchFamily="34" charset="-122"/>
-                <a:cs typeface="Pretendard" pitchFamily="34" charset="-120"/>
-              </a:rPr>
-              <a:t>예상 개발 이익률</a:t>
-            </a:r>
-            <a:endParaRPr lang="en-US" sz="950" dirty="0"/>
-          </a:p>
-        </p:txBody>
-      </p:sp>
-      <p:sp>
-        <p:nvSpPr>
-          <p:cNvPr id="22" name="Text 20"/>
-          <p:cNvSpPr/>
-          <p:nvPr/>
-        </p:nvSpPr>
-        <p:spPr>
-          <a:xfrm>
-            <a:off x="731520" y="3630168"/>
-            <a:ext cx="3247034" cy="402336"/>
-          </a:xfrm>
-          <a:prstGeom prst="rect">
-            <a:avLst/>
-          </a:prstGeom>
-          <a:noFill/>
-          <a:ln/>
-        </p:spPr>
-        <p:txBody>
-          <a:bodyPr wrap="square" lIns="0" tIns="0" rIns="0" bIns="0" rtlCol="0" anchor="ctr">
-            <a:normAutofit/>
-          </a:bodyPr>
-          <a:lstStyle/>
-          <a:p>
-            <a:pPr indent="0" marL="0">
-              <a:buNone/>
-            </a:pPr>
-            <a:r>
-              <a:rPr lang="en-US" sz="1800" b="1" dirty="0">
-                <a:solidFill>
-                  <a:srgbClr val="10161F"/>
-                </a:solidFill>
-                <a:latin typeface="Pretendard" pitchFamily="34" charset="0"/>
-                <a:ea typeface="Pretendard" pitchFamily="34" charset="-122"/>
-                <a:cs typeface="Pretendard" pitchFamily="34" charset="-120"/>
-              </a:rPr>
-              <a:t>15% ~ 25% 수준</a:t>
-            </a:r>
-            <a:endParaRPr lang="en-US" sz="1800" dirty="0"/>
-          </a:p>
-        </p:txBody>
-      </p:sp>
-      <p:sp>
-        <p:nvSpPr>
-          <p:cNvPr id="23" name="Text 21"/>
-          <p:cNvSpPr/>
-          <p:nvPr/>
-        </p:nvSpPr>
-        <p:spPr>
-          <a:xfrm>
-            <a:off x="731520" y="3995928"/>
-            <a:ext cx="3247034" cy="164592"/>
-          </a:xfrm>
-          <a:prstGeom prst="rect">
-            <a:avLst/>
-          </a:prstGeom>
-          <a:noFill/>
-          <a:ln/>
-        </p:spPr>
-        <p:txBody>
-          <a:bodyPr wrap="square" lIns="0" tIns="0" rIns="0" bIns="0" rtlCol="0" anchor="ctr"/>
-          <a:lstStyle/>
-          <a:p>
-            <a:pPr indent="0" marL="0">
-              <a:buNone/>
-            </a:pPr>
-            <a:r>
-              <a:rPr lang="en-US" sz="880" dirty="0">
-                <a:solidFill>
-                  <a:srgbClr val="718096"/>
-                </a:solidFill>
-                <a:latin typeface="Pretendard" pitchFamily="34" charset="0"/>
-                <a:ea typeface="Pretendard" pitchFamily="34" charset="-122"/>
-                <a:cs typeface="Pretendard" pitchFamily="34" charset="-120"/>
-              </a:rPr>
-              <a:t>시장 상황 연동</a:t>
-            </a:r>
-            <a:endParaRPr lang="en-US" sz="880" dirty="0"/>
-          </a:p>
-        </p:txBody>
-      </p:sp>
-      <p:sp>
-        <p:nvSpPr>
-          <p:cNvPr id="24" name="Shape 22"/>
-          <p:cNvSpPr/>
-          <p:nvPr/>
-        </p:nvSpPr>
-        <p:spPr>
-          <a:xfrm>
-            <a:off x="566928" y="4626864"/>
-            <a:ext cx="5437480" cy="1280160"/>
+          <p:cNvPr id="7" name="Shape 5"/>
+          <p:cNvSpPr/>
+          <p:nvPr/>
+        </p:nvSpPr>
+        <p:spPr>
+          <a:xfrm>
+            <a:off x="566928" y="1645920"/>
+            <a:ext cx="11057839" cy="1280160"/>
           </a:xfrm>
           <a:prstGeom prst="roundRect">
             <a:avLst>
@@ -7201,13 +7868,13 @@
       </p:sp>
       <p:sp>
         <p:nvSpPr>
-          <p:cNvPr id="25" name="Shape 23"/>
-          <p:cNvSpPr/>
-          <p:nvPr/>
-        </p:nvSpPr>
-        <p:spPr>
-          <a:xfrm>
-            <a:off x="566928" y="4681728"/>
+          <p:cNvPr id="8" name="Shape 6"/>
+          <p:cNvSpPr/>
+          <p:nvPr/>
+        </p:nvSpPr>
+        <p:spPr>
+          <a:xfrm>
+            <a:off x="566928" y="1700784"/>
             <a:ext cx="36576" cy="1170432"/>
           </a:xfrm>
           <a:prstGeom prst="rect">
@@ -7221,14 +7888,14 @@
       </p:sp>
       <p:sp>
         <p:nvSpPr>
-          <p:cNvPr id="26" name="Text 24"/>
-          <p:cNvSpPr/>
-          <p:nvPr/>
-        </p:nvSpPr>
-        <p:spPr>
-          <a:xfrm>
-            <a:off x="749808" y="4736592"/>
-            <a:ext cx="5108296" cy="201168"/>
+          <p:cNvPr id="9" name="Text 7"/>
+          <p:cNvSpPr/>
+          <p:nvPr/>
+        </p:nvSpPr>
+        <p:spPr>
+          <a:xfrm>
+            <a:off x="749808" y="1755648"/>
+            <a:ext cx="10728655" cy="201168"/>
           </a:xfrm>
           <a:prstGeom prst="rect">
             <a:avLst/>
@@ -7260,14 +7927,14 @@
       </p:sp>
       <p:sp>
         <p:nvSpPr>
-          <p:cNvPr id="27" name="Text 25"/>
-          <p:cNvSpPr/>
-          <p:nvPr/>
-        </p:nvSpPr>
-        <p:spPr>
-          <a:xfrm>
-            <a:off x="749808" y="4956048"/>
-            <a:ext cx="5108296" cy="877824"/>
+          <p:cNvPr id="10" name="Text 8"/>
+          <p:cNvSpPr/>
+          <p:nvPr/>
+        </p:nvSpPr>
+        <p:spPr>
+          <a:xfrm>
+            <a:off x="749808" y="1975104"/>
+            <a:ext cx="10728655" cy="877824"/>
           </a:xfrm>
           <a:prstGeom prst="rect">
             <a:avLst/>
@@ -7294,7 +7961,7 @@
                 <a:ea typeface="Pretendard" pitchFamily="34" charset="-122"/>
                 <a:cs typeface="Pretendard" pitchFamily="34" charset="-120"/>
               </a:rPr>
-              <a:t>본 자산의 대지 매입 후 신축 개발 시 총 사업비, 예상 분양 수입 및 개발 이익률을 종합 추정합니다. [주의] 신축 공사비 및 분양가 변동에 따라 최종 수익률이 달라질 수 있습니다.</a:t>
+              <a:t>{"ok":true,"mocked":true,"extractedFields":{"area_signal":"역삼","asset_type":"오피스빌딩","price_band":"300억","size_signal":"3000평(약 9917.4㎡)"},"extractedFacts":{"region":"역삼","exactAddressCandidate":"역삼동 742-1","assetType":"오피스빌딩","priceText":"300억","sizeText":"3000평(약 9917.4㎡)","currentUse":"오피스","currentUseSignal":"근린생활시설","leaseSignal":"임대중","vacancySignal":"공실없음","tenantNames":["쿠팡","네이버"],"unitRentTexts":["301호: 1500만"],"sellerMotivationText":"자산 효율화","brokerNotes":["초역세권 매물"]},"detectedSensitiveFields":["exact_address","tenant_name"],"ambiguousFields":[],"warnings":[],"areaSignal":"역삼","assetType":"오피스빌딩","priceBand":"300억","sizeSignal":"3000평(약 9917.4㎡)","dealType":"매각","buildingName":"역삼 센트럴타워","exactAddress":"역삼동 742-1","totalFloorArea":9917.3,"buildYear":2015,"currentUseSignal":"근린생활시설","vacancySignal":"공실 없음","fitSummary":"초역세권 근생 빌딩으로 시행/사옥 매입에 최적화","cautionSummary":"주요 임차 업종 만기 조율 필요","hiddenFields":["exact_address","seller_motivation"],"confidence":{"areaSignal":"confirmed","assetType":"confirmed","priceBand":"ai_hypothesis","fitSummary":"ai_hypothesis"},"missingData":["sizeSignal"],"boundaryNote":"본 자료는 실거래 통계 기반 참고치입니다.","buyerType":"법인 사옥형","budgetRange":{"min":50,"max":80,"display":"50억~80억"},"preferredRegions":["강남","성수"],"assetTypes":["꼬마빌딩","사옥용"],"purchasePurpose":"사옥용 매입","mustHave":["초역세권","주차"],"niceToHave":["테라스","루프탑"],"riskTolerance":"medium","financingNote":"자본금 50% 준비","missingQuestions":["구체적인 입주 시기가 언제인가요?","선호하는 수익률이 있나요?"],"privacyNotes":["연락처 비공개"],"fitReasons":["매수자 예산(50-80억)에 부합하는 매물입니다.","요청하신 성수/강남 권역에 해당합니다."],"cautionReasons":["요청한 용도와 달리 명도 협의가 다소 필요합니다."],"recommendedNextAction":"현장 답사 제안","kakaoMessage":"안녕하세요! 요청하신 조건에 부합하는 추천 매물이 있어 안내해 드립니다. 확인해보시고 피드백 부탁드립니다.","title":"강남 역삼역 초역세권 오피스 사옥용 빌딩 매각","shortSummary":"역삼역 도보 5분 거리의 준신축급 대형 오피스빌딩입니다.","dealPoints":["초역세권","사옥 최적"],"cautionPoints":["명도 조율 필요"],"hiddenInfoNotice":["보증금 및 지번은 인가 후 확인 가능"],"gateMessage":"G1 등급 등록이 필요합니다.","kakaoText":"강남 역삼역 오피스 빌딩 매각 안내입니다.","exactUnitCandidate":"101호","floor":"1층","areaSqmText":"150㎡","spaceType":"office","depositText":"5000만","monthlyRentText":"400만","maintenanceFeeText":"50만","availableFromText":"즉시입주","leaseTermMonthsText":"24","incentivesText":"렌트프리 2개월","restrictions":[],"landlordIdentity":"김성수","currentTenant":"스타트업","vacancyReason":"이전 확장","rentNegotiation":"협의 가능","region":"성수동","areaSqm":150,"deposit":5000,"monthlyRent":400,"maintenanceFee":50,"availableFrom":"즉시입주","leaseTermMonths":24,"incentives":{"rentFreeMonths":2,"interiorSupport":"일부 인테리어 지원","freeRentDetail":"렌트프리 2개월 지원"},"shortSummaryLease":"성수역 도보 5분 거리 1층 리테일 상가 매물입니다."}</a:t>
             </a:r>
             <a:endParaRPr lang="en-US" sz="930" dirty="0"/>
           </a:p>
@@ -7302,119 +7969,7 @@
       </p:sp>
       <p:sp>
         <p:nvSpPr>
-          <p:cNvPr id="28" name="Shape 26"/>
-          <p:cNvSpPr/>
-          <p:nvPr/>
-        </p:nvSpPr>
-        <p:spPr>
-          <a:xfrm>
-            <a:off x="6187288" y="4626864"/>
-            <a:ext cx="5437480" cy="1280160"/>
-          </a:xfrm>
-          <a:prstGeom prst="roundRect">
-            <a:avLst>
-              <a:gd name="adj" fmla="val 4286"/>
-            </a:avLst>
-          </a:prstGeom>
-          <a:solidFill>
-            <a:srgbClr val="BEE3F8"/>
-          </a:solidFill>
-          <a:ln/>
-        </p:spPr>
-      </p:sp>
-      <p:sp>
-        <p:nvSpPr>
-          <p:cNvPr id="29" name="Shape 27"/>
-          <p:cNvSpPr/>
-          <p:nvPr/>
-        </p:nvSpPr>
-        <p:spPr>
-          <a:xfrm>
-            <a:off x="6187288" y="4681728"/>
-            <a:ext cx="36576" cy="1170432"/>
-          </a:xfrm>
-          <a:prstGeom prst="rect">
-            <a:avLst/>
-          </a:prstGeom>
-          <a:solidFill>
-            <a:srgbClr val="2B6CB0"/>
-          </a:solidFill>
-          <a:ln/>
-        </p:spPr>
-      </p:sp>
-      <p:sp>
-        <p:nvSpPr>
-          <p:cNvPr id="30" name="Text 28"/>
-          <p:cNvSpPr/>
-          <p:nvPr/>
-        </p:nvSpPr>
-        <p:spPr>
-          <a:xfrm>
-            <a:off x="6370168" y="4736592"/>
-            <a:ext cx="5108296" cy="201168"/>
-          </a:xfrm>
-          <a:prstGeom prst="rect">
-            <a:avLst/>
-          </a:prstGeom>
-          <a:noFill/>
-          <a:ln/>
-        </p:spPr>
-        <p:txBody>
-          <a:bodyPr wrap="square" lIns="0" tIns="0" rIns="0" bIns="0" rtlCol="0" anchor="ctr"/>
-          <a:lstStyle/>
-          <a:p>
-            <a:pPr indent="0" marL="0">
-              <a:buNone/>
-            </a:pPr>
-            <a:endParaRPr lang="en-US" sz="1050" dirty="0"/>
-          </a:p>
-        </p:txBody>
-      </p:sp>
-      <p:sp>
-        <p:nvSpPr>
-          <p:cNvPr id="31" name="Text 29"/>
-          <p:cNvSpPr/>
-          <p:nvPr/>
-        </p:nvSpPr>
-        <p:spPr>
-          <a:xfrm>
-            <a:off x="6370168" y="4956048"/>
-            <a:ext cx="5108296" cy="877824"/>
-          </a:xfrm>
-          <a:prstGeom prst="rect">
-            <a:avLst/>
-          </a:prstGeom>
-          <a:noFill/>
-          <a:ln/>
-        </p:spPr>
-        <p:txBody>
-          <a:bodyPr wrap="square" lIns="0" tIns="0" rIns="0" bIns="0" rtlCol="0" anchor="t"/>
-          <a:lstStyle/>
-          <a:p>
-            <a:pPr indent="0" marL="0">
-              <a:lnSpc>
-                <a:spcPct val="120000"/>
-              </a:lnSpc>
-              <a:buNone/>
-            </a:pPr>
-            <a:r>
-              <a:rPr lang="en-US" sz="930" dirty="0">
-                <a:solidFill>
-                  <a:srgbClr val="10161F"/>
-                </a:solidFill>
-                <a:latin typeface="Pretendard" pitchFamily="34" charset="0"/>
-                <a:ea typeface="Pretendard" pitchFamily="34" charset="-122"/>
-                <a:cs typeface="Pretendard" pitchFamily="34" charset="-120"/>
-              </a:rPr>
-              <a:t>[주의] 신축 공사비 및 분양가 변동에 따라 최종 수익률이 달라질 수 있습니다.</a:t>
-            </a:r>
-            <a:endParaRPr lang="en-US" sz="930" dirty="0"/>
-          </a:p>
-        </p:txBody>
-      </p:sp>
-      <p:sp>
-        <p:nvSpPr>
-          <p:cNvPr id="32" name="Text 30"/>
+          <p:cNvPr id="11" name="Text 9"/>
           <p:cNvSpPr/>
           <p:nvPr/>
         </p:nvSpPr>
@@ -7453,7 +8008,7 @@
       </p:sp>
       <p:sp>
         <p:nvSpPr>
-          <p:cNvPr id="33" name="Text 31"/>
+          <p:cNvPr id="12" name="Text 10"/>
           <p:cNvSpPr/>
           <p:nvPr/>
         </p:nvSpPr>
@@ -7668,11 +8223,11 @@
         <p:spPr>
           <a:xfrm>
             <a:off x="566928" y="1417320"/>
-            <a:ext cx="11057839" cy="3611880"/>
+            <a:ext cx="3515258" cy="3657600"/>
           </a:xfrm>
           <a:prstGeom prst="roundRect">
             <a:avLst>
-              <a:gd name="adj" fmla="val 1519"/>
+              <a:gd name="adj" fmla="val 1561"/>
             </a:avLst>
           </a:prstGeom>
           <a:solidFill>
@@ -7695,7 +8250,7 @@
         <p:spPr>
           <a:xfrm>
             <a:off x="566928" y="1417320"/>
-            <a:ext cx="11057839" cy="45720"/>
+            <a:ext cx="3515258" cy="45720"/>
           </a:xfrm>
           <a:prstGeom prst="rect">
             <a:avLst/>
@@ -7715,7 +8270,7 @@
         <p:spPr>
           <a:xfrm>
             <a:off x="795528" y="1618488"/>
-            <a:ext cx="10600639" cy="292608"/>
+            <a:ext cx="3058058" cy="292608"/>
           </a:xfrm>
           <a:prstGeom prst="rect">
             <a:avLst/>
@@ -7739,7 +8294,7 @@
                 <a:ea typeface="Pretendard" pitchFamily="34" charset="-122"/>
                 <a:cs typeface="Pretendard" pitchFamily="34" charset="-120"/>
               </a:rPr>
-              <a:t>용도 리스크</a:t>
+              <a:t>건물 물리적 상태</a:t>
             </a:r>
             <a:endParaRPr lang="en-US" sz="1350" dirty="0"/>
           </a:p>
@@ -7753,8 +8308,8 @@
         </p:nvSpPr>
         <p:spPr>
           <a:xfrm>
-            <a:off x="795528" y="1911096"/>
-            <a:ext cx="10600639" cy="402336"/>
+            <a:off x="795528" y="1947672"/>
+            <a:ext cx="3058058" cy="365760"/>
           </a:xfrm>
           <a:prstGeom prst="rect">
             <a:avLst/>
@@ -7772,7 +8327,7 @@
               <a:buNone/>
             </a:pPr>
             <a:r>
-              <a:rPr lang="en-US" sz="1350" b="1" dirty="0">
+              <a:rPr lang="en-US" sz="1250" b="1" dirty="0">
                 <a:solidFill>
                   <a:srgbClr val="10161F"/>
                 </a:solidFill>
@@ -7780,9 +8335,9 @@
                 <a:ea typeface="Pretendard" pitchFamily="34" charset="-122"/>
                 <a:cs typeface="Pretendard" pitchFamily="34" charset="-120"/>
               </a:rPr>
-              <a:t>—</a:t>
-            </a:r>
-            <a:endParaRPr lang="en-US" sz="1350" dirty="0"/>
+              <a:t>2017년 준공 신축급 상태 (누수/균열 결함 없음)</a:t>
+            </a:r>
+            <a:endParaRPr lang="en-US" sz="1250" dirty="0"/>
           </a:p>
         </p:txBody>
       </p:sp>
@@ -7795,7 +8350,7 @@
         <p:spPr>
           <a:xfrm>
             <a:off x="795528" y="2377440"/>
-            <a:ext cx="10600639" cy="2560320"/>
+            <a:ext cx="3058058" cy="2606040"/>
           </a:xfrm>
           <a:prstGeom prst="rect">
             <a:avLst/>
@@ -7817,7 +8372,7 @@
               <a:buChar char="•"/>
             </a:pPr>
             <a:r>
-              <a:rPr lang="en-US" sz="1200" dirty="0">
+              <a:rPr lang="en-US" sz="1100" dirty="0">
                 <a:solidFill>
                   <a:srgbClr val="10161F"/>
                 </a:solidFill>
@@ -7825,15 +8380,425 @@
                 <a:ea typeface="Pretendard" pitchFamily="34" charset="-122"/>
                 <a:cs typeface="Pretendard" pitchFamily="34" charset="-120"/>
               </a:rPr>
-              <a:t>{"ok":true,"mocked":true,"extractedFields":{"area_signal":"역삼","asset_type":"오피스빌딩","price_band":"300억","size_signal":"3000평(약 9917.4㎡)"},"extractedFacts":{"region":"역삼","exactAddressCandidate":"역삼동 7</a:t>
-            </a:r>
-            <a:endParaRPr lang="en-US" sz="1200" dirty="0"/>
-          </a:p>
-        </p:txBody>
-      </p:sp>
-      <p:sp>
-        <p:nvSpPr>
-          <p:cNvPr id="11" name="Text 9"/>
+              <a:t>준공 10년 미만으로 대규모 수선비용 발생 가능성 낮음</a:t>
+            </a:r>
+            <a:endParaRPr lang="en-US" sz="1100" dirty="0"/>
+          </a:p>
+        </p:txBody>
+      </p:sp>
+      <p:sp>
+        <p:nvSpPr>
+          <p:cNvPr id="11" name="Shape 9"/>
+          <p:cNvSpPr/>
+          <p:nvPr/>
+        </p:nvSpPr>
+        <p:spPr>
+          <a:xfrm>
+            <a:off x="4338218" y="1417320"/>
+            <a:ext cx="3515258" cy="3657600"/>
+          </a:xfrm>
+          <a:prstGeom prst="roundRect">
+            <a:avLst>
+              <a:gd name="adj" fmla="val 1561"/>
+            </a:avLst>
+          </a:prstGeom>
+          <a:solidFill>
+            <a:srgbClr val="F7FAFC"/>
+          </a:solidFill>
+          <a:ln w="6350">
+            <a:solidFill>
+              <a:srgbClr val="CBD5E0"/>
+            </a:solidFill>
+            <a:prstDash val="solid"/>
+          </a:ln>
+        </p:spPr>
+      </p:sp>
+      <p:sp>
+        <p:nvSpPr>
+          <p:cNvPr id="12" name="Shape 10"/>
+          <p:cNvSpPr/>
+          <p:nvPr/>
+        </p:nvSpPr>
+        <p:spPr>
+          <a:xfrm>
+            <a:off x="4338218" y="1417320"/>
+            <a:ext cx="3515258" cy="45720"/>
+          </a:xfrm>
+          <a:prstGeom prst="rect">
+            <a:avLst/>
+          </a:prstGeom>
+          <a:solidFill>
+            <a:srgbClr val="B98A2E"/>
+          </a:solidFill>
+          <a:ln/>
+        </p:spPr>
+      </p:sp>
+      <p:sp>
+        <p:nvSpPr>
+          <p:cNvPr id="13" name="Text 11"/>
+          <p:cNvSpPr/>
+          <p:nvPr/>
+        </p:nvSpPr>
+        <p:spPr>
+          <a:xfrm>
+            <a:off x="4566818" y="1618488"/>
+            <a:ext cx="3058058" cy="292608"/>
+          </a:xfrm>
+          <a:prstGeom prst="rect">
+            <a:avLst/>
+          </a:prstGeom>
+          <a:noFill/>
+          <a:ln/>
+        </p:spPr>
+        <p:txBody>
+          <a:bodyPr wrap="square" lIns="0" tIns="0" rIns="0" bIns="0" rtlCol="0" anchor="ctr"/>
+          <a:lstStyle/>
+          <a:p>
+            <a:pPr indent="0" marL="0">
+              <a:buNone/>
+            </a:pPr>
+            <a:r>
+              <a:rPr lang="en-US" sz="1350" b="1" dirty="0">
+                <a:solidFill>
+                  <a:srgbClr val="977024"/>
+                </a:solidFill>
+                <a:latin typeface="Pretendard" pitchFamily="34" charset="0"/>
+                <a:ea typeface="Pretendard" pitchFamily="34" charset="-122"/>
+                <a:cs typeface="Pretendard" pitchFamily="34" charset="-120"/>
+              </a:rPr>
+              <a:t>승강기 및 설비</a:t>
+            </a:r>
+            <a:endParaRPr lang="en-US" sz="1350" dirty="0"/>
+          </a:p>
+        </p:txBody>
+      </p:sp>
+      <p:sp>
+        <p:nvSpPr>
+          <p:cNvPr id="14" name="Text 12"/>
+          <p:cNvSpPr/>
+          <p:nvPr/>
+        </p:nvSpPr>
+        <p:spPr>
+          <a:xfrm>
+            <a:off x="4566818" y="1947672"/>
+            <a:ext cx="3058058" cy="365760"/>
+          </a:xfrm>
+          <a:prstGeom prst="rect">
+            <a:avLst/>
+          </a:prstGeom>
+          <a:noFill/>
+          <a:ln/>
+        </p:spPr>
+        <p:txBody>
+          <a:bodyPr wrap="square" lIns="0" tIns="0" rIns="0" bIns="0" rtlCol="0" anchor="ctr">
+            <a:normAutofit/>
+          </a:bodyPr>
+          <a:lstStyle/>
+          <a:p>
+            <a:pPr indent="0" marL="0">
+              <a:buNone/>
+            </a:pPr>
+            <a:r>
+              <a:rPr lang="en-US" sz="1250" b="1" dirty="0">
+                <a:solidFill>
+                  <a:srgbClr val="10161F"/>
+                </a:solidFill>
+                <a:latin typeface="Pretendard" pitchFamily="34" charset="0"/>
+                <a:ea typeface="Pretendard" pitchFamily="34" charset="-122"/>
+                <a:cs typeface="Pretendard" pitchFamily="34" charset="-120"/>
+              </a:rPr>
+              <a:t>15인승 침대용 승강기 및 냉난방 설비 양호</a:t>
+            </a:r>
+            <a:endParaRPr lang="en-US" sz="1250" dirty="0"/>
+          </a:p>
+        </p:txBody>
+      </p:sp>
+      <p:sp>
+        <p:nvSpPr>
+          <p:cNvPr id="15" name="Text 13"/>
+          <p:cNvSpPr/>
+          <p:nvPr/>
+        </p:nvSpPr>
+        <p:spPr>
+          <a:xfrm>
+            <a:off x="4566818" y="2377440"/>
+            <a:ext cx="3058058" cy="2606040"/>
+          </a:xfrm>
+          <a:prstGeom prst="rect">
+            <a:avLst/>
+          </a:prstGeom>
+          <a:noFill/>
+          <a:ln/>
+        </p:spPr>
+        <p:txBody>
+          <a:bodyPr wrap="square" lIns="0" tIns="0" rIns="0" bIns="0" rtlCol="0" anchor="t">
+            <a:normAutofit/>
+          </a:bodyPr>
+          <a:lstStyle/>
+          <a:p>
+            <a:pPr marL="342900" indent="-342900">
+              <a:lnSpc>
+                <a:spcPct val="125000"/>
+              </a:lnSpc>
+              <a:buSzPct val="100000"/>
+              <a:buChar char="•"/>
+            </a:pPr>
+            <a:r>
+              <a:rPr lang="en-US" sz="1100" dirty="0">
+                <a:solidFill>
+                  <a:srgbClr val="10161F"/>
+                </a:solidFill>
+                <a:latin typeface="Pretendard" pitchFamily="34" charset="0"/>
+                <a:ea typeface="Pretendard" pitchFamily="34" charset="-122"/>
+                <a:cs typeface="Pretendard" pitchFamily="34" charset="-120"/>
+              </a:rPr>
+              <a:t>주기적 정기 점검 계약 유지로 관리 리스크 최소화</a:t>
+            </a:r>
+            <a:endParaRPr lang="en-US" sz="1100" dirty="0"/>
+          </a:p>
+        </p:txBody>
+      </p:sp>
+      <p:sp>
+        <p:nvSpPr>
+          <p:cNvPr id="16" name="Shape 14"/>
+          <p:cNvSpPr/>
+          <p:nvPr/>
+        </p:nvSpPr>
+        <p:spPr>
+          <a:xfrm>
+            <a:off x="8109509" y="1417320"/>
+            <a:ext cx="3515258" cy="3657600"/>
+          </a:xfrm>
+          <a:prstGeom prst="roundRect">
+            <a:avLst>
+              <a:gd name="adj" fmla="val 1561"/>
+            </a:avLst>
+          </a:prstGeom>
+          <a:solidFill>
+            <a:srgbClr val="F7FAFC"/>
+          </a:solidFill>
+          <a:ln w="6350">
+            <a:solidFill>
+              <a:srgbClr val="CBD5E0"/>
+            </a:solidFill>
+            <a:prstDash val="solid"/>
+          </a:ln>
+        </p:spPr>
+      </p:sp>
+      <p:sp>
+        <p:nvSpPr>
+          <p:cNvPr id="17" name="Shape 15"/>
+          <p:cNvSpPr/>
+          <p:nvPr/>
+        </p:nvSpPr>
+        <p:spPr>
+          <a:xfrm>
+            <a:off x="8109509" y="1417320"/>
+            <a:ext cx="3515258" cy="45720"/>
+          </a:xfrm>
+          <a:prstGeom prst="rect">
+            <a:avLst/>
+          </a:prstGeom>
+          <a:solidFill>
+            <a:srgbClr val="B98A2E"/>
+          </a:solidFill>
+          <a:ln/>
+        </p:spPr>
+      </p:sp>
+      <p:sp>
+        <p:nvSpPr>
+          <p:cNvPr id="18" name="Text 16"/>
+          <p:cNvSpPr/>
+          <p:nvPr/>
+        </p:nvSpPr>
+        <p:spPr>
+          <a:xfrm>
+            <a:off x="8338109" y="1618488"/>
+            <a:ext cx="3058058" cy="292608"/>
+          </a:xfrm>
+          <a:prstGeom prst="rect">
+            <a:avLst/>
+          </a:prstGeom>
+          <a:noFill/>
+          <a:ln/>
+        </p:spPr>
+        <p:txBody>
+          <a:bodyPr wrap="square" lIns="0" tIns="0" rIns="0" bIns="0" rtlCol="0" anchor="ctr"/>
+          <a:lstStyle/>
+          <a:p>
+            <a:pPr indent="0" marL="0">
+              <a:buNone/>
+            </a:pPr>
+            <a:r>
+              <a:rPr lang="en-US" sz="1350" b="1" dirty="0">
+                <a:solidFill>
+                  <a:srgbClr val="977024"/>
+                </a:solidFill>
+                <a:latin typeface="Pretendard" pitchFamily="34" charset="0"/>
+                <a:ea typeface="Pretendard" pitchFamily="34" charset="-122"/>
+                <a:cs typeface="Pretendard" pitchFamily="34" charset="-120"/>
+              </a:rPr>
+              <a:t>임차인 이탈 위험</a:t>
+            </a:r>
+            <a:endParaRPr lang="en-US" sz="1350" dirty="0"/>
+          </a:p>
+        </p:txBody>
+      </p:sp>
+      <p:sp>
+        <p:nvSpPr>
+          <p:cNvPr id="19" name="Text 17"/>
+          <p:cNvSpPr/>
+          <p:nvPr/>
+        </p:nvSpPr>
+        <p:spPr>
+          <a:xfrm>
+            <a:off x="8338109" y="1947672"/>
+            <a:ext cx="3058058" cy="365760"/>
+          </a:xfrm>
+          <a:prstGeom prst="rect">
+            <a:avLst/>
+          </a:prstGeom>
+          <a:noFill/>
+          <a:ln/>
+        </p:spPr>
+        <p:txBody>
+          <a:bodyPr wrap="square" lIns="0" tIns="0" rIns="0" bIns="0" rtlCol="0" anchor="ctr">
+            <a:normAutofit/>
+          </a:bodyPr>
+          <a:lstStyle/>
+          <a:p>
+            <a:pPr indent="0" marL="0">
+              <a:buNone/>
+            </a:pPr>
+            <a:r>
+              <a:rPr lang="en-US" sz="1250" b="1" dirty="0">
+                <a:solidFill>
+                  <a:srgbClr val="10161F"/>
+                </a:solidFill>
+                <a:latin typeface="Pretendard" pitchFamily="34" charset="0"/>
+                <a:ea typeface="Pretendard" pitchFamily="34" charset="-122"/>
+                <a:cs typeface="Pretendard" pitchFamily="34" charset="-120"/>
+              </a:rPr>
+              <a:t>병의원/약국 인테리어 투자비(호실당 5억↑) 존속</a:t>
+            </a:r>
+            <a:endParaRPr lang="en-US" sz="1250" dirty="0"/>
+          </a:p>
+        </p:txBody>
+      </p:sp>
+      <p:sp>
+        <p:nvSpPr>
+          <p:cNvPr id="20" name="Text 18"/>
+          <p:cNvSpPr/>
+          <p:nvPr/>
+        </p:nvSpPr>
+        <p:spPr>
+          <a:xfrm>
+            <a:off x="8338109" y="2377440"/>
+            <a:ext cx="3058058" cy="2606040"/>
+          </a:xfrm>
+          <a:prstGeom prst="rect">
+            <a:avLst/>
+          </a:prstGeom>
+          <a:noFill/>
+          <a:ln/>
+        </p:spPr>
+        <p:txBody>
+          <a:bodyPr wrap="square" lIns="0" tIns="0" rIns="0" bIns="0" rtlCol="0" anchor="t">
+            <a:normAutofit/>
+          </a:bodyPr>
+          <a:lstStyle/>
+          <a:p>
+            <a:pPr marL="342900" indent="-342900">
+              <a:lnSpc>
+                <a:spcPct val="125000"/>
+              </a:lnSpc>
+              <a:buSzPct val="100000"/>
+              <a:buChar char="•"/>
+            </a:pPr>
+            <a:r>
+              <a:rPr lang="en-US" sz="1100" dirty="0">
+                <a:solidFill>
+                  <a:srgbClr val="10161F"/>
+                </a:solidFill>
+                <a:latin typeface="Pretendard" pitchFamily="34" charset="0"/>
+                <a:ea typeface="Pretendard" pitchFamily="34" charset="-122"/>
+                <a:cs typeface="Pretendard" pitchFamily="34" charset="-120"/>
+              </a:rPr>
+              <a:t>WALE 3.5년 확보 및 만기 6개월 전 재계약 협상 개시</a:t>
+            </a:r>
+            <a:endParaRPr lang="en-US" sz="1100" dirty="0"/>
+          </a:p>
+        </p:txBody>
+      </p:sp>
+      <p:sp>
+        <p:nvSpPr>
+          <p:cNvPr id="21" name="Shape 19"/>
+          <p:cNvSpPr/>
+          <p:nvPr/>
+        </p:nvSpPr>
+        <p:spPr>
+          <a:xfrm>
+            <a:off x="566928" y="5193792"/>
+            <a:ext cx="11057839" cy="621792"/>
+          </a:xfrm>
+          <a:prstGeom prst="roundRect">
+            <a:avLst>
+              <a:gd name="adj" fmla="val 8824"/>
+            </a:avLst>
+          </a:prstGeom>
+          <a:solidFill>
+            <a:srgbClr val="F7FAFC"/>
+          </a:solidFill>
+          <a:ln w="6350">
+            <a:solidFill>
+              <a:srgbClr val="CBD5E0"/>
+            </a:solidFill>
+            <a:prstDash val="solid"/>
+          </a:ln>
+        </p:spPr>
+      </p:sp>
+      <p:sp>
+        <p:nvSpPr>
+          <p:cNvPr id="22" name="Text 20"/>
+          <p:cNvSpPr/>
+          <p:nvPr/>
+        </p:nvSpPr>
+        <p:spPr>
+          <a:xfrm>
+            <a:off x="795528" y="5193792"/>
+            <a:ext cx="10600639" cy="621792"/>
+          </a:xfrm>
+          <a:prstGeom prst="rect">
+            <a:avLst/>
+          </a:prstGeom>
+          <a:noFill/>
+          <a:ln/>
+        </p:spPr>
+        <p:txBody>
+          <a:bodyPr wrap="square" lIns="0" tIns="0" rIns="0" bIns="0" rtlCol="0" anchor="ctr"/>
+          <a:lstStyle/>
+          <a:p>
+            <a:pPr indent="0" marL="0">
+              <a:buNone/>
+            </a:pPr>
+            <a:r>
+              <a:rPr lang="en-US" sz="1100" dirty="0">
+                <a:solidFill>
+                  <a:srgbClr val="10161F"/>
+                </a:solidFill>
+                <a:latin typeface="Pretendard" pitchFamily="34" charset="0"/>
+                <a:ea typeface="Pretendard" pitchFamily="34" charset="-122"/>
+                <a:cs typeface="Pretendard" pitchFamily="34" charset="-120"/>
+              </a:rPr>
+              <a:t>실사 총평: 자산의 물리적·권리적 하자가 없으며, 세부 임대차 계약서 및 등기사항증명서는 LOI 접수 후 원본 열람 가능합니다.</a:t>
+            </a:r>
+            <a:endParaRPr lang="en-US" sz="1100" dirty="0"/>
+          </a:p>
+        </p:txBody>
+      </p:sp>
+      <p:sp>
+        <p:nvSpPr>
+          <p:cNvPr id="23" name="Text 21"/>
           <p:cNvSpPr/>
           <p:nvPr/>
         </p:nvSpPr>
@@ -7872,7 +8837,7 @@
       </p:sp>
       <p:sp>
         <p:nvSpPr>
-          <p:cNvPr id="12" name="Text 10"/>
+          <p:cNvPr id="24" name="Text 22"/>
           <p:cNvSpPr/>
           <p:nvPr/>
         </p:nvSpPr>
@@ -8442,11 +9407,11 @@
         <p:spPr>
           <a:xfrm>
             <a:off x="566928" y="1572768"/>
-            <a:ext cx="11057839" cy="3200400"/>
+            <a:ext cx="2490140" cy="3200400"/>
           </a:xfrm>
           <a:prstGeom prst="roundRect">
             <a:avLst>
-              <a:gd name="adj" fmla="val 1714"/>
+              <a:gd name="adj" fmla="val 2203"/>
             </a:avLst>
           </a:prstGeom>
           <a:solidFill>
@@ -8528,7 +9493,7 @@
         <p:spPr>
           <a:xfrm>
             <a:off x="786384" y="2304288"/>
-            <a:ext cx="10618927" cy="365760"/>
+            <a:ext cx="2051228" cy="365760"/>
           </a:xfrm>
           <a:prstGeom prst="rect">
             <a:avLst/>
@@ -8552,7 +9517,7 @@
                 <a:ea typeface="Pretendard" pitchFamily="34" charset="-122"/>
                 <a:cs typeface="Pretendard" pitchFamily="34" charset="-120"/>
               </a:rPr>
-              <a:t>{"ok"</a:t>
+              <a:t>초기 관심 표명 → 담당자 연락</a:t>
             </a:r>
             <a:endParaRPr lang="en-US" sz="1600" dirty="0"/>
           </a:p>
@@ -8567,7 +9532,7 @@
         <p:spPr>
           <a:xfrm>
             <a:off x="786384" y="2761488"/>
-            <a:ext cx="10618927" cy="1828800"/>
+            <a:ext cx="2051228" cy="1828800"/>
           </a:xfrm>
           <a:prstGeom prst="rect">
             <a:avLst/>
@@ -8582,8 +9547,147 @@
             <a:pPr indent="0" marL="0">
               <a:buNone/>
             </a:pPr>
-            <a:r>
-              <a:rPr lang="en-US" sz="1100" dirty="0">
+            <a:endParaRPr lang="en-US" sz="1100" dirty="0"/>
+          </a:p>
+        </p:txBody>
+      </p:sp>
+      <p:sp>
+        <p:nvSpPr>
+          <p:cNvPr id="11" name="Shape 9"/>
+          <p:cNvSpPr/>
+          <p:nvPr/>
+        </p:nvSpPr>
+        <p:spPr>
+          <a:xfrm>
+            <a:off x="3148508" y="3035808"/>
+            <a:ext cx="182880" cy="274320"/>
+          </a:xfrm>
+          <a:prstGeom prst="rightArrow">
+            <a:avLst/>
+          </a:prstGeom>
+          <a:solidFill>
+            <a:srgbClr val="CBD5E0"/>
+          </a:solidFill>
+          <a:ln w="6350">
+            <a:solidFill>
+              <a:srgbClr val="718096"/>
+            </a:solidFill>
+            <a:prstDash val="solid"/>
+          </a:ln>
+        </p:spPr>
+      </p:sp>
+      <p:sp>
+        <p:nvSpPr>
+          <p:cNvPr id="12" name="Shape 10"/>
+          <p:cNvSpPr/>
+          <p:nvPr/>
+        </p:nvSpPr>
+        <p:spPr>
+          <a:xfrm>
+            <a:off x="3422828" y="1572768"/>
+            <a:ext cx="2490140" cy="3200400"/>
+          </a:xfrm>
+          <a:prstGeom prst="roundRect">
+            <a:avLst>
+              <a:gd name="adj" fmla="val 2203"/>
+            </a:avLst>
+          </a:prstGeom>
+          <a:solidFill>
+            <a:srgbClr val="F7FAFC"/>
+          </a:solidFill>
+          <a:ln w="6350">
+            <a:solidFill>
+              <a:srgbClr val="CBD5E0"/>
+            </a:solidFill>
+            <a:prstDash val="solid"/>
+          </a:ln>
+        </p:spPr>
+      </p:sp>
+      <p:sp>
+        <p:nvSpPr>
+          <p:cNvPr id="13" name="Shape 11"/>
+          <p:cNvSpPr/>
+          <p:nvPr/>
+        </p:nvSpPr>
+        <p:spPr>
+          <a:xfrm>
+            <a:off x="3642284" y="1792224"/>
+            <a:ext cx="384048" cy="384048"/>
+          </a:xfrm>
+          <a:prstGeom prst="ellipse">
+            <a:avLst/>
+          </a:prstGeom>
+          <a:solidFill>
+            <a:srgbClr val="B98A2E"/>
+          </a:solidFill>
+          <a:ln/>
+        </p:spPr>
+      </p:sp>
+      <p:sp>
+        <p:nvSpPr>
+          <p:cNvPr id="14" name="Text 12"/>
+          <p:cNvSpPr/>
+          <p:nvPr/>
+        </p:nvSpPr>
+        <p:spPr>
+          <a:xfrm>
+            <a:off x="3642284" y="1792224"/>
+            <a:ext cx="384048" cy="384048"/>
+          </a:xfrm>
+          <a:prstGeom prst="rect">
+            <a:avLst/>
+          </a:prstGeom>
+          <a:noFill/>
+          <a:ln/>
+        </p:spPr>
+        <p:txBody>
+          <a:bodyPr wrap="square" lIns="0" tIns="0" rIns="0" bIns="0" rtlCol="0" anchor="ctr"/>
+          <a:lstStyle/>
+          <a:p>
+            <a:pPr algn="ctr" indent="0" marL="0">
+              <a:buNone/>
+            </a:pPr>
+            <a:r>
+              <a:rPr lang="en-US" sz="1300" b="1" dirty="0">
+                <a:solidFill>
+                  <a:srgbClr val="FFFFFF"/>
+                </a:solidFill>
+                <a:latin typeface="Arial" pitchFamily="34" charset="0"/>
+                <a:ea typeface="Arial" pitchFamily="34" charset="-122"/>
+                <a:cs typeface="Arial" pitchFamily="34" charset="-120"/>
+              </a:rPr>
+              <a:t>STEP 2</a:t>
+            </a:r>
+            <a:endParaRPr lang="en-US" sz="1300" dirty="0"/>
+          </a:p>
+        </p:txBody>
+      </p:sp>
+      <p:sp>
+        <p:nvSpPr>
+          <p:cNvPr id="15" name="Text 13"/>
+          <p:cNvSpPr/>
+          <p:nvPr/>
+        </p:nvSpPr>
+        <p:spPr>
+          <a:xfrm>
+            <a:off x="3642284" y="2304288"/>
+            <a:ext cx="2051228" cy="365760"/>
+          </a:xfrm>
+          <a:prstGeom prst="rect">
+            <a:avLst/>
+          </a:prstGeom>
+          <a:noFill/>
+          <a:ln/>
+        </p:spPr>
+        <p:txBody>
+          <a:bodyPr wrap="square" rtlCol="0" anchor="ctr"/>
+          <a:lstStyle/>
+          <a:p>
+            <a:pPr indent="0" marL="0">
+              <a:buNone/>
+            </a:pPr>
+            <a:r>
+              <a:rPr lang="en-US" sz="1600" b="1" dirty="0">
                 <a:solidFill>
                   <a:srgbClr val="10161F"/>
                 </a:solidFill>
@@ -8591,15 +9695,399 @@
                 <a:ea typeface="Pretendard" pitchFamily="34" charset="-122"/>
                 <a:cs typeface="Pretendard" pitchFamily="34" charset="-120"/>
               </a:rPr>
-              <a:t>true,"mocked":true,"extractedFields":{"area_signal":"역삼","asset_type":"오피스빌딩","price_band":"300억","size_signal":"3000평(약 9917.4㎡)"},"extractedFacts":{"region":"역삼","exactAddressCandidate":"역삼동 742-1","assetType":"오피스빌딩","priceText":"300억","sizeText":"3000평(약 9917.4㎡)","currentUse":"오피스","currentUseSignal":"근린생활시설","leaseSignal":"임대중","vacancySignal":"공실없음","tenantNames":["쿠팡","네이버"],"unitRentTexts":["301호: 1500만"],"sellerMotivationText":"자산 효율화","brokerNotes":["초역세권 매물"]},"detectedSensitiveFields":["exact_address","tenant_name"],"ambiguousFields":[],"warnings":[],"areaSignal":"역삼","assetType":"오피스빌딩","priceBand":"300억","sizeSignal":"3000평(약 9917.4㎡)","dealType":"매각","buildingName":"역삼 센트럴타워","exactAddress":"역삼동 742-1","totalFloorArea":9917.3,"buildYear":2015,"currentUseSignal":"근린생활시설","vacancySignal":"공실 없음","fitSummary":"초역세권 근생 빌딩으로 시행/사옥 매입에 최적화","cautionSummary":"주요 임차 업종 만기 조율 필요","hiddenFields":["exact_address","seller_motivation"],"confidence":{"areaSignal":"confirmed","assetType":"confirmed","priceBand":"ai_hypothesis","fitSummary":"ai_hypothesis"},"missingData":["sizeSignal"],"boundaryNote":"본 자료는 실거래 통계 기반 참고치입니다.","buyerType":"법인 사옥형","budgetRange":{"min":50,"max":80,"display":"50억~80억"},"preferredRegions":["강남","성수"],"assetTypes":["꼬마빌딩","사옥용"],"purchasePurpose":"사옥용 매입","mustHave":["초역세권","주차"],"niceToHave":["테라스","루프탑"],"riskTolerance":"medium","financingNote":"자본금 50% 준비","missingQuestions":["구체적인 입주 시기가 언제인가요?","선호하는 수익률이 있나요?"],"privacyNotes":["연락처 비공개"],"fitReasons":["매수자 예산(50-80억)에 부합하는 매물입니다.","요청하신 성수/강남 권역에 해당합니다."],"cautionReasons":["요청한 용도와 달리 명도 협의가 다소 필요합니다."],"recommendedNextAction":"현장 답사 제안","kakaoMessage":"안녕하세요! 요청하신 조건에 부합하는 추천 매물이 있어 안내해 드립니다. 확인해보시고 피드백 부탁드립니다.","title":"강남 역삼역 초역세권 오피스 사옥용 빌딩 매각","shortSummary":"역삼역 도보 5분 거리의 준신축급 대형 오피스빌딩입니다.","dealPoints":["초역세권","사옥 최적"],"cautionPoints":["명도 조율 필요"],"hiddenInfoNotice":["보증금 및 지번은 인가 후 확인 가능"],"gateMessage":"G1 등급 등록이 필요합니다.","kakaoText":"강남 역삼역 오피스 빌딩 매각 안내입니다.","exactUnitCandidate":"101호","floor":"1층","areaSqmText":"150㎡","spaceType":"office","depositText":"5000만","monthlyRentText":"400만","maintenanceFeeText":"50만","availableFromText":"즉시입주","leaseTermMonthsText":"24","incentivesText":"렌트프리 2개월","restrictions":[],"landlordIdentity":"김성수","currentTenant":"스타트업","vacancyReason":"이전 확장","rentNegotiation":"협의 가능","region":"성수동","areaSqm":150,"deposit":5000,"monthlyRent":400,"maintenanceFee":50,"availableFrom":"즉시입주","leaseTermMonths":24,"incentives":{"rentFreeMonths":2,"interiorSupport":"일부 인테리어 지원","freeRentDetail":"렌트프리 2개월 지원"},"shortSummaryLease":"성수역 도보 5분 거리 1층 리테일 상가 매물입니다."}</a:t>
-            </a:r>
+              <a:t>NDA 체결 → 임차인 정보 및 임대차계약서 제공</a:t>
+            </a:r>
+            <a:endParaRPr lang="en-US" sz="1600" dirty="0"/>
+          </a:p>
+        </p:txBody>
+      </p:sp>
+      <p:sp>
+        <p:nvSpPr>
+          <p:cNvPr id="16" name="Text 14"/>
+          <p:cNvSpPr/>
+          <p:nvPr/>
+        </p:nvSpPr>
+        <p:spPr>
+          <a:xfrm>
+            <a:off x="3642284" y="2761488"/>
+            <a:ext cx="2051228" cy="1828800"/>
+          </a:xfrm>
+          <a:prstGeom prst="rect">
+            <a:avLst/>
+          </a:prstGeom>
+          <a:noFill/>
+          <a:ln/>
+        </p:spPr>
+        <p:txBody>
+          <a:bodyPr wrap="square" rtlCol="0" anchor="t"/>
+          <a:lstStyle/>
+          <a:p>
+            <a:pPr indent="0" marL="0">
+              <a:buNone/>
+            </a:pPr>
             <a:endParaRPr lang="en-US" sz="1100" dirty="0"/>
           </a:p>
         </p:txBody>
       </p:sp>
       <p:sp>
         <p:nvSpPr>
-          <p:cNvPr id="11" name="Text 9"/>
+          <p:cNvPr id="17" name="Shape 15"/>
+          <p:cNvSpPr/>
+          <p:nvPr/>
+        </p:nvSpPr>
+        <p:spPr>
+          <a:xfrm>
+            <a:off x="6004408" y="3035808"/>
+            <a:ext cx="182880" cy="274320"/>
+          </a:xfrm>
+          <a:prstGeom prst="rightArrow">
+            <a:avLst/>
+          </a:prstGeom>
+          <a:solidFill>
+            <a:srgbClr val="CBD5E0"/>
+          </a:solidFill>
+          <a:ln w="6350">
+            <a:solidFill>
+              <a:srgbClr val="718096"/>
+            </a:solidFill>
+            <a:prstDash val="solid"/>
+          </a:ln>
+        </p:spPr>
+      </p:sp>
+      <p:sp>
+        <p:nvSpPr>
+          <p:cNvPr id="18" name="Shape 16"/>
+          <p:cNvSpPr/>
+          <p:nvPr/>
+        </p:nvSpPr>
+        <p:spPr>
+          <a:xfrm>
+            <a:off x="6278728" y="1572768"/>
+            <a:ext cx="2490140" cy="3200400"/>
+          </a:xfrm>
+          <a:prstGeom prst="roundRect">
+            <a:avLst>
+              <a:gd name="adj" fmla="val 2203"/>
+            </a:avLst>
+          </a:prstGeom>
+          <a:solidFill>
+            <a:srgbClr val="F7FAFC"/>
+          </a:solidFill>
+          <a:ln w="6350">
+            <a:solidFill>
+              <a:srgbClr val="CBD5E0"/>
+            </a:solidFill>
+            <a:prstDash val="solid"/>
+          </a:ln>
+        </p:spPr>
+      </p:sp>
+      <p:sp>
+        <p:nvSpPr>
+          <p:cNvPr id="19" name="Shape 17"/>
+          <p:cNvSpPr/>
+          <p:nvPr/>
+        </p:nvSpPr>
+        <p:spPr>
+          <a:xfrm>
+            <a:off x="6498184" y="1792224"/>
+            <a:ext cx="384048" cy="384048"/>
+          </a:xfrm>
+          <a:prstGeom prst="ellipse">
+            <a:avLst/>
+          </a:prstGeom>
+          <a:solidFill>
+            <a:srgbClr val="B98A2E"/>
+          </a:solidFill>
+          <a:ln/>
+        </p:spPr>
+      </p:sp>
+      <p:sp>
+        <p:nvSpPr>
+          <p:cNvPr id="20" name="Text 18"/>
+          <p:cNvSpPr/>
+          <p:nvPr/>
+        </p:nvSpPr>
+        <p:spPr>
+          <a:xfrm>
+            <a:off x="6498184" y="1792224"/>
+            <a:ext cx="384048" cy="384048"/>
+          </a:xfrm>
+          <a:prstGeom prst="rect">
+            <a:avLst/>
+          </a:prstGeom>
+          <a:noFill/>
+          <a:ln/>
+        </p:spPr>
+        <p:txBody>
+          <a:bodyPr wrap="square" lIns="0" tIns="0" rIns="0" bIns="0" rtlCol="0" anchor="ctr"/>
+          <a:lstStyle/>
+          <a:p>
+            <a:pPr algn="ctr" indent="0" marL="0">
+              <a:buNone/>
+            </a:pPr>
+            <a:r>
+              <a:rPr lang="en-US" sz="1300" b="1" dirty="0">
+                <a:solidFill>
+                  <a:srgbClr val="FFFFFF"/>
+                </a:solidFill>
+                <a:latin typeface="Arial" pitchFamily="34" charset="0"/>
+                <a:ea typeface="Arial" pitchFamily="34" charset="-122"/>
+                <a:cs typeface="Arial" pitchFamily="34" charset="-120"/>
+              </a:rPr>
+              <a:t>STEP 3</a:t>
+            </a:r>
+            <a:endParaRPr lang="en-US" sz="1300" dirty="0"/>
+          </a:p>
+        </p:txBody>
+      </p:sp>
+      <p:sp>
+        <p:nvSpPr>
+          <p:cNvPr id="21" name="Text 19"/>
+          <p:cNvSpPr/>
+          <p:nvPr/>
+        </p:nvSpPr>
+        <p:spPr>
+          <a:xfrm>
+            <a:off x="6498184" y="2304288"/>
+            <a:ext cx="2051228" cy="365760"/>
+          </a:xfrm>
+          <a:prstGeom prst="rect">
+            <a:avLst/>
+          </a:prstGeom>
+          <a:noFill/>
+          <a:ln/>
+        </p:spPr>
+        <p:txBody>
+          <a:bodyPr wrap="square" rtlCol="0" anchor="ctr"/>
+          <a:lstStyle/>
+          <a:p>
+            <a:pPr indent="0" marL="0">
+              <a:buNone/>
+            </a:pPr>
+            <a:r>
+              <a:rPr lang="en-US" sz="1600" b="1" dirty="0">
+                <a:solidFill>
+                  <a:srgbClr val="10161F"/>
+                </a:solidFill>
+                <a:latin typeface="Pretendard" pitchFamily="34" charset="0"/>
+                <a:ea typeface="Pretendard" pitchFamily="34" charset="-122"/>
+                <a:cs typeface="Pretendard" pitchFamily="34" charset="-120"/>
+              </a:rPr>
+              <a:t>현장 실사 일정 조율 → 건물 컨디션 및 설비 직접 확인</a:t>
+            </a:r>
+            <a:endParaRPr lang="en-US" sz="1600" dirty="0"/>
+          </a:p>
+        </p:txBody>
+      </p:sp>
+      <p:sp>
+        <p:nvSpPr>
+          <p:cNvPr id="22" name="Text 20"/>
+          <p:cNvSpPr/>
+          <p:nvPr/>
+        </p:nvSpPr>
+        <p:spPr>
+          <a:xfrm>
+            <a:off x="6498184" y="2761488"/>
+            <a:ext cx="2051228" cy="1828800"/>
+          </a:xfrm>
+          <a:prstGeom prst="rect">
+            <a:avLst/>
+          </a:prstGeom>
+          <a:noFill/>
+          <a:ln/>
+        </p:spPr>
+        <p:txBody>
+          <a:bodyPr wrap="square" rtlCol="0" anchor="t"/>
+          <a:lstStyle/>
+          <a:p>
+            <a:pPr indent="0" marL="0">
+              <a:buNone/>
+            </a:pPr>
+            <a:endParaRPr lang="en-US" sz="1100" dirty="0"/>
+          </a:p>
+        </p:txBody>
+      </p:sp>
+      <p:sp>
+        <p:nvSpPr>
+          <p:cNvPr id="23" name="Shape 21"/>
+          <p:cNvSpPr/>
+          <p:nvPr/>
+        </p:nvSpPr>
+        <p:spPr>
+          <a:xfrm>
+            <a:off x="8860307" y="3035808"/>
+            <a:ext cx="182880" cy="274320"/>
+          </a:xfrm>
+          <a:prstGeom prst="rightArrow">
+            <a:avLst/>
+          </a:prstGeom>
+          <a:solidFill>
+            <a:srgbClr val="CBD5E0"/>
+          </a:solidFill>
+          <a:ln w="6350">
+            <a:solidFill>
+              <a:srgbClr val="718096"/>
+            </a:solidFill>
+            <a:prstDash val="solid"/>
+          </a:ln>
+        </p:spPr>
+      </p:sp>
+      <p:sp>
+        <p:nvSpPr>
+          <p:cNvPr id="24" name="Shape 22"/>
+          <p:cNvSpPr/>
+          <p:nvPr/>
+        </p:nvSpPr>
+        <p:spPr>
+          <a:xfrm>
+            <a:off x="9134627" y="1572768"/>
+            <a:ext cx="2490140" cy="3200400"/>
+          </a:xfrm>
+          <a:prstGeom prst="roundRect">
+            <a:avLst>
+              <a:gd name="adj" fmla="val 2203"/>
+            </a:avLst>
+          </a:prstGeom>
+          <a:solidFill>
+            <a:srgbClr val="F7FAFC"/>
+          </a:solidFill>
+          <a:ln w="6350">
+            <a:solidFill>
+              <a:srgbClr val="CBD5E0"/>
+            </a:solidFill>
+            <a:prstDash val="solid"/>
+          </a:ln>
+        </p:spPr>
+      </p:sp>
+      <p:sp>
+        <p:nvSpPr>
+          <p:cNvPr id="25" name="Shape 23"/>
+          <p:cNvSpPr/>
+          <p:nvPr/>
+        </p:nvSpPr>
+        <p:spPr>
+          <a:xfrm>
+            <a:off x="9354083" y="1792224"/>
+            <a:ext cx="384048" cy="384048"/>
+          </a:xfrm>
+          <a:prstGeom prst="ellipse">
+            <a:avLst/>
+          </a:prstGeom>
+          <a:solidFill>
+            <a:srgbClr val="B98A2E"/>
+          </a:solidFill>
+          <a:ln/>
+        </p:spPr>
+      </p:sp>
+      <p:sp>
+        <p:nvSpPr>
+          <p:cNvPr id="26" name="Text 24"/>
+          <p:cNvSpPr/>
+          <p:nvPr/>
+        </p:nvSpPr>
+        <p:spPr>
+          <a:xfrm>
+            <a:off x="9354083" y="1792224"/>
+            <a:ext cx="384048" cy="384048"/>
+          </a:xfrm>
+          <a:prstGeom prst="rect">
+            <a:avLst/>
+          </a:prstGeom>
+          <a:noFill/>
+          <a:ln/>
+        </p:spPr>
+        <p:txBody>
+          <a:bodyPr wrap="square" lIns="0" tIns="0" rIns="0" bIns="0" rtlCol="0" anchor="ctr"/>
+          <a:lstStyle/>
+          <a:p>
+            <a:pPr algn="ctr" indent="0" marL="0">
+              <a:buNone/>
+            </a:pPr>
+            <a:r>
+              <a:rPr lang="en-US" sz="1300" b="1" dirty="0">
+                <a:solidFill>
+                  <a:srgbClr val="FFFFFF"/>
+                </a:solidFill>
+                <a:latin typeface="Arial" pitchFamily="34" charset="0"/>
+                <a:ea typeface="Arial" pitchFamily="34" charset="-122"/>
+                <a:cs typeface="Arial" pitchFamily="34" charset="-120"/>
+              </a:rPr>
+              <a:t>STEP 4</a:t>
+            </a:r>
+            <a:endParaRPr lang="en-US" sz="1300" dirty="0"/>
+          </a:p>
+        </p:txBody>
+      </p:sp>
+      <p:sp>
+        <p:nvSpPr>
+          <p:cNvPr id="27" name="Text 25"/>
+          <p:cNvSpPr/>
+          <p:nvPr/>
+        </p:nvSpPr>
+        <p:spPr>
+          <a:xfrm>
+            <a:off x="9354083" y="2304288"/>
+            <a:ext cx="2051228" cy="365760"/>
+          </a:xfrm>
+          <a:prstGeom prst="rect">
+            <a:avLst/>
+          </a:prstGeom>
+          <a:noFill/>
+          <a:ln/>
+        </p:spPr>
+        <p:txBody>
+          <a:bodyPr wrap="square" rtlCol="0" anchor="ctr"/>
+          <a:lstStyle/>
+          <a:p>
+            <a:pPr indent="0" marL="0">
+              <a:buNone/>
+            </a:pPr>
+            <a:r>
+              <a:rPr lang="en-US" sz="1600" b="1" dirty="0">
+                <a:solidFill>
+                  <a:srgbClr val="10161F"/>
+                </a:solidFill>
+                <a:latin typeface="Pretendard" pitchFamily="34" charset="0"/>
+                <a:ea typeface="Pretendard" pitchFamily="34" charset="-122"/>
+                <a:cs typeface="Pretendard" pitchFamily="34" charset="-120"/>
+              </a:rPr>
+              <a:t>LOI(투자의향서) 제출 → 가격 협의 개시</a:t>
+            </a:r>
+            <a:endParaRPr lang="en-US" sz="1600" dirty="0"/>
+          </a:p>
+        </p:txBody>
+      </p:sp>
+      <p:sp>
+        <p:nvSpPr>
+          <p:cNvPr id="28" name="Text 26"/>
+          <p:cNvSpPr/>
+          <p:nvPr/>
+        </p:nvSpPr>
+        <p:spPr>
+          <a:xfrm>
+            <a:off x="9354083" y="2761488"/>
+            <a:ext cx="2051228" cy="1828800"/>
+          </a:xfrm>
+          <a:prstGeom prst="rect">
+            <a:avLst/>
+          </a:prstGeom>
+          <a:noFill/>
+          <a:ln/>
+        </p:spPr>
+        <p:txBody>
+          <a:bodyPr wrap="square" rtlCol="0" anchor="t"/>
+          <a:lstStyle/>
+          <a:p>
+            <a:pPr indent="0" marL="0">
+              <a:buNone/>
+            </a:pPr>
+            <a:endParaRPr lang="en-US" sz="1100" dirty="0"/>
+          </a:p>
+        </p:txBody>
+      </p:sp>
+      <p:sp>
+        <p:nvSpPr>
+          <p:cNvPr id="29" name="Text 27"/>
           <p:cNvSpPr/>
           <p:nvPr/>
         </p:nvSpPr>
@@ -8638,7 +10126,7 @@
       </p:sp>
       <p:sp>
         <p:nvSpPr>
-          <p:cNvPr id="12" name="Text 10"/>
+          <p:cNvPr id="30" name="Text 28"/>
           <p:cNvSpPr/>
           <p:nvPr/>
         </p:nvSpPr>

--- a/docs/test/stress/e2e-outputs/development_case12_yeoksam_dev_basic.pptx
+++ b/docs/test/stress/e2e-outputs/development_case12_yeoksam_dev_basic.pptx
@@ -1905,7 +1905,7 @@
                 <a:ea typeface="Arial" pitchFamily="34" charset="-122"/>
                 <a:cs typeface="Arial" pitchFamily="34" charset="-120"/>
               </a:rPr>
-              <a:t>BASIC IM</a:t>
+              <a:t>INVESTMENT MEMORANDUM</a:t>
             </a:r>
             <a:endParaRPr lang="en-US" sz="1000" dirty="0"/>
           </a:p>
@@ -3988,7 +3988,7 @@
                 <a:ea typeface="Pretendard" pitchFamily="34" charset="-122"/>
                 <a:cs typeface="Pretendard" pitchFamily="34" charset="-120"/>
               </a:rPr>
-              <a:t>강남권역 내 신축부지, 매각 희망가 210억. 입지·임대차 현황을 감안할 때 투자 검토 가치가 있는 물건입니다.</a:t>
+              <a:t>강남권역 소재 신축부지, 희망가 210억 투자 검토 자료입니다.</a:t>
             </a:r>
             <a:endParaRPr lang="en-US" sz="1500" dirty="0"/>
           </a:p>
@@ -4610,7 +4610,7 @@
                 <a:ea typeface="Pretendard" pitchFamily="34" charset="-122"/>
                 <a:cs typeface="Pretendard" pitchFamily="34" charset="-120"/>
               </a:rPr>
-              <a:t>원금 안전판: 강남권역 핵심 입지 및 우량 대지 지분 가치로 하방 경직성 확보</a:t>
+              <a:t>입지 가치: 강남권역 소재 자산으로 중장기 자산 가치 및 안정적 수요 검토</a:t>
             </a:r>
             <a:endParaRPr lang="en-US" sz="1150" dirty="0"/>
           </a:p>
@@ -4742,7 +4742,7 @@
                 <a:ea typeface="Pretendard" pitchFamily="34" charset="-122"/>
                 <a:cs typeface="Pretendard" pitchFamily="34" charset="-120"/>
               </a:rPr>
-              <a:t>수익 안정성: 매각 희망가 210억 대비 안정적인 월 임대수익 창출 구조</a:t>
+              <a:t>임대 구조: 210억 수준의 가격대 및 현 임대차 기반의 현금흐름 분석</a:t>
             </a:r>
             <a:endParaRPr lang="en-US" sz="1150" dirty="0"/>
           </a:p>
@@ -4874,7 +4874,7 @@
                 <a:ea typeface="Pretendard" pitchFamily="34" charset="-122"/>
                 <a:cs typeface="Pretendard" pitchFamily="34" charset="-120"/>
               </a:rPr>
-              <a:t>미래 가치: 향후 권역 지가 상승 및 공법상 잔여 용적률 활용 밸류업 기회</a:t>
+              <a:t>실사 점검: 계약서 및 공부 확인을 통한 권리관계·물리적 상태 정밀 진단</a:t>
             </a:r>
             <a:endParaRPr lang="en-US" sz="1150" dirty="0"/>
           </a:p>
@@ -5187,7 +5187,7 @@
                 <a:ea typeface="Pretendard" pitchFamily="34" charset="-122"/>
                 <a:cs typeface="Pretendard" pitchFamily="34" charset="-120"/>
               </a:rPr>
-              <a:t>교통 접근성</a:t>
+              <a:t>교통 접근성 상세 정보는 담당 브로커를 통해 확인하</a:t>
             </a:r>
             <a:endParaRPr lang="en-US" sz="1300" dirty="0"/>
           </a:p>
@@ -5220,6 +5220,102 @@
               </a:lnSpc>
               <a:buNone/>
             </a:pPr>
+            <a:endParaRPr lang="en-US" sz="1300" dirty="0"/>
+          </a:p>
+        </p:txBody>
+      </p:sp>
+      <p:sp>
+        <p:nvSpPr>
+          <p:cNvPr id="9" name="Shape 6"/>
+          <p:cNvSpPr/>
+          <p:nvPr/>
+        </p:nvSpPr>
+        <p:spPr>
+          <a:xfrm>
+            <a:off x="6053328" y="1975104"/>
+            <a:ext cx="5571439" cy="0"/>
+          </a:xfrm>
+          <a:prstGeom prst="line">
+            <a:avLst/>
+          </a:prstGeom>
+          <a:noFill/>
+          <a:ln w="3810">
+            <a:solidFill>
+              <a:srgbClr val="CBD5E0"/>
+            </a:solidFill>
+            <a:prstDash val="solid"/>
+          </a:ln>
+        </p:spPr>
+      </p:sp>
+      <p:sp>
+        <p:nvSpPr>
+          <p:cNvPr id="10" name="Text 7"/>
+          <p:cNvSpPr/>
+          <p:nvPr/>
+        </p:nvSpPr>
+        <p:spPr>
+          <a:xfrm>
+            <a:off x="6053328" y="1975104"/>
+            <a:ext cx="2117147" cy="493776"/>
+          </a:xfrm>
+          <a:prstGeom prst="rect">
+            <a:avLst/>
+          </a:prstGeom>
+          <a:noFill/>
+          <a:ln/>
+        </p:spPr>
+        <p:txBody>
+          <a:bodyPr wrap="square" lIns="0" tIns="0" rIns="0" bIns="0" rtlCol="0" anchor="ctr"/>
+          <a:lstStyle/>
+          <a:p>
+            <a:pPr indent="0" marL="0">
+              <a:lnSpc>
+                <a:spcPct val="120000"/>
+              </a:lnSpc>
+              <a:buNone/>
+            </a:pPr>
+            <a:r>
+              <a:rPr lang="en-US" sz="1300" dirty="0">
+                <a:solidFill>
+                  <a:srgbClr val="718096"/>
+                </a:solidFill>
+                <a:latin typeface="Pretendard" pitchFamily="34" charset="0"/>
+                <a:ea typeface="Pretendard" pitchFamily="34" charset="-122"/>
+                <a:cs typeface="Pretendard" pitchFamily="34" charset="-120"/>
+              </a:rPr>
+              <a:t>[건물] 주변 상권</a:t>
+            </a:r>
+            <a:endParaRPr lang="en-US" sz="1300" dirty="0"/>
+          </a:p>
+        </p:txBody>
+      </p:sp>
+      <p:sp>
+        <p:nvSpPr>
+          <p:cNvPr id="11" name="Text 8"/>
+          <p:cNvSpPr/>
+          <p:nvPr/>
+        </p:nvSpPr>
+        <p:spPr>
+          <a:xfrm>
+            <a:off x="8170475" y="1975104"/>
+            <a:ext cx="3454292" cy="493776"/>
+          </a:xfrm>
+          <a:prstGeom prst="rect">
+            <a:avLst/>
+          </a:prstGeom>
+          <a:noFill/>
+          <a:ln/>
+        </p:spPr>
+        <p:txBody>
+          <a:bodyPr wrap="square" lIns="0" tIns="0" rIns="0" bIns="0" rtlCol="0" anchor="ctr"/>
+          <a:lstStyle/>
+          <a:p>
+            <a:pPr indent="0" marL="0">
+              <a:lnSpc>
+                <a:spcPct val="120000"/>
+              </a:lnSpc>
+              <a:buNone/>
+            </a:pPr>
             <a:r>
               <a:rPr lang="en-US" sz="1300" b="1" dirty="0">
                 <a:solidFill>
@@ -5229,7 +5325,7 @@
                 <a:ea typeface="Pretendard" pitchFamily="34" charset="-122"/>
                 <a:cs typeface="Pretendard" pitchFamily="34" charset="-120"/>
               </a:rPr>
-              <a:t>{"ok":true,"mocked":true,"extractedFields":{"area_signal":"역삼","asset_type":"오피스빌딩","price_band":"300억","size_signal":"3000평(약 9917.</a:t>
+              <a:t>강남권역 내 주요 비즈니스 및 유동인구 풍부한 상권 입지 ### [성장] 입지 평가</a:t>
             </a:r>
             <a:endParaRPr lang="en-US" sz="1300" dirty="0"/>
           </a:p>
@@ -5237,7 +5333,103 @@
       </p:sp>
       <p:sp>
         <p:nvSpPr>
-          <p:cNvPr id="9" name="Text 6"/>
+          <p:cNvPr id="12" name="Shape 9"/>
+          <p:cNvSpPr/>
+          <p:nvPr/>
+        </p:nvSpPr>
+        <p:spPr>
+          <a:xfrm>
+            <a:off x="6053328" y="2468880"/>
+            <a:ext cx="5571439" cy="0"/>
+          </a:xfrm>
+          <a:prstGeom prst="line">
+            <a:avLst/>
+          </a:prstGeom>
+          <a:noFill/>
+          <a:ln w="3810">
+            <a:solidFill>
+              <a:srgbClr val="CBD5E0"/>
+            </a:solidFill>
+            <a:prstDash val="solid"/>
+          </a:ln>
+        </p:spPr>
+      </p:sp>
+      <p:sp>
+        <p:nvSpPr>
+          <p:cNvPr id="13" name="Text 10"/>
+          <p:cNvSpPr/>
+          <p:nvPr/>
+        </p:nvSpPr>
+        <p:spPr>
+          <a:xfrm>
+            <a:off x="6053328" y="2468880"/>
+            <a:ext cx="2117147" cy="493776"/>
+          </a:xfrm>
+          <a:prstGeom prst="rect">
+            <a:avLst/>
+          </a:prstGeom>
+          <a:noFill/>
+          <a:ln/>
+        </p:spPr>
+        <p:txBody>
+          <a:bodyPr wrap="square" lIns="0" tIns="0" rIns="0" bIns="0" rtlCol="0" anchor="ctr"/>
+          <a:lstStyle/>
+          <a:p>
+            <a:pPr indent="0" marL="0">
+              <a:lnSpc>
+                <a:spcPct val="120000"/>
+              </a:lnSpc>
+              <a:buNone/>
+            </a:pPr>
+            <a:r>
+              <a:rPr lang="en-US" sz="1300" dirty="0">
+                <a:solidFill>
+                  <a:srgbClr val="718096"/>
+                </a:solidFill>
+                <a:latin typeface="Pretendard" pitchFamily="34" charset="0"/>
+                <a:ea typeface="Pretendard" pitchFamily="34" charset="-122"/>
+                <a:cs typeface="Pretendard" pitchFamily="34" charset="-120"/>
+              </a:rPr>
+              <a:t>강남권역 내 위치하며 접근성과 가시성이 양호한 입지</a:t>
+            </a:r>
+            <a:endParaRPr lang="en-US" sz="1300" dirty="0"/>
+          </a:p>
+        </p:txBody>
+      </p:sp>
+      <p:sp>
+        <p:nvSpPr>
+          <p:cNvPr id="14" name="Text 11"/>
+          <p:cNvSpPr/>
+          <p:nvPr/>
+        </p:nvSpPr>
+        <p:spPr>
+          <a:xfrm>
+            <a:off x="8170475" y="2468880"/>
+            <a:ext cx="3454292" cy="493776"/>
+          </a:xfrm>
+          <a:prstGeom prst="rect">
+            <a:avLst/>
+          </a:prstGeom>
+          <a:noFill/>
+          <a:ln/>
+        </p:spPr>
+        <p:txBody>
+          <a:bodyPr wrap="square" lIns="0" tIns="0" rIns="0" bIns="0" rtlCol="0" anchor="ctr"/>
+          <a:lstStyle/>
+          <a:p>
+            <a:pPr indent="0" marL="0">
+              <a:lnSpc>
+                <a:spcPct val="120000"/>
+              </a:lnSpc>
+              <a:buNone/>
+            </a:pPr>
+            <a:endParaRPr lang="en-US" sz="1300" dirty="0"/>
+          </a:p>
+        </p:txBody>
+      </p:sp>
+      <p:sp>
+        <p:nvSpPr>
+          <p:cNvPr id="15" name="Text 12"/>
           <p:cNvSpPr/>
           <p:nvPr/>
         </p:nvSpPr>
@@ -5276,7 +5468,7 @@
       </p:sp>
       <p:sp>
         <p:nvSpPr>
-          <p:cNvPr id="10" name="Text 7"/>
+          <p:cNvPr id="16" name="Text 13"/>
           <p:cNvSpPr/>
           <p:nvPr/>
         </p:nvSpPr>
@@ -5310,45 +5502,6 @@
               <a:t>3</a:t>
             </a:r>
             <a:endParaRPr lang="en-US" sz="900" dirty="0"/>
-          </a:p>
-        </p:txBody>
-      </p:sp>
-      <p:sp>
-        <p:nvSpPr>
-          <p:cNvPr id="11" name="Text 8"/>
-          <p:cNvSpPr/>
-          <p:nvPr/>
-        </p:nvSpPr>
-        <p:spPr>
-          <a:xfrm>
-            <a:off x="566928" y="1481328"/>
-            <a:ext cx="11057839" cy="9692640"/>
-          </a:xfrm>
-          <a:prstGeom prst="rect">
-            <a:avLst/>
-          </a:prstGeom>
-          <a:noFill/>
-          <a:ln/>
-        </p:spPr>
-        <p:txBody>
-          <a:bodyPr wrap="square" lIns="0" tIns="0" rIns="0" bIns="0" rtlCol="0" anchor="t"/>
-          <a:lstStyle/>
-          <a:p>
-            <a:pPr indent="0" marL="0">
-              <a:buNone/>
-            </a:pPr>
-            <a:r>
-              <a:rPr lang="en-US" sz="1000" dirty="0">
-                <a:solidFill>
-                  <a:srgbClr val="10161F"/>
-                </a:solidFill>
-                <a:latin typeface="Pretendard" pitchFamily="34" charset="0"/>
-                <a:ea typeface="Pretendard" pitchFamily="34" charset="-122"/>
-                <a:cs typeface="Pretendard" pitchFamily="34" charset="-120"/>
-              </a:rPr>
-              <a:t>{"ok":true,"mocked":true,"extractedFields":{"area_signal":"역삼","asset_type":"오피스빌딩","price_band":"300억","size_signal":"3000평(약 9917.4㎡)"},"extractedFacts":{"region":"역삼","exactAddressCandidate":"역삼동 742-1","assetType":"오피스빌딩","priceText":"300억","sizeText":"3000평(약 9917.4㎡)","currentUse":"오피스","currentUseSignal":"근린생활시설","leaseSignal":"임대중","vacancySignal":"공실없음","tenantNames":["쿠팡","네이버"],"unitRentTexts":["301호: 1500만"],"sellerMotivationText":"자산 효율화","brokerNotes":["초역세권 매물"]},"detectedSensitiveFields":["exact_address","tenant_name"],"ambiguousFields":[],"warnings":[],"areaSignal":"역삼","assetType":"오피스빌딩","priceBand":"300억","sizeSignal":"3000평(약 9917.4㎡)","dealType":"매각","buildingName":"역삼 센트럴타워","exactAddress":"역삼동 742-1","totalFloorArea":9917.3,"buildYear":2015,"currentUseSignal":"근린생활시설","vacancySignal":"공실 없음","fitSummary":"초역세권 근생 빌딩으로 시행/사옥 매입에 최적화","cautionSummary":"주요 임차 업종 만기 조율 필요","hiddenFields":["exact_address","seller_motivation"],"confidence":{"areaSignal":"confirmed","assetType":"confirmed","priceBand":"ai_hypothesis","fitSummary":"ai_hypothesis"},"missingData":["sizeSignal"],"boundaryNote":"본 자료는 실거래 통계 기반 참고치입니다.","buyerType":"법인 사옥형","budgetRange":{"min":50,"max":80,"display":"50억~80억"},"preferredRegions":["강남","성수"],"assetTypes":["꼬마빌딩","사옥용"],"purchasePurpose":"사옥용 매입","mustHave":["초역세권","주차"],"niceToHave":["테라스","루프탑"],"riskTolerance":"medium","financingNote":"자본금 50% 준비","missingQuestions":["구체적인 입주 시기가 언제인가요?","선호하는 수익률이 있나요?"],"privacyNotes":["연락처 비공개"],"fitReasons":["매수자 예산(50-80억)에 부합하는 매물입니다.","요청하신 성수/강남 권역에 해당합니다."],"cautionReasons":["요청한 용도와 달리 명도 협의가 다소 필요합니다."],"recommendedNextAction":"현장 답사 제안","kakaoMessage":"안녕하세요! 요청하신 조건에 부합하는 추천 매물이 있어 안내해 드립니다. 확인해보시고 피드백 부탁드립니다.","title":"강남 역삼역 초역세권 오피스 사옥용 빌딩 매각","shortSummary":"역삼역 도보 5분 거리의 준신축급 대형 오피스빌딩입니다.","dealPoints":["초역세권","사옥 최적"],"cautionPoints":["명도 조율 필요"],"hiddenInfoNotice":["보증금 및 지번은 인가 후 확인 가능"],"gateMessage":"G1 등급 등록이 필요합니다.","kakaoText":"강남 역삼역 오피스 빌딩 매각 안내입니다.","exactUnitCandidate":"101호","floor":"1층","areaSqmText":"150㎡","spaceType":"office","depositText":"5000만","monthlyRentText":"400만","maintenanceFeeText":"50만","availableFromText":"즉시입주","leaseTermMonthsText":"24","incentivesText":"렌트프리 2개월","restrictions":[],"landlordIdentity":"김성수","currentTenant":"스타트업","vacancyReason":"이전 확장","rentNegotiation":"협의 가능","region":"성수동","areaSqm":150,"deposit":5000,"monthlyRent":400,"maintenanceFee":50,"availableFrom":"즉시입주","leaseTermMonths":24,"incentives":{"rentFreeMonths":2,"interiorSupport":"일부 인테리어 지원","freeRentDetail":"렌트프리 2개월 지원"},"shortSummaryLease":"성수역 도보 5분 거리 1층 리테일 상가 매물입니다."}</a:t>
-            </a:r>
-            <a:endParaRPr lang="en-US" sz="1000" dirty="0"/>
           </a:p>
         </p:txBody>
       </p:sp>
@@ -5596,7 +5749,7 @@
                 <a:ea typeface="Pretendard" pitchFamily="34" charset="-122"/>
                 <a:cs typeface="Pretendard" pitchFamily="34" charset="-120"/>
               </a:rPr>
-              <a:t>소재지</a:t>
+              <a:t>{"ok"</a:t>
             </a:r>
             <a:endParaRPr lang="en-US" sz="1400" dirty="0"/>
           </a:p>
@@ -5638,7 +5791,7 @@
                 <a:ea typeface="Pretendard" pitchFamily="34" charset="-122"/>
                 <a:cs typeface="Pretendard" pitchFamily="34" charset="-120"/>
               </a:rPr>
-              <a:t>강남권역</a:t>
+              <a:t>true,"mocked":true,"extractedFields":{"area_signal":"역삼","asset_type":"오피스빌딩","price_band":"300억","size_signal":"3000평(약 9917.4㎡)"},"extractedFacts":{"region":"역삼","exactAddressCandidate":"역삼동 742-1","assetType":"오피스빌딩","priceText":"300억","sizeText":"3000평(약 9917.4㎡)","currentUse":"오피스","currentUseSignal":"근린생활시설","leaseSignal":"임대중","vacancySignal":"공실없음","tenantNames":"쿠팡","네이버","unitRentTexts":"301호: 1500만","sellerMotivationText":"자산 효율화","brokerNotes":"초역세권 매물"},"detectedSensitiveFields":"exact_address","tenant_name","ambiguousFields":,"warnings":,"areaSignal":"역삼","assetType":"오피스빌딩","priceBand":"300억","sizeSignal":"3000평(약 9917.4㎡)","dealType":"매각","buildingName":"역삼 센트럴타워","exactAddress":"역삼동 742-1","totalFloorArea":9917.3,"buildYear":2015,"currentUseSignal":"근린생활시설","vacancySignal":"공실 없음","fitSummary":"초역세권 근생 빌딩으로 시행/사옥 매입에 최적화","cautionSummary":"주요 임차인 만기 조율 필요","hiddenFields":"exact_address","seller_motivation","confidence":{"areaSignal":"confirmed","assetType":"confirmed","priceBand":"ai_hypothesis","fitSummary":"ai_hypothesis"},"missingData":"sizeSignal","boundaryNote":"본 자료는 실거래 통계 기반 참고치입니다.","buyerType":"법인 사옥형","budgetRange":{"min":50,"max":80,"display":"50억~80억"},"preferredRegions":"강남","성수","assetTypes":"꼬마빌딩","사옥용","purchasePurpose":"사옥용 매입","mustHave":"초역세권","주차","niceToHave":"테라스","루프탑","riskTolerance":"medium","financingNote":"자본금 50% 준비","missingQuestions":"구체적인 입주 시기가 언제인가요?","선호하는 수익률이 있나요?","privacyNotes":"연락처 비공개","fitReasons":"매수자 예산(50-80억)에 부합하는 매물입니다.","요청하신 성수/강남 권역에 해당합니다.","cautionReasons":"요청한 용도와 달리 명도 협의가 다소 필요합니다.","recommendedNextAction":"현장 답사 제안","kakaoMessage":"안녕하세요! 요청하신 조건에 부합하는 추천 매물이 있어 안내해 드립니다. 확인해보시고 피드백 부탁드립니다.","title":"강남 역삼역 초역세권 오피스 사옥용 빌딩 매각","shortSummary":"역삼역 도보 5분 거리의 준신축급 대형 오피스빌딩입니다.","dealPoints":"초역세권","사옥 최적","cautionPoints":"명도 조율 필요","hiddenInfoNotice":"보증금 및 지번은 인가 후 확인 가능","gateMessage":"G1 등급 등록이 필요합니다.","kakaoText":"강남 역삼역 오피스 빌딩 매각 안내입니다.","exactUnitCandidate":"101호","floor":"1층","areaSqmText":"150㎡","spaceType":"office","depositText":"5000만","monthlyRentText":"400만","maintenanceFeeText":"50만","availableFromText":"즉시입주","leaseTermMonthsText":"24","incentivesText":"렌트프리 2개월","restrictions":,"landlordIdentity":"김성수","currentTenant":"스타트업","vacancyReason":"이전 확장","rentNegotiation":"협의 가능","region":"성수동","areaSqm":150,"deposit":5000,"monthlyRent":400,"maintenanceFee":50,"availableFrom":"즉시입주","leaseTermMonths":24,"incentives":{"rentFreeMonths":2,"interiorSupport":"일부 인테리어 지원","freeRentDetail":"렌트프리 2개월 지원"},"shortSummaryLease":"성수역 도보 5분 거리 1층 리테일 상가 매물입니다."}</a:t>
             </a:r>
             <a:endParaRPr lang="en-US" sz="1400" dirty="0"/>
           </a:p>
@@ -5647,862 +5800,6 @@
       <p:sp>
         <p:nvSpPr>
           <p:cNvPr id="9" name="Shape 7"/>
-          <p:cNvSpPr/>
-          <p:nvPr/>
-        </p:nvSpPr>
-        <p:spPr>
-          <a:xfrm>
-            <a:off x="566928" y="2048256"/>
-            <a:ext cx="6858000" cy="0"/>
-          </a:xfrm>
-          <a:prstGeom prst="line">
-            <a:avLst/>
-          </a:prstGeom>
-          <a:noFill/>
-          <a:ln w="3810">
-            <a:solidFill>
-              <a:srgbClr val="CBD5E0"/>
-            </a:solidFill>
-            <a:prstDash val="solid"/>
-          </a:ln>
-        </p:spPr>
-      </p:sp>
-      <p:sp>
-        <p:nvSpPr>
-          <p:cNvPr id="10" name="Text 8"/>
-          <p:cNvSpPr/>
-          <p:nvPr/>
-        </p:nvSpPr>
-        <p:spPr>
-          <a:xfrm>
-            <a:off x="566928" y="2048256"/>
-            <a:ext cx="2606040" cy="402336"/>
-          </a:xfrm>
-          <a:prstGeom prst="rect">
-            <a:avLst/>
-          </a:prstGeom>
-          <a:noFill/>
-          <a:ln/>
-        </p:spPr>
-        <p:txBody>
-          <a:bodyPr wrap="square" lIns="0" tIns="0" rIns="0" bIns="0" rtlCol="0" anchor="ctr"/>
-          <a:lstStyle/>
-          <a:p>
-            <a:pPr indent="0" marL="0">
-              <a:lnSpc>
-                <a:spcPct val="120000"/>
-              </a:lnSpc>
-              <a:buNone/>
-            </a:pPr>
-            <a:r>
-              <a:rPr lang="en-US" sz="1400" dirty="0">
-                <a:solidFill>
-                  <a:srgbClr val="718096"/>
-                </a:solidFill>
-                <a:latin typeface="Pretendard" pitchFamily="34" charset="0"/>
-                <a:ea typeface="Pretendard" pitchFamily="34" charset="-122"/>
-                <a:cs typeface="Pretendard" pitchFamily="34" charset="-120"/>
-              </a:rPr>
-              <a:t>주요 용도</a:t>
-            </a:r>
-            <a:endParaRPr lang="en-US" sz="1400" dirty="0"/>
-          </a:p>
-        </p:txBody>
-      </p:sp>
-      <p:sp>
-        <p:nvSpPr>
-          <p:cNvPr id="11" name="Text 9"/>
-          <p:cNvSpPr/>
-          <p:nvPr/>
-        </p:nvSpPr>
-        <p:spPr>
-          <a:xfrm>
-            <a:off x="3172968" y="2048256"/>
-            <a:ext cx="4251960" cy="402336"/>
-          </a:xfrm>
-          <a:prstGeom prst="rect">
-            <a:avLst/>
-          </a:prstGeom>
-          <a:noFill/>
-          <a:ln/>
-        </p:spPr>
-        <p:txBody>
-          <a:bodyPr wrap="square" lIns="0" tIns="0" rIns="0" bIns="0" rtlCol="0" anchor="ctr"/>
-          <a:lstStyle/>
-          <a:p>
-            <a:pPr indent="0" marL="0">
-              <a:lnSpc>
-                <a:spcPct val="120000"/>
-              </a:lnSpc>
-              <a:buNone/>
-            </a:pPr>
-            <a:r>
-              <a:rPr lang="en-US" sz="1400" b="1" dirty="0">
-                <a:solidFill>
-                  <a:srgbClr val="10161F"/>
-                </a:solidFill>
-                <a:latin typeface="Pretendard" pitchFamily="34" charset="0"/>
-                <a:ea typeface="Pretendard" pitchFamily="34" charset="-122"/>
-                <a:cs typeface="Pretendard" pitchFamily="34" charset="-120"/>
-              </a:rPr>
-              <a:t>근린생활시설</a:t>
-            </a:r>
-            <a:endParaRPr lang="en-US" sz="1400" dirty="0"/>
-          </a:p>
-        </p:txBody>
-      </p:sp>
-      <p:sp>
-        <p:nvSpPr>
-          <p:cNvPr id="12" name="Shape 10"/>
-          <p:cNvSpPr/>
-          <p:nvPr/>
-        </p:nvSpPr>
-        <p:spPr>
-          <a:xfrm>
-            <a:off x="566928" y="2450592"/>
-            <a:ext cx="6858000" cy="0"/>
-          </a:xfrm>
-          <a:prstGeom prst="line">
-            <a:avLst/>
-          </a:prstGeom>
-          <a:noFill/>
-          <a:ln w="3810">
-            <a:solidFill>
-              <a:srgbClr val="CBD5E0"/>
-            </a:solidFill>
-            <a:prstDash val="solid"/>
-          </a:ln>
-        </p:spPr>
-      </p:sp>
-      <p:sp>
-        <p:nvSpPr>
-          <p:cNvPr id="13" name="Text 11"/>
-          <p:cNvSpPr/>
-          <p:nvPr/>
-        </p:nvSpPr>
-        <p:spPr>
-          <a:xfrm>
-            <a:off x="566928" y="2450592"/>
-            <a:ext cx="2606040" cy="402336"/>
-          </a:xfrm>
-          <a:prstGeom prst="rect">
-            <a:avLst/>
-          </a:prstGeom>
-          <a:noFill/>
-          <a:ln/>
-        </p:spPr>
-        <p:txBody>
-          <a:bodyPr wrap="square" lIns="0" tIns="0" rIns="0" bIns="0" rtlCol="0" anchor="ctr"/>
-          <a:lstStyle/>
-          <a:p>
-            <a:pPr indent="0" marL="0">
-              <a:lnSpc>
-                <a:spcPct val="120000"/>
-              </a:lnSpc>
-              <a:buNone/>
-            </a:pPr>
-            <a:r>
-              <a:rPr lang="en-US" sz="1400" dirty="0">
-                <a:solidFill>
-                  <a:srgbClr val="718096"/>
-                </a:solidFill>
-                <a:latin typeface="Pretendard" pitchFamily="34" charset="0"/>
-                <a:ea typeface="Pretendard" pitchFamily="34" charset="-122"/>
-                <a:cs typeface="Pretendard" pitchFamily="34" charset="-120"/>
-              </a:rPr>
-              <a:t>연면적</a:t>
-            </a:r>
-            <a:endParaRPr lang="en-US" sz="1400" dirty="0"/>
-          </a:p>
-        </p:txBody>
-      </p:sp>
-      <p:sp>
-        <p:nvSpPr>
-          <p:cNvPr id="14" name="Text 12"/>
-          <p:cNvSpPr/>
-          <p:nvPr/>
-        </p:nvSpPr>
-        <p:spPr>
-          <a:xfrm>
-            <a:off x="3172968" y="2450592"/>
-            <a:ext cx="4251960" cy="402336"/>
-          </a:xfrm>
-          <a:prstGeom prst="rect">
-            <a:avLst/>
-          </a:prstGeom>
-          <a:noFill/>
-          <a:ln/>
-        </p:spPr>
-        <p:txBody>
-          <a:bodyPr wrap="square" lIns="0" tIns="0" rIns="0" bIns="0" rtlCol="0" anchor="ctr"/>
-          <a:lstStyle/>
-          <a:p>
-            <a:pPr indent="0" marL="0">
-              <a:lnSpc>
-                <a:spcPct val="120000"/>
-              </a:lnSpc>
-              <a:buNone/>
-            </a:pPr>
-            <a:r>
-              <a:rPr lang="en-US" sz="1400" b="1" dirty="0">
-                <a:solidFill>
-                  <a:srgbClr val="10161F"/>
-                </a:solidFill>
-                <a:latin typeface="Pretendard" pitchFamily="34" charset="0"/>
-                <a:ea typeface="Pretendard" pitchFamily="34" charset="-122"/>
-                <a:cs typeface="Pretendard" pitchFamily="34" charset="-120"/>
-              </a:rPr>
-              <a:t>5,000㎡ (약 1513평(약 5001.7㎡))</a:t>
-            </a:r>
-            <a:endParaRPr lang="en-US" sz="1400" dirty="0"/>
-          </a:p>
-        </p:txBody>
-      </p:sp>
-      <p:sp>
-        <p:nvSpPr>
-          <p:cNvPr id="15" name="Shape 13"/>
-          <p:cNvSpPr/>
-          <p:nvPr/>
-        </p:nvSpPr>
-        <p:spPr>
-          <a:xfrm>
-            <a:off x="566928" y="2852928"/>
-            <a:ext cx="6858000" cy="0"/>
-          </a:xfrm>
-          <a:prstGeom prst="line">
-            <a:avLst/>
-          </a:prstGeom>
-          <a:noFill/>
-          <a:ln w="3810">
-            <a:solidFill>
-              <a:srgbClr val="CBD5E0"/>
-            </a:solidFill>
-            <a:prstDash val="solid"/>
-          </a:ln>
-        </p:spPr>
-      </p:sp>
-      <p:sp>
-        <p:nvSpPr>
-          <p:cNvPr id="16" name="Text 14"/>
-          <p:cNvSpPr/>
-          <p:nvPr/>
-        </p:nvSpPr>
-        <p:spPr>
-          <a:xfrm>
-            <a:off x="566928" y="2852928"/>
-            <a:ext cx="2606040" cy="402336"/>
-          </a:xfrm>
-          <a:prstGeom prst="rect">
-            <a:avLst/>
-          </a:prstGeom>
-          <a:noFill/>
-          <a:ln/>
-        </p:spPr>
-        <p:txBody>
-          <a:bodyPr wrap="square" lIns="0" tIns="0" rIns="0" bIns="0" rtlCol="0" anchor="ctr"/>
-          <a:lstStyle/>
-          <a:p>
-            <a:pPr indent="0" marL="0">
-              <a:lnSpc>
-                <a:spcPct val="120000"/>
-              </a:lnSpc>
-              <a:buNone/>
-            </a:pPr>
-            <a:r>
-              <a:rPr lang="en-US" sz="1400" dirty="0">
-                <a:solidFill>
-                  <a:srgbClr val="718096"/>
-                </a:solidFill>
-                <a:latin typeface="Pretendard" pitchFamily="34" charset="0"/>
-                <a:ea typeface="Pretendard" pitchFamily="34" charset="-122"/>
-                <a:cs typeface="Pretendard" pitchFamily="34" charset="-120"/>
-              </a:rPr>
-              <a:t>대지면적</a:t>
-            </a:r>
-            <a:endParaRPr lang="en-US" sz="1400" dirty="0"/>
-          </a:p>
-        </p:txBody>
-      </p:sp>
-      <p:sp>
-        <p:nvSpPr>
-          <p:cNvPr id="17" name="Text 15"/>
-          <p:cNvSpPr/>
-          <p:nvPr/>
-        </p:nvSpPr>
-        <p:spPr>
-          <a:xfrm>
-            <a:off x="3172968" y="2852928"/>
-            <a:ext cx="4251960" cy="402336"/>
-          </a:xfrm>
-          <a:prstGeom prst="rect">
-            <a:avLst/>
-          </a:prstGeom>
-          <a:noFill/>
-          <a:ln/>
-        </p:spPr>
-        <p:txBody>
-          <a:bodyPr wrap="square" lIns="0" tIns="0" rIns="0" bIns="0" rtlCol="0" anchor="ctr"/>
-          <a:lstStyle/>
-          <a:p>
-            <a:pPr indent="0" marL="0">
-              <a:lnSpc>
-                <a:spcPct val="120000"/>
-              </a:lnSpc>
-              <a:buNone/>
-            </a:pPr>
-            <a:r>
-              <a:rPr lang="en-US" sz="1400" b="1" dirty="0">
-                <a:solidFill>
-                  <a:srgbClr val="10161F"/>
-                </a:solidFill>
-                <a:latin typeface="Pretendard" pitchFamily="34" charset="0"/>
-                <a:ea typeface="Pretendard" pitchFamily="34" charset="-122"/>
-                <a:cs typeface="Pretendard" pitchFamily="34" charset="-120"/>
-              </a:rPr>
-              <a:t>1,000㎡ (약 303평(약 1001.7㎡))</a:t>
-            </a:r>
-            <a:endParaRPr lang="en-US" sz="1400" dirty="0"/>
-          </a:p>
-        </p:txBody>
-      </p:sp>
-      <p:sp>
-        <p:nvSpPr>
-          <p:cNvPr id="18" name="Shape 16"/>
-          <p:cNvSpPr/>
-          <p:nvPr/>
-        </p:nvSpPr>
-        <p:spPr>
-          <a:xfrm>
-            <a:off x="566928" y="3255264"/>
-            <a:ext cx="6858000" cy="0"/>
-          </a:xfrm>
-          <a:prstGeom prst="line">
-            <a:avLst/>
-          </a:prstGeom>
-          <a:noFill/>
-          <a:ln w="3810">
-            <a:solidFill>
-              <a:srgbClr val="CBD5E0"/>
-            </a:solidFill>
-            <a:prstDash val="solid"/>
-          </a:ln>
-        </p:spPr>
-      </p:sp>
-      <p:sp>
-        <p:nvSpPr>
-          <p:cNvPr id="19" name="Text 17"/>
-          <p:cNvSpPr/>
-          <p:nvPr/>
-        </p:nvSpPr>
-        <p:spPr>
-          <a:xfrm>
-            <a:off x="566928" y="3255264"/>
-            <a:ext cx="2606040" cy="402336"/>
-          </a:xfrm>
-          <a:prstGeom prst="rect">
-            <a:avLst/>
-          </a:prstGeom>
-          <a:noFill/>
-          <a:ln/>
-        </p:spPr>
-        <p:txBody>
-          <a:bodyPr wrap="square" lIns="0" tIns="0" rIns="0" bIns="0" rtlCol="0" anchor="ctr"/>
-          <a:lstStyle/>
-          <a:p>
-            <a:pPr indent="0" marL="0">
-              <a:lnSpc>
-                <a:spcPct val="120000"/>
-              </a:lnSpc>
-              <a:buNone/>
-            </a:pPr>
-            <a:r>
-              <a:rPr lang="en-US" sz="1400" dirty="0">
-                <a:solidFill>
-                  <a:srgbClr val="718096"/>
-                </a:solidFill>
-                <a:latin typeface="Pretendard" pitchFamily="34" charset="0"/>
-                <a:ea typeface="Pretendard" pitchFamily="34" charset="-122"/>
-                <a:cs typeface="Pretendard" pitchFamily="34" charset="-120"/>
-              </a:rPr>
-              <a:t>용도지역</a:t>
-            </a:r>
-            <a:endParaRPr lang="en-US" sz="1400" dirty="0"/>
-          </a:p>
-        </p:txBody>
-      </p:sp>
-      <p:sp>
-        <p:nvSpPr>
-          <p:cNvPr id="20" name="Text 18"/>
-          <p:cNvSpPr/>
-          <p:nvPr/>
-        </p:nvSpPr>
-        <p:spPr>
-          <a:xfrm>
-            <a:off x="3172968" y="3255264"/>
-            <a:ext cx="4251960" cy="402336"/>
-          </a:xfrm>
-          <a:prstGeom prst="rect">
-            <a:avLst/>
-          </a:prstGeom>
-          <a:noFill/>
-          <a:ln/>
-        </p:spPr>
-        <p:txBody>
-          <a:bodyPr wrap="square" lIns="0" tIns="0" rIns="0" bIns="0" rtlCol="0" anchor="ctr"/>
-          <a:lstStyle/>
-          <a:p>
-            <a:pPr indent="0" marL="0">
-              <a:lnSpc>
-                <a:spcPct val="120000"/>
-              </a:lnSpc>
-              <a:buNone/>
-            </a:pPr>
-            <a:r>
-              <a:rPr lang="en-US" sz="1400" b="1" dirty="0">
-                <a:solidFill>
-                  <a:srgbClr val="10161F"/>
-                </a:solidFill>
-                <a:latin typeface="Pretendard" pitchFamily="34" charset="0"/>
-                <a:ea typeface="Pretendard" pitchFamily="34" charset="-122"/>
-                <a:cs typeface="Pretendard" pitchFamily="34" charset="-120"/>
-              </a:rPr>
-              <a:t>일반상업지역</a:t>
-            </a:r>
-            <a:endParaRPr lang="en-US" sz="1400" dirty="0"/>
-          </a:p>
-        </p:txBody>
-      </p:sp>
-      <p:sp>
-        <p:nvSpPr>
-          <p:cNvPr id="21" name="Shape 19"/>
-          <p:cNvSpPr/>
-          <p:nvPr/>
-        </p:nvSpPr>
-        <p:spPr>
-          <a:xfrm>
-            <a:off x="566928" y="3657600"/>
-            <a:ext cx="6858000" cy="0"/>
-          </a:xfrm>
-          <a:prstGeom prst="line">
-            <a:avLst/>
-          </a:prstGeom>
-          <a:noFill/>
-          <a:ln w="3810">
-            <a:solidFill>
-              <a:srgbClr val="CBD5E0"/>
-            </a:solidFill>
-            <a:prstDash val="solid"/>
-          </a:ln>
-        </p:spPr>
-      </p:sp>
-      <p:sp>
-        <p:nvSpPr>
-          <p:cNvPr id="22" name="Text 20"/>
-          <p:cNvSpPr/>
-          <p:nvPr/>
-        </p:nvSpPr>
-        <p:spPr>
-          <a:xfrm>
-            <a:off x="566928" y="3657600"/>
-            <a:ext cx="2606040" cy="402336"/>
-          </a:xfrm>
-          <a:prstGeom prst="rect">
-            <a:avLst/>
-          </a:prstGeom>
-          <a:noFill/>
-          <a:ln/>
-        </p:spPr>
-        <p:txBody>
-          <a:bodyPr wrap="square" lIns="0" tIns="0" rIns="0" bIns="0" rtlCol="0" anchor="ctr"/>
-          <a:lstStyle/>
-          <a:p>
-            <a:pPr indent="0" marL="0">
-              <a:lnSpc>
-                <a:spcPct val="120000"/>
-              </a:lnSpc>
-              <a:buNone/>
-            </a:pPr>
-            <a:r>
-              <a:rPr lang="en-US" sz="1400" dirty="0">
-                <a:solidFill>
-                  <a:srgbClr val="718096"/>
-                </a:solidFill>
-                <a:latin typeface="Pretendard" pitchFamily="34" charset="0"/>
-                <a:ea typeface="Pretendard" pitchFamily="34" charset="-122"/>
-                <a:cs typeface="Pretendard" pitchFamily="34" charset="-120"/>
-              </a:rPr>
-              <a:t>승강기</a:t>
-            </a:r>
-            <a:endParaRPr lang="en-US" sz="1400" dirty="0"/>
-          </a:p>
-        </p:txBody>
-      </p:sp>
-      <p:sp>
-        <p:nvSpPr>
-          <p:cNvPr id="23" name="Text 21"/>
-          <p:cNvSpPr/>
-          <p:nvPr/>
-        </p:nvSpPr>
-        <p:spPr>
-          <a:xfrm>
-            <a:off x="3172968" y="3657600"/>
-            <a:ext cx="4251960" cy="402336"/>
-          </a:xfrm>
-          <a:prstGeom prst="rect">
-            <a:avLst/>
-          </a:prstGeom>
-          <a:noFill/>
-          <a:ln/>
-        </p:spPr>
-        <p:txBody>
-          <a:bodyPr wrap="square" lIns="0" tIns="0" rIns="0" bIns="0" rtlCol="0" anchor="ctr"/>
-          <a:lstStyle/>
-          <a:p>
-            <a:pPr indent="0" marL="0">
-              <a:lnSpc>
-                <a:spcPct val="120000"/>
-              </a:lnSpc>
-              <a:buNone/>
-            </a:pPr>
-            <a:r>
-              <a:rPr lang="en-US" sz="1400" b="1" dirty="0">
-                <a:solidFill>
-                  <a:srgbClr val="10161F"/>
-                </a:solidFill>
-                <a:latin typeface="Pretendard" pitchFamily="34" charset="0"/>
-                <a:ea typeface="Pretendard" pitchFamily="34" charset="-122"/>
-                <a:cs typeface="Pretendard" pitchFamily="34" charset="-120"/>
-              </a:rPr>
-              <a:t>1대 (15인승 침대용)</a:t>
-            </a:r>
-            <a:endParaRPr lang="en-US" sz="1400" dirty="0"/>
-          </a:p>
-        </p:txBody>
-      </p:sp>
-      <p:sp>
-        <p:nvSpPr>
-          <p:cNvPr id="24" name="Shape 22"/>
-          <p:cNvSpPr/>
-          <p:nvPr/>
-        </p:nvSpPr>
-        <p:spPr>
-          <a:xfrm>
-            <a:off x="566928" y="4059936"/>
-            <a:ext cx="6858000" cy="0"/>
-          </a:xfrm>
-          <a:prstGeom prst="line">
-            <a:avLst/>
-          </a:prstGeom>
-          <a:noFill/>
-          <a:ln w="3810">
-            <a:solidFill>
-              <a:srgbClr val="CBD5E0"/>
-            </a:solidFill>
-            <a:prstDash val="solid"/>
-          </a:ln>
-        </p:spPr>
-      </p:sp>
-      <p:sp>
-        <p:nvSpPr>
-          <p:cNvPr id="25" name="Text 23"/>
-          <p:cNvSpPr/>
-          <p:nvPr/>
-        </p:nvSpPr>
-        <p:spPr>
-          <a:xfrm>
-            <a:off x="566928" y="4059936"/>
-            <a:ext cx="2606040" cy="402336"/>
-          </a:xfrm>
-          <a:prstGeom prst="rect">
-            <a:avLst/>
-          </a:prstGeom>
-          <a:noFill/>
-          <a:ln/>
-        </p:spPr>
-        <p:txBody>
-          <a:bodyPr wrap="square" lIns="0" tIns="0" rIns="0" bIns="0" rtlCol="0" anchor="ctr"/>
-          <a:lstStyle/>
-          <a:p>
-            <a:pPr indent="0" marL="0">
-              <a:lnSpc>
-                <a:spcPct val="120000"/>
-              </a:lnSpc>
-              <a:buNone/>
-            </a:pPr>
-            <a:r>
-              <a:rPr lang="en-US" sz="1400" dirty="0">
-                <a:solidFill>
-                  <a:srgbClr val="718096"/>
-                </a:solidFill>
-                <a:latin typeface="Pretendard" pitchFamily="34" charset="0"/>
-                <a:ea typeface="Pretendard" pitchFamily="34" charset="-122"/>
-                <a:cs typeface="Pretendard" pitchFamily="34" charset="-120"/>
-              </a:rPr>
-              <a:t>주차 대수</a:t>
-            </a:r>
-            <a:endParaRPr lang="en-US" sz="1400" dirty="0"/>
-          </a:p>
-        </p:txBody>
-      </p:sp>
-      <p:sp>
-        <p:nvSpPr>
-          <p:cNvPr id="26" name="Text 24"/>
-          <p:cNvSpPr/>
-          <p:nvPr/>
-        </p:nvSpPr>
-        <p:spPr>
-          <a:xfrm>
-            <a:off x="3172968" y="4059936"/>
-            <a:ext cx="4251960" cy="402336"/>
-          </a:xfrm>
-          <a:prstGeom prst="rect">
-            <a:avLst/>
-          </a:prstGeom>
-          <a:noFill/>
-          <a:ln/>
-        </p:spPr>
-        <p:txBody>
-          <a:bodyPr wrap="square" lIns="0" tIns="0" rIns="0" bIns="0" rtlCol="0" anchor="ctr"/>
-          <a:lstStyle/>
-          <a:p>
-            <a:pPr indent="0" marL="0">
-              <a:lnSpc>
-                <a:spcPct val="120000"/>
-              </a:lnSpc>
-              <a:buNone/>
-            </a:pPr>
-            <a:r>
-              <a:rPr lang="en-US" sz="1400" b="1" dirty="0">
-                <a:solidFill>
-                  <a:srgbClr val="10161F"/>
-                </a:solidFill>
-                <a:latin typeface="Pretendard" pitchFamily="34" charset="0"/>
-                <a:ea typeface="Pretendard" pitchFamily="34" charset="-122"/>
-                <a:cs typeface="Pretendard" pitchFamily="34" charset="-120"/>
-              </a:rPr>
-              <a:t>18대 (자주식 완비)</a:t>
-            </a:r>
-            <a:endParaRPr lang="en-US" sz="1400" dirty="0"/>
-          </a:p>
-        </p:txBody>
-      </p:sp>
-      <p:sp>
-        <p:nvSpPr>
-          <p:cNvPr id="27" name="Shape 25"/>
-          <p:cNvSpPr/>
-          <p:nvPr/>
-        </p:nvSpPr>
-        <p:spPr>
-          <a:xfrm>
-            <a:off x="566928" y="4462272"/>
-            <a:ext cx="6858000" cy="0"/>
-          </a:xfrm>
-          <a:prstGeom prst="line">
-            <a:avLst/>
-          </a:prstGeom>
-          <a:noFill/>
-          <a:ln w="3810">
-            <a:solidFill>
-              <a:srgbClr val="CBD5E0"/>
-            </a:solidFill>
-            <a:prstDash val="solid"/>
-          </a:ln>
-        </p:spPr>
-      </p:sp>
-      <p:sp>
-        <p:nvSpPr>
-          <p:cNvPr id="28" name="Text 26"/>
-          <p:cNvSpPr/>
-          <p:nvPr/>
-        </p:nvSpPr>
-        <p:spPr>
-          <a:xfrm>
-            <a:off x="566928" y="4462272"/>
-            <a:ext cx="2606040" cy="402336"/>
-          </a:xfrm>
-          <a:prstGeom prst="rect">
-            <a:avLst/>
-          </a:prstGeom>
-          <a:noFill/>
-          <a:ln/>
-        </p:spPr>
-        <p:txBody>
-          <a:bodyPr wrap="square" lIns="0" tIns="0" rIns="0" bIns="0" rtlCol="0" anchor="ctr"/>
-          <a:lstStyle/>
-          <a:p>
-            <a:pPr indent="0" marL="0">
-              <a:lnSpc>
-                <a:spcPct val="120000"/>
-              </a:lnSpc>
-              <a:buNone/>
-            </a:pPr>
-            <a:r>
-              <a:rPr lang="en-US" sz="1400" dirty="0">
-                <a:solidFill>
-                  <a:srgbClr val="718096"/>
-                </a:solidFill>
-                <a:latin typeface="Pretendard" pitchFamily="34" charset="0"/>
-                <a:ea typeface="Pretendard" pitchFamily="34" charset="-122"/>
-                <a:cs typeface="Pretendard" pitchFamily="34" charset="-120"/>
-              </a:rPr>
-              <a:t>주구조</a:t>
-            </a:r>
-            <a:endParaRPr lang="en-US" sz="1400" dirty="0"/>
-          </a:p>
-        </p:txBody>
-      </p:sp>
-      <p:sp>
-        <p:nvSpPr>
-          <p:cNvPr id="29" name="Text 27"/>
-          <p:cNvSpPr/>
-          <p:nvPr/>
-        </p:nvSpPr>
-        <p:spPr>
-          <a:xfrm>
-            <a:off x="3172968" y="4462272"/>
-            <a:ext cx="4251960" cy="402336"/>
-          </a:xfrm>
-          <a:prstGeom prst="rect">
-            <a:avLst/>
-          </a:prstGeom>
-          <a:noFill/>
-          <a:ln/>
-        </p:spPr>
-        <p:txBody>
-          <a:bodyPr wrap="square" lIns="0" tIns="0" rIns="0" bIns="0" rtlCol="0" anchor="ctr"/>
-          <a:lstStyle/>
-          <a:p>
-            <a:pPr indent="0" marL="0">
-              <a:lnSpc>
-                <a:spcPct val="120000"/>
-              </a:lnSpc>
-              <a:buNone/>
-            </a:pPr>
-            <a:r>
-              <a:rPr lang="en-US" sz="1400" b="1" dirty="0">
-                <a:solidFill>
-                  <a:srgbClr val="10161F"/>
-                </a:solidFill>
-                <a:latin typeface="Pretendard" pitchFamily="34" charset="0"/>
-                <a:ea typeface="Pretendard" pitchFamily="34" charset="-122"/>
-                <a:cs typeface="Pretendard" pitchFamily="34" charset="-120"/>
-              </a:rPr>
-              <a:t>철근콘크리트구조</a:t>
-            </a:r>
-            <a:endParaRPr lang="en-US" sz="1400" dirty="0"/>
-          </a:p>
-        </p:txBody>
-      </p:sp>
-      <p:sp>
-        <p:nvSpPr>
-          <p:cNvPr id="30" name="Shape 28"/>
-          <p:cNvSpPr/>
-          <p:nvPr/>
-        </p:nvSpPr>
-        <p:spPr>
-          <a:xfrm>
-            <a:off x="566928" y="4864608"/>
-            <a:ext cx="6858000" cy="0"/>
-          </a:xfrm>
-          <a:prstGeom prst="line">
-            <a:avLst/>
-          </a:prstGeom>
-          <a:noFill/>
-          <a:ln w="3810">
-            <a:solidFill>
-              <a:srgbClr val="CBD5E0"/>
-            </a:solidFill>
-            <a:prstDash val="solid"/>
-          </a:ln>
-        </p:spPr>
-      </p:sp>
-      <p:sp>
-        <p:nvSpPr>
-          <p:cNvPr id="31" name="Text 29"/>
-          <p:cNvSpPr/>
-          <p:nvPr/>
-        </p:nvSpPr>
-        <p:spPr>
-          <a:xfrm>
-            <a:off x="566928" y="4864608"/>
-            <a:ext cx="2606040" cy="402336"/>
-          </a:xfrm>
-          <a:prstGeom prst="rect">
-            <a:avLst/>
-          </a:prstGeom>
-          <a:noFill/>
-          <a:ln/>
-        </p:spPr>
-        <p:txBody>
-          <a:bodyPr wrap="square" lIns="0" tIns="0" rIns="0" bIns="0" rtlCol="0" anchor="ctr"/>
-          <a:lstStyle/>
-          <a:p>
-            <a:pPr indent="0" marL="0">
-              <a:lnSpc>
-                <a:spcPct val="120000"/>
-              </a:lnSpc>
-              <a:buNone/>
-            </a:pPr>
-            <a:r>
-              <a:rPr lang="en-US" sz="1400" dirty="0">
-                <a:solidFill>
-                  <a:srgbClr val="718096"/>
-                </a:solidFill>
-                <a:latin typeface="Pretendard" pitchFamily="34" charset="0"/>
-                <a:ea typeface="Pretendard" pitchFamily="34" charset="-122"/>
-                <a:cs typeface="Pretendard" pitchFamily="34" charset="-120"/>
-              </a:rPr>
-              <a:t>매매 희망가</a:t>
-            </a:r>
-            <a:endParaRPr lang="en-US" sz="1400" dirty="0"/>
-          </a:p>
-        </p:txBody>
-      </p:sp>
-      <p:sp>
-        <p:nvSpPr>
-          <p:cNvPr id="32" name="Text 30"/>
-          <p:cNvSpPr/>
-          <p:nvPr/>
-        </p:nvSpPr>
-        <p:spPr>
-          <a:xfrm>
-            <a:off x="3172968" y="4864608"/>
-            <a:ext cx="4251960" cy="402336"/>
-          </a:xfrm>
-          <a:prstGeom prst="rect">
-            <a:avLst/>
-          </a:prstGeom>
-          <a:noFill/>
-          <a:ln/>
-        </p:spPr>
-        <p:txBody>
-          <a:bodyPr wrap="square" lIns="0" tIns="0" rIns="0" bIns="0" rtlCol="0" anchor="ctr"/>
-          <a:lstStyle/>
-          <a:p>
-            <a:pPr indent="0" marL="0">
-              <a:lnSpc>
-                <a:spcPct val="120000"/>
-              </a:lnSpc>
-              <a:buNone/>
-            </a:pPr>
-            <a:r>
-              <a:rPr lang="en-US" sz="1400" b="1" dirty="0">
-                <a:solidFill>
-                  <a:srgbClr val="10161F"/>
-                </a:solidFill>
-                <a:latin typeface="Pretendard" pitchFamily="34" charset="0"/>
-                <a:ea typeface="Pretendard" pitchFamily="34" charset="-122"/>
-                <a:cs typeface="Pretendard" pitchFamily="34" charset="-120"/>
-              </a:rPr>
-              <a:t>210억</a:t>
-            </a:r>
-            <a:endParaRPr lang="en-US" sz="1400" dirty="0"/>
-          </a:p>
-        </p:txBody>
-      </p:sp>
-      <p:sp>
-        <p:nvSpPr>
-          <p:cNvPr id="33" name="Shape 31"/>
           <p:cNvSpPr/>
           <p:nvPr/>
         </p:nvSpPr>
@@ -6525,49 +5822,49 @@
       </p:sp>
       <p:sp>
         <p:nvSpPr>
-          <p:cNvPr id="34" name="Shape 32"/>
+          <p:cNvPr id="10" name="Shape 8"/>
           <p:cNvSpPr/>
           <p:nvPr/>
         </p:nvSpPr>
         <p:spPr>
           <a:xfrm>
             <a:off x="7784287" y="1645920"/>
-            <a:ext cx="3840480" cy="1645920"/>
+            <a:ext cx="3840480" cy="2103120"/>
           </a:xfrm>
           <a:prstGeom prst="roundRect">
             <a:avLst>
-              <a:gd name="adj" fmla="val 3333"/>
+              <a:gd name="adj" fmla="val 2609"/>
             </a:avLst>
           </a:prstGeom>
           <a:solidFill>
-            <a:srgbClr val="BEE3F8"/>
+            <a:srgbClr val="F3EBDA"/>
           </a:solidFill>
           <a:ln/>
         </p:spPr>
       </p:sp>
       <p:sp>
         <p:nvSpPr>
-          <p:cNvPr id="35" name="Shape 33"/>
+          <p:cNvPr id="11" name="Shape 9"/>
           <p:cNvSpPr/>
           <p:nvPr/>
         </p:nvSpPr>
         <p:spPr>
           <a:xfrm>
             <a:off x="7784287" y="1700784"/>
-            <a:ext cx="36576" cy="1536192"/>
+            <a:ext cx="36576" cy="1993392"/>
           </a:xfrm>
           <a:prstGeom prst="rect">
             <a:avLst/>
           </a:prstGeom>
           <a:solidFill>
-            <a:srgbClr val="2B6CB0"/>
+            <a:srgbClr val="977024"/>
           </a:solidFill>
           <a:ln/>
         </p:spPr>
       </p:sp>
       <p:sp>
         <p:nvSpPr>
-          <p:cNvPr id="36" name="Text 34"/>
+          <p:cNvPr id="12" name="Text 10"/>
           <p:cNvSpPr/>
           <p:nvPr/>
         </p:nvSpPr>
@@ -6595,14 +5892,14 @@
       </p:sp>
       <p:sp>
         <p:nvSpPr>
-          <p:cNvPr id="37" name="Text 35"/>
+          <p:cNvPr id="13" name="Text 11"/>
           <p:cNvSpPr/>
           <p:nvPr/>
         </p:nvSpPr>
         <p:spPr>
           <a:xfrm>
             <a:off x="7967167" y="1975104"/>
-            <a:ext cx="3511296" cy="1243584"/>
+            <a:ext cx="3511296" cy="1700784"/>
           </a:xfrm>
           <a:prstGeom prst="rect">
             <a:avLst/>
@@ -6629,7 +5926,7 @@
                 <a:ea typeface="Pretendard" pitchFamily="34" charset="-122"/>
                 <a:cs typeface="Pretendard" pitchFamily="34" charset="-120"/>
               </a:rPr>
-              <a:t>본 매물은 강남권역 입지의 안정적 운영 자산입니다.</a:t>
+              <a:t>{"ok":true,"mocked":true,"extractedFields":{"area_signal":"역삼","asset_type":"오피스빌딩","price_band":"300억","size_signal":"3</a:t>
             </a:r>
             <a:endParaRPr lang="en-US" sz="930" dirty="0"/>
           </a:p>
@@ -6637,7 +5934,7 @@
       </p:sp>
       <p:sp>
         <p:nvSpPr>
-          <p:cNvPr id="38" name="Text 36"/>
+          <p:cNvPr id="14" name="Text 12"/>
           <p:cNvSpPr/>
           <p:nvPr/>
         </p:nvSpPr>
@@ -6676,7 +5973,7 @@
       </p:sp>
       <p:sp>
         <p:nvSpPr>
-          <p:cNvPr id="39" name="Text 37"/>
+          <p:cNvPr id="15" name="Text 13"/>
           <p:cNvSpPr/>
           <p:nvPr/>
         </p:nvSpPr>
@@ -6923,75 +6220,136 @@
       </p:sp>
       <p:sp>
         <p:nvSpPr>
-          <p:cNvPr id="7" name="Text 5"/>
+          <p:cNvPr id="7" name="Shape 5"/>
           <p:cNvSpPr/>
           <p:nvPr/>
         </p:nvSpPr>
         <p:spPr>
           <a:xfrm>
             <a:off x="566928" y="1645920"/>
-            <a:ext cx="2606040" cy="402336"/>
-          </a:xfrm>
-          <a:prstGeom prst="rect">
-            <a:avLst/>
-          </a:prstGeom>
-          <a:noFill/>
-          <a:ln/>
-        </p:spPr>
-        <p:txBody>
-          <a:bodyPr wrap="square" lIns="0" tIns="0" rIns="0" bIns="0" rtlCol="0" anchor="ctr"/>
-          <a:lstStyle/>
-          <a:p>
-            <a:pPr indent="0" marL="0">
+            <a:ext cx="6858000" cy="1828800"/>
+          </a:xfrm>
+          <a:prstGeom prst="roundRect">
+            <a:avLst>
+              <a:gd name="adj" fmla="val 3000"/>
+            </a:avLst>
+          </a:prstGeom>
+          <a:solidFill>
+            <a:srgbClr val="BEE3F8"/>
+          </a:solidFill>
+          <a:ln/>
+        </p:spPr>
+      </p:sp>
+      <p:sp>
+        <p:nvSpPr>
+          <p:cNvPr id="8" name="Shape 6"/>
+          <p:cNvSpPr/>
+          <p:nvPr/>
+        </p:nvSpPr>
+        <p:spPr>
+          <a:xfrm>
+            <a:off x="566928" y="1700784"/>
+            <a:ext cx="36576" cy="1719072"/>
+          </a:xfrm>
+          <a:prstGeom prst="rect">
+            <a:avLst/>
+          </a:prstGeom>
+          <a:solidFill>
+            <a:srgbClr val="2B6CB0"/>
+          </a:solidFill>
+          <a:ln/>
+        </p:spPr>
+      </p:sp>
+      <p:sp>
+        <p:nvSpPr>
+          <p:cNvPr id="9" name="Text 7"/>
+          <p:cNvSpPr/>
+          <p:nvPr/>
+        </p:nvSpPr>
+        <p:spPr>
+          <a:xfrm>
+            <a:off x="749808" y="1755648"/>
+            <a:ext cx="6528816" cy="201168"/>
+          </a:xfrm>
+          <a:prstGeom prst="rect">
+            <a:avLst/>
+          </a:prstGeom>
+          <a:noFill/>
+          <a:ln/>
+        </p:spPr>
+        <p:txBody>
+          <a:bodyPr wrap="square" lIns="0" tIns="0" rIns="0" bIns="0" rtlCol="0" anchor="ctr"/>
+          <a:lstStyle/>
+          <a:p>
+            <a:pPr indent="0" marL="0">
+              <a:buNone/>
+            </a:pPr>
+            <a:r>
+              <a:rPr lang="en-US" sz="1050" b="1" dirty="0">
+                <a:solidFill>
+                  <a:srgbClr val="2B6CB0"/>
+                </a:solidFill>
+                <a:latin typeface="Pretendard" pitchFamily="34" charset="0"/>
+                <a:ea typeface="Pretendard" pitchFamily="34" charset="-122"/>
+                <a:cs typeface="Pretendard" pitchFamily="34" charset="-120"/>
+              </a:rPr>
+              <a:t>건축물 물리 스펙 요약</a:t>
+            </a:r>
+            <a:endParaRPr lang="en-US" sz="1050" dirty="0"/>
+          </a:p>
+        </p:txBody>
+      </p:sp>
+      <p:sp>
+        <p:nvSpPr>
+          <p:cNvPr id="10" name="Text 8"/>
+          <p:cNvSpPr/>
+          <p:nvPr/>
+        </p:nvSpPr>
+        <p:spPr>
+          <a:xfrm>
+            <a:off x="749808" y="1975104"/>
+            <a:ext cx="6528816" cy="1426464"/>
+          </a:xfrm>
+          <a:prstGeom prst="rect">
+            <a:avLst/>
+          </a:prstGeom>
+          <a:noFill/>
+          <a:ln/>
+        </p:spPr>
+        <p:txBody>
+          <a:bodyPr wrap="square" lIns="0" tIns="0" rIns="0" bIns="0" rtlCol="0" anchor="t"/>
+          <a:lstStyle/>
+          <a:p>
+            <a:pPr marL="342900" indent="-342900">
               <a:lnSpc>
                 <a:spcPct val="120000"/>
               </a:lnSpc>
-              <a:buNone/>
-            </a:pPr>
-            <a:r>
-              <a:rPr lang="en-US" sz="1400" dirty="0">
-                <a:solidFill>
-                  <a:srgbClr val="718096"/>
-                </a:solidFill>
-                <a:latin typeface="Pretendard" pitchFamily="34" charset="0"/>
-                <a:ea typeface="Pretendard" pitchFamily="34" charset="-122"/>
-                <a:cs typeface="Pretendard" pitchFamily="34" charset="-120"/>
-              </a:rPr>
-              <a:t>연면적</a:t>
-            </a:r>
-            <a:endParaRPr lang="en-US" sz="1400" dirty="0"/>
-          </a:p>
-        </p:txBody>
-      </p:sp>
-      <p:sp>
-        <p:nvSpPr>
-          <p:cNvPr id="8" name="Text 6"/>
-          <p:cNvSpPr/>
-          <p:nvPr/>
-        </p:nvSpPr>
-        <p:spPr>
-          <a:xfrm>
-            <a:off x="3172968" y="1645920"/>
-            <a:ext cx="4251960" cy="402336"/>
-          </a:xfrm>
-          <a:prstGeom prst="rect">
-            <a:avLst/>
-          </a:prstGeom>
-          <a:noFill/>
-          <a:ln/>
-        </p:spPr>
-        <p:txBody>
-          <a:bodyPr wrap="square" lIns="0" tIns="0" rIns="0" bIns="0" rtlCol="0" anchor="ctr"/>
-          <a:lstStyle/>
-          <a:p>
-            <a:pPr indent="0" marL="0">
+              <a:buSzPct val="100000"/>
+              <a:buChar char="•"/>
+            </a:pPr>
+            <a:r>
+              <a:rPr lang="en-US" sz="930" dirty="0">
+                <a:solidFill>
+                  <a:srgbClr val="10161F"/>
+                </a:solidFill>
+                <a:latin typeface="Pretendard" pitchFamily="34" charset="0"/>
+                <a:ea typeface="Pretendard" pitchFamily="34" charset="-122"/>
+                <a:cs typeface="Pretendard" pitchFamily="34" charset="-120"/>
+              </a:rPr>
+              <a:t>상세 건물 제원은 실사 자료를 참조하시기 바랍니다</a:t>
+            </a:r>
+            <a:endParaRPr lang="en-US" sz="930" dirty="0"/>
+          </a:p>
+          <a:p>
+            <a:pPr marL="342900" indent="-342900">
               <a:lnSpc>
                 <a:spcPct val="120000"/>
               </a:lnSpc>
-              <a:buNone/>
-            </a:pPr>
-            <a:r>
-              <a:rPr lang="en-US" sz="1400" b="1" dirty="0">
+              <a:buSzPct val="100000"/>
+              <a:buChar char="•"/>
+            </a:pPr>
+            <a:r>
+              <a:rPr lang="en-US" sz="930" dirty="0">
                 <a:solidFill>
                   <a:srgbClr val="10161F"/>
                 </a:solidFill>
@@ -6999,106 +6357,20 @@
                 <a:ea typeface="Pretendard" pitchFamily="34" charset="-122"/>
                 <a:cs typeface="Pretendard" pitchFamily="34" charset="-120"/>
               </a:rPr>
-              <a:t>5,000㎡ (약 1513평(약 5001.7㎡))</a:t>
-            </a:r>
-            <a:endParaRPr lang="en-US" sz="1400" dirty="0"/>
-          </a:p>
-        </p:txBody>
-      </p:sp>
-      <p:sp>
-        <p:nvSpPr>
-          <p:cNvPr id="9" name="Shape 7"/>
-          <p:cNvSpPr/>
-          <p:nvPr/>
-        </p:nvSpPr>
-        <p:spPr>
-          <a:xfrm>
-            <a:off x="566928" y="2048256"/>
-            <a:ext cx="6858000" cy="0"/>
-          </a:xfrm>
-          <a:prstGeom prst="line">
-            <a:avLst/>
-          </a:prstGeom>
-          <a:noFill/>
-          <a:ln w="3810">
-            <a:solidFill>
-              <a:srgbClr val="CBD5E0"/>
-            </a:solidFill>
-            <a:prstDash val="solid"/>
-          </a:ln>
-        </p:spPr>
-      </p:sp>
-      <p:sp>
-        <p:nvSpPr>
-          <p:cNvPr id="10" name="Text 8"/>
-          <p:cNvSpPr/>
-          <p:nvPr/>
-        </p:nvSpPr>
-        <p:spPr>
-          <a:xfrm>
-            <a:off x="566928" y="2048256"/>
-            <a:ext cx="2606040" cy="402336"/>
-          </a:xfrm>
-          <a:prstGeom prst="rect">
-            <a:avLst/>
-          </a:prstGeom>
-          <a:noFill/>
-          <a:ln/>
-        </p:spPr>
-        <p:txBody>
-          <a:bodyPr wrap="square" lIns="0" tIns="0" rIns="0" bIns="0" rtlCol="0" anchor="ctr"/>
-          <a:lstStyle/>
-          <a:p>
-            <a:pPr indent="0" marL="0">
+              <a:t>건물 현황 및 규모는 첨부 대장을 기준으로 합니다</a:t>
+            </a:r>
+            <a:endParaRPr lang="en-US" sz="930" dirty="0"/>
+          </a:p>
+          <a:p>
+            <a:pPr marL="342900" indent="-342900">
               <a:lnSpc>
                 <a:spcPct val="120000"/>
               </a:lnSpc>
-              <a:buNone/>
-            </a:pPr>
-            <a:r>
-              <a:rPr lang="en-US" sz="1400" dirty="0">
-                <a:solidFill>
-                  <a:srgbClr val="718096"/>
-                </a:solidFill>
-                <a:latin typeface="Pretendard" pitchFamily="34" charset="0"/>
-                <a:ea typeface="Pretendard" pitchFamily="34" charset="-122"/>
-                <a:cs typeface="Pretendard" pitchFamily="34" charset="-120"/>
-              </a:rPr>
-              <a:t>대지면적</a:t>
-            </a:r>
-            <a:endParaRPr lang="en-US" sz="1400" dirty="0"/>
-          </a:p>
-        </p:txBody>
-      </p:sp>
-      <p:sp>
-        <p:nvSpPr>
-          <p:cNvPr id="11" name="Text 9"/>
-          <p:cNvSpPr/>
-          <p:nvPr/>
-        </p:nvSpPr>
-        <p:spPr>
-          <a:xfrm>
-            <a:off x="3172968" y="2048256"/>
-            <a:ext cx="4251960" cy="402336"/>
-          </a:xfrm>
-          <a:prstGeom prst="rect">
-            <a:avLst/>
-          </a:prstGeom>
-          <a:noFill/>
-          <a:ln/>
-        </p:spPr>
-        <p:txBody>
-          <a:bodyPr wrap="square" lIns="0" tIns="0" rIns="0" bIns="0" rtlCol="0" anchor="ctr"/>
-          <a:lstStyle/>
-          <a:p>
-            <a:pPr indent="0" marL="0">
-              <a:lnSpc>
-                <a:spcPct val="120000"/>
-              </a:lnSpc>
-              <a:buNone/>
-            </a:pPr>
-            <a:r>
-              <a:rPr lang="en-US" sz="1400" b="1" dirty="0">
+              <a:buSzPct val="100000"/>
+              <a:buChar char="•"/>
+            </a:pPr>
+            <a:r>
+              <a:rPr lang="en-US" sz="930" dirty="0">
                 <a:solidFill>
                   <a:srgbClr val="10161F"/>
                 </a:solidFill>
@@ -7106,122 +6378,15 @@
                 <a:ea typeface="Pretendard" pitchFamily="34" charset="-122"/>
                 <a:cs typeface="Pretendard" pitchFamily="34" charset="-120"/>
               </a:rPr>
-              <a:t>1,000㎡ (약 303평(약 1001.7㎡))</a:t>
-            </a:r>
-            <a:endParaRPr lang="en-US" sz="1400" dirty="0"/>
-          </a:p>
-        </p:txBody>
-      </p:sp>
-      <p:sp>
-        <p:nvSpPr>
-          <p:cNvPr id="12" name="Shape 10"/>
-          <p:cNvSpPr/>
-          <p:nvPr/>
-        </p:nvSpPr>
-        <p:spPr>
-          <a:xfrm>
-            <a:off x="566928" y="2450592"/>
-            <a:ext cx="6858000" cy="0"/>
-          </a:xfrm>
-          <a:prstGeom prst="line">
-            <a:avLst/>
-          </a:prstGeom>
-          <a:noFill/>
-          <a:ln w="3810">
-            <a:solidFill>
-              <a:srgbClr val="CBD5E0"/>
-            </a:solidFill>
-            <a:prstDash val="solid"/>
-          </a:ln>
-        </p:spPr>
-      </p:sp>
-      <p:sp>
-        <p:nvSpPr>
-          <p:cNvPr id="13" name="Text 11"/>
-          <p:cNvSpPr/>
-          <p:nvPr/>
-        </p:nvSpPr>
-        <p:spPr>
-          <a:xfrm>
-            <a:off x="566928" y="2450592"/>
-            <a:ext cx="2606040" cy="402336"/>
-          </a:xfrm>
-          <a:prstGeom prst="rect">
-            <a:avLst/>
-          </a:prstGeom>
-          <a:noFill/>
-          <a:ln/>
-        </p:spPr>
-        <p:txBody>
-          <a:bodyPr wrap="square" lIns="0" tIns="0" rIns="0" bIns="0" rtlCol="0" anchor="ctr"/>
-          <a:lstStyle/>
-          <a:p>
-            <a:pPr indent="0" marL="0">
-              <a:lnSpc>
-                <a:spcPct val="120000"/>
-              </a:lnSpc>
-              <a:buNone/>
-            </a:pPr>
-            <a:r>
-              <a:rPr lang="en-US" sz="1400" dirty="0">
-                <a:solidFill>
-                  <a:srgbClr val="718096"/>
-                </a:solidFill>
-                <a:latin typeface="Pretendard" pitchFamily="34" charset="0"/>
-                <a:ea typeface="Pretendard" pitchFamily="34" charset="-122"/>
-                <a:cs typeface="Pretendard" pitchFamily="34" charset="-120"/>
-              </a:rPr>
-              <a:t>용도지역</a:t>
-            </a:r>
-            <a:endParaRPr lang="en-US" sz="1400" dirty="0"/>
-          </a:p>
-        </p:txBody>
-      </p:sp>
-      <p:sp>
-        <p:nvSpPr>
-          <p:cNvPr id="14" name="Text 12"/>
-          <p:cNvSpPr/>
-          <p:nvPr/>
-        </p:nvSpPr>
-        <p:spPr>
-          <a:xfrm>
-            <a:off x="3172968" y="2450592"/>
-            <a:ext cx="4251960" cy="402336"/>
-          </a:xfrm>
-          <a:prstGeom prst="rect">
-            <a:avLst/>
-          </a:prstGeom>
-          <a:noFill/>
-          <a:ln/>
-        </p:spPr>
-        <p:txBody>
-          <a:bodyPr wrap="square" lIns="0" tIns="0" rIns="0" bIns="0" rtlCol="0" anchor="ctr"/>
-          <a:lstStyle/>
-          <a:p>
-            <a:pPr indent="0" marL="0">
-              <a:lnSpc>
-                <a:spcPct val="120000"/>
-              </a:lnSpc>
-              <a:buNone/>
-            </a:pPr>
-            <a:r>
-              <a:rPr lang="en-US" sz="1400" b="1" dirty="0">
-                <a:solidFill>
-                  <a:srgbClr val="10161F"/>
-                </a:solidFill>
-                <a:latin typeface="Pretendard" pitchFamily="34" charset="0"/>
-                <a:ea typeface="Pretendard" pitchFamily="34" charset="-122"/>
-                <a:cs typeface="Pretendard" pitchFamily="34" charset="-120"/>
-              </a:rPr>
-              <a:t>일반상업지역</a:t>
-            </a:r>
-            <a:endParaRPr lang="en-US" sz="1400" dirty="0"/>
-          </a:p>
-        </p:txBody>
-      </p:sp>
-      <p:sp>
-        <p:nvSpPr>
-          <p:cNvPr id="15" name="Shape 13"/>
+              <a:t>건물 상태 및 설비 현황은 실사 보고서를 참조하십시오</a:t>
+            </a:r>
+            <a:endParaRPr lang="en-US" sz="930" dirty="0"/>
+          </a:p>
+        </p:txBody>
+      </p:sp>
+      <p:sp>
+        <p:nvSpPr>
+          <p:cNvPr id="11" name="Shape 9"/>
           <p:cNvSpPr/>
           <p:nvPr/>
         </p:nvSpPr>
@@ -7244,7 +6409,7 @@
       </p:sp>
       <p:sp>
         <p:nvSpPr>
-          <p:cNvPr id="16" name="Shape 14"/>
+          <p:cNvPr id="12" name="Shape 10"/>
           <p:cNvSpPr/>
           <p:nvPr/>
         </p:nvSpPr>
@@ -7266,7 +6431,7 @@
       </p:sp>
       <p:sp>
         <p:nvSpPr>
-          <p:cNvPr id="17" name="Shape 15"/>
+          <p:cNvPr id="13" name="Shape 11"/>
           <p:cNvSpPr/>
           <p:nvPr/>
         </p:nvSpPr>
@@ -7286,7 +6451,7 @@
       </p:sp>
       <p:sp>
         <p:nvSpPr>
-          <p:cNvPr id="18" name="Text 16"/>
+          <p:cNvPr id="14" name="Text 12"/>
           <p:cNvSpPr/>
           <p:nvPr/>
         </p:nvSpPr>
@@ -7325,7 +6490,7 @@
       </p:sp>
       <p:sp>
         <p:nvSpPr>
-          <p:cNvPr id="19" name="Text 17"/>
+          <p:cNvPr id="15" name="Text 13"/>
           <p:cNvSpPr/>
           <p:nvPr/>
         </p:nvSpPr>
@@ -7410,7 +6575,7 @@
       </p:sp>
       <p:sp>
         <p:nvSpPr>
-          <p:cNvPr id="20" name="Shape 18"/>
+          <p:cNvPr id="16" name="Shape 14"/>
           <p:cNvSpPr/>
           <p:nvPr/>
         </p:nvSpPr>
@@ -7432,7 +6597,7 @@
       </p:sp>
       <p:sp>
         <p:nvSpPr>
-          <p:cNvPr id="21" name="Shape 19"/>
+          <p:cNvPr id="17" name="Shape 15"/>
           <p:cNvSpPr/>
           <p:nvPr/>
         </p:nvSpPr>
@@ -7452,7 +6617,7 @@
       </p:sp>
       <p:sp>
         <p:nvSpPr>
-          <p:cNvPr id="22" name="Text 20"/>
+          <p:cNvPr id="18" name="Text 16"/>
           <p:cNvSpPr/>
           <p:nvPr/>
         </p:nvSpPr>
@@ -7491,7 +6656,7 @@
       </p:sp>
       <p:sp>
         <p:nvSpPr>
-          <p:cNvPr id="23" name="Text 21"/>
+          <p:cNvPr id="19" name="Text 17"/>
           <p:cNvSpPr/>
           <p:nvPr/>
         </p:nvSpPr>
@@ -7576,7 +6741,7 @@
       </p:sp>
       <p:sp>
         <p:nvSpPr>
-          <p:cNvPr id="24" name="Text 22"/>
+          <p:cNvPr id="20" name="Text 18"/>
           <p:cNvSpPr/>
           <p:nvPr/>
         </p:nvSpPr>
@@ -7615,7 +6780,7 @@
       </p:sp>
       <p:sp>
         <p:nvSpPr>
-          <p:cNvPr id="25" name="Text 23"/>
+          <p:cNvPr id="21" name="Text 19"/>
           <p:cNvSpPr/>
           <p:nvPr/>
         </p:nvSpPr>
@@ -7823,13 +6988,52 @@
       </p:sp>
       <p:sp>
         <p:nvSpPr>
-          <p:cNvPr id="6" name="Shape 4"/>
+          <p:cNvPr id="6" name="Text 4"/>
           <p:cNvSpPr/>
           <p:nvPr/>
         </p:nvSpPr>
         <p:spPr>
           <a:xfrm>
             <a:off x="566928" y="1325880"/>
+            <a:ext cx="11057839" cy="237744"/>
+          </a:xfrm>
+          <a:prstGeom prst="rect">
+            <a:avLst/>
+          </a:prstGeom>
+          <a:noFill/>
+          <a:ln/>
+        </p:spPr>
+        <p:txBody>
+          <a:bodyPr wrap="square" lIns="0" tIns="0" rIns="0" bIns="0" rtlCol="0" anchor="ctr"/>
+          <a:lstStyle/>
+          <a:p>
+            <a:pPr indent="0" marL="0">
+              <a:buNone/>
+            </a:pPr>
+            <a:r>
+              <a:rPr lang="en-US" sz="1100" b="1" dirty="0">
+                <a:solidFill>
+                  <a:srgbClr val="10161F"/>
+                </a:solidFill>
+                <a:latin typeface="Pretendard" pitchFamily="34" charset="0"/>
+                <a:ea typeface="Pretendard" pitchFamily="34" charset="-122"/>
+                <a:cs typeface="Pretendard" pitchFamily="34" charset="-120"/>
+              </a:rPr>
+              <a:t>신축 사업수지 및 개발 타당성 분석</a:t>
+            </a:r>
+            <a:endParaRPr lang="en-US" sz="1100" dirty="0"/>
+          </a:p>
+        </p:txBody>
+      </p:sp>
+      <p:sp>
+        <p:nvSpPr>
+          <p:cNvPr id="7" name="Shape 5"/>
+          <p:cNvSpPr/>
+          <p:nvPr/>
+        </p:nvSpPr>
+        <p:spPr>
+          <a:xfrm>
+            <a:off x="566928" y="1737360"/>
             <a:ext cx="11057839" cy="0"/>
           </a:xfrm>
           <a:prstGeom prst="line">
@@ -7846,13 +7050,597 @@
       </p:sp>
       <p:sp>
         <p:nvSpPr>
-          <p:cNvPr id="7" name="Shape 5"/>
-          <p:cNvSpPr/>
-          <p:nvPr/>
-        </p:nvSpPr>
-        <p:spPr>
-          <a:xfrm>
-            <a:off x="566928" y="1645920"/>
+          <p:cNvPr id="8" name="Shape 6"/>
+          <p:cNvSpPr/>
+          <p:nvPr/>
+        </p:nvSpPr>
+        <p:spPr>
+          <a:xfrm>
+            <a:off x="566928" y="1965960"/>
+            <a:ext cx="3576218" cy="1188720"/>
+          </a:xfrm>
+          <a:prstGeom prst="roundRect">
+            <a:avLst>
+              <a:gd name="adj" fmla="val 4615"/>
+            </a:avLst>
+          </a:prstGeom>
+          <a:solidFill>
+            <a:srgbClr val="F7FAFC"/>
+          </a:solidFill>
+          <a:ln w="6350">
+            <a:solidFill>
+              <a:srgbClr val="CBD5E0"/>
+            </a:solidFill>
+            <a:prstDash val="solid"/>
+          </a:ln>
+        </p:spPr>
+      </p:sp>
+      <p:sp>
+        <p:nvSpPr>
+          <p:cNvPr id="9" name="Text 7"/>
+          <p:cNvSpPr/>
+          <p:nvPr/>
+        </p:nvSpPr>
+        <p:spPr>
+          <a:xfrm>
+            <a:off x="731520" y="2093976"/>
+            <a:ext cx="3247034" cy="201168"/>
+          </a:xfrm>
+          <a:prstGeom prst="rect">
+            <a:avLst/>
+          </a:prstGeom>
+          <a:noFill/>
+          <a:ln/>
+        </p:spPr>
+        <p:txBody>
+          <a:bodyPr wrap="square" lIns="0" tIns="0" rIns="0" bIns="0" rtlCol="0" anchor="ctr"/>
+          <a:lstStyle/>
+          <a:p>
+            <a:pPr indent="0" marL="0">
+              <a:buNone/>
+            </a:pPr>
+            <a:r>
+              <a:rPr lang="en-US" sz="950" dirty="0">
+                <a:solidFill>
+                  <a:srgbClr val="718096"/>
+                </a:solidFill>
+                <a:latin typeface="Pretendard" pitchFamily="34" charset="0"/>
+                <a:ea typeface="Pretendard" pitchFamily="34" charset="-122"/>
+                <a:cs typeface="Pretendard" pitchFamily="34" charset="-120"/>
+              </a:rPr>
+              <a:t>토지 매입비</a:t>
+            </a:r>
+            <a:endParaRPr lang="en-US" sz="950" dirty="0"/>
+          </a:p>
+        </p:txBody>
+      </p:sp>
+      <p:sp>
+        <p:nvSpPr>
+          <p:cNvPr id="10" name="Text 8"/>
+          <p:cNvSpPr/>
+          <p:nvPr/>
+        </p:nvSpPr>
+        <p:spPr>
+          <a:xfrm>
+            <a:off x="731520" y="2276856"/>
+            <a:ext cx="3247034" cy="402336"/>
+          </a:xfrm>
+          <a:prstGeom prst="rect">
+            <a:avLst/>
+          </a:prstGeom>
+          <a:noFill/>
+          <a:ln/>
+        </p:spPr>
+        <p:txBody>
+          <a:bodyPr wrap="square" lIns="0" tIns="0" rIns="0" bIns="0" rtlCol="0" anchor="ctr">
+            <a:normAutofit/>
+          </a:bodyPr>
+          <a:lstStyle/>
+          <a:p>
+            <a:pPr indent="0" marL="0">
+              <a:buNone/>
+            </a:pPr>
+            <a:r>
+              <a:rPr lang="en-US" sz="2200" b="1" dirty="0">
+                <a:solidFill>
+                  <a:srgbClr val="10161F"/>
+                </a:solidFill>
+                <a:latin typeface="Pretendard" pitchFamily="34" charset="0"/>
+                <a:ea typeface="Pretendard" pitchFamily="34" charset="-122"/>
+                <a:cs typeface="Pretendard" pitchFamily="34" charset="-120"/>
+              </a:rPr>
+              <a:t>희망가 기준</a:t>
+            </a:r>
+            <a:endParaRPr lang="en-US" sz="2200" dirty="0"/>
+          </a:p>
+        </p:txBody>
+      </p:sp>
+      <p:sp>
+        <p:nvSpPr>
+          <p:cNvPr id="11" name="Text 9"/>
+          <p:cNvSpPr/>
+          <p:nvPr/>
+        </p:nvSpPr>
+        <p:spPr>
+          <a:xfrm>
+            <a:off x="731520" y="2642616"/>
+            <a:ext cx="3247034" cy="164592"/>
+          </a:xfrm>
+          <a:prstGeom prst="rect">
+            <a:avLst/>
+          </a:prstGeom>
+          <a:noFill/>
+          <a:ln/>
+        </p:spPr>
+        <p:txBody>
+          <a:bodyPr wrap="square" lIns="0" tIns="0" rIns="0" bIns="0" rtlCol="0" anchor="ctr"/>
+          <a:lstStyle/>
+          <a:p>
+            <a:pPr indent="0" marL="0">
+              <a:buNone/>
+            </a:pPr>
+            <a:r>
+              <a:rPr lang="en-US" sz="880" dirty="0">
+                <a:solidFill>
+                  <a:srgbClr val="718096"/>
+                </a:solidFill>
+                <a:latin typeface="Pretendard" pitchFamily="34" charset="0"/>
+                <a:ea typeface="Pretendard" pitchFamily="34" charset="-122"/>
+                <a:cs typeface="Pretendard" pitchFamily="34" charset="-120"/>
+              </a:rPr>
+              <a:t>사업비 내 비중 산출</a:t>
+            </a:r>
+            <a:endParaRPr lang="en-US" sz="880" dirty="0"/>
+          </a:p>
+        </p:txBody>
+      </p:sp>
+      <p:sp>
+        <p:nvSpPr>
+          <p:cNvPr id="12" name="Shape 10"/>
+          <p:cNvSpPr/>
+          <p:nvPr/>
+        </p:nvSpPr>
+        <p:spPr>
+          <a:xfrm>
+            <a:off x="4307738" y="1965960"/>
+            <a:ext cx="3576218" cy="1188720"/>
+          </a:xfrm>
+          <a:prstGeom prst="roundRect">
+            <a:avLst>
+              <a:gd name="adj" fmla="val 4615"/>
+            </a:avLst>
+          </a:prstGeom>
+          <a:solidFill>
+            <a:srgbClr val="F7FAFC"/>
+          </a:solidFill>
+          <a:ln w="6350">
+            <a:solidFill>
+              <a:srgbClr val="CBD5E0"/>
+            </a:solidFill>
+            <a:prstDash val="solid"/>
+          </a:ln>
+        </p:spPr>
+      </p:sp>
+      <p:sp>
+        <p:nvSpPr>
+          <p:cNvPr id="13" name="Text 11"/>
+          <p:cNvSpPr/>
+          <p:nvPr/>
+        </p:nvSpPr>
+        <p:spPr>
+          <a:xfrm>
+            <a:off x="4472330" y="2093976"/>
+            <a:ext cx="3247034" cy="201168"/>
+          </a:xfrm>
+          <a:prstGeom prst="rect">
+            <a:avLst/>
+          </a:prstGeom>
+          <a:noFill/>
+          <a:ln/>
+        </p:spPr>
+        <p:txBody>
+          <a:bodyPr wrap="square" lIns="0" tIns="0" rIns="0" bIns="0" rtlCol="0" anchor="ctr"/>
+          <a:lstStyle/>
+          <a:p>
+            <a:pPr indent="0" marL="0">
+              <a:buNone/>
+            </a:pPr>
+            <a:r>
+              <a:rPr lang="en-US" sz="950" dirty="0">
+                <a:solidFill>
+                  <a:srgbClr val="718096"/>
+                </a:solidFill>
+                <a:latin typeface="Pretendard" pitchFamily="34" charset="0"/>
+                <a:ea typeface="Pretendard" pitchFamily="34" charset="-122"/>
+                <a:cs typeface="Pretendard" pitchFamily="34" charset="-120"/>
+              </a:rPr>
+              <a:t>추정 신축 공사비</a:t>
+            </a:r>
+            <a:endParaRPr lang="en-US" sz="950" dirty="0"/>
+          </a:p>
+        </p:txBody>
+      </p:sp>
+      <p:sp>
+        <p:nvSpPr>
+          <p:cNvPr id="14" name="Text 12"/>
+          <p:cNvSpPr/>
+          <p:nvPr/>
+        </p:nvSpPr>
+        <p:spPr>
+          <a:xfrm>
+            <a:off x="4472330" y="2276856"/>
+            <a:ext cx="3247034" cy="402336"/>
+          </a:xfrm>
+          <a:prstGeom prst="rect">
+            <a:avLst/>
+          </a:prstGeom>
+          <a:noFill/>
+          <a:ln/>
+        </p:spPr>
+        <p:txBody>
+          <a:bodyPr wrap="square" lIns="0" tIns="0" rIns="0" bIns="0" rtlCol="0" anchor="ctr">
+            <a:normAutofit/>
+          </a:bodyPr>
+          <a:lstStyle/>
+          <a:p>
+            <a:pPr indent="0" marL="0">
+              <a:buNone/>
+            </a:pPr>
+            <a:r>
+              <a:rPr lang="en-US" sz="2200" b="1" dirty="0">
+                <a:solidFill>
+                  <a:srgbClr val="10161F"/>
+                </a:solidFill>
+                <a:latin typeface="Pretendard" pitchFamily="34" charset="0"/>
+                <a:ea typeface="Pretendard" pitchFamily="34" charset="-122"/>
+                <a:cs typeface="Pretendard" pitchFamily="34" charset="-120"/>
+              </a:rPr>
+              <a:t>평당 공사비 산정</a:t>
+            </a:r>
+            <a:endParaRPr lang="en-US" sz="2200" dirty="0"/>
+          </a:p>
+        </p:txBody>
+      </p:sp>
+      <p:sp>
+        <p:nvSpPr>
+          <p:cNvPr id="15" name="Text 13"/>
+          <p:cNvSpPr/>
+          <p:nvPr/>
+        </p:nvSpPr>
+        <p:spPr>
+          <a:xfrm>
+            <a:off x="4472330" y="2642616"/>
+            <a:ext cx="3247034" cy="164592"/>
+          </a:xfrm>
+          <a:prstGeom prst="rect">
+            <a:avLst/>
+          </a:prstGeom>
+          <a:noFill/>
+          <a:ln/>
+        </p:spPr>
+        <p:txBody>
+          <a:bodyPr wrap="square" lIns="0" tIns="0" rIns="0" bIns="0" rtlCol="0" anchor="ctr"/>
+          <a:lstStyle/>
+          <a:p>
+            <a:pPr indent="0" marL="0">
+              <a:buNone/>
+            </a:pPr>
+            <a:r>
+              <a:rPr lang="en-US" sz="880" dirty="0">
+                <a:solidFill>
+                  <a:srgbClr val="718096"/>
+                </a:solidFill>
+                <a:latin typeface="Pretendard" pitchFamily="34" charset="0"/>
+                <a:ea typeface="Pretendard" pitchFamily="34" charset="-122"/>
+                <a:cs typeface="Pretendard" pitchFamily="34" charset="-120"/>
+              </a:rPr>
+              <a:t>신축 연면적 기준</a:t>
+            </a:r>
+            <a:endParaRPr lang="en-US" sz="880" dirty="0"/>
+          </a:p>
+        </p:txBody>
+      </p:sp>
+      <p:sp>
+        <p:nvSpPr>
+          <p:cNvPr id="16" name="Shape 14"/>
+          <p:cNvSpPr/>
+          <p:nvPr/>
+        </p:nvSpPr>
+        <p:spPr>
+          <a:xfrm>
+            <a:off x="8048549" y="1965960"/>
+            <a:ext cx="3576218" cy="1188720"/>
+          </a:xfrm>
+          <a:prstGeom prst="roundRect">
+            <a:avLst>
+              <a:gd name="adj" fmla="val 4615"/>
+            </a:avLst>
+          </a:prstGeom>
+          <a:solidFill>
+            <a:srgbClr val="F7FAFC"/>
+          </a:solidFill>
+          <a:ln w="6350">
+            <a:solidFill>
+              <a:srgbClr val="CBD5E0"/>
+            </a:solidFill>
+            <a:prstDash val="solid"/>
+          </a:ln>
+        </p:spPr>
+      </p:sp>
+      <p:sp>
+        <p:nvSpPr>
+          <p:cNvPr id="17" name="Text 15"/>
+          <p:cNvSpPr/>
+          <p:nvPr/>
+        </p:nvSpPr>
+        <p:spPr>
+          <a:xfrm>
+            <a:off x="8213141" y="2093976"/>
+            <a:ext cx="3247034" cy="201168"/>
+          </a:xfrm>
+          <a:prstGeom prst="rect">
+            <a:avLst/>
+          </a:prstGeom>
+          <a:noFill/>
+          <a:ln/>
+        </p:spPr>
+        <p:txBody>
+          <a:bodyPr wrap="square" lIns="0" tIns="0" rIns="0" bIns="0" rtlCol="0" anchor="ctr"/>
+          <a:lstStyle/>
+          <a:p>
+            <a:pPr indent="0" marL="0">
+              <a:buNone/>
+            </a:pPr>
+            <a:r>
+              <a:rPr lang="en-US" sz="950" dirty="0">
+                <a:solidFill>
+                  <a:srgbClr val="718096"/>
+                </a:solidFill>
+                <a:latin typeface="Pretendard" pitchFamily="34" charset="0"/>
+                <a:ea typeface="Pretendard" pitchFamily="34" charset="-122"/>
+                <a:cs typeface="Pretendard" pitchFamily="34" charset="-120"/>
+              </a:rPr>
+              <a:t>예상 총 사업비</a:t>
+            </a:r>
+            <a:endParaRPr lang="en-US" sz="950" dirty="0"/>
+          </a:p>
+        </p:txBody>
+      </p:sp>
+      <p:sp>
+        <p:nvSpPr>
+          <p:cNvPr id="18" name="Text 16"/>
+          <p:cNvSpPr/>
+          <p:nvPr/>
+        </p:nvSpPr>
+        <p:spPr>
+          <a:xfrm>
+            <a:off x="8213141" y="2276856"/>
+            <a:ext cx="3247034" cy="402336"/>
+          </a:xfrm>
+          <a:prstGeom prst="rect">
+            <a:avLst/>
+          </a:prstGeom>
+          <a:noFill/>
+          <a:ln/>
+        </p:spPr>
+        <p:txBody>
+          <a:bodyPr wrap="square" lIns="0" tIns="0" rIns="0" bIns="0" rtlCol="0" anchor="ctr">
+            <a:normAutofit/>
+          </a:bodyPr>
+          <a:lstStyle/>
+          <a:p>
+            <a:pPr indent="0" marL="0">
+              <a:buNone/>
+            </a:pPr>
+            <a:r>
+              <a:rPr lang="en-US" sz="2200" b="1" dirty="0">
+                <a:solidFill>
+                  <a:srgbClr val="10161F"/>
+                </a:solidFill>
+                <a:latin typeface="Pretendard" pitchFamily="34" charset="0"/>
+                <a:ea typeface="Pretendard" pitchFamily="34" charset="-122"/>
+                <a:cs typeface="Pretendard" pitchFamily="34" charset="-120"/>
+              </a:rPr>
+              <a:t>토지비 + 공사비 + 금융/기타</a:t>
+            </a:r>
+            <a:endParaRPr lang="en-US" sz="2200" dirty="0"/>
+          </a:p>
+        </p:txBody>
+      </p:sp>
+      <p:sp>
+        <p:nvSpPr>
+          <p:cNvPr id="19" name="Text 17"/>
+          <p:cNvSpPr/>
+          <p:nvPr/>
+        </p:nvSpPr>
+        <p:spPr>
+          <a:xfrm>
+            <a:off x="8213141" y="2642616"/>
+            <a:ext cx="3247034" cy="164592"/>
+          </a:xfrm>
+          <a:prstGeom prst="rect">
+            <a:avLst/>
+          </a:prstGeom>
+          <a:noFill/>
+          <a:ln/>
+        </p:spPr>
+        <p:txBody>
+          <a:bodyPr wrap="square" lIns="0" tIns="0" rIns="0" bIns="0" rtlCol="0" anchor="ctr"/>
+          <a:lstStyle/>
+          <a:p>
+            <a:pPr indent="0" marL="0">
+              <a:buNone/>
+            </a:pPr>
+            <a:r>
+              <a:rPr lang="en-US" sz="880" dirty="0">
+                <a:solidFill>
+                  <a:srgbClr val="718096"/>
+                </a:solidFill>
+                <a:latin typeface="Pretendard" pitchFamily="34" charset="0"/>
+                <a:ea typeface="Pretendard" pitchFamily="34" charset="-122"/>
+                <a:cs typeface="Pretendard" pitchFamily="34" charset="-120"/>
+              </a:rPr>
+              <a:t>총 투자금</a:t>
+            </a:r>
+            <a:endParaRPr lang="en-US" sz="880" dirty="0"/>
+          </a:p>
+        </p:txBody>
+      </p:sp>
+      <p:sp>
+        <p:nvSpPr>
+          <p:cNvPr id="20" name="Shape 18"/>
+          <p:cNvSpPr/>
+          <p:nvPr/>
+        </p:nvSpPr>
+        <p:spPr>
+          <a:xfrm>
+            <a:off x="566928" y="3319272"/>
+            <a:ext cx="3576218" cy="1051560"/>
+          </a:xfrm>
+          <a:prstGeom prst="roundRect">
+            <a:avLst>
+              <a:gd name="adj" fmla="val 5217"/>
+            </a:avLst>
+          </a:prstGeom>
+          <a:solidFill>
+            <a:srgbClr val="F7FAFC"/>
+          </a:solidFill>
+          <a:ln w="6350">
+            <a:solidFill>
+              <a:srgbClr val="CBD5E0"/>
+            </a:solidFill>
+            <a:prstDash val="solid"/>
+          </a:ln>
+        </p:spPr>
+      </p:sp>
+      <p:sp>
+        <p:nvSpPr>
+          <p:cNvPr id="21" name="Text 19"/>
+          <p:cNvSpPr/>
+          <p:nvPr/>
+        </p:nvSpPr>
+        <p:spPr>
+          <a:xfrm>
+            <a:off x="731520" y="3447288"/>
+            <a:ext cx="3247034" cy="201168"/>
+          </a:xfrm>
+          <a:prstGeom prst="rect">
+            <a:avLst/>
+          </a:prstGeom>
+          <a:noFill/>
+          <a:ln/>
+        </p:spPr>
+        <p:txBody>
+          <a:bodyPr wrap="square" lIns="0" tIns="0" rIns="0" bIns="0" rtlCol="0" anchor="ctr"/>
+          <a:lstStyle/>
+          <a:p>
+            <a:pPr indent="0" marL="0">
+              <a:buNone/>
+            </a:pPr>
+            <a:r>
+              <a:rPr lang="en-US" sz="950" dirty="0">
+                <a:solidFill>
+                  <a:srgbClr val="718096"/>
+                </a:solidFill>
+                <a:latin typeface="Pretendard" pitchFamily="34" charset="0"/>
+                <a:ea typeface="Pretendard" pitchFamily="34" charset="-122"/>
+                <a:cs typeface="Pretendard" pitchFamily="34" charset="-120"/>
+              </a:rPr>
+              <a:t>예상 개발 이익률</a:t>
+            </a:r>
+            <a:endParaRPr lang="en-US" sz="950" dirty="0"/>
+          </a:p>
+        </p:txBody>
+      </p:sp>
+      <p:sp>
+        <p:nvSpPr>
+          <p:cNvPr id="22" name="Text 20"/>
+          <p:cNvSpPr/>
+          <p:nvPr/>
+        </p:nvSpPr>
+        <p:spPr>
+          <a:xfrm>
+            <a:off x="731520" y="3630168"/>
+            <a:ext cx="3247034" cy="402336"/>
+          </a:xfrm>
+          <a:prstGeom prst="rect">
+            <a:avLst/>
+          </a:prstGeom>
+          <a:noFill/>
+          <a:ln/>
+        </p:spPr>
+        <p:txBody>
+          <a:bodyPr wrap="square" lIns="0" tIns="0" rIns="0" bIns="0" rtlCol="0" anchor="ctr">
+            <a:normAutofit/>
+          </a:bodyPr>
+          <a:lstStyle/>
+          <a:p>
+            <a:pPr indent="0" marL="0">
+              <a:buNone/>
+            </a:pPr>
+            <a:r>
+              <a:rPr lang="en-US" sz="1800" b="1" dirty="0">
+                <a:solidFill>
+                  <a:srgbClr val="10161F"/>
+                </a:solidFill>
+                <a:latin typeface="Pretendard" pitchFamily="34" charset="0"/>
+                <a:ea typeface="Pretendard" pitchFamily="34" charset="-122"/>
+                <a:cs typeface="Pretendard" pitchFamily="34" charset="-120"/>
+              </a:rPr>
+              <a:t>산출 불가 (사업비 데이터 부족)</a:t>
+            </a:r>
+            <a:endParaRPr lang="en-US" sz="1800" dirty="0"/>
+          </a:p>
+        </p:txBody>
+      </p:sp>
+      <p:sp>
+        <p:nvSpPr>
+          <p:cNvPr id="23" name="Text 21"/>
+          <p:cNvSpPr/>
+          <p:nvPr/>
+        </p:nvSpPr>
+        <p:spPr>
+          <a:xfrm>
+            <a:off x="731520" y="3995928"/>
+            <a:ext cx="3247034" cy="164592"/>
+          </a:xfrm>
+          <a:prstGeom prst="rect">
+            <a:avLst/>
+          </a:prstGeom>
+          <a:noFill/>
+          <a:ln/>
+        </p:spPr>
+        <p:txBody>
+          <a:bodyPr wrap="square" lIns="0" tIns="0" rIns="0" bIns="0" rtlCol="0" anchor="ctr"/>
+          <a:lstStyle/>
+          <a:p>
+            <a:pPr indent="0" marL="0">
+              <a:buNone/>
+            </a:pPr>
+            <a:r>
+              <a:rPr lang="en-US" sz="880" dirty="0">
+                <a:solidFill>
+                  <a:srgbClr val="718096"/>
+                </a:solidFill>
+                <a:latin typeface="Pretendard" pitchFamily="34" charset="0"/>
+                <a:ea typeface="Pretendard" pitchFamily="34" charset="-122"/>
+                <a:cs typeface="Pretendard" pitchFamily="34" charset="-120"/>
+              </a:rPr>
+              <a:t>시장 상황 연동</a:t>
+            </a:r>
+            <a:endParaRPr lang="en-US" sz="880" dirty="0"/>
+          </a:p>
+        </p:txBody>
+      </p:sp>
+      <p:sp>
+        <p:nvSpPr>
+          <p:cNvPr id="24" name="Shape 22"/>
+          <p:cNvSpPr/>
+          <p:nvPr/>
+        </p:nvSpPr>
+        <p:spPr>
+          <a:xfrm>
+            <a:off x="566928" y="4626864"/>
             <a:ext cx="11057839" cy="1280160"/>
           </a:xfrm>
           <a:prstGeom prst="roundRect">
@@ -7868,13 +7656,13 @@
       </p:sp>
       <p:sp>
         <p:nvSpPr>
-          <p:cNvPr id="8" name="Shape 6"/>
-          <p:cNvSpPr/>
-          <p:nvPr/>
-        </p:nvSpPr>
-        <p:spPr>
-          <a:xfrm>
-            <a:off x="566928" y="1700784"/>
+          <p:cNvPr id="25" name="Shape 23"/>
+          <p:cNvSpPr/>
+          <p:nvPr/>
+        </p:nvSpPr>
+        <p:spPr>
+          <a:xfrm>
+            <a:off x="566928" y="4681728"/>
             <a:ext cx="36576" cy="1170432"/>
           </a:xfrm>
           <a:prstGeom prst="rect">
@@ -7888,13 +7676,13 @@
       </p:sp>
       <p:sp>
         <p:nvSpPr>
-          <p:cNvPr id="9" name="Text 7"/>
-          <p:cNvSpPr/>
-          <p:nvPr/>
-        </p:nvSpPr>
-        <p:spPr>
-          <a:xfrm>
-            <a:off x="749808" y="1755648"/>
+          <p:cNvPr id="26" name="Text 24"/>
+          <p:cNvSpPr/>
+          <p:nvPr/>
+        </p:nvSpPr>
+        <p:spPr>
+          <a:xfrm>
+            <a:off x="749808" y="4736592"/>
             <a:ext cx="10728655" cy="201168"/>
           </a:xfrm>
           <a:prstGeom prst="rect">
@@ -7927,13 +7715,13 @@
       </p:sp>
       <p:sp>
         <p:nvSpPr>
-          <p:cNvPr id="10" name="Text 8"/>
-          <p:cNvSpPr/>
-          <p:nvPr/>
-        </p:nvSpPr>
-        <p:spPr>
-          <a:xfrm>
-            <a:off x="749808" y="1975104"/>
+          <p:cNvPr id="27" name="Text 25"/>
+          <p:cNvSpPr/>
+          <p:nvPr/>
+        </p:nvSpPr>
+        <p:spPr>
+          <a:xfrm>
+            <a:off x="749808" y="4956048"/>
             <a:ext cx="10728655" cy="877824"/>
           </a:xfrm>
           <a:prstGeom prst="rect">
@@ -7961,7 +7749,7 @@
                 <a:ea typeface="Pretendard" pitchFamily="34" charset="-122"/>
                 <a:cs typeface="Pretendard" pitchFamily="34" charset="-120"/>
               </a:rPr>
-              <a:t>{"ok":true,"mocked":true,"extractedFields":{"area_signal":"역삼","asset_type":"오피스빌딩","price_band":"300억","size_signal":"3000평(약 9917.4㎡)"},"extractedFacts":{"region":"역삼","exactAddressCandidate":"역삼동 742-1","assetType":"오피스빌딩","priceText":"300억","sizeText":"3000평(약 9917.4㎡)","currentUse":"오피스","currentUseSignal":"근린생활시설","leaseSignal":"임대중","vacancySignal":"공실없음","tenantNames":["쿠팡","네이버"],"unitRentTexts":["301호: 1500만"],"sellerMotivationText":"자산 효율화","brokerNotes":["초역세권 매물"]},"detectedSensitiveFields":["exact_address","tenant_name"],"ambiguousFields":[],"warnings":[],"areaSignal":"역삼","assetType":"오피스빌딩","priceBand":"300억","sizeSignal":"3000평(약 9917.4㎡)","dealType":"매각","buildingName":"역삼 센트럴타워","exactAddress":"역삼동 742-1","totalFloorArea":9917.3,"buildYear":2015,"currentUseSignal":"근린생활시설","vacancySignal":"공실 없음","fitSummary":"초역세권 근생 빌딩으로 시행/사옥 매입에 최적화","cautionSummary":"주요 임차 업종 만기 조율 필요","hiddenFields":["exact_address","seller_motivation"],"confidence":{"areaSignal":"confirmed","assetType":"confirmed","priceBand":"ai_hypothesis","fitSummary":"ai_hypothesis"},"missingData":["sizeSignal"],"boundaryNote":"본 자료는 실거래 통계 기반 참고치입니다.","buyerType":"법인 사옥형","budgetRange":{"min":50,"max":80,"display":"50억~80억"},"preferredRegions":["강남","성수"],"assetTypes":["꼬마빌딩","사옥용"],"purchasePurpose":"사옥용 매입","mustHave":["초역세권","주차"],"niceToHave":["테라스","루프탑"],"riskTolerance":"medium","financingNote":"자본금 50% 준비","missingQuestions":["구체적인 입주 시기가 언제인가요?","선호하는 수익률이 있나요?"],"privacyNotes":["연락처 비공개"],"fitReasons":["매수자 예산(50-80억)에 부합하는 매물입니다.","요청하신 성수/강남 권역에 해당합니다."],"cautionReasons":["요청한 용도와 달리 명도 협의가 다소 필요합니다."],"recommendedNextAction":"현장 답사 제안","kakaoMessage":"안녕하세요! 요청하신 조건에 부합하는 추천 매물이 있어 안내해 드립니다. 확인해보시고 피드백 부탁드립니다.","title":"강남 역삼역 초역세권 오피스 사옥용 빌딩 매각","shortSummary":"역삼역 도보 5분 거리의 준신축급 대형 오피스빌딩입니다.","dealPoints":["초역세권","사옥 최적"],"cautionPoints":["명도 조율 필요"],"hiddenInfoNotice":["보증금 및 지번은 인가 후 확인 가능"],"gateMessage":"G1 등급 등록이 필요합니다.","kakaoText":"강남 역삼역 오피스 빌딩 매각 안내입니다.","exactUnitCandidate":"101호","floor":"1층","areaSqmText":"150㎡","spaceType":"office","depositText":"5000만","monthlyRentText":"400만","maintenanceFeeText":"50만","availableFromText":"즉시입주","leaseTermMonthsText":"24","incentivesText":"렌트프리 2개월","restrictions":[],"landlordIdentity":"김성수","currentTenant":"스타트업","vacancyReason":"이전 확장","rentNegotiation":"협의 가능","region":"성수동","areaSqm":150,"deposit":5000,"monthlyRent":400,"maintenanceFee":50,"availableFrom":"즉시입주","leaseTermMonths":24,"incentives":{"rentFreeMonths":2,"interiorSupport":"일부 인테리어 지원","freeRentDetail":"렌트프리 2개월 지원"},"shortSummaryLease":"성수역 도보 5분 거리 1층 리테일 상가 매물입니다."}</a:t>
+              <a:t>본 자산의 대지 매입 후 신축 개발 시 총 사업비, 예상 분양 수입 및 개발 이익률을 종합 추정합니다. ### 신축 사업수지 요약</a:t>
             </a:r>
             <a:endParaRPr lang="en-US" sz="930" dirty="0"/>
           </a:p>
@@ -7969,7 +7757,7 @@
       </p:sp>
       <p:sp>
         <p:nvSpPr>
-          <p:cNvPr id="11" name="Text 9"/>
+          <p:cNvPr id="28" name="Text 26"/>
           <p:cNvSpPr/>
           <p:nvPr/>
         </p:nvSpPr>
@@ -8008,7 +7796,7 @@
       </p:sp>
       <p:sp>
         <p:nvSpPr>
-          <p:cNvPr id="12" name="Text 10"/>
+          <p:cNvPr id="29" name="Text 27"/>
           <p:cNvSpPr/>
           <p:nvPr/>
         </p:nvSpPr>
@@ -8335,7 +8123,7 @@
                 <a:ea typeface="Pretendard" pitchFamily="34" charset="-122"/>
                 <a:cs typeface="Pretendard" pitchFamily="34" charset="-120"/>
               </a:rPr>
-              <a:t>2017년 준공 신축급 상태 (누수/균열 결함 없음)</a:t>
+              <a:t>준공연도 확인 필요, 구조 확인 필요</a:t>
             </a:r>
             <a:endParaRPr lang="en-US" sz="1250" dirty="0"/>
           </a:p>
@@ -8380,7 +8168,55 @@
                 <a:ea typeface="Pretendard" pitchFamily="34" charset="-122"/>
                 <a:cs typeface="Pretendard" pitchFamily="34" charset="-120"/>
               </a:rPr>
-              <a:t>준공 10년 미만으로 대규모 수선비용 발생 가능성 낮음</a:t>
+              <a:t>누수</a:t>
+            </a:r>
+            <a:endParaRPr lang="en-US" sz="1100" dirty="0"/>
+          </a:p>
+          <a:p>
+            <a:pPr marL="342900" indent="-342900">
+              <a:lnSpc>
+                <a:spcPct val="125000"/>
+              </a:lnSpc>
+              <a:spcBef>
+                <a:spcPts val="600"/>
+              </a:spcBef>
+              <a:buSzPct val="100000"/>
+              <a:buChar char="•"/>
+            </a:pPr>
+            <a:r>
+              <a:rPr lang="en-US" sz="1100" dirty="0">
+                <a:solidFill>
+                  <a:srgbClr val="10161F"/>
+                </a:solidFill>
+                <a:latin typeface="Pretendard" pitchFamily="34" charset="0"/>
+                <a:ea typeface="Pretendard" pitchFamily="34" charset="-122"/>
+                <a:cs typeface="Pretendard" pitchFamily="34" charset="-120"/>
+              </a:rPr>
+              <a:t>균열</a:t>
+            </a:r>
+            <a:endParaRPr lang="en-US" sz="1100" dirty="0"/>
+          </a:p>
+          <a:p>
+            <a:pPr marL="342900" indent="-342900">
+              <a:lnSpc>
+                <a:spcPct val="125000"/>
+              </a:lnSpc>
+              <a:spcBef>
+                <a:spcPts val="600"/>
+              </a:spcBef>
+              <a:buSzPct val="100000"/>
+              <a:buChar char="•"/>
+            </a:pPr>
+            <a:r>
+              <a:rPr lang="en-US" sz="1100" dirty="0">
+                <a:solidFill>
+                  <a:srgbClr val="10161F"/>
+                </a:solidFill>
+                <a:latin typeface="Pretendard" pitchFamily="34" charset="0"/>
+                <a:ea typeface="Pretendard" pitchFamily="34" charset="-122"/>
+                <a:cs typeface="Pretendard" pitchFamily="34" charset="-120"/>
+              </a:rPr>
+              <a:t>설비 노후 여부 현장 점검 필요</a:t>
             </a:r>
             <a:endParaRPr lang="en-US" sz="1100" dirty="0"/>
           </a:p>
@@ -8507,7 +8343,7 @@
                 <a:ea typeface="Pretendard" pitchFamily="34" charset="-122"/>
                 <a:cs typeface="Pretendard" pitchFamily="34" charset="-120"/>
               </a:rPr>
-              <a:t>15인승 침대용 승강기 및 냉난방 설비 양호</a:t>
+              <a:t>승강기 정보 확인 필요</a:t>
             </a:r>
             <a:endParaRPr lang="en-US" sz="1250" dirty="0"/>
           </a:p>
@@ -8552,7 +8388,7 @@
                 <a:ea typeface="Pretendard" pitchFamily="34" charset="-122"/>
                 <a:cs typeface="Pretendard" pitchFamily="34" charset="-120"/>
               </a:rPr>
-              <a:t>주기적 정기 점검 계약 유지로 관리 리스크 최소화</a:t>
+              <a:t>정기검사 이력, 냉난방 설비 상태 확인 필요</a:t>
             </a:r>
             <a:endParaRPr lang="en-US" sz="1100" dirty="0"/>
           </a:p>
@@ -8679,7 +8515,7 @@
                 <a:ea typeface="Pretendard" pitchFamily="34" charset="-122"/>
                 <a:cs typeface="Pretendard" pitchFamily="34" charset="-120"/>
               </a:rPr>
-              <a:t>병의원/약국 인테리어 투자비(호실당 5억↑) 존속</a:t>
+              <a:t>임대차 계약 현황 LOI 접수 후 열람</a:t>
             </a:r>
             <a:endParaRPr lang="en-US" sz="1250" dirty="0"/>
           </a:p>
@@ -8724,7 +8560,7 @@
                 <a:ea typeface="Pretendard" pitchFamily="34" charset="-122"/>
                 <a:cs typeface="Pretendard" pitchFamily="34" charset="-120"/>
               </a:rPr>
-              <a:t>WALE 3.5년 확보 및 만기 6개월 전 재계약 협상 개시</a:t>
+              <a:t>잔여 계약기간(WALE), 임차인 신용도 확인 필요</a:t>
             </a:r>
             <a:endParaRPr lang="en-US" sz="1100" dirty="0"/>
           </a:p>
@@ -8790,7 +8626,7 @@
                 <a:ea typeface="Pretendard" pitchFamily="34" charset="-122"/>
                 <a:cs typeface="Pretendard" pitchFamily="34" charset="-120"/>
               </a:rPr>
-              <a:t>실사 총평: 자산의 물리적·권리적 하자가 없으며, 세부 임대차 계약서 및 등기사항증명서는 LOI 접수 후 원본 열람 가능합니다.</a:t>
+              <a:t>※ 본 리스크 체크는 공부 및 브로커 확인 기반이며, 매수 전 전문 실사팀(변호사/건축사)을 통한 정밀 실사가 필요합니다.</a:t>
             </a:r>
             <a:endParaRPr lang="en-US" sz="1100" dirty="0"/>
           </a:p>
@@ -9145,7 +8981,7 @@
                 <a:ea typeface="Pretendard" pitchFamily="34" charset="-122"/>
                 <a:cs typeface="Pretendard" pitchFamily="34" charset="-120"/>
               </a:rPr>
-              <a:t>{"ok":true,"mocked":true,"extractedFields":{"area_signal":"역삼","asset_type":"오피스빌딩","price_band":"300억","size_signal":"3000평(약 9917.4㎡)"},"extractedFacts":{"region":"역삼","exactAddressCandidate":"역삼동 742-1","assetType":"오피스빌딩","priceText":"300억","sizeText":"3000평(약 9917.4㎡)","currentUse":"오피스","currentUseSignal":"근린생활시설","leaseSignal":"임대중","vacancySignal":"공실없음","tenantNames":["쿠팡","네이버"],"unitRentTexts":["301호: 1500만"],"sellerMotivationText":"자산 효율화","brokerNotes":["초역세권 매물"]},"detectedSensitiveFields":["exact_address","tenant_name"],"ambiguousFields":[],"warnings":[],"areaSignal":"역삼","assetType":"오피스빌딩","priceBand":"300억","sizeSignal":"3000평(약 9917.4㎡)","dealType":"매각","buildingName":"역삼 센트럴타워","exactAddress":"역삼동 742-1","totalFloorArea":9917.3,"buildYear":2015,"currentUseSignal":"근린생활시설","vacancySignal":"공실 없음","fitSummary":"초역세권 근생 빌딩으로 시행/사옥 매입에 최적화","cautionSummary":"주요 임차 업종 만기 조율 필요","hiddenFields":["exact_address","seller_motivation"],"confidence":{"areaSignal":"confirmed","assetType":"confirmed","priceBand":"ai_hypothesis","fitSummary":"ai_hypothesis"},"missingData":["sizeSignal"],"boundaryNote":"본 자료는 실거래 통계 기반 참고치입니다.","buyerType":"법인 사옥형","budgetRange":{"min":50,"max":80,"display":"50억~80억"},"preferredRegions":["강남","성수"],"assetTypes":["꼬마빌딩","사옥용"],"purchasePurpose":"사옥용 매입","mustHave":["초역세권","주차"],"niceToHave":["테라스","루프탑"],"riskTolerance":"medium","financingNote":"자본금 50% 준비","missingQuestions":["구체적인 입주 시기가 언제인가요?","선호하는 수익률이 있나요?"],"privacyNotes":["연락처 비공개"],"fitReasons":["매수자 예산(50-80억)에 부합하는 매물입니다.","요청하신 성수/강남 권역에 해당합니다."],"cautionReasons":["요청한 용도와 달리 명도 협의가 다소 필요합니다."],"recommendedNextAction":"현장 답사 제안","kakaoMessage":"안녕하세요! 요청하신 조건에 부합하는 추천 매물이 있어 안내해 드립니다. 확인해보시고 피드백 부탁드립니다.","title":"강남 역삼역 초역세권 오피스 사옥용 빌딩 매각","shortSummary":"역삼역 도보 5분 거리의 준신축급 대형 오피스빌딩입니다.","dealPoints":["초역세권","사옥 최적"],"cautionPoints":["명도 조율 필요"],"hiddenInfoNotice":["보증금 및 지번은 인가 후 확인 가능"],"gateMessage":"G1 등급 등록이 필요합니다.","kakaoText":"강남 역삼역 오피스 빌딩 매각 안내입니다.","exactUnitCandidate":"101호","floor":"1층","areaSqmText":"150㎡","spaceType":"office","depositText":"5000만","monthlyRentText":"400만","maintenanceFeeText":"50만","availableFromText":"즉시입주","leaseTermMonthsText":"24","incentivesText":"렌트프리 2개월","restrictions":[],"landlordIdentity":"김성수","currentTenant":"스타트업","vacancyReason":"이전 확장","rentNegotiation":"협의 가능","region":"성수동","areaSqm":150,"deposit":5000,"monthlyRent":400,"maintenanceFee":50,"availableFrom":"즉시입주","leaseTermMonths":24,"incentives":{"rentFreeMonths":2,"interiorSupport":"일부 인테리어 지원","freeRentDetail":"렌트프리 2개월 지원"},"shortSummaryLease":"성수역 도보 5분 거리 1층 리테일 상가 매물입니다."}</a:t>
+              <a:t>{"ok":true,"mocked":true,"extractedFields":{"area_signal":"역삼","asset_type":"오피스빌딩","price_band":"300억","size_signal":"3000평(약 9917.4㎡)"},"extractedFacts":{"region":"역삼","exactAddressCandidate":"역삼동 742-1","assetType":"오피스빌딩","priceText":"300억","sizeText":"3000평(약 9917.4㎡)","currentUse":"오피스","currentUseSignal":"근린생활시설","leaseSignal":"임대중","vacancySignal":"공실없음","tenantNames":["쿠팡","네이버"],"unitRentTexts":["301호: 1500만"],"sellerMotivationText":"자산 효율화","brokerNotes":["초역세권 매물"]},"detectedSensitiveFields":["exact_address","tenant_name"],"ambiguousFields":[],"warnings":[],"areaSignal":"역삼","assetType":"오피스빌딩","priceBand":"300억","sizeSignal":"3000평(약 9917.4㎡)","dealType":"매각","buildingName":"역삼 센트럴타워","exactAddress":"역삼동 742-1","totalFloorArea":9917.3,"buildYear":2015,"currentUseSignal":"근린생활시설","vacancySignal":"공실 없음","fitSummary":"초역세권 근생 빌딩으로 시행/사옥 매입에 최적화","cautionSummary":"주요 임차인 만기 조율 필요","hiddenFields":["exact_address","seller_motivation"],"confidence":{"areaSignal":"confirmed","assetType":"confirmed","priceBand":"ai_hypothesis","fitSummary":"ai_hypothesis"},"missingData":["sizeSignal"],"boundaryNote":"본 자료는 실거래 통계 기반 참고치입니다.","buyerType":"법인 사옥형","budgetRange":{"min":50,"max":80,"display":"50억~80억"},"preferredRegions":["강남","성수"],"assetTypes":["꼬마빌딩","사옥용"],"purchasePurpose":"사옥용 매입","mustHave":["초역세권","주차"],"niceToHave":["테라스","루프탑"],"riskTolerance":"medium","financingNote":"자본금 50% 준비","missingQuestions":["구체적인 입주 시기가 언제인가요?","선호하는 수익률이 있나요?"],"privacyNotes":["연락처 비공개"],"fitReasons":["매수자 예산(50-80억)에 부합하는 매물입니다.","요청하신 성수/강남 권역에 해당합니다."],"cautionReasons":["요청한 용도와 달리 명도 협의가 다소 필요합니다."],"recommendedNextAction":"현장 답사 제안","kakaoMessage":"안녕하세요! 요청하신 조건에 부합하는 추천 매물이 있어 안내해 드립니다. 확인해보시고 피드백 부탁드립니다.","title":"강남 역삼역 초역세권 오피스 사옥용 빌딩 매각","shortSummary":"역삼역 도보 5분 거리의 준신축급 대형 오피스빌딩입니다.","dealPoints":["초역세권","사옥 최적"],"cautionPoints":["명도 조율 필요"],"hiddenInfoNotice":["보증금 및 지번은 인가 후 확인 가능"],"gateMessage":"G1 등급 등록이 필요합니다.","kakaoText":"강남 역삼역 오피스 빌딩 매각 안내입니다.","exactUnitCandidate":"101호","floor":"1층","areaSqmText":"150㎡","spaceType":"office","depositText":"5000만","monthlyRentText":"400만","maintenanceFeeText":"50만","availableFromText":"즉시입주","leaseTermMonthsText":"24","incentivesText":"렌트프리 2개월","restrictions":[],"landlordIdentity":"김성수","currentTenant":"스타트업","vacancyReason":"이전 확장","rentNegotiation":"협의 가능","region":"성수동","areaSqm":150,"deposit":5000,"monthlyRent":400,"maintenanceFee":50,"availableFrom":"즉시입주","leaseTermMonths":24,"incentives":{"rentFreeMonths":2,"interiorSupport":"일부 인테리어 지원","freeRentDetail":"렌트프리 2개월 지원"},"shortSummaryLease":"성수역 도보 5분 거리 1층 리테일 상가 매물입니다."}</a:t>
             </a:r>
             <a:endParaRPr lang="en-US" sz="1100" dirty="0"/>
           </a:p>
@@ -9434,7 +9270,7 @@
         <p:spPr>
           <a:xfrm>
             <a:off x="786384" y="1792224"/>
-            <a:ext cx="384048" cy="384048"/>
+            <a:ext cx="438912" cy="438912"/>
           </a:xfrm>
           <a:prstGeom prst="ellipse">
             <a:avLst/>
@@ -9454,7 +9290,7 @@
         <p:spPr>
           <a:xfrm>
             <a:off x="786384" y="1792224"/>
-            <a:ext cx="384048" cy="384048"/>
+            <a:ext cx="438912" cy="438912"/>
           </a:xfrm>
           <a:prstGeom prst="rect">
             <a:avLst/>
@@ -9470,7 +9306,7 @@
               <a:buNone/>
             </a:pPr>
             <a:r>
-              <a:rPr lang="en-US" sz="1300" b="1" dirty="0">
+              <a:rPr lang="en-US" sz="1400" b="1" dirty="0">
                 <a:solidFill>
                   <a:srgbClr val="FFFFFF"/>
                 </a:solidFill>
@@ -9478,9 +9314,9 @@
                 <a:ea typeface="Arial" pitchFamily="34" charset="-122"/>
                 <a:cs typeface="Arial" pitchFamily="34" charset="-120"/>
               </a:rPr>
-              <a:t>STEP 1</a:t>
-            </a:r>
-            <a:endParaRPr lang="en-US" sz="1300" dirty="0"/>
+              <a:t>01</a:t>
+            </a:r>
+            <a:endParaRPr lang="en-US" sz="1400" dirty="0"/>
           </a:p>
         </p:txBody>
       </p:sp>
@@ -9517,7 +9353,7 @@
                 <a:ea typeface="Pretendard" pitchFamily="34" charset="-122"/>
                 <a:cs typeface="Pretendard" pitchFamily="34" charset="-120"/>
               </a:rPr>
-              <a:t>초기 관심 표명 → 담당자 연락</a:t>
+              <a:t>1단계</a:t>
             </a:r>
             <a:endParaRPr lang="en-US" sz="1600" dirty="0"/>
           </a:p>
@@ -9547,6 +9383,17 @@
             <a:pPr indent="0" marL="0">
               <a:buNone/>
             </a:pPr>
+            <a:r>
+              <a:rPr lang="en-US" sz="1100" dirty="0">
+                <a:solidFill>
+                  <a:srgbClr val="10161F"/>
+                </a:solidFill>
+                <a:latin typeface="Pretendard" pitchFamily="34" charset="0"/>
+                <a:ea typeface="Pretendard" pitchFamily="34" charset="-122"/>
+                <a:cs typeface="Pretendard" pitchFamily="34" charset="-120"/>
+              </a:rPr>
+              <a:t>초기 관심 표명 → 담당자 연락</a:t>
+            </a:r>
             <a:endParaRPr lang="en-US" sz="1100" dirty="0"/>
           </a:p>
         </p:txBody>
@@ -9612,7 +9459,7 @@
         <p:spPr>
           <a:xfrm>
             <a:off x="3642284" y="1792224"/>
-            <a:ext cx="384048" cy="384048"/>
+            <a:ext cx="438912" cy="438912"/>
           </a:xfrm>
           <a:prstGeom prst="ellipse">
             <a:avLst/>
@@ -9632,7 +9479,7 @@
         <p:spPr>
           <a:xfrm>
             <a:off x="3642284" y="1792224"/>
-            <a:ext cx="384048" cy="384048"/>
+            <a:ext cx="438912" cy="438912"/>
           </a:xfrm>
           <a:prstGeom prst="rect">
             <a:avLst/>
@@ -9648,7 +9495,7 @@
               <a:buNone/>
             </a:pPr>
             <a:r>
-              <a:rPr lang="en-US" sz="1300" b="1" dirty="0">
+              <a:rPr lang="en-US" sz="1400" b="1" dirty="0">
                 <a:solidFill>
                   <a:srgbClr val="FFFFFF"/>
                 </a:solidFill>
@@ -9656,9 +9503,9 @@
                 <a:ea typeface="Arial" pitchFamily="34" charset="-122"/>
                 <a:cs typeface="Arial" pitchFamily="34" charset="-120"/>
               </a:rPr>
-              <a:t>STEP 2</a:t>
-            </a:r>
-            <a:endParaRPr lang="en-US" sz="1300" dirty="0"/>
+              <a:t>02</a:t>
+            </a:r>
+            <a:endParaRPr lang="en-US" sz="1400" dirty="0"/>
           </a:p>
         </p:txBody>
       </p:sp>
@@ -9695,7 +9542,7 @@
                 <a:ea typeface="Pretendard" pitchFamily="34" charset="-122"/>
                 <a:cs typeface="Pretendard" pitchFamily="34" charset="-120"/>
               </a:rPr>
-              <a:t>NDA 체결 → 임차인 정보 및 임대차계약서 제공</a:t>
+              <a:t>2단계</a:t>
             </a:r>
             <a:endParaRPr lang="en-US" sz="1600" dirty="0"/>
           </a:p>
@@ -9725,6 +9572,17 @@
             <a:pPr indent="0" marL="0">
               <a:buNone/>
             </a:pPr>
+            <a:r>
+              <a:rPr lang="en-US" sz="1100" dirty="0">
+                <a:solidFill>
+                  <a:srgbClr val="10161F"/>
+                </a:solidFill>
+                <a:latin typeface="Pretendard" pitchFamily="34" charset="0"/>
+                <a:ea typeface="Pretendard" pitchFamily="34" charset="-122"/>
+                <a:cs typeface="Pretendard" pitchFamily="34" charset="-120"/>
+              </a:rPr>
+              <a:t>NDA 체결 → 임차인 정보 및 임대차계약서 제공</a:t>
+            </a:r>
             <a:endParaRPr lang="en-US" sz="1100" dirty="0"/>
           </a:p>
         </p:txBody>
@@ -9790,7 +9648,7 @@
         <p:spPr>
           <a:xfrm>
             <a:off x="6498184" y="1792224"/>
-            <a:ext cx="384048" cy="384048"/>
+            <a:ext cx="438912" cy="438912"/>
           </a:xfrm>
           <a:prstGeom prst="ellipse">
             <a:avLst/>
@@ -9810,7 +9668,7 @@
         <p:spPr>
           <a:xfrm>
             <a:off x="6498184" y="1792224"/>
-            <a:ext cx="384048" cy="384048"/>
+            <a:ext cx="438912" cy="438912"/>
           </a:xfrm>
           <a:prstGeom prst="rect">
             <a:avLst/>
@@ -9826,7 +9684,7 @@
               <a:buNone/>
             </a:pPr>
             <a:r>
-              <a:rPr lang="en-US" sz="1300" b="1" dirty="0">
+              <a:rPr lang="en-US" sz="1400" b="1" dirty="0">
                 <a:solidFill>
                   <a:srgbClr val="FFFFFF"/>
                 </a:solidFill>
@@ -9834,9 +9692,9 @@
                 <a:ea typeface="Arial" pitchFamily="34" charset="-122"/>
                 <a:cs typeface="Arial" pitchFamily="34" charset="-120"/>
               </a:rPr>
-              <a:t>STEP 3</a:t>
-            </a:r>
-            <a:endParaRPr lang="en-US" sz="1300" dirty="0"/>
+              <a:t>03</a:t>
+            </a:r>
+            <a:endParaRPr lang="en-US" sz="1400" dirty="0"/>
           </a:p>
         </p:txBody>
       </p:sp>
@@ -9873,7 +9731,7 @@
                 <a:ea typeface="Pretendard" pitchFamily="34" charset="-122"/>
                 <a:cs typeface="Pretendard" pitchFamily="34" charset="-120"/>
               </a:rPr>
-              <a:t>현장 실사 일정 조율 → 건물 컨디션 및 설비 직접 확인</a:t>
+              <a:t>3단계</a:t>
             </a:r>
             <a:endParaRPr lang="en-US" sz="1600" dirty="0"/>
           </a:p>
@@ -9903,6 +9761,17 @@
             <a:pPr indent="0" marL="0">
               <a:buNone/>
             </a:pPr>
+            <a:r>
+              <a:rPr lang="en-US" sz="1100" dirty="0">
+                <a:solidFill>
+                  <a:srgbClr val="10161F"/>
+                </a:solidFill>
+                <a:latin typeface="Pretendard" pitchFamily="34" charset="0"/>
+                <a:ea typeface="Pretendard" pitchFamily="34" charset="-122"/>
+                <a:cs typeface="Pretendard" pitchFamily="34" charset="-120"/>
+              </a:rPr>
+              <a:t>현장 실사 일정 조율 → 건물 컨디션 및 설비 직접 확인</a:t>
+            </a:r>
             <a:endParaRPr lang="en-US" sz="1100" dirty="0"/>
           </a:p>
         </p:txBody>
@@ -9968,7 +9837,7 @@
         <p:spPr>
           <a:xfrm>
             <a:off x="9354083" y="1792224"/>
-            <a:ext cx="384048" cy="384048"/>
+            <a:ext cx="438912" cy="438912"/>
           </a:xfrm>
           <a:prstGeom prst="ellipse">
             <a:avLst/>
@@ -9988,7 +9857,7 @@
         <p:spPr>
           <a:xfrm>
             <a:off x="9354083" y="1792224"/>
-            <a:ext cx="384048" cy="384048"/>
+            <a:ext cx="438912" cy="438912"/>
           </a:xfrm>
           <a:prstGeom prst="rect">
             <a:avLst/>
@@ -10004,7 +9873,7 @@
               <a:buNone/>
             </a:pPr>
             <a:r>
-              <a:rPr lang="en-US" sz="1300" b="1" dirty="0">
+              <a:rPr lang="en-US" sz="1400" b="1" dirty="0">
                 <a:solidFill>
                   <a:srgbClr val="FFFFFF"/>
                 </a:solidFill>
@@ -10012,9 +9881,9 @@
                 <a:ea typeface="Arial" pitchFamily="34" charset="-122"/>
                 <a:cs typeface="Arial" pitchFamily="34" charset="-120"/>
               </a:rPr>
-              <a:t>STEP 4</a:t>
-            </a:r>
-            <a:endParaRPr lang="en-US" sz="1300" dirty="0"/>
+              <a:t>04</a:t>
+            </a:r>
+            <a:endParaRPr lang="en-US" sz="1400" dirty="0"/>
           </a:p>
         </p:txBody>
       </p:sp>
@@ -10051,7 +9920,7 @@
                 <a:ea typeface="Pretendard" pitchFamily="34" charset="-122"/>
                 <a:cs typeface="Pretendard" pitchFamily="34" charset="-120"/>
               </a:rPr>
-              <a:t>LOI(투자의향서) 제출 → 가격 협의 개시</a:t>
+              <a:t>4단계</a:t>
             </a:r>
             <a:endParaRPr lang="en-US" sz="1600" dirty="0"/>
           </a:p>
@@ -10081,6 +9950,17 @@
             <a:pPr indent="0" marL="0">
               <a:buNone/>
             </a:pPr>
+            <a:r>
+              <a:rPr lang="en-US" sz="1100" dirty="0">
+                <a:solidFill>
+                  <a:srgbClr val="10161F"/>
+                </a:solidFill>
+                <a:latin typeface="Pretendard" pitchFamily="34" charset="0"/>
+                <a:ea typeface="Pretendard" pitchFamily="34" charset="-122"/>
+                <a:cs typeface="Pretendard" pitchFamily="34" charset="-120"/>
+              </a:rPr>
+              <a:t>LOI(투자의향서) 제출 → 가격 협의 개시</a:t>
+            </a:r>
             <a:endParaRPr lang="en-US" sz="1100" dirty="0"/>
           </a:p>
         </p:txBody>

--- a/docs/test/stress/e2e-outputs/development_case12_yeoksam_dev_basic.pptx
+++ b/docs/test/stress/e2e-outputs/development_case12_yeoksam_dev_basic.pptx
@@ -15,9 +15,10 @@
     <p:sldId id="263" r:id="rId9"/>
     <p:sldId id="264" r:id="rId10"/>
     <p:sldId id="265" r:id="rId11"/>
+    <p:sldId id="266" r:id="rId12"/>
   </p:sldIdLst>
   <p:notesMasterIdLst>
-    <p:notesMasterId r:id="rId12"/>
+    <p:notesMasterId r:id="rId13"/>
   </p:notesMasterIdLst>
   <p:sldSz cx="12192000" cy="6858000"/>
   <p:notesSz cx="6858000" cy="12192000"/>
@@ -623,6 +624,94 @@
             <a:fld id="{F7021451-1387-4CA6-816F-3879F97B5CBC}" type="slidenum">
               <a:rPr lang="en-US"/>
               <a:t>10</a:t>
+            </a:fld>
+            <a:endParaRPr lang="en-US"/>
+          </a:p>
+        </p:txBody>
+      </p:sp>
+    </p:spTree>
+    <p:extLst>
+      <p:ext uri="{BB962C8B-B14F-4D97-AF65-F5344CB8AC3E}">
+        <p14:creationId xmlns:p14="http://schemas.microsoft.com/office/powerpoint/2010/main" val="1024086991"/>
+      </p:ext>
+    </p:extLst>
+  </p:cSld>
+  <p:clrMapOvr>
+    <a:masterClrMapping/>
+  </p:clrMapOvr>
+</p:notes>
+</file>
+
+<file path=ppt/notesSlides/notesSlide11.xml><?xml version="1.0" encoding="utf-8"?>
+<p:notes xmlns:a="http://schemas.openxmlformats.org/drawingml/2006/main" xmlns:r="http://schemas.openxmlformats.org/officeDocument/2006/relationships" xmlns:p="http://schemas.openxmlformats.org/presentationml/2006/main">
+  <p:cSld>
+    <p:spTree>
+      <p:nvGrpSpPr>
+        <p:cNvPr id="1" name=""/>
+        <p:cNvGrpSpPr/>
+        <p:nvPr/>
+      </p:nvGrpSpPr>
+      <p:grpSpPr>
+        <a:xfrm>
+          <a:off x="0" y="0"/>
+          <a:ext cx="0" cy="0"/>
+          <a:chOff x="0" y="0"/>
+          <a:chExt cx="0" cy="0"/>
+        </a:xfrm>
+      </p:grpSpPr>
+      <p:sp>
+        <p:nvSpPr>
+          <p:cNvPr id="2" name="Slide Image Placeholder 1"/>
+          <p:cNvSpPr>
+            <a:spLocks noGrp="1" noRot="1" noChangeAspect="1"/>
+          </p:cNvSpPr>
+          <p:nvPr>
+            <p:ph type="sldImg"/>
+          </p:nvPr>
+        </p:nvSpPr>
+        <p:spPr/>
+      </p:sp>
+      <p:sp>
+        <p:nvSpPr>
+          <p:cNvPr id="3" name="Notes Placeholder 2"/>
+          <p:cNvSpPr>
+            <a:spLocks noGrp="1"/>
+          </p:cNvSpPr>
+          <p:nvPr>
+            <p:ph type="body" idx="1"/>
+          </p:nvPr>
+        </p:nvSpPr>
+        <p:spPr/>
+        <p:txBody>
+          <a:bodyPr/>
+          <a:lstStyle/>
+          <a:p>
+            <a:r>
+              <a:rPr lang="en-US" dirty="0"/>
+              <a:t/>
+            </a:r>
+            <a:endParaRPr lang="en-US" dirty="0"/>
+          </a:p>
+        </p:txBody>
+      </p:sp>
+      <p:sp>
+        <p:nvSpPr>
+          <p:cNvPr id="4" name="Slide Number Placeholder 3"/>
+          <p:cNvSpPr>
+            <a:spLocks noGrp="1"/>
+          </p:cNvSpPr>
+          <p:nvPr>
+            <p:ph type="sldNum" sz="quarter" idx="10"/>
+          </p:nvPr>
+        </p:nvSpPr>
+        <p:spPr/>
+        <p:txBody>
+          <a:bodyPr/>
+          <a:lstStyle/>
+          <a:p>
+            <a:fld id="{F7021451-1387-4CA6-816F-3879F97B5CBC}" type="slidenum">
+              <a:rPr lang="en-US"/>
+              <a:t>11</a:t>
             </a:fld>
             <a:endParaRPr lang="en-US"/>
           </a:p>
@@ -2297,6 +2386,434 @@
     <p:bg>
       <p:bgPr>
         <a:solidFill>
+          <a:srgbClr val="FFFFFF"/>
+        </a:solidFill>
+      </p:bgPr>
+    </p:bg>
+    <p:spTree>
+      <p:nvGrpSpPr>
+        <p:cNvPr id="1" name=""/>
+        <p:cNvGrpSpPr/>
+        <p:nvPr/>
+      </p:nvGrpSpPr>
+      <p:grpSpPr>
+        <a:xfrm>
+          <a:off x="0" y="0"/>
+          <a:ext cx="0" cy="0"/>
+          <a:chOff x="0" y="0"/>
+          <a:chExt cx="0" cy="0"/>
+        </a:xfrm>
+      </p:grpSpPr>
+      <p:sp>
+        <p:nvSpPr>
+          <p:cNvPr id="2" name="Shape 0"/>
+          <p:cNvSpPr/>
+          <p:nvPr/>
+        </p:nvSpPr>
+        <p:spPr>
+          <a:xfrm>
+            <a:off x="566928" y="457200"/>
+            <a:ext cx="384048" cy="384048"/>
+          </a:xfrm>
+          <a:prstGeom prst="ellipse">
+            <a:avLst/>
+          </a:prstGeom>
+          <a:solidFill>
+            <a:srgbClr val="B98A2E"/>
+          </a:solidFill>
+          <a:ln/>
+        </p:spPr>
+      </p:sp>
+      <p:sp>
+        <p:nvSpPr>
+          <p:cNvPr id="3" name="Text 1"/>
+          <p:cNvSpPr/>
+          <p:nvPr/>
+        </p:nvSpPr>
+        <p:spPr>
+          <a:xfrm>
+            <a:off x="566928" y="457200"/>
+            <a:ext cx="384048" cy="384048"/>
+          </a:xfrm>
+          <a:prstGeom prst="rect">
+            <a:avLst/>
+          </a:prstGeom>
+          <a:noFill/>
+          <a:ln/>
+        </p:spPr>
+        <p:txBody>
+          <a:bodyPr wrap="square" lIns="0" tIns="0" rIns="0" bIns="0" rtlCol="0" anchor="ctr"/>
+          <a:lstStyle/>
+          <a:p>
+            <a:pPr algn="ctr" indent="0" marL="0">
+              <a:buNone/>
+            </a:pPr>
+            <a:r>
+              <a:rPr lang="en-US" sz="1300" b="1" dirty="0">
+                <a:solidFill>
+                  <a:srgbClr val="FFFFFF"/>
+                </a:solidFill>
+                <a:latin typeface="Arial" pitchFamily="34" charset="0"/>
+                <a:ea typeface="Arial" pitchFamily="34" charset="-122"/>
+                <a:cs typeface="Arial" pitchFamily="34" charset="-120"/>
+              </a:rPr>
+              <a:t>10</a:t>
+            </a:r>
+            <a:endParaRPr lang="en-US" sz="1300" dirty="0"/>
+          </a:p>
+        </p:txBody>
+      </p:sp>
+      <p:sp>
+        <p:nvSpPr>
+          <p:cNvPr id="4" name="Text 2"/>
+          <p:cNvSpPr/>
+          <p:nvPr/>
+        </p:nvSpPr>
+        <p:spPr>
+          <a:xfrm>
+            <a:off x="1133856" y="457200"/>
+            <a:ext cx="10490911" cy="182880"/>
+          </a:xfrm>
+          <a:prstGeom prst="rect">
+            <a:avLst/>
+          </a:prstGeom>
+          <a:noFill/>
+          <a:ln/>
+        </p:spPr>
+        <p:txBody>
+          <a:bodyPr wrap="square" lIns="0" tIns="0" rIns="0" bIns="0" rtlCol="0" anchor="ctr"/>
+          <a:lstStyle/>
+          <a:p>
+            <a:pPr indent="0" marL="0">
+              <a:buNone/>
+            </a:pPr>
+            <a:r>
+              <a:rPr lang="en-US" sz="950" b="1" spc="200" kern="0" dirty="0">
+                <a:solidFill>
+                  <a:srgbClr val="B98A2E"/>
+                </a:solidFill>
+                <a:latin typeface="Arial" pitchFamily="34" charset="0"/>
+                <a:ea typeface="Arial" pitchFamily="34" charset="-122"/>
+                <a:cs typeface="Arial" pitchFamily="34" charset="-120"/>
+              </a:rPr>
+              <a:t>Process</a:t>
+            </a:r>
+            <a:endParaRPr lang="en-US" sz="950" dirty="0"/>
+          </a:p>
+        </p:txBody>
+      </p:sp>
+      <p:sp>
+        <p:nvSpPr>
+          <p:cNvPr id="5" name="Text 3"/>
+          <p:cNvSpPr/>
+          <p:nvPr/>
+        </p:nvSpPr>
+        <p:spPr>
+          <a:xfrm>
+            <a:off x="1133856" y="640080"/>
+            <a:ext cx="10490911" cy="365760"/>
+          </a:xfrm>
+          <a:prstGeom prst="rect">
+            <a:avLst/>
+          </a:prstGeom>
+          <a:noFill/>
+          <a:ln/>
+        </p:spPr>
+        <p:txBody>
+          <a:bodyPr wrap="square" lIns="0" tIns="0" rIns="0" bIns="0" rtlCol="0" anchor="ctr"/>
+          <a:lstStyle/>
+          <a:p>
+            <a:pPr indent="0" marL="0">
+              <a:buNone/>
+            </a:pPr>
+            <a:r>
+              <a:rPr lang="en-US" sz="2300" b="1" dirty="0">
+                <a:solidFill>
+                  <a:srgbClr val="10161F"/>
+                </a:solidFill>
+                <a:latin typeface="Pretendard" pitchFamily="34" charset="0"/>
+                <a:ea typeface="Pretendard" pitchFamily="34" charset="-122"/>
+                <a:cs typeface="Pretendard" pitchFamily="34" charset="-120"/>
+              </a:rPr>
+              <a:t>검토 후 다음 단계는 무엇인가</a:t>
+            </a:r>
+            <a:endParaRPr lang="en-US" sz="2300" dirty="0"/>
+          </a:p>
+        </p:txBody>
+      </p:sp>
+      <p:sp>
+        <p:nvSpPr>
+          <p:cNvPr id="6" name="Shape 4"/>
+          <p:cNvSpPr/>
+          <p:nvPr/>
+        </p:nvSpPr>
+        <p:spPr>
+          <a:xfrm>
+            <a:off x="566928" y="1572768"/>
+            <a:ext cx="11057839" cy="3200400"/>
+          </a:xfrm>
+          <a:prstGeom prst="roundRect">
+            <a:avLst>
+              <a:gd name="adj" fmla="val 1714"/>
+            </a:avLst>
+          </a:prstGeom>
+          <a:solidFill>
+            <a:srgbClr val="F7FAFC"/>
+          </a:solidFill>
+          <a:ln w="6350">
+            <a:solidFill>
+              <a:srgbClr val="CBD5E0"/>
+            </a:solidFill>
+            <a:prstDash val="solid"/>
+          </a:ln>
+        </p:spPr>
+      </p:sp>
+      <p:sp>
+        <p:nvSpPr>
+          <p:cNvPr id="7" name="Shape 5"/>
+          <p:cNvSpPr/>
+          <p:nvPr/>
+        </p:nvSpPr>
+        <p:spPr>
+          <a:xfrm>
+            <a:off x="786384" y="1792224"/>
+            <a:ext cx="438912" cy="438912"/>
+          </a:xfrm>
+          <a:prstGeom prst="ellipse">
+            <a:avLst/>
+          </a:prstGeom>
+          <a:solidFill>
+            <a:srgbClr val="B98A2E"/>
+          </a:solidFill>
+          <a:ln/>
+        </p:spPr>
+      </p:sp>
+      <p:sp>
+        <p:nvSpPr>
+          <p:cNvPr id="8" name="Text 6"/>
+          <p:cNvSpPr/>
+          <p:nvPr/>
+        </p:nvSpPr>
+        <p:spPr>
+          <a:xfrm>
+            <a:off x="786384" y="1792224"/>
+            <a:ext cx="438912" cy="438912"/>
+          </a:xfrm>
+          <a:prstGeom prst="rect">
+            <a:avLst/>
+          </a:prstGeom>
+          <a:noFill/>
+          <a:ln/>
+        </p:spPr>
+        <p:txBody>
+          <a:bodyPr wrap="square" lIns="0" tIns="0" rIns="0" bIns="0" rtlCol="0" anchor="ctr"/>
+          <a:lstStyle/>
+          <a:p>
+            <a:pPr algn="ctr" indent="0" marL="0">
+              <a:buNone/>
+            </a:pPr>
+            <a:r>
+              <a:rPr lang="en-US" sz="1400" b="1" dirty="0">
+                <a:solidFill>
+                  <a:srgbClr val="FFFFFF"/>
+                </a:solidFill>
+                <a:latin typeface="Arial" pitchFamily="34" charset="0"/>
+                <a:ea typeface="Arial" pitchFamily="34" charset="-122"/>
+                <a:cs typeface="Arial" pitchFamily="34" charset="-120"/>
+              </a:rPr>
+              <a:t>01</a:t>
+            </a:r>
+            <a:endParaRPr lang="en-US" sz="1400" dirty="0"/>
+          </a:p>
+        </p:txBody>
+      </p:sp>
+      <p:sp>
+        <p:nvSpPr>
+          <p:cNvPr id="9" name="Text 7"/>
+          <p:cNvSpPr/>
+          <p:nvPr/>
+        </p:nvSpPr>
+        <p:spPr>
+          <a:xfrm>
+            <a:off x="786384" y="2304288"/>
+            <a:ext cx="10618927" cy="365760"/>
+          </a:xfrm>
+          <a:prstGeom prst="rect">
+            <a:avLst/>
+          </a:prstGeom>
+          <a:noFill/>
+          <a:ln/>
+        </p:spPr>
+        <p:txBody>
+          <a:bodyPr wrap="square" rtlCol="0" anchor="ctr"/>
+          <a:lstStyle/>
+          <a:p>
+            <a:pPr indent="0" marL="0">
+              <a:buNone/>
+            </a:pPr>
+            <a:r>
+              <a:rPr lang="en-US" sz="1600" b="1" dirty="0">
+                <a:solidFill>
+                  <a:srgbClr val="10161F"/>
+                </a:solidFill>
+                <a:latin typeface="Pretendard" pitchFamily="34" charset="0"/>
+                <a:ea typeface="Pretendard" pitchFamily="34" charset="-122"/>
+                <a:cs typeface="Pretendard" pitchFamily="34" charset="-120"/>
+              </a:rPr>
+              <a:t>1단계</a:t>
+            </a:r>
+            <a:endParaRPr lang="en-US" sz="1600" dirty="0"/>
+          </a:p>
+        </p:txBody>
+      </p:sp>
+      <p:sp>
+        <p:nvSpPr>
+          <p:cNvPr id="10" name="Text 8"/>
+          <p:cNvSpPr/>
+          <p:nvPr/>
+        </p:nvSpPr>
+        <p:spPr>
+          <a:xfrm>
+            <a:off x="786384" y="2761488"/>
+            <a:ext cx="10618927" cy="1828800"/>
+          </a:xfrm>
+          <a:prstGeom prst="rect">
+            <a:avLst/>
+          </a:prstGeom>
+          <a:noFill/>
+          <a:ln/>
+        </p:spPr>
+        <p:txBody>
+          <a:bodyPr wrap="square" rtlCol="0" anchor="t"/>
+          <a:lstStyle/>
+          <a:p>
+            <a:pPr indent="0" marL="0">
+              <a:buNone/>
+            </a:pPr>
+            <a:r>
+              <a:rPr lang="en-US" sz="1100" dirty="0">
+                <a:solidFill>
+                  <a:srgbClr val="10161F"/>
+                </a:solidFill>
+                <a:latin typeface="Pretendard" pitchFamily="34" charset="0"/>
+                <a:ea typeface="Pretendard" pitchFamily="34" charset="-122"/>
+                <a:cs typeface="Pretendard" pitchFamily="34" charset="-120"/>
+              </a:rPr>
+              <a:t>{"ok"</a:t>
+            </a:r>
+            <a:endParaRPr lang="en-US" sz="1100" dirty="0"/>
+          </a:p>
+          <a:p>
+            <a:pPr indent="0" marL="0">
+              <a:buNone/>
+            </a:pPr>
+            <a:r>
+              <a:rPr lang="en-US" sz="1100" dirty="0">
+                <a:solidFill>
+                  <a:srgbClr val="10161F"/>
+                </a:solidFill>
+                <a:latin typeface="Pretendard" pitchFamily="34" charset="0"/>
+                <a:ea typeface="Pretendard" pitchFamily="34" charset="-122"/>
+                <a:cs typeface="Pretendard" pitchFamily="34" charset="-120"/>
+              </a:rPr>
+              <a:t>true,"mocked":true,"extractedFields":{"area_signal":"역삼","asset_type":"오피스빌딩","price_band":"300억","size_signal":"3000평(약 9917.4㎡)"},"extractedFacts":{"region":"역삼","exactAddressCandidate":"역삼동 742-1","assetType":"오피스빌딩","priceText":"300억","sizeText":"3000평(약 9917.4㎡)","currentUse":"오피스","currentUseSignal":"근린생활시설","leaseSignal":"임대중","vacancySignal":"공실없음","tenantNames":["쿠팡","네이버"],"unitRentTexts":["301호: 1500만"],"sellerMotivationText":"자산 효율화","brokerNotes":["초역세권 매물"]},"detectedSensitiveFields":["exact_address","tenant_name"],"ambiguousFields":[],"warnings":[],"areaSignal":"역삼","assetType":"오피스빌딩","priceBand":"300억","sizeSignal":"3000평(약 9917.4㎡)","dealType":"매각","buildingName":"역삼 센트럴타워","exactAddress":"역삼동 742-1","totalFloorArea":9917.3,"buildYear":2015,"currentUseSignal":"근린생활시설","vacancySignal":"공실 없음","fitSummary":"초역세권 근생 빌딩으로 시행/사옥 매입에 최적화","cautionSummary":"주요 임차인 만기 조율 필요","hiddenFields":["exact_address","seller_motivation"],"confidence":{"areaSignal":"confirmed","assetType":"confirmed","priceBand":"ai_hypothesis","fitSummary":"ai_hypothesis"},"missingData":["sizeSignal"],"boundaryNote":"본 자료는 실거래 통계 기반 참고치입니다.","buyerType":"법인 사옥형","budgetRange":{"min":50,"max":80,"display":"50억~80억"},"preferredRegions":["강남","성수"],"assetTypes":["꼬마빌딩","사옥용"],"purchasePurpose":"사옥용 매입","mustHave":["초역세권","주차"],"niceToHave":["테라스","루프탑"],"riskTolerance":"medium","financingNote":"자본금 50% 준비","missingQuestions":["구체적인 입주 시기가 언제인가요?","선호하는 수익률이 있나요?"],"privacyNotes":["연락처 비공개"],"fitReasons":["매수자 예산(50-80억)에 부합하는 매물입니다.","요청하신 성수/강남 권역에 해당합니다."],"cautionReasons":["요청한 용도와 달리 명도 협의가 다소 필요합니다."],"recommendedNextAction":"현장 답사 제안","kakaoMessage":"안녕하세요! 요청하신 조건에 부합하는 추천 매물이 있어 안내해 드립니다. 확인해보시고 피드백 부탁드립니다.","title":"강남 역삼역 초역세권 오피스 사옥용 빌딩 매각","shortSummary":"역삼역 도보 5분 거리의 준신축급 대형 오피스빌딩입니다.","dealPoints":["초역세권","사옥 최적"],"cautionPoints":["명도 조율 필요"],"hiddenInfoNotice":["보증금 및 지번은 인가 후 확인 가능"],"gateMessage":"G1 등급 등록이 필요합니다.","kakaoText":"강남 역삼역 오피스 빌딩 매각 안내입니다.","exactUnitCandidate":"101호","floor":"1층","areaSqmText":"150㎡","spaceType":"office","depositText":"5000만","monthlyRentText":"400만","maintenanceFeeText":"50만","availableFromText":"즉시입주","leaseTermMonthsText":"24","incentivesText":"렌트프리 2개월","restrictions":[],"landlordIdentity":"김성수","currentTenant":"스타트업","vacancyReason":"이전 확장","rentNegotiation":"협의 가능","region":"성수동","areaSqm":150,"deposit":5000,"monthlyRent":400,"maintenanceFee":50,"availableFrom":"즉시입주","leaseTermMonths":24,"incentives":{"rentFreeMonths":2,"interiorSupport":"일부 인테리어 지원","freeRentDetail":"렌트프리 2개월 지원"},"shortSummaryLease":"성수역 도보 5분 거리 1층 리테일 상가 매물입니다."}</a:t>
+            </a:r>
+            <a:endParaRPr lang="en-US" sz="1100" dirty="0"/>
+          </a:p>
+        </p:txBody>
+      </p:sp>
+      <p:sp>
+        <p:nvSpPr>
+          <p:cNvPr id="11" name="Text 9"/>
+          <p:cNvSpPr/>
+          <p:nvPr/>
+        </p:nvSpPr>
+        <p:spPr>
+          <a:xfrm>
+            <a:off x="566928" y="6382512"/>
+            <a:ext cx="7315200" cy="219456"/>
+          </a:xfrm>
+          <a:prstGeom prst="rect">
+            <a:avLst/>
+          </a:prstGeom>
+          <a:noFill/>
+          <a:ln/>
+        </p:spPr>
+        <p:txBody>
+          <a:bodyPr wrap="square" lIns="0" tIns="0" rIns="0" bIns="0" rtlCol="0" anchor="ctr"/>
+          <a:lstStyle/>
+          <a:p>
+            <a:pPr indent="0" marL="0">
+              <a:buNone/>
+            </a:pPr>
+            <a:r>
+              <a:rPr lang="en-US" sz="800" dirty="0">
+                <a:solidFill>
+                  <a:srgbClr val="718096"/>
+                </a:solidFill>
+                <a:latin typeface="Pretendard" pitchFamily="34" charset="0"/>
+                <a:ea typeface="Pretendard" pitchFamily="34" charset="-122"/>
+                <a:cs typeface="Pretendard" pitchFamily="34" charset="-120"/>
+              </a:rPr>
+              <a:t>크리딜   |   </a:t>
+            </a:r>
+            <a:endParaRPr lang="en-US" sz="800" dirty="0"/>
+          </a:p>
+        </p:txBody>
+      </p:sp>
+      <p:sp>
+        <p:nvSpPr>
+          <p:cNvPr id="12" name="Text 10"/>
+          <p:cNvSpPr/>
+          <p:nvPr/>
+        </p:nvSpPr>
+        <p:spPr>
+          <a:xfrm>
+            <a:off x="10710367" y="6382512"/>
+            <a:ext cx="914400" cy="219456"/>
+          </a:xfrm>
+          <a:prstGeom prst="rect">
+            <a:avLst/>
+          </a:prstGeom>
+          <a:noFill/>
+          <a:ln/>
+        </p:spPr>
+        <p:txBody>
+          <a:bodyPr wrap="square" lIns="0" tIns="0" rIns="0" bIns="0" rtlCol="0" anchor="ctr"/>
+          <a:lstStyle/>
+          <a:p>
+            <a:pPr algn="r" indent="0" marL="0">
+              <a:buNone/>
+            </a:pPr>
+            <a:r>
+              <a:rPr lang="en-US" sz="900" b="1" dirty="0">
+                <a:solidFill>
+                  <a:srgbClr val="B98A2E"/>
+                </a:solidFill>
+                <a:latin typeface="Arial" pitchFamily="34" charset="0"/>
+                <a:ea typeface="Arial" pitchFamily="34" charset="-122"/>
+                <a:cs typeface="Arial" pitchFamily="34" charset="-120"/>
+              </a:rPr>
+              <a:t>10</a:t>
+            </a:r>
+            <a:endParaRPr lang="en-US" sz="900" dirty="0"/>
+          </a:p>
+        </p:txBody>
+      </p:sp>
+    </p:spTree>
+  </p:cSld>
+  <p:clrMapOvr>
+    <a:masterClrMapping/>
+  </p:clrMapOvr>
+</p:sld>
+</file>
+
+<file path=ppt/slides/slide11.xml><?xml version="1.0" encoding="utf-8"?>
+<p:sld xmlns:a="http://schemas.openxmlformats.org/drawingml/2006/main" xmlns:r="http://schemas.openxmlformats.org/officeDocument/2006/relationships" xmlns:p="http://schemas.openxmlformats.org/presentationml/2006/main">
+  <p:cSld name="Slide 11">
+    <p:bg>
+      <p:bgPr>
+        <a:solidFill>
           <a:srgbClr val="10161F"/>
         </a:solidFill>
       </p:bgPr>
@@ -2368,7 +2885,7 @@
                 <a:ea typeface="Arial" pitchFamily="34" charset="-122"/>
                 <a:cs typeface="Arial" pitchFamily="34" charset="-120"/>
               </a:rPr>
-              <a:t>10</a:t>
+              <a:t>11</a:t>
             </a:r>
             <a:endParaRPr lang="en-US" sz="1300" dirty="0"/>
           </a:p>
@@ -3780,7 +4297,7 @@
                 <a:ea typeface="Arial" pitchFamily="34" charset="-122"/>
                 <a:cs typeface="Arial" pitchFamily="34" charset="-120"/>
               </a:rPr>
-              <a:t>10</a:t>
+              <a:t>11</a:t>
             </a:r>
             <a:endParaRPr lang="en-US" sz="900" dirty="0"/>
           </a:p>
@@ -5187,7 +5704,7 @@
                 <a:ea typeface="Pretendard" pitchFamily="34" charset="-122"/>
                 <a:cs typeface="Pretendard" pitchFamily="34" charset="-120"/>
               </a:rPr>
-              <a:t>교통 접근성 상세 정보는 담당 브로커를 통해 확인하</a:t>
+              <a:t>교통 접근성</a:t>
             </a:r>
             <a:endParaRPr lang="en-US" sz="1300" dirty="0"/>
           </a:p>
@@ -5220,70 +5737,16 @@
               </a:lnSpc>
               <a:buNone/>
             </a:pPr>
-            <a:endParaRPr lang="en-US" sz="1300" dirty="0"/>
-          </a:p>
-        </p:txBody>
-      </p:sp>
-      <p:sp>
-        <p:nvSpPr>
-          <p:cNvPr id="9" name="Shape 6"/>
-          <p:cNvSpPr/>
-          <p:nvPr/>
-        </p:nvSpPr>
-        <p:spPr>
-          <a:xfrm>
-            <a:off x="6053328" y="1975104"/>
-            <a:ext cx="5571439" cy="0"/>
-          </a:xfrm>
-          <a:prstGeom prst="line">
-            <a:avLst/>
-          </a:prstGeom>
-          <a:noFill/>
-          <a:ln w="3810">
-            <a:solidFill>
-              <a:srgbClr val="CBD5E0"/>
-            </a:solidFill>
-            <a:prstDash val="solid"/>
-          </a:ln>
-        </p:spPr>
-      </p:sp>
-      <p:sp>
-        <p:nvSpPr>
-          <p:cNvPr id="10" name="Text 7"/>
-          <p:cNvSpPr/>
-          <p:nvPr/>
-        </p:nvSpPr>
-        <p:spPr>
-          <a:xfrm>
-            <a:off x="6053328" y="1975104"/>
-            <a:ext cx="2117147" cy="493776"/>
-          </a:xfrm>
-          <a:prstGeom prst="rect">
-            <a:avLst/>
-          </a:prstGeom>
-          <a:noFill/>
-          <a:ln/>
-        </p:spPr>
-        <p:txBody>
-          <a:bodyPr wrap="square" lIns="0" tIns="0" rIns="0" bIns="0" rtlCol="0" anchor="ctr"/>
-          <a:lstStyle/>
-          <a:p>
-            <a:pPr indent="0" marL="0">
-              <a:lnSpc>
-                <a:spcPct val="120000"/>
-              </a:lnSpc>
-              <a:buNone/>
-            </a:pPr>
-            <a:r>
-              <a:rPr lang="en-US" sz="1300" dirty="0">
-                <a:solidFill>
-                  <a:srgbClr val="718096"/>
+            <a:r>
+              <a:rPr lang="en-US" sz="1300" b="1" dirty="0">
+                <a:solidFill>
+                  <a:srgbClr val="10161F"/>
                 </a:solidFill>
                 <a:latin typeface="Pretendard" pitchFamily="34" charset="0"/>
                 <a:ea typeface="Pretendard" pitchFamily="34" charset="-122"/>
                 <a:cs typeface="Pretendard" pitchFamily="34" charset="-120"/>
               </a:rPr>
-              <a:t>[건물] 주변 상권</a:t>
+              <a:t>{"ok":true,"mocked":true,"extractedFields":{"area_signal":"역삼","asset_type":"오피스빌딩","price_band":"300억","size_signal":"3000평(약 9917.</a:t>
             </a:r>
             <a:endParaRPr lang="en-US" sz="1300" dirty="0"/>
           </a:p>
@@ -5291,14 +5754,14 @@
       </p:sp>
       <p:sp>
         <p:nvSpPr>
-          <p:cNvPr id="11" name="Text 8"/>
-          <p:cNvSpPr/>
-          <p:nvPr/>
-        </p:nvSpPr>
-        <p:spPr>
-          <a:xfrm>
-            <a:off x="8170475" y="1975104"/>
-            <a:ext cx="3454292" cy="493776"/>
+          <p:cNvPr id="9" name="Text 6"/>
+          <p:cNvSpPr/>
+          <p:nvPr/>
+        </p:nvSpPr>
+        <p:spPr>
+          <a:xfrm>
+            <a:off x="566928" y="6382512"/>
+            <a:ext cx="7315200" cy="219456"/>
           </a:xfrm>
           <a:prstGeom prst="rect">
             <a:avLst/>
@@ -5311,197 +5774,98 @@
           <a:lstStyle/>
           <a:p>
             <a:pPr indent="0" marL="0">
-              <a:lnSpc>
-                <a:spcPct val="120000"/>
-              </a:lnSpc>
-              <a:buNone/>
-            </a:pPr>
-            <a:r>
-              <a:rPr lang="en-US" sz="1300" b="1" dirty="0">
-                <a:solidFill>
-                  <a:srgbClr val="10161F"/>
+              <a:buNone/>
+            </a:pPr>
+            <a:r>
+              <a:rPr lang="en-US" sz="800" dirty="0">
+                <a:solidFill>
+                  <a:srgbClr val="718096"/>
                 </a:solidFill>
                 <a:latin typeface="Pretendard" pitchFamily="34" charset="0"/>
                 <a:ea typeface="Pretendard" pitchFamily="34" charset="-122"/>
                 <a:cs typeface="Pretendard" pitchFamily="34" charset="-120"/>
               </a:rPr>
-              <a:t>강남권역 내 주요 비즈니스 및 유동인구 풍부한 상권 입지 ### [성장] 입지 평가</a:t>
-            </a:r>
-            <a:endParaRPr lang="en-US" sz="1300" dirty="0"/>
-          </a:p>
-        </p:txBody>
-      </p:sp>
-      <p:sp>
-        <p:nvSpPr>
-          <p:cNvPr id="12" name="Shape 9"/>
-          <p:cNvSpPr/>
-          <p:nvPr/>
-        </p:nvSpPr>
-        <p:spPr>
-          <a:xfrm>
-            <a:off x="6053328" y="2468880"/>
-            <a:ext cx="5571439" cy="0"/>
-          </a:xfrm>
-          <a:prstGeom prst="line">
-            <a:avLst/>
-          </a:prstGeom>
-          <a:noFill/>
-          <a:ln w="3810">
-            <a:solidFill>
-              <a:srgbClr val="CBD5E0"/>
-            </a:solidFill>
-            <a:prstDash val="solid"/>
-          </a:ln>
-        </p:spPr>
-      </p:sp>
-      <p:sp>
-        <p:nvSpPr>
-          <p:cNvPr id="13" name="Text 10"/>
-          <p:cNvSpPr/>
-          <p:nvPr/>
-        </p:nvSpPr>
-        <p:spPr>
-          <a:xfrm>
-            <a:off x="6053328" y="2468880"/>
-            <a:ext cx="2117147" cy="493776"/>
-          </a:xfrm>
-          <a:prstGeom prst="rect">
-            <a:avLst/>
-          </a:prstGeom>
-          <a:noFill/>
-          <a:ln/>
-        </p:spPr>
-        <p:txBody>
-          <a:bodyPr wrap="square" lIns="0" tIns="0" rIns="0" bIns="0" rtlCol="0" anchor="ctr"/>
+              <a:t>크리딜   |   </a:t>
+            </a:r>
+            <a:endParaRPr lang="en-US" sz="800" dirty="0"/>
+          </a:p>
+        </p:txBody>
+      </p:sp>
+      <p:sp>
+        <p:nvSpPr>
+          <p:cNvPr id="10" name="Text 7"/>
+          <p:cNvSpPr/>
+          <p:nvPr/>
+        </p:nvSpPr>
+        <p:spPr>
+          <a:xfrm>
+            <a:off x="10710367" y="6382512"/>
+            <a:ext cx="914400" cy="219456"/>
+          </a:xfrm>
+          <a:prstGeom prst="rect">
+            <a:avLst/>
+          </a:prstGeom>
+          <a:noFill/>
+          <a:ln/>
+        </p:spPr>
+        <p:txBody>
+          <a:bodyPr wrap="square" lIns="0" tIns="0" rIns="0" bIns="0" rtlCol="0" anchor="ctr"/>
+          <a:lstStyle/>
+          <a:p>
+            <a:pPr algn="r" indent="0" marL="0">
+              <a:buNone/>
+            </a:pPr>
+            <a:r>
+              <a:rPr lang="en-US" sz="900" b="1" dirty="0">
+                <a:solidFill>
+                  <a:srgbClr val="B98A2E"/>
+                </a:solidFill>
+                <a:latin typeface="Arial" pitchFamily="34" charset="0"/>
+                <a:ea typeface="Arial" pitchFamily="34" charset="-122"/>
+                <a:cs typeface="Arial" pitchFamily="34" charset="-120"/>
+              </a:rPr>
+              <a:t>3</a:t>
+            </a:r>
+            <a:endParaRPr lang="en-US" sz="900" dirty="0"/>
+          </a:p>
+        </p:txBody>
+      </p:sp>
+      <p:sp>
+        <p:nvSpPr>
+          <p:cNvPr id="11" name="Text 8"/>
+          <p:cNvSpPr/>
+          <p:nvPr/>
+        </p:nvSpPr>
+        <p:spPr>
+          <a:xfrm>
+            <a:off x="566928" y="1481328"/>
+            <a:ext cx="11057839" cy="9692640"/>
+          </a:xfrm>
+          <a:prstGeom prst="rect">
+            <a:avLst/>
+          </a:prstGeom>
+          <a:noFill/>
+          <a:ln/>
+        </p:spPr>
+        <p:txBody>
+          <a:bodyPr wrap="square" lIns="0" tIns="0" rIns="0" bIns="0" rtlCol="0" anchor="t"/>
           <a:lstStyle/>
           <a:p>
             <a:pPr indent="0" marL="0">
-              <a:lnSpc>
-                <a:spcPct val="120000"/>
-              </a:lnSpc>
-              <a:buNone/>
-            </a:pPr>
-            <a:r>
-              <a:rPr lang="en-US" sz="1300" dirty="0">
-                <a:solidFill>
-                  <a:srgbClr val="718096"/>
+              <a:buNone/>
+            </a:pPr>
+            <a:r>
+              <a:rPr lang="en-US" sz="1000" dirty="0">
+                <a:solidFill>
+                  <a:srgbClr val="10161F"/>
                 </a:solidFill>
                 <a:latin typeface="Pretendard" pitchFamily="34" charset="0"/>
                 <a:ea typeface="Pretendard" pitchFamily="34" charset="-122"/>
                 <a:cs typeface="Pretendard" pitchFamily="34" charset="-120"/>
               </a:rPr>
-              <a:t>강남권역 내 위치하며 접근성과 가시성이 양호한 입지</a:t>
-            </a:r>
-            <a:endParaRPr lang="en-US" sz="1300" dirty="0"/>
-          </a:p>
-        </p:txBody>
-      </p:sp>
-      <p:sp>
-        <p:nvSpPr>
-          <p:cNvPr id="14" name="Text 11"/>
-          <p:cNvSpPr/>
-          <p:nvPr/>
-        </p:nvSpPr>
-        <p:spPr>
-          <a:xfrm>
-            <a:off x="8170475" y="2468880"/>
-            <a:ext cx="3454292" cy="493776"/>
-          </a:xfrm>
-          <a:prstGeom prst="rect">
-            <a:avLst/>
-          </a:prstGeom>
-          <a:noFill/>
-          <a:ln/>
-        </p:spPr>
-        <p:txBody>
-          <a:bodyPr wrap="square" lIns="0" tIns="0" rIns="0" bIns="0" rtlCol="0" anchor="ctr"/>
-          <a:lstStyle/>
-          <a:p>
-            <a:pPr indent="0" marL="0">
-              <a:lnSpc>
-                <a:spcPct val="120000"/>
-              </a:lnSpc>
-              <a:buNone/>
-            </a:pPr>
-            <a:endParaRPr lang="en-US" sz="1300" dirty="0"/>
-          </a:p>
-        </p:txBody>
-      </p:sp>
-      <p:sp>
-        <p:nvSpPr>
-          <p:cNvPr id="15" name="Text 12"/>
-          <p:cNvSpPr/>
-          <p:nvPr/>
-        </p:nvSpPr>
-        <p:spPr>
-          <a:xfrm>
-            <a:off x="566928" y="6382512"/>
-            <a:ext cx="7315200" cy="219456"/>
-          </a:xfrm>
-          <a:prstGeom prst="rect">
-            <a:avLst/>
-          </a:prstGeom>
-          <a:noFill/>
-          <a:ln/>
-        </p:spPr>
-        <p:txBody>
-          <a:bodyPr wrap="square" lIns="0" tIns="0" rIns="0" bIns="0" rtlCol="0" anchor="ctr"/>
-          <a:lstStyle/>
-          <a:p>
-            <a:pPr indent="0" marL="0">
-              <a:buNone/>
-            </a:pPr>
-            <a:r>
-              <a:rPr lang="en-US" sz="800" dirty="0">
-                <a:solidFill>
-                  <a:srgbClr val="718096"/>
-                </a:solidFill>
-                <a:latin typeface="Pretendard" pitchFamily="34" charset="0"/>
-                <a:ea typeface="Pretendard" pitchFamily="34" charset="-122"/>
-                <a:cs typeface="Pretendard" pitchFamily="34" charset="-120"/>
-              </a:rPr>
-              <a:t>크리딜   |   </a:t>
-            </a:r>
-            <a:endParaRPr lang="en-US" sz="800" dirty="0"/>
-          </a:p>
-        </p:txBody>
-      </p:sp>
-      <p:sp>
-        <p:nvSpPr>
-          <p:cNvPr id="16" name="Text 13"/>
-          <p:cNvSpPr/>
-          <p:nvPr/>
-        </p:nvSpPr>
-        <p:spPr>
-          <a:xfrm>
-            <a:off x="10710367" y="6382512"/>
-            <a:ext cx="914400" cy="219456"/>
-          </a:xfrm>
-          <a:prstGeom prst="rect">
-            <a:avLst/>
-          </a:prstGeom>
-          <a:noFill/>
-          <a:ln/>
-        </p:spPr>
-        <p:txBody>
-          <a:bodyPr wrap="square" lIns="0" tIns="0" rIns="0" bIns="0" rtlCol="0" anchor="ctr"/>
-          <a:lstStyle/>
-          <a:p>
-            <a:pPr algn="r" indent="0" marL="0">
-              <a:buNone/>
-            </a:pPr>
-            <a:r>
-              <a:rPr lang="en-US" sz="900" b="1" dirty="0">
-                <a:solidFill>
-                  <a:srgbClr val="B98A2E"/>
-                </a:solidFill>
-                <a:latin typeface="Arial" pitchFamily="34" charset="0"/>
-                <a:ea typeface="Arial" pitchFamily="34" charset="-122"/>
-                <a:cs typeface="Arial" pitchFamily="34" charset="-120"/>
-              </a:rPr>
-              <a:t>3</a:t>
-            </a:r>
-            <a:endParaRPr lang="en-US" sz="900" dirty="0"/>
+              <a:t>{"ok":true,"mocked":true,"extractedFields":{"area_signal":"역삼","asset_type":"오피스빌딩","price_band":"300억","size_signal":"3000평(약 9917.4㎡)"},"extractedFacts":{"region":"역삼","exactAddressCandidate":"역삼동 742-1","assetType":"오피스빌딩","priceText":"300억","sizeText":"3000평(약 9917.4㎡)","currentUse":"오피스","currentUseSignal":"근린생활시설","leaseSignal":"임대중","vacancySignal":"공실없음","tenantNames":["쿠팡","네이버"],"unitRentTexts":["301호: 1500만"],"sellerMotivationText":"자산 효율화","brokerNotes":["초역세권 매물"]},"detectedSensitiveFields":["exact_address","tenant_name"],"ambiguousFields":[],"warnings":[],"areaSignal":"역삼","assetType":"오피스빌딩","priceBand":"300억","sizeSignal":"3000평(약 9917.4㎡)","dealType":"매각","buildingName":"역삼 센트럴타워","exactAddress":"역삼동 742-1","totalFloorArea":9917.3,"buildYear":2015,"currentUseSignal":"근린생활시설","vacancySignal":"공실 없음","fitSummary":"초역세권 근생 빌딩으로 시행/사옥 매입에 최적화","cautionSummary":"주요 임차인 만기 조율 필요","hiddenFields":["exact_address","seller_motivation"],"confidence":{"areaSignal":"confirmed","assetType":"confirmed","priceBand":"ai_hypothesis","fitSummary":"ai_hypothesis"},"missingData":["sizeSignal"],"boundaryNote":"본 자료는 실거래 통계 기반 참고치입니다.","buyerType":"법인 사옥형","budgetRange":{"min":50,"max":80,"display":"50억~80억"},"preferredRegions":["강남","성수"],"assetTypes":["꼬마빌딩","사옥용"],"purchasePurpose":"사옥용 매입","mustHave":["초역세권","주차"],"niceToHave":["테라스","루프탑"],"riskTolerance":"medium","financingNote":"자본금 50% 준비","missingQuestions":["구체적인 입주 시기가 언제인가요?","선호하는 수익률이 있나요?"],"privacyNotes":["연락처 비공개"],"fitReasons":["매수자 예산(50-80억)에 부합하는 매물입니다.","요청하신 성수/강남 권역에 해당합니다."],"cautionReasons":["요청한 용도와 달리 명도 협의가 다소 필요합니다."],"recommendedNextAction":"현장 답사 제안","kakaoMessage":"안녕하세요! 요청하신 조건에 부합하는 추천 매물이 있어 안내해 드립니다. 확인해보시고 피드백 부탁드립니다.","title":"강남 역삼역 초역세권 오피스 사옥용 빌딩 매각","shortSummary":"역삼역 도보 5분 거리의 준신축급 대형 오피스빌딩입니다.","dealPoints":["초역세권","사옥 최적"],"cautionPoints":["명도 조율 필요"],"hiddenInfoNotice":["보증금 및 지번은 인가 후 확인 가능"],"gateMessage":"G1 등급 등록이 필요합니다.","kakaoText":"강남 역삼역 오피스 빌딩 매각 안내입니다.","exactUnitCandidate":"101호","floor":"1층","areaSqmText":"150㎡","spaceType":"office","depositText":"5000만","monthlyRentText":"400만","maintenanceFeeText":"50만","availableFromText":"즉시입주","leaseTermMonthsText":"24","incentivesText":"렌트프리 2개월","restrictions":[],"landlordIdentity":"김성수","currentTenant":"스타트업","vacancyReason":"이전 확장","rentNegotiation":"협의 가능","region":"성수동","areaSqm":150,"deposit":5000,"monthlyRent":400,"maintenanceFee":50,"availableFrom":"즉시입주","leaseTermMonths":24,"incentives":{"rentFreeMonths":2,"interiorSupport":"일부 인테리어 지원","freeRentDetail":"렌트프리 2개월 지원"},"shortSummaryLease":"성수역 도보 5분 거리 1층 리테일 상가 매물입니다."}</a:t>
+            </a:r>
+            <a:endParaRPr lang="en-US" sz="1000" dirty="0"/>
           </a:p>
         </p:txBody>
       </p:sp>
@@ -8011,11 +8375,11 @@
         <p:spPr>
           <a:xfrm>
             <a:off x="566928" y="1417320"/>
-            <a:ext cx="3515258" cy="3657600"/>
+            <a:ext cx="11057839" cy="3657600"/>
           </a:xfrm>
           <a:prstGeom prst="roundRect">
             <a:avLst>
-              <a:gd name="adj" fmla="val 1561"/>
+              <a:gd name="adj" fmla="val 1500"/>
             </a:avLst>
           </a:prstGeom>
           <a:solidFill>
@@ -8038,7 +8402,7 @@
         <p:spPr>
           <a:xfrm>
             <a:off x="566928" y="1417320"/>
-            <a:ext cx="3515258" cy="45720"/>
+            <a:ext cx="11057839" cy="45720"/>
           </a:xfrm>
           <a:prstGeom prst="rect">
             <a:avLst/>
@@ -8058,7 +8422,7 @@
         <p:spPr>
           <a:xfrm>
             <a:off x="795528" y="1618488"/>
-            <a:ext cx="3058058" cy="292608"/>
+            <a:ext cx="10600639" cy="292608"/>
           </a:xfrm>
           <a:prstGeom prst="rect">
             <a:avLst/>
@@ -8082,7 +8446,7 @@
                 <a:ea typeface="Pretendard" pitchFamily="34" charset="-122"/>
                 <a:cs typeface="Pretendard" pitchFamily="34" charset="-120"/>
               </a:rPr>
-              <a:t>건물 물리적 상태</a:t>
+              <a:t>용도 리스크</a:t>
             </a:r>
             <a:endParaRPr lang="en-US" sz="1350" dirty="0"/>
           </a:p>
@@ -8097,7 +8461,7 @@
         <p:spPr>
           <a:xfrm>
             <a:off x="795528" y="1947672"/>
-            <a:ext cx="3058058" cy="365760"/>
+            <a:ext cx="10600639" cy="365760"/>
           </a:xfrm>
           <a:prstGeom prst="rect">
             <a:avLst/>
@@ -8123,7 +8487,7 @@
                 <a:ea typeface="Pretendard" pitchFamily="34" charset="-122"/>
                 <a:cs typeface="Pretendard" pitchFamily="34" charset="-120"/>
               </a:rPr>
-              <a:t>준공연도 확인 필요, 구조 확인 필요</a:t>
+              <a:t>—</a:t>
             </a:r>
             <a:endParaRPr lang="en-US" sz="1250" dirty="0"/>
           </a:p>
@@ -8138,7 +8502,7 @@
         <p:spPr>
           <a:xfrm>
             <a:off x="795528" y="2377440"/>
-            <a:ext cx="3058058" cy="2606040"/>
+            <a:ext cx="10600639" cy="2606040"/>
           </a:xfrm>
           <a:prstGeom prst="rect">
             <a:avLst/>
@@ -8168,58 +8532,10 @@
                 <a:ea typeface="Pretendard" pitchFamily="34" charset="-122"/>
                 <a:cs typeface="Pretendard" pitchFamily="34" charset="-120"/>
               </a:rPr>
-              <a:t>누수</a:t>
+              <a:t>{"ok":true,"mocked":true,"extractedFields":{"area_signal":"역삼","asset_type":"오피스빌딩","price_band":"300억","size_signal":"3000평(약 9917.4㎡)"},"extractedFacts":{"region":"역삼","exactAddressCandidate":"역삼동 7</a:t>
             </a:r>
             <a:endParaRPr lang="en-US" sz="1100" dirty="0"/>
           </a:p>
-          <a:p>
-            <a:pPr marL="342900" indent="-342900">
-              <a:lnSpc>
-                <a:spcPct val="125000"/>
-              </a:lnSpc>
-              <a:spcBef>
-                <a:spcPts val="600"/>
-              </a:spcBef>
-              <a:buSzPct val="100000"/>
-              <a:buChar char="•"/>
-            </a:pPr>
-            <a:r>
-              <a:rPr lang="en-US" sz="1100" dirty="0">
-                <a:solidFill>
-                  <a:srgbClr val="10161F"/>
-                </a:solidFill>
-                <a:latin typeface="Pretendard" pitchFamily="34" charset="0"/>
-                <a:ea typeface="Pretendard" pitchFamily="34" charset="-122"/>
-                <a:cs typeface="Pretendard" pitchFamily="34" charset="-120"/>
-              </a:rPr>
-              <a:t>균열</a:t>
-            </a:r>
-            <a:endParaRPr lang="en-US" sz="1100" dirty="0"/>
-          </a:p>
-          <a:p>
-            <a:pPr marL="342900" indent="-342900">
-              <a:lnSpc>
-                <a:spcPct val="125000"/>
-              </a:lnSpc>
-              <a:spcBef>
-                <a:spcPts val="600"/>
-              </a:spcBef>
-              <a:buSzPct val="100000"/>
-              <a:buChar char="•"/>
-            </a:pPr>
-            <a:r>
-              <a:rPr lang="en-US" sz="1100" dirty="0">
-                <a:solidFill>
-                  <a:srgbClr val="10161F"/>
-                </a:solidFill>
-                <a:latin typeface="Pretendard" pitchFamily="34" charset="0"/>
-                <a:ea typeface="Pretendard" pitchFamily="34" charset="-122"/>
-                <a:cs typeface="Pretendard" pitchFamily="34" charset="-120"/>
-              </a:rPr>
-              <a:t>설비 노후 여부 현장 점검 필요</a:t>
-            </a:r>
-            <a:endParaRPr lang="en-US" sz="1100" dirty="0"/>
-          </a:p>
         </p:txBody>
       </p:sp>
       <p:sp>
@@ -8230,12 +8546,12 @@
         </p:nvSpPr>
         <p:spPr>
           <a:xfrm>
-            <a:off x="4338218" y="1417320"/>
-            <a:ext cx="3515258" cy="3657600"/>
+            <a:off x="566928" y="5193792"/>
+            <a:ext cx="11057839" cy="621792"/>
           </a:xfrm>
           <a:prstGeom prst="roundRect">
             <a:avLst>
-              <a:gd name="adj" fmla="val 1561"/>
+              <a:gd name="adj" fmla="val 8824"/>
             </a:avLst>
           </a:prstGeom>
           <a:solidFill>
@@ -8251,34 +8567,14 @@
       </p:sp>
       <p:sp>
         <p:nvSpPr>
-          <p:cNvPr id="12" name="Shape 10"/>
-          <p:cNvSpPr/>
-          <p:nvPr/>
-        </p:nvSpPr>
-        <p:spPr>
-          <a:xfrm>
-            <a:off x="4338218" y="1417320"/>
-            <a:ext cx="3515258" cy="45720"/>
-          </a:xfrm>
-          <a:prstGeom prst="rect">
-            <a:avLst/>
-          </a:prstGeom>
-          <a:solidFill>
-            <a:srgbClr val="B98A2E"/>
-          </a:solidFill>
-          <a:ln/>
-        </p:spPr>
-      </p:sp>
-      <p:sp>
-        <p:nvSpPr>
-          <p:cNvPr id="13" name="Text 11"/>
-          <p:cNvSpPr/>
-          <p:nvPr/>
-        </p:nvSpPr>
-        <p:spPr>
-          <a:xfrm>
-            <a:off x="4566818" y="1618488"/>
-            <a:ext cx="3058058" cy="292608"/>
+          <p:cNvPr id="12" name="Text 10"/>
+          <p:cNvSpPr/>
+          <p:nvPr/>
+        </p:nvSpPr>
+        <p:spPr>
+          <a:xfrm>
+            <a:off x="795528" y="5193792"/>
+            <a:ext cx="10600639" cy="621792"/>
           </a:xfrm>
           <a:prstGeom prst="rect">
             <a:avLst/>
@@ -8294,377 +8590,53 @@
               <a:buNone/>
             </a:pPr>
             <a:r>
-              <a:rPr lang="en-US" sz="1350" b="1" dirty="0">
-                <a:solidFill>
-                  <a:srgbClr val="977024"/>
+              <a:rPr lang="en-US" sz="1100" dirty="0">
+                <a:solidFill>
+                  <a:srgbClr val="10161F"/>
                 </a:solidFill>
                 <a:latin typeface="Pretendard" pitchFamily="34" charset="0"/>
                 <a:ea typeface="Pretendard" pitchFamily="34" charset="-122"/>
                 <a:cs typeface="Pretendard" pitchFamily="34" charset="-120"/>
               </a:rPr>
-              <a:t>승강기 및 설비</a:t>
-            </a:r>
-            <a:endParaRPr lang="en-US" sz="1350" dirty="0"/>
-          </a:p>
-        </p:txBody>
-      </p:sp>
-      <p:sp>
-        <p:nvSpPr>
-          <p:cNvPr id="14" name="Text 12"/>
-          <p:cNvSpPr/>
-          <p:nvPr/>
-        </p:nvSpPr>
-        <p:spPr>
-          <a:xfrm>
-            <a:off x="4566818" y="1947672"/>
-            <a:ext cx="3058058" cy="365760"/>
-          </a:xfrm>
-          <a:prstGeom prst="rect">
-            <a:avLst/>
-          </a:prstGeom>
-          <a:noFill/>
-          <a:ln/>
-        </p:spPr>
-        <p:txBody>
-          <a:bodyPr wrap="square" lIns="0" tIns="0" rIns="0" bIns="0" rtlCol="0" anchor="ctr">
-            <a:normAutofit/>
-          </a:bodyPr>
+              <a:t>※ 본 리스크 체크는 공부 및 브로커 확인 기반이며, 매수 전 전문 실사팀(변호사/건축사)을 통한 정밀 실사가 필요합니다.</a:t>
+            </a:r>
+            <a:endParaRPr lang="en-US" sz="1100" dirty="0"/>
+          </a:p>
+        </p:txBody>
+      </p:sp>
+      <p:sp>
+        <p:nvSpPr>
+          <p:cNvPr id="13" name="Text 11"/>
+          <p:cNvSpPr/>
+          <p:nvPr/>
+        </p:nvSpPr>
+        <p:spPr>
+          <a:xfrm>
+            <a:off x="566928" y="6382512"/>
+            <a:ext cx="7315200" cy="219456"/>
+          </a:xfrm>
+          <a:prstGeom prst="rect">
+            <a:avLst/>
+          </a:prstGeom>
+          <a:noFill/>
+          <a:ln/>
+        </p:spPr>
+        <p:txBody>
+          <a:bodyPr wrap="square" lIns="0" tIns="0" rIns="0" bIns="0" rtlCol="0" anchor="ctr"/>
           <a:lstStyle/>
           <a:p>
             <a:pPr indent="0" marL="0">
               <a:buNone/>
             </a:pPr>
             <a:r>
-              <a:rPr lang="en-US" sz="1250" b="1" dirty="0">
-                <a:solidFill>
-                  <a:srgbClr val="10161F"/>
+              <a:rPr lang="en-US" sz="800" dirty="0">
+                <a:solidFill>
+                  <a:srgbClr val="718096"/>
                 </a:solidFill>
                 <a:latin typeface="Pretendard" pitchFamily="34" charset="0"/>
                 <a:ea typeface="Pretendard" pitchFamily="34" charset="-122"/>
                 <a:cs typeface="Pretendard" pitchFamily="34" charset="-120"/>
               </a:rPr>
-              <a:t>승강기 정보 확인 필요</a:t>
-            </a:r>
-            <a:endParaRPr lang="en-US" sz="1250" dirty="0"/>
-          </a:p>
-        </p:txBody>
-      </p:sp>
-      <p:sp>
-        <p:nvSpPr>
-          <p:cNvPr id="15" name="Text 13"/>
-          <p:cNvSpPr/>
-          <p:nvPr/>
-        </p:nvSpPr>
-        <p:spPr>
-          <a:xfrm>
-            <a:off x="4566818" y="2377440"/>
-            <a:ext cx="3058058" cy="2606040"/>
-          </a:xfrm>
-          <a:prstGeom prst="rect">
-            <a:avLst/>
-          </a:prstGeom>
-          <a:noFill/>
-          <a:ln/>
-        </p:spPr>
-        <p:txBody>
-          <a:bodyPr wrap="square" lIns="0" tIns="0" rIns="0" bIns="0" rtlCol="0" anchor="t">
-            <a:normAutofit/>
-          </a:bodyPr>
-          <a:lstStyle/>
-          <a:p>
-            <a:pPr marL="342900" indent="-342900">
-              <a:lnSpc>
-                <a:spcPct val="125000"/>
-              </a:lnSpc>
-              <a:buSzPct val="100000"/>
-              <a:buChar char="•"/>
-            </a:pPr>
-            <a:r>
-              <a:rPr lang="en-US" sz="1100" dirty="0">
-                <a:solidFill>
-                  <a:srgbClr val="10161F"/>
-                </a:solidFill>
-                <a:latin typeface="Pretendard" pitchFamily="34" charset="0"/>
-                <a:ea typeface="Pretendard" pitchFamily="34" charset="-122"/>
-                <a:cs typeface="Pretendard" pitchFamily="34" charset="-120"/>
-              </a:rPr>
-              <a:t>정기검사 이력, 냉난방 설비 상태 확인 필요</a:t>
-            </a:r>
-            <a:endParaRPr lang="en-US" sz="1100" dirty="0"/>
-          </a:p>
-        </p:txBody>
-      </p:sp>
-      <p:sp>
-        <p:nvSpPr>
-          <p:cNvPr id="16" name="Shape 14"/>
-          <p:cNvSpPr/>
-          <p:nvPr/>
-        </p:nvSpPr>
-        <p:spPr>
-          <a:xfrm>
-            <a:off x="8109509" y="1417320"/>
-            <a:ext cx="3515258" cy="3657600"/>
-          </a:xfrm>
-          <a:prstGeom prst="roundRect">
-            <a:avLst>
-              <a:gd name="adj" fmla="val 1561"/>
-            </a:avLst>
-          </a:prstGeom>
-          <a:solidFill>
-            <a:srgbClr val="F7FAFC"/>
-          </a:solidFill>
-          <a:ln w="6350">
-            <a:solidFill>
-              <a:srgbClr val="CBD5E0"/>
-            </a:solidFill>
-            <a:prstDash val="solid"/>
-          </a:ln>
-        </p:spPr>
-      </p:sp>
-      <p:sp>
-        <p:nvSpPr>
-          <p:cNvPr id="17" name="Shape 15"/>
-          <p:cNvSpPr/>
-          <p:nvPr/>
-        </p:nvSpPr>
-        <p:spPr>
-          <a:xfrm>
-            <a:off x="8109509" y="1417320"/>
-            <a:ext cx="3515258" cy="45720"/>
-          </a:xfrm>
-          <a:prstGeom prst="rect">
-            <a:avLst/>
-          </a:prstGeom>
-          <a:solidFill>
-            <a:srgbClr val="B98A2E"/>
-          </a:solidFill>
-          <a:ln/>
-        </p:spPr>
-      </p:sp>
-      <p:sp>
-        <p:nvSpPr>
-          <p:cNvPr id="18" name="Text 16"/>
-          <p:cNvSpPr/>
-          <p:nvPr/>
-        </p:nvSpPr>
-        <p:spPr>
-          <a:xfrm>
-            <a:off x="8338109" y="1618488"/>
-            <a:ext cx="3058058" cy="292608"/>
-          </a:xfrm>
-          <a:prstGeom prst="rect">
-            <a:avLst/>
-          </a:prstGeom>
-          <a:noFill/>
-          <a:ln/>
-        </p:spPr>
-        <p:txBody>
-          <a:bodyPr wrap="square" lIns="0" tIns="0" rIns="0" bIns="0" rtlCol="0" anchor="ctr"/>
-          <a:lstStyle/>
-          <a:p>
-            <a:pPr indent="0" marL="0">
-              <a:buNone/>
-            </a:pPr>
-            <a:r>
-              <a:rPr lang="en-US" sz="1350" b="1" dirty="0">
-                <a:solidFill>
-                  <a:srgbClr val="977024"/>
-                </a:solidFill>
-                <a:latin typeface="Pretendard" pitchFamily="34" charset="0"/>
-                <a:ea typeface="Pretendard" pitchFamily="34" charset="-122"/>
-                <a:cs typeface="Pretendard" pitchFamily="34" charset="-120"/>
-              </a:rPr>
-              <a:t>임차인 이탈 위험</a:t>
-            </a:r>
-            <a:endParaRPr lang="en-US" sz="1350" dirty="0"/>
-          </a:p>
-        </p:txBody>
-      </p:sp>
-      <p:sp>
-        <p:nvSpPr>
-          <p:cNvPr id="19" name="Text 17"/>
-          <p:cNvSpPr/>
-          <p:nvPr/>
-        </p:nvSpPr>
-        <p:spPr>
-          <a:xfrm>
-            <a:off x="8338109" y="1947672"/>
-            <a:ext cx="3058058" cy="365760"/>
-          </a:xfrm>
-          <a:prstGeom prst="rect">
-            <a:avLst/>
-          </a:prstGeom>
-          <a:noFill/>
-          <a:ln/>
-        </p:spPr>
-        <p:txBody>
-          <a:bodyPr wrap="square" lIns="0" tIns="0" rIns="0" bIns="0" rtlCol="0" anchor="ctr">
-            <a:normAutofit/>
-          </a:bodyPr>
-          <a:lstStyle/>
-          <a:p>
-            <a:pPr indent="0" marL="0">
-              <a:buNone/>
-            </a:pPr>
-            <a:r>
-              <a:rPr lang="en-US" sz="1250" b="1" dirty="0">
-                <a:solidFill>
-                  <a:srgbClr val="10161F"/>
-                </a:solidFill>
-                <a:latin typeface="Pretendard" pitchFamily="34" charset="0"/>
-                <a:ea typeface="Pretendard" pitchFamily="34" charset="-122"/>
-                <a:cs typeface="Pretendard" pitchFamily="34" charset="-120"/>
-              </a:rPr>
-              <a:t>임대차 계약 현황 LOI 접수 후 열람</a:t>
-            </a:r>
-            <a:endParaRPr lang="en-US" sz="1250" dirty="0"/>
-          </a:p>
-        </p:txBody>
-      </p:sp>
-      <p:sp>
-        <p:nvSpPr>
-          <p:cNvPr id="20" name="Text 18"/>
-          <p:cNvSpPr/>
-          <p:nvPr/>
-        </p:nvSpPr>
-        <p:spPr>
-          <a:xfrm>
-            <a:off x="8338109" y="2377440"/>
-            <a:ext cx="3058058" cy="2606040"/>
-          </a:xfrm>
-          <a:prstGeom prst="rect">
-            <a:avLst/>
-          </a:prstGeom>
-          <a:noFill/>
-          <a:ln/>
-        </p:spPr>
-        <p:txBody>
-          <a:bodyPr wrap="square" lIns="0" tIns="0" rIns="0" bIns="0" rtlCol="0" anchor="t">
-            <a:normAutofit/>
-          </a:bodyPr>
-          <a:lstStyle/>
-          <a:p>
-            <a:pPr marL="342900" indent="-342900">
-              <a:lnSpc>
-                <a:spcPct val="125000"/>
-              </a:lnSpc>
-              <a:buSzPct val="100000"/>
-              <a:buChar char="•"/>
-            </a:pPr>
-            <a:r>
-              <a:rPr lang="en-US" sz="1100" dirty="0">
-                <a:solidFill>
-                  <a:srgbClr val="10161F"/>
-                </a:solidFill>
-                <a:latin typeface="Pretendard" pitchFamily="34" charset="0"/>
-                <a:ea typeface="Pretendard" pitchFamily="34" charset="-122"/>
-                <a:cs typeface="Pretendard" pitchFamily="34" charset="-120"/>
-              </a:rPr>
-              <a:t>잔여 계약기간(WALE), 임차인 신용도 확인 필요</a:t>
-            </a:r>
-            <a:endParaRPr lang="en-US" sz="1100" dirty="0"/>
-          </a:p>
-        </p:txBody>
-      </p:sp>
-      <p:sp>
-        <p:nvSpPr>
-          <p:cNvPr id="21" name="Shape 19"/>
-          <p:cNvSpPr/>
-          <p:nvPr/>
-        </p:nvSpPr>
-        <p:spPr>
-          <a:xfrm>
-            <a:off x="566928" y="5193792"/>
-            <a:ext cx="11057839" cy="621792"/>
-          </a:xfrm>
-          <a:prstGeom prst="roundRect">
-            <a:avLst>
-              <a:gd name="adj" fmla="val 8824"/>
-            </a:avLst>
-          </a:prstGeom>
-          <a:solidFill>
-            <a:srgbClr val="F7FAFC"/>
-          </a:solidFill>
-          <a:ln w="6350">
-            <a:solidFill>
-              <a:srgbClr val="CBD5E0"/>
-            </a:solidFill>
-            <a:prstDash val="solid"/>
-          </a:ln>
-        </p:spPr>
-      </p:sp>
-      <p:sp>
-        <p:nvSpPr>
-          <p:cNvPr id="22" name="Text 20"/>
-          <p:cNvSpPr/>
-          <p:nvPr/>
-        </p:nvSpPr>
-        <p:spPr>
-          <a:xfrm>
-            <a:off x="795528" y="5193792"/>
-            <a:ext cx="10600639" cy="621792"/>
-          </a:xfrm>
-          <a:prstGeom prst="rect">
-            <a:avLst/>
-          </a:prstGeom>
-          <a:noFill/>
-          <a:ln/>
-        </p:spPr>
-        <p:txBody>
-          <a:bodyPr wrap="square" lIns="0" tIns="0" rIns="0" bIns="0" rtlCol="0" anchor="ctr"/>
-          <a:lstStyle/>
-          <a:p>
-            <a:pPr indent="0" marL="0">
-              <a:buNone/>
-            </a:pPr>
-            <a:r>
-              <a:rPr lang="en-US" sz="1100" dirty="0">
-                <a:solidFill>
-                  <a:srgbClr val="10161F"/>
-                </a:solidFill>
-                <a:latin typeface="Pretendard" pitchFamily="34" charset="0"/>
-                <a:ea typeface="Pretendard" pitchFamily="34" charset="-122"/>
-                <a:cs typeface="Pretendard" pitchFamily="34" charset="-120"/>
-              </a:rPr>
-              <a:t>※ 본 리스크 체크는 공부 및 브로커 확인 기반이며, 매수 전 전문 실사팀(변호사/건축사)을 통한 정밀 실사가 필요합니다.</a:t>
-            </a:r>
-            <a:endParaRPr lang="en-US" sz="1100" dirty="0"/>
-          </a:p>
-        </p:txBody>
-      </p:sp>
-      <p:sp>
-        <p:nvSpPr>
-          <p:cNvPr id="23" name="Text 21"/>
-          <p:cNvSpPr/>
-          <p:nvPr/>
-        </p:nvSpPr>
-        <p:spPr>
-          <a:xfrm>
-            <a:off x="566928" y="6382512"/>
-            <a:ext cx="7315200" cy="219456"/>
-          </a:xfrm>
-          <a:prstGeom prst="rect">
-            <a:avLst/>
-          </a:prstGeom>
-          <a:noFill/>
-          <a:ln/>
-        </p:spPr>
-        <p:txBody>
-          <a:bodyPr wrap="square" lIns="0" tIns="0" rIns="0" bIns="0" rtlCol="0" anchor="ctr"/>
-          <a:lstStyle/>
-          <a:p>
-            <a:pPr indent="0" marL="0">
-              <a:buNone/>
-            </a:pPr>
-            <a:r>
-              <a:rPr lang="en-US" sz="800" dirty="0">
-                <a:solidFill>
-                  <a:srgbClr val="718096"/>
-                </a:solidFill>
-                <a:latin typeface="Pretendard" pitchFamily="34" charset="0"/>
-                <a:ea typeface="Pretendard" pitchFamily="34" charset="-122"/>
-                <a:cs typeface="Pretendard" pitchFamily="34" charset="-120"/>
-              </a:rPr>
               <a:t>크리딜   |   </a:t>
             </a:r>
             <a:endParaRPr lang="en-US" sz="800" dirty="0"/>
@@ -8673,7 +8645,7 @@
       </p:sp>
       <p:sp>
         <p:nvSpPr>
-          <p:cNvPr id="24" name="Text 22"/>
+          <p:cNvPr id="14" name="Text 12"/>
           <p:cNvSpPr/>
           <p:nvPr/>
         </p:nvSpPr>
@@ -8721,13 +8693,6 @@
 <file path=ppt/slides/slide8.xml><?xml version="1.0" encoding="utf-8"?>
 <p:sld xmlns:a="http://schemas.openxmlformats.org/drawingml/2006/main" xmlns:r="http://schemas.openxmlformats.org/officeDocument/2006/relationships" xmlns:p="http://schemas.openxmlformats.org/presentationml/2006/main">
   <p:cSld name="Slide 8">
-    <p:bg>
-      <p:bgPr>
-        <a:solidFill>
-          <a:srgbClr val="FFFFFF"/>
-        </a:solidFill>
-      </p:bgPr>
-    </p:bg>
     <p:spTree>
       <p:nvGrpSpPr>
         <p:cNvPr id="1" name=""/>
@@ -8834,7 +8799,7 @@
                 <a:ea typeface="Arial" pitchFamily="34" charset="-122"/>
                 <a:cs typeface="Arial" pitchFamily="34" charset="-120"/>
               </a:rPr>
-              <a:t>Thesis</a:t>
+              <a:t>Checklist</a:t>
             </a:r>
             <a:endParaRPr lang="en-US" sz="950" dirty="0"/>
           </a:p>
@@ -8873,7 +8838,7 @@
                 <a:ea typeface="Pretendard" pitchFamily="34" charset="-122"/>
                 <a:cs typeface="Pretendard" pitchFamily="34" charset="-120"/>
               </a:rPr>
-              <a:t>왜 지금 이 매물을 사야 하는가</a:t>
+              <a:t>섹션 상세</a:t>
             </a:r>
             <a:endParaRPr lang="en-US" sz="2300" dirty="0"/>
           </a:p>
@@ -8881,30 +8846,31 @@
       </p:sp>
       <p:sp>
         <p:nvSpPr>
-          <p:cNvPr id="6" name="Shape 4"/>
-          <p:cNvSpPr/>
-          <p:nvPr/>
-        </p:nvSpPr>
-        <p:spPr>
-          <a:xfrm>
-            <a:off x="566928" y="4983480"/>
-            <a:ext cx="11057839" cy="804672"/>
-          </a:xfrm>
-          <a:prstGeom prst="roundRect">
-            <a:avLst>
-              <a:gd name="adj" fmla="val 6818"/>
-            </a:avLst>
-          </a:prstGeom>
-          <a:solidFill>
-            <a:srgbClr val="F3EBDA"/>
-          </a:solidFill>
-          <a:ln w="10160">
-            <a:solidFill>
-              <a:srgbClr val="D9B668"/>
-            </a:solidFill>
-            <a:prstDash val="solid"/>
-          </a:ln>
-        </p:spPr>
+          <p:cNvPr id="6" name="Text 4"/>
+          <p:cNvSpPr/>
+          <p:nvPr/>
+        </p:nvSpPr>
+        <p:spPr>
+          <a:xfrm>
+            <a:off x="566928" y="1517904"/>
+            <a:ext cx="6492240" cy="274320"/>
+          </a:xfrm>
+          <a:prstGeom prst="rect">
+            <a:avLst/>
+          </a:prstGeom>
+          <a:noFill/>
+          <a:ln/>
+        </p:spPr>
+        <p:txBody>
+          <a:bodyPr wrap="square" rtlCol="0" anchor="ctr"/>
+          <a:lstStyle/>
+          <a:p>
+            <a:pPr indent="0" marL="0">
+              <a:buNone/>
+            </a:pPr>
+            <a:endParaRPr lang="en-US" sz="1400" dirty="0"/>
+          </a:p>
+        </p:txBody>
       </p:sp>
       <p:sp>
         <p:nvSpPr>
@@ -8914,121 +8880,68 @@
         </p:nvSpPr>
         <p:spPr>
           <a:xfrm>
-            <a:off x="749808" y="5093208"/>
-            <a:ext cx="1691640" cy="256032"/>
-          </a:xfrm>
-          <a:prstGeom prst="rect">
-            <a:avLst/>
-          </a:prstGeom>
-          <a:noFill/>
-          <a:ln/>
-        </p:spPr>
-        <p:txBody>
-          <a:bodyPr wrap="square" lIns="0" tIns="0" rIns="0" bIns="0" rtlCol="0" anchor="ctr"/>
+            <a:off x="566928" y="1874520"/>
+            <a:ext cx="6492240" cy="182880"/>
+          </a:xfrm>
+          <a:prstGeom prst="rect">
+            <a:avLst/>
+          </a:prstGeom>
+          <a:noFill/>
+          <a:ln/>
+        </p:spPr>
+        <p:txBody>
+          <a:bodyPr wrap="square" rtlCol="0" anchor="ctr"/>
           <a:lstStyle/>
           <a:p>
             <a:pPr indent="0" marL="0">
               <a:buNone/>
             </a:pPr>
-            <a:r>
-              <a:rPr lang="en-US" sz="1050" b="1" dirty="0">
-                <a:solidFill>
-                  <a:srgbClr val="977024"/>
+            <a:endParaRPr lang="en-US" sz="900" dirty="0"/>
+          </a:p>
+        </p:txBody>
+      </p:sp>
+      <p:sp>
+        <p:nvSpPr>
+          <p:cNvPr id="8" name="Text 6"/>
+          <p:cNvSpPr/>
+          <p:nvPr/>
+        </p:nvSpPr>
+        <p:spPr>
+          <a:xfrm>
+            <a:off x="566928" y="6382512"/>
+            <a:ext cx="7315200" cy="219456"/>
+          </a:xfrm>
+          <a:prstGeom prst="rect">
+            <a:avLst/>
+          </a:prstGeom>
+          <a:noFill/>
+          <a:ln/>
+        </p:spPr>
+        <p:txBody>
+          <a:bodyPr wrap="square" lIns="0" tIns="0" rIns="0" bIns="0" rtlCol="0" anchor="ctr"/>
+          <a:lstStyle/>
+          <a:p>
+            <a:pPr indent="0" marL="0">
+              <a:buNone/>
+            </a:pPr>
+            <a:r>
+              <a:rPr lang="en-US" sz="800" dirty="0">
+                <a:solidFill>
+                  <a:srgbClr val="718096"/>
                 </a:solidFill>
                 <a:latin typeface="Pretendard" pitchFamily="34" charset="0"/>
                 <a:ea typeface="Pretendard" pitchFamily="34" charset="-122"/>
                 <a:cs typeface="Pretendard" pitchFamily="34" charset="-120"/>
               </a:rPr>
-              <a:t>종합 가치 제안</a:t>
-            </a:r>
-            <a:endParaRPr lang="en-US" sz="1050" dirty="0"/>
-          </a:p>
-        </p:txBody>
-      </p:sp>
-      <p:sp>
-        <p:nvSpPr>
-          <p:cNvPr id="8" name="Text 6"/>
-          <p:cNvSpPr/>
-          <p:nvPr/>
-        </p:nvSpPr>
-        <p:spPr>
-          <a:xfrm>
-            <a:off x="2487168" y="5056632"/>
-            <a:ext cx="8954719" cy="658368"/>
-          </a:xfrm>
-          <a:prstGeom prst="rect">
-            <a:avLst/>
-          </a:prstGeom>
-          <a:noFill/>
-          <a:ln/>
-        </p:spPr>
-        <p:txBody>
-          <a:bodyPr wrap="square" lIns="0" tIns="0" rIns="0" bIns="0" rtlCol="0" anchor="ctr"/>
-          <a:lstStyle/>
-          <a:p>
-            <a:pPr indent="0" marL="0">
-              <a:lnSpc>
-                <a:spcPct val="125000"/>
-              </a:lnSpc>
-              <a:buNone/>
-            </a:pPr>
-            <a:r>
-              <a:rPr lang="en-US" sz="1100" dirty="0">
-                <a:solidFill>
-                  <a:srgbClr val="10161F"/>
-                </a:solidFill>
-                <a:latin typeface="Pretendard" pitchFamily="34" charset="0"/>
-                <a:ea typeface="Pretendard" pitchFamily="34" charset="-122"/>
-                <a:cs typeface="Pretendard" pitchFamily="34" charset="-120"/>
-              </a:rPr>
-              <a:t>{"ok":true,"mocked":true,"extractedFields":{"area_signal":"역삼","asset_type":"오피스빌딩","price_band":"300억","size_signal":"3000평(약 9917.4㎡)"},"extractedFacts":{"region":"역삼","exactAddressCandidate":"역삼동 742-1","assetType":"오피스빌딩","priceText":"300억","sizeText":"3000평(약 9917.4㎡)","currentUse":"오피스","currentUseSignal":"근린생활시설","leaseSignal":"임대중","vacancySignal":"공실없음","tenantNames":["쿠팡","네이버"],"unitRentTexts":["301호: 1500만"],"sellerMotivationText":"자산 효율화","brokerNotes":["초역세권 매물"]},"detectedSensitiveFields":["exact_address","tenant_name"],"ambiguousFields":[],"warnings":[],"areaSignal":"역삼","assetType":"오피스빌딩","priceBand":"300억","sizeSignal":"3000평(약 9917.4㎡)","dealType":"매각","buildingName":"역삼 센트럴타워","exactAddress":"역삼동 742-1","totalFloorArea":9917.3,"buildYear":2015,"currentUseSignal":"근린생활시설","vacancySignal":"공실 없음","fitSummary":"초역세권 근생 빌딩으로 시행/사옥 매입에 최적화","cautionSummary":"주요 임차인 만기 조율 필요","hiddenFields":["exact_address","seller_motivation"],"confidence":{"areaSignal":"confirmed","assetType":"confirmed","priceBand":"ai_hypothesis","fitSummary":"ai_hypothesis"},"missingData":["sizeSignal"],"boundaryNote":"본 자료는 실거래 통계 기반 참고치입니다.","buyerType":"법인 사옥형","budgetRange":{"min":50,"max":80,"display":"50억~80억"},"preferredRegions":["강남","성수"],"assetTypes":["꼬마빌딩","사옥용"],"purchasePurpose":"사옥용 매입","mustHave":["초역세권","주차"],"niceToHave":["테라스","루프탑"],"riskTolerance":"medium","financingNote":"자본금 50% 준비","missingQuestions":["구체적인 입주 시기가 언제인가요?","선호하는 수익률이 있나요?"],"privacyNotes":["연락처 비공개"],"fitReasons":["매수자 예산(50-80억)에 부합하는 매물입니다.","요청하신 성수/강남 권역에 해당합니다."],"cautionReasons":["요청한 용도와 달리 명도 협의가 다소 필요합니다."],"recommendedNextAction":"현장 답사 제안","kakaoMessage":"안녕하세요! 요청하신 조건에 부합하는 추천 매물이 있어 안내해 드립니다. 확인해보시고 피드백 부탁드립니다.","title":"강남 역삼역 초역세권 오피스 사옥용 빌딩 매각","shortSummary":"역삼역 도보 5분 거리의 준신축급 대형 오피스빌딩입니다.","dealPoints":["초역세권","사옥 최적"],"cautionPoints":["명도 조율 필요"],"hiddenInfoNotice":["보증금 및 지번은 인가 후 확인 가능"],"gateMessage":"G1 등급 등록이 필요합니다.","kakaoText":"강남 역삼역 오피스 빌딩 매각 안내입니다.","exactUnitCandidate":"101호","floor":"1층","areaSqmText":"150㎡","spaceType":"office","depositText":"5000만","monthlyRentText":"400만","maintenanceFeeText":"50만","availableFromText":"즉시입주","leaseTermMonthsText":"24","incentivesText":"렌트프리 2개월","restrictions":[],"landlordIdentity":"김성수","currentTenant":"스타트업","vacancyReason":"이전 확장","rentNegotiation":"협의 가능","region":"성수동","areaSqm":150,"deposit":5000,"monthlyRent":400,"maintenanceFee":50,"availableFrom":"즉시입주","leaseTermMonths":24,"incentives":{"rentFreeMonths":2,"interiorSupport":"일부 인테리어 지원","freeRentDetail":"렌트프리 2개월 지원"},"shortSummaryLease":"성수역 도보 5분 거리 1층 리테일 상가 매물입니다."}</a:t>
-            </a:r>
-            <a:endParaRPr lang="en-US" sz="1100" dirty="0"/>
+              <a:t>크리딜   |   </a:t>
+            </a:r>
+            <a:endParaRPr lang="en-US" sz="800" dirty="0"/>
           </a:p>
         </p:txBody>
       </p:sp>
       <p:sp>
         <p:nvSpPr>
           <p:cNvPr id="9" name="Text 7"/>
-          <p:cNvSpPr/>
-          <p:nvPr/>
-        </p:nvSpPr>
-        <p:spPr>
-          <a:xfrm>
-            <a:off x="566928" y="6382512"/>
-            <a:ext cx="7315200" cy="219456"/>
-          </a:xfrm>
-          <a:prstGeom prst="rect">
-            <a:avLst/>
-          </a:prstGeom>
-          <a:noFill/>
-          <a:ln/>
-        </p:spPr>
-        <p:txBody>
-          <a:bodyPr wrap="square" lIns="0" tIns="0" rIns="0" bIns="0" rtlCol="0" anchor="ctr"/>
-          <a:lstStyle/>
-          <a:p>
-            <a:pPr indent="0" marL="0">
-              <a:buNone/>
-            </a:pPr>
-            <a:r>
-              <a:rPr lang="en-US" sz="800" dirty="0">
-                <a:solidFill>
-                  <a:srgbClr val="718096"/>
-                </a:solidFill>
-                <a:latin typeface="Pretendard" pitchFamily="34" charset="0"/>
-                <a:ea typeface="Pretendard" pitchFamily="34" charset="-122"/>
-                <a:cs typeface="Pretendard" pitchFamily="34" charset="-120"/>
-              </a:rPr>
-              <a:t>크리딜   |   </a:t>
-            </a:r>
-            <a:endParaRPr lang="en-US" sz="800" dirty="0"/>
-          </a:p>
-        </p:txBody>
-      </p:sp>
-      <p:sp>
-        <p:nvSpPr>
-          <p:cNvPr id="10" name="Text 8"/>
           <p:cNvSpPr/>
           <p:nvPr/>
         </p:nvSpPr>
@@ -9189,7 +9102,7 @@
                 <a:ea typeface="Arial" pitchFamily="34" charset="-122"/>
                 <a:cs typeface="Arial" pitchFamily="34" charset="-120"/>
               </a:rPr>
-              <a:t>Process</a:t>
+              <a:t>Thesis</a:t>
             </a:r>
             <a:endParaRPr lang="en-US" sz="950" dirty="0"/>
           </a:p>
@@ -9228,7 +9141,7 @@
                 <a:ea typeface="Pretendard" pitchFamily="34" charset="-122"/>
                 <a:cs typeface="Pretendard" pitchFamily="34" charset="-120"/>
               </a:rPr>
-              <a:t>검토 후 다음 단계는 무엇인가</a:t>
+              <a:t>왜 지금 이 매물을 사야 하는가</a:t>
             </a:r>
             <a:endParaRPr lang="en-US" sz="2300" dirty="0"/>
           </a:p>
@@ -9242,17 +9155,160 @@
         </p:nvSpPr>
         <p:spPr>
           <a:xfrm>
-            <a:off x="566928" y="1572768"/>
-            <a:ext cx="2490140" cy="3200400"/>
+            <a:off x="566928" y="1325880"/>
+            <a:ext cx="5368900" cy="2560320"/>
           </a:xfrm>
           <a:prstGeom prst="roundRect">
             <a:avLst>
-              <a:gd name="adj" fmla="val 2203"/>
+              <a:gd name="adj" fmla="val 2857"/>
             </a:avLst>
           </a:prstGeom>
           <a:solidFill>
             <a:srgbClr val="F7FAFC"/>
           </a:solidFill>
+          <a:ln w="10160">
+            <a:solidFill>
+              <a:srgbClr val="CBD5E0"/>
+            </a:solidFill>
+            <a:prstDash val="solid"/>
+          </a:ln>
+        </p:spPr>
+      </p:sp>
+      <p:sp>
+        <p:nvSpPr>
+          <p:cNvPr id="7" name="Shape 5"/>
+          <p:cNvSpPr/>
+          <p:nvPr/>
+        </p:nvSpPr>
+        <p:spPr>
+          <a:xfrm>
+            <a:off x="566928" y="1325880"/>
+            <a:ext cx="5368900" cy="54864"/>
+          </a:xfrm>
+          <a:prstGeom prst="rect">
+            <a:avLst/>
+          </a:prstGeom>
+          <a:solidFill>
+            <a:srgbClr val="B98A2E"/>
+          </a:solidFill>
+          <a:ln/>
+        </p:spPr>
+      </p:sp>
+      <p:sp>
+        <p:nvSpPr>
+          <p:cNvPr id="8" name="Shape 6"/>
+          <p:cNvSpPr/>
+          <p:nvPr/>
+        </p:nvSpPr>
+        <p:spPr>
+          <a:xfrm>
+            <a:off x="795528" y="1600200"/>
+            <a:ext cx="475488" cy="292608"/>
+          </a:xfrm>
+          <a:prstGeom prst="roundRect">
+            <a:avLst>
+              <a:gd name="adj" fmla="val 12500"/>
+            </a:avLst>
+          </a:prstGeom>
+          <a:solidFill>
+            <a:srgbClr val="D9B668"/>
+          </a:solidFill>
+          <a:ln/>
+        </p:spPr>
+      </p:sp>
+      <p:sp>
+        <p:nvSpPr>
+          <p:cNvPr id="9" name="Text 7"/>
+          <p:cNvSpPr/>
+          <p:nvPr/>
+        </p:nvSpPr>
+        <p:spPr>
+          <a:xfrm>
+            <a:off x="795528" y="1600200"/>
+            <a:ext cx="475488" cy="292608"/>
+          </a:xfrm>
+          <a:prstGeom prst="rect">
+            <a:avLst/>
+          </a:prstGeom>
+          <a:noFill/>
+          <a:ln/>
+        </p:spPr>
+        <p:txBody>
+          <a:bodyPr wrap="square" lIns="0" tIns="0" rIns="0" bIns="0" rtlCol="0" anchor="ctr"/>
+          <a:lstStyle/>
+          <a:p>
+            <a:pPr algn="ctr" indent="0" marL="0">
+              <a:buNone/>
+            </a:pPr>
+            <a:r>
+              <a:rPr lang="en-US" sz="1100" b="1" dirty="0">
+                <a:solidFill>
+                  <a:srgbClr val="977024"/>
+                </a:solidFill>
+                <a:latin typeface="Arial" pitchFamily="34" charset="0"/>
+                <a:ea typeface="Arial" pitchFamily="34" charset="-122"/>
+                <a:cs typeface="Arial" pitchFamily="34" charset="-120"/>
+              </a:rPr>
+              <a:t>01</a:t>
+            </a:r>
+            <a:endParaRPr lang="en-US" sz="1100" dirty="0"/>
+          </a:p>
+        </p:txBody>
+      </p:sp>
+      <p:sp>
+        <p:nvSpPr>
+          <p:cNvPr id="10" name="Text 8"/>
+          <p:cNvSpPr/>
+          <p:nvPr/>
+        </p:nvSpPr>
+        <p:spPr>
+          <a:xfrm>
+            <a:off x="795528" y="2039112"/>
+            <a:ext cx="4911700" cy="365760"/>
+          </a:xfrm>
+          <a:prstGeom prst="rect">
+            <a:avLst/>
+          </a:prstGeom>
+          <a:noFill/>
+          <a:ln/>
+        </p:spPr>
+        <p:txBody>
+          <a:bodyPr wrap="square" lIns="0" tIns="0" rIns="0" bIns="0" rtlCol="0" anchor="t"/>
+          <a:lstStyle/>
+          <a:p>
+            <a:pPr indent="0" marL="0">
+              <a:buNone/>
+            </a:pPr>
+            <a:r>
+              <a:rPr lang="en-US" sz="1500" b="1" dirty="0">
+                <a:solidFill>
+                  <a:srgbClr val="10161F"/>
+                </a:solidFill>
+                <a:latin typeface="Pretendard" pitchFamily="34" charset="0"/>
+                <a:ea typeface="Pretendard" pitchFamily="34" charset="-122"/>
+                <a:cs typeface="Pretendard" pitchFamily="34" charset="-120"/>
+              </a:rPr>
+              <a:t>확실한 월 현금흐름</a:t>
+            </a:r>
+            <a:endParaRPr lang="en-US" sz="1500" dirty="0"/>
+          </a:p>
+        </p:txBody>
+      </p:sp>
+      <p:sp>
+        <p:nvSpPr>
+          <p:cNvPr id="11" name="Shape 9"/>
+          <p:cNvSpPr/>
+          <p:nvPr/>
+        </p:nvSpPr>
+        <p:spPr>
+          <a:xfrm>
+            <a:off x="795528" y="2468880"/>
+            <a:ext cx="4911700" cy="0"/>
+          </a:xfrm>
+          <a:prstGeom prst="line">
+            <a:avLst/>
+          </a:prstGeom>
+          <a:noFill/>
           <a:ln w="6350">
             <a:solidFill>
               <a:srgbClr val="CBD5E0"/>
@@ -9263,16 +9319,85 @@
       </p:sp>
       <p:sp>
         <p:nvSpPr>
-          <p:cNvPr id="7" name="Shape 5"/>
-          <p:cNvSpPr/>
-          <p:nvPr/>
-        </p:nvSpPr>
-        <p:spPr>
-          <a:xfrm>
-            <a:off x="786384" y="1792224"/>
-            <a:ext cx="438912" cy="438912"/>
-          </a:xfrm>
-          <a:prstGeom prst="ellipse">
+          <p:cNvPr id="12" name="Text 10"/>
+          <p:cNvSpPr/>
+          <p:nvPr/>
+        </p:nvSpPr>
+        <p:spPr>
+          <a:xfrm>
+            <a:off x="795528" y="2624328"/>
+            <a:ext cx="4911700" cy="1051560"/>
+          </a:xfrm>
+          <a:prstGeom prst="rect">
+            <a:avLst/>
+          </a:prstGeom>
+          <a:noFill/>
+          <a:ln/>
+        </p:spPr>
+        <p:txBody>
+          <a:bodyPr wrap="square" lIns="0" tIns="0" rIns="0" bIns="0" rtlCol="0" anchor="t"/>
+          <a:lstStyle/>
+          <a:p>
+            <a:pPr indent="0" marL="0">
+              <a:lnSpc>
+                <a:spcPct val="130000"/>
+              </a:lnSpc>
+              <a:buNone/>
+            </a:pPr>
+            <a:r>
+              <a:rPr lang="en-US" sz="1200" dirty="0">
+                <a:solidFill>
+                  <a:srgbClr val="10161F"/>
+                </a:solidFill>
+                <a:latin typeface="Pretendard" pitchFamily="34" charset="0"/>
+                <a:ea typeface="Pretendard" pitchFamily="34" charset="-122"/>
+                <a:cs typeface="Pretendard" pitchFamily="34" charset="-120"/>
+              </a:rPr>
+              <a:t>임대차 현황 및 공실률을 반영한 순영업소득(NOI) 분석은 수익분석 섹션을 참조하시기 바랍니다.</a:t>
+            </a:r>
+            <a:endParaRPr lang="en-US" sz="1200" dirty="0"/>
+          </a:p>
+        </p:txBody>
+      </p:sp>
+      <p:sp>
+        <p:nvSpPr>
+          <p:cNvPr id="13" name="Shape 11"/>
+          <p:cNvSpPr/>
+          <p:nvPr/>
+        </p:nvSpPr>
+        <p:spPr>
+          <a:xfrm>
+            <a:off x="6255868" y="1325880"/>
+            <a:ext cx="5368900" cy="2560320"/>
+          </a:xfrm>
+          <a:prstGeom prst="roundRect">
+            <a:avLst>
+              <a:gd name="adj" fmla="val 2857"/>
+            </a:avLst>
+          </a:prstGeom>
+          <a:solidFill>
+            <a:srgbClr val="F7FAFC"/>
+          </a:solidFill>
+          <a:ln w="10160">
+            <a:solidFill>
+              <a:srgbClr val="CBD5E0"/>
+            </a:solidFill>
+            <a:prstDash val="solid"/>
+          </a:ln>
+        </p:spPr>
+      </p:sp>
+      <p:sp>
+        <p:nvSpPr>
+          <p:cNvPr id="14" name="Shape 12"/>
+          <p:cNvSpPr/>
+          <p:nvPr/>
+        </p:nvSpPr>
+        <p:spPr>
+          <a:xfrm>
+            <a:off x="6255868" y="1325880"/>
+            <a:ext cx="5368900" cy="54864"/>
+          </a:xfrm>
+          <a:prstGeom prst="rect">
             <a:avLst/>
           </a:prstGeom>
           <a:solidFill>
@@ -9283,14 +9408,36 @@
       </p:sp>
       <p:sp>
         <p:nvSpPr>
-          <p:cNvPr id="8" name="Text 6"/>
-          <p:cNvSpPr/>
-          <p:nvPr/>
-        </p:nvSpPr>
-        <p:spPr>
-          <a:xfrm>
-            <a:off x="786384" y="1792224"/>
-            <a:ext cx="438912" cy="438912"/>
+          <p:cNvPr id="15" name="Shape 13"/>
+          <p:cNvSpPr/>
+          <p:nvPr/>
+        </p:nvSpPr>
+        <p:spPr>
+          <a:xfrm>
+            <a:off x="6484468" y="1600200"/>
+            <a:ext cx="475488" cy="292608"/>
+          </a:xfrm>
+          <a:prstGeom prst="roundRect">
+            <a:avLst>
+              <a:gd name="adj" fmla="val 12500"/>
+            </a:avLst>
+          </a:prstGeom>
+          <a:solidFill>
+            <a:srgbClr val="D9B668"/>
+          </a:solidFill>
+          <a:ln/>
+        </p:spPr>
+      </p:sp>
+      <p:sp>
+        <p:nvSpPr>
+          <p:cNvPr id="16" name="Text 14"/>
+          <p:cNvSpPr/>
+          <p:nvPr/>
+        </p:nvSpPr>
+        <p:spPr>
+          <a:xfrm>
+            <a:off x="6484468" y="1600200"/>
+            <a:ext cx="475488" cy="292608"/>
           </a:xfrm>
           <a:prstGeom prst="rect">
             <a:avLst/>
@@ -9306,46 +9453,46 @@
               <a:buNone/>
             </a:pPr>
             <a:r>
-              <a:rPr lang="en-US" sz="1400" b="1" dirty="0">
-                <a:solidFill>
-                  <a:srgbClr val="FFFFFF"/>
+              <a:rPr lang="en-US" sz="1100" b="1" dirty="0">
+                <a:solidFill>
+                  <a:srgbClr val="977024"/>
                 </a:solidFill>
                 <a:latin typeface="Arial" pitchFamily="34" charset="0"/>
                 <a:ea typeface="Arial" pitchFamily="34" charset="-122"/>
                 <a:cs typeface="Arial" pitchFamily="34" charset="-120"/>
               </a:rPr>
-              <a:t>01</a:t>
-            </a:r>
-            <a:endParaRPr lang="en-US" sz="1400" dirty="0"/>
-          </a:p>
-        </p:txBody>
-      </p:sp>
-      <p:sp>
-        <p:nvSpPr>
-          <p:cNvPr id="9" name="Text 7"/>
-          <p:cNvSpPr/>
-          <p:nvPr/>
-        </p:nvSpPr>
-        <p:spPr>
-          <a:xfrm>
-            <a:off x="786384" y="2304288"/>
-            <a:ext cx="2051228" cy="365760"/>
-          </a:xfrm>
-          <a:prstGeom prst="rect">
-            <a:avLst/>
-          </a:prstGeom>
-          <a:noFill/>
-          <a:ln/>
-        </p:spPr>
-        <p:txBody>
-          <a:bodyPr wrap="square" rtlCol="0" anchor="ctr"/>
+              <a:t>02</a:t>
+            </a:r>
+            <a:endParaRPr lang="en-US" sz="1100" dirty="0"/>
+          </a:p>
+        </p:txBody>
+      </p:sp>
+      <p:sp>
+        <p:nvSpPr>
+          <p:cNvPr id="17" name="Text 15"/>
+          <p:cNvSpPr/>
+          <p:nvPr/>
+        </p:nvSpPr>
+        <p:spPr>
+          <a:xfrm>
+            <a:off x="6484468" y="2039112"/>
+            <a:ext cx="4911700" cy="365760"/>
+          </a:xfrm>
+          <a:prstGeom prst="rect">
+            <a:avLst/>
+          </a:prstGeom>
+          <a:noFill/>
+          <a:ln/>
+        </p:spPr>
+        <p:txBody>
+          <a:bodyPr wrap="square" lIns="0" tIns="0" rIns="0" bIns="0" rtlCol="0" anchor="t"/>
           <a:lstStyle/>
           <a:p>
             <a:pPr indent="0" marL="0">
               <a:buNone/>
             </a:pPr>
             <a:r>
-              <a:rPr lang="en-US" sz="1600" b="1" dirty="0">
+              <a:rPr lang="en-US" sz="1500" b="1" dirty="0">
                 <a:solidFill>
                   <a:srgbClr val="10161F"/>
                 </a:solidFill>
@@ -9353,95 +9500,27 @@
                 <a:ea typeface="Pretendard" pitchFamily="34" charset="-122"/>
                 <a:cs typeface="Pretendard" pitchFamily="34" charset="-120"/>
               </a:rPr>
-              <a:t>1단계</a:t>
-            </a:r>
-            <a:endParaRPr lang="en-US" sz="1600" dirty="0"/>
-          </a:p>
-        </p:txBody>
-      </p:sp>
-      <p:sp>
-        <p:nvSpPr>
-          <p:cNvPr id="10" name="Text 8"/>
-          <p:cNvSpPr/>
-          <p:nvPr/>
-        </p:nvSpPr>
-        <p:spPr>
-          <a:xfrm>
-            <a:off x="786384" y="2761488"/>
-            <a:ext cx="2051228" cy="1828800"/>
-          </a:xfrm>
-          <a:prstGeom prst="rect">
-            <a:avLst/>
-          </a:prstGeom>
-          <a:noFill/>
-          <a:ln/>
-        </p:spPr>
-        <p:txBody>
-          <a:bodyPr wrap="square" rtlCol="0" anchor="t"/>
-          <a:lstStyle/>
-          <a:p>
-            <a:pPr indent="0" marL="0">
-              <a:buNone/>
-            </a:pPr>
-            <a:r>
-              <a:rPr lang="en-US" sz="1100" dirty="0">
-                <a:solidFill>
-                  <a:srgbClr val="10161F"/>
-                </a:solidFill>
-                <a:latin typeface="Pretendard" pitchFamily="34" charset="0"/>
-                <a:ea typeface="Pretendard" pitchFamily="34" charset="-122"/>
-                <a:cs typeface="Pretendard" pitchFamily="34" charset="-120"/>
-              </a:rPr>
-              <a:t>초기 관심 표명 → 담당자 연락</a:t>
-            </a:r>
-            <a:endParaRPr lang="en-US" sz="1100" dirty="0"/>
-          </a:p>
-        </p:txBody>
-      </p:sp>
-      <p:sp>
-        <p:nvSpPr>
-          <p:cNvPr id="11" name="Shape 9"/>
-          <p:cNvSpPr/>
-          <p:nvPr/>
-        </p:nvSpPr>
-        <p:spPr>
-          <a:xfrm>
-            <a:off x="3148508" y="3035808"/>
-            <a:ext cx="182880" cy="274320"/>
-          </a:xfrm>
-          <a:prstGeom prst="rightArrow">
-            <a:avLst/>
-          </a:prstGeom>
-          <a:solidFill>
-            <a:srgbClr val="CBD5E0"/>
-          </a:solidFill>
-          <a:ln w="6350">
-            <a:solidFill>
-              <a:srgbClr val="718096"/>
-            </a:solidFill>
-            <a:prstDash val="solid"/>
-          </a:ln>
-        </p:spPr>
-      </p:sp>
-      <p:sp>
-        <p:nvSpPr>
-          <p:cNvPr id="12" name="Shape 10"/>
-          <p:cNvSpPr/>
-          <p:nvPr/>
-        </p:nvSpPr>
-        <p:spPr>
-          <a:xfrm>
-            <a:off x="3422828" y="1572768"/>
-            <a:ext cx="2490140" cy="3200400"/>
-          </a:xfrm>
-          <a:prstGeom prst="roundRect">
-            <a:avLst>
-              <a:gd name="adj" fmla="val 2203"/>
-            </a:avLst>
-          </a:prstGeom>
-          <a:solidFill>
-            <a:srgbClr val="F7FAFC"/>
-          </a:solidFill>
+              <a:t>가치 상승 및 출구 전략</a:t>
+            </a:r>
+            <a:endParaRPr lang="en-US" sz="1500" dirty="0"/>
+          </a:p>
+        </p:txBody>
+      </p:sp>
+      <p:sp>
+        <p:nvSpPr>
+          <p:cNvPr id="18" name="Shape 16"/>
+          <p:cNvSpPr/>
+          <p:nvPr/>
+        </p:nvSpPr>
+        <p:spPr>
+          <a:xfrm>
+            <a:off x="6484468" y="2468880"/>
+            <a:ext cx="4911700" cy="0"/>
+          </a:xfrm>
+          <a:prstGeom prst="line">
+            <a:avLst/>
+          </a:prstGeom>
+          <a:noFill/>
           <a:ln w="6350">
             <a:solidFill>
               <a:srgbClr val="CBD5E0"/>
@@ -9452,89 +9531,33 @@
       </p:sp>
       <p:sp>
         <p:nvSpPr>
-          <p:cNvPr id="13" name="Shape 11"/>
-          <p:cNvSpPr/>
-          <p:nvPr/>
-        </p:nvSpPr>
-        <p:spPr>
-          <a:xfrm>
-            <a:off x="3642284" y="1792224"/>
-            <a:ext cx="438912" cy="438912"/>
-          </a:xfrm>
-          <a:prstGeom prst="ellipse">
-            <a:avLst/>
-          </a:prstGeom>
-          <a:solidFill>
-            <a:srgbClr val="B98A2E"/>
-          </a:solidFill>
-          <a:ln/>
-        </p:spPr>
-      </p:sp>
-      <p:sp>
-        <p:nvSpPr>
-          <p:cNvPr id="14" name="Text 12"/>
-          <p:cNvSpPr/>
-          <p:nvPr/>
-        </p:nvSpPr>
-        <p:spPr>
-          <a:xfrm>
-            <a:off x="3642284" y="1792224"/>
-            <a:ext cx="438912" cy="438912"/>
-          </a:xfrm>
-          <a:prstGeom prst="rect">
-            <a:avLst/>
-          </a:prstGeom>
-          <a:noFill/>
-          <a:ln/>
-        </p:spPr>
-        <p:txBody>
-          <a:bodyPr wrap="square" lIns="0" tIns="0" rIns="0" bIns="0" rtlCol="0" anchor="ctr"/>
-          <a:lstStyle/>
-          <a:p>
-            <a:pPr algn="ctr" indent="0" marL="0">
-              <a:buNone/>
-            </a:pPr>
-            <a:r>
-              <a:rPr lang="en-US" sz="1400" b="1" dirty="0">
-                <a:solidFill>
-                  <a:srgbClr val="FFFFFF"/>
-                </a:solidFill>
-                <a:latin typeface="Arial" pitchFamily="34" charset="0"/>
-                <a:ea typeface="Arial" pitchFamily="34" charset="-122"/>
-                <a:cs typeface="Arial" pitchFamily="34" charset="-120"/>
-              </a:rPr>
-              <a:t>02</a:t>
-            </a:r>
-            <a:endParaRPr lang="en-US" sz="1400" dirty="0"/>
-          </a:p>
-        </p:txBody>
-      </p:sp>
-      <p:sp>
-        <p:nvSpPr>
-          <p:cNvPr id="15" name="Text 13"/>
-          <p:cNvSpPr/>
-          <p:nvPr/>
-        </p:nvSpPr>
-        <p:spPr>
-          <a:xfrm>
-            <a:off x="3642284" y="2304288"/>
-            <a:ext cx="2051228" cy="365760"/>
-          </a:xfrm>
-          <a:prstGeom prst="rect">
-            <a:avLst/>
-          </a:prstGeom>
-          <a:noFill/>
-          <a:ln/>
-        </p:spPr>
-        <p:txBody>
-          <a:bodyPr wrap="square" rtlCol="0" anchor="ctr"/>
+          <p:cNvPr id="19" name="Text 17"/>
+          <p:cNvSpPr/>
+          <p:nvPr/>
+        </p:nvSpPr>
+        <p:spPr>
+          <a:xfrm>
+            <a:off x="6484468" y="2624328"/>
+            <a:ext cx="4911700" cy="1051560"/>
+          </a:xfrm>
+          <a:prstGeom prst="rect">
+            <a:avLst/>
+          </a:prstGeom>
+          <a:noFill/>
+          <a:ln/>
+        </p:spPr>
+        <p:txBody>
+          <a:bodyPr wrap="square" lIns="0" tIns="0" rIns="0" bIns="0" rtlCol="0" anchor="t"/>
           <a:lstStyle/>
           <a:p>
             <a:pPr indent="0" marL="0">
-              <a:buNone/>
-            </a:pPr>
-            <a:r>
-              <a:rPr lang="en-US" sz="1600" b="1" dirty="0">
+              <a:lnSpc>
+                <a:spcPct val="130000"/>
+              </a:lnSpc>
+              <a:buNone/>
+            </a:pPr>
+            <a:r>
+              <a:rPr lang="en-US" sz="1200" dirty="0">
                 <a:solidFill>
                   <a:srgbClr val="10161F"/>
                 </a:solidFill>
@@ -9542,188 +9565,1116 @@
                 <a:ea typeface="Pretendard" pitchFamily="34" charset="-122"/>
                 <a:cs typeface="Pretendard" pitchFamily="34" charset="-120"/>
               </a:rPr>
-              <a:t>2단계</a:t>
-            </a:r>
-            <a:endParaRPr lang="en-US" sz="1600" dirty="0"/>
-          </a:p>
-        </p:txBody>
-      </p:sp>
-      <p:sp>
-        <p:nvSpPr>
-          <p:cNvPr id="16" name="Text 14"/>
-          <p:cNvSpPr/>
-          <p:nvPr/>
-        </p:nvSpPr>
-        <p:spPr>
-          <a:xfrm>
-            <a:off x="3642284" y="2761488"/>
-            <a:ext cx="2051228" cy="1828800"/>
-          </a:xfrm>
-          <a:prstGeom prst="rect">
-            <a:avLst/>
-          </a:prstGeom>
-          <a:noFill/>
-          <a:ln/>
-        </p:spPr>
-        <p:txBody>
-          <a:bodyPr wrap="square" rtlCol="0" anchor="t"/>
+              <a:t>현행 공법 여력을 활용한 밸류업 기회와 더불어 향후 권역 지가 상승에 따른 시세차익 실현이 유력합니다. ### 예상 매수자 유형 (AI 분석)</a:t>
+            </a:r>
+            <a:endParaRPr lang="en-US" sz="1200" dirty="0"/>
+          </a:p>
+        </p:txBody>
+      </p:sp>
+      <p:graphicFrame>
+        <p:nvGraphicFramePr>
+          <p:cNvPr id="10" name="Table 0"/>
+          <p:cNvGraphicFramePr>
+            <a:graphicFrameLocks noGrp="1"/>
+          </p:cNvGraphicFramePr>
+          <p:nvPr>
+            <p:extLst>
+              <p:ext uri="{D42A27DB-BD31-4B8C-83A1-F6EECF244321}">
+                <p14:modId xmlns:p14="http://schemas.microsoft.com/office/powerpoint/2010/main" val="1579011935"/>
+              </p:ext>
+            </p:extLst>
+          </p:nvPr>
+        </p:nvGraphicFramePr>
+        <p:xfrm>
+          <a:off x="566928" y="4023360"/>
+          <a:ext cx="11057839" cy="914400"/>
+        </p:xfrm>
+        <a:graphic>
+          <a:graphicData uri="http://schemas.openxmlformats.org/drawingml/2006/table">
+            <a:tbl>
+              <a:tblPr/>
+              <a:tblGrid>
+                <a:gridCol w="3685946"/>
+                <a:gridCol w="3685946"/>
+                <a:gridCol w="3685946"/>
+              </a:tblGrid>
+              <a:tr h="329184">
+                <a:tc>
+                  <a:txBody>
+                    <a:bodyPr/>
+                    <a:lstStyle/>
+                    <a:p>
+                      <a:pPr indent="0" marL="0">
+                        <a:buNone/>
+                      </a:pPr>
+                      <a:r>
+                        <a:rPr lang="en-US" sz="1050" b="1" dirty="0">
+                          <a:solidFill>
+                            <a:srgbClr val="718096"/>
+                          </a:solidFill>
+                          <a:latin typeface="Pretendard" pitchFamily="34" charset="0"/>
+                          <a:ea typeface="Pretendard" pitchFamily="34" charset="-122"/>
+                          <a:cs typeface="Pretendard" pitchFamily="34" charset="-120"/>
+                        </a:rPr>
+                        <a:t>유형</a:t>
+                      </a:r>
+                      <a:endParaRPr lang="en-US" sz="1050" dirty="0">
+                        <a:latin typeface="Pretendard" charset="0"/>
+                        <a:ea typeface="Pretendard" charset="0"/>
+                        <a:cs typeface="Pretendard" charset="0"/>
+                      </a:endParaRPr>
+                    </a:p>
+                  </a:txBody>
+                  <a:tcPr marL="50800" marR="50800" marT="25400" marB="25400" anchor="ctr">
+                    <a:lnL w="3810" cap="flat" cmpd="sng" algn="ctr">
+                      <a:solidFill>
+                        <a:srgbClr val="CBD5E0"/>
+                      </a:solidFill>
+                      <a:prstDash val="solid"/>
+                      <a:round/>
+                      <a:headEnd type="none" w="med" len="med"/>
+                      <a:tailEnd type="none" w="med" len="med"/>
+                    </a:lnL>
+                    <a:lnR w="3810" cap="flat" cmpd="sng" algn="ctr">
+                      <a:solidFill>
+                        <a:srgbClr val="CBD5E0"/>
+                      </a:solidFill>
+                      <a:prstDash val="solid"/>
+                      <a:round/>
+                      <a:headEnd type="none" w="med" len="med"/>
+                      <a:tailEnd type="none" w="med" len="med"/>
+                    </a:lnR>
+                    <a:lnT w="3810" cap="flat" cmpd="sng" algn="ctr">
+                      <a:solidFill>
+                        <a:srgbClr val="CBD5E0"/>
+                      </a:solidFill>
+                      <a:prstDash val="solid"/>
+                      <a:round/>
+                      <a:headEnd type="none" w="med" len="med"/>
+                      <a:tailEnd type="none" w="med" len="med"/>
+                    </a:lnT>
+                    <a:lnB w="3810" cap="flat" cmpd="sng" algn="ctr">
+                      <a:solidFill>
+                        <a:srgbClr val="CBD5E0"/>
+                      </a:solidFill>
+                      <a:prstDash val="solid"/>
+                      <a:round/>
+                      <a:headEnd type="none" w="med" len="med"/>
+                      <a:tailEnd type="none" w="med" len="med"/>
+                    </a:lnB>
+                    <a:solidFill>
+                      <a:srgbClr val="F7FAFC"/>
+                    </a:solidFill>
+                  </a:tcPr>
+                </a:tc>
+                <a:tc>
+                  <a:txBody>
+                    <a:bodyPr/>
+                    <a:lstStyle/>
+                    <a:p>
+                      <a:pPr indent="0" marL="0">
+                        <a:buNone/>
+                      </a:pPr>
+                      <a:r>
+                        <a:rPr lang="en-US" sz="1050" b="1" dirty="0">
+                          <a:solidFill>
+                            <a:srgbClr val="718096"/>
+                          </a:solidFill>
+                          <a:latin typeface="Pretendard" pitchFamily="34" charset="0"/>
+                          <a:ea typeface="Pretendard" pitchFamily="34" charset="-122"/>
+                          <a:cs typeface="Pretendard" pitchFamily="34" charset="-120"/>
+                        </a:rPr>
+                        <a:t>적합도</a:t>
+                      </a:r>
+                      <a:endParaRPr lang="en-US" sz="1050" dirty="0">
+                        <a:latin typeface="Pretendard" charset="0"/>
+                        <a:ea typeface="Pretendard" charset="0"/>
+                        <a:cs typeface="Pretendard" charset="0"/>
+                      </a:endParaRPr>
+                    </a:p>
+                  </a:txBody>
+                  <a:tcPr marL="50800" marR="50800" marT="25400" marB="25400" anchor="ctr">
+                    <a:lnL w="3810" cap="flat" cmpd="sng" algn="ctr">
+                      <a:solidFill>
+                        <a:srgbClr val="CBD5E0"/>
+                      </a:solidFill>
+                      <a:prstDash val="solid"/>
+                      <a:round/>
+                      <a:headEnd type="none" w="med" len="med"/>
+                      <a:tailEnd type="none" w="med" len="med"/>
+                    </a:lnL>
+                    <a:lnR w="3810" cap="flat" cmpd="sng" algn="ctr">
+                      <a:solidFill>
+                        <a:srgbClr val="CBD5E0"/>
+                      </a:solidFill>
+                      <a:prstDash val="solid"/>
+                      <a:round/>
+                      <a:headEnd type="none" w="med" len="med"/>
+                      <a:tailEnd type="none" w="med" len="med"/>
+                    </a:lnR>
+                    <a:lnT w="3810" cap="flat" cmpd="sng" algn="ctr">
+                      <a:solidFill>
+                        <a:srgbClr val="CBD5E0"/>
+                      </a:solidFill>
+                      <a:prstDash val="solid"/>
+                      <a:round/>
+                      <a:headEnd type="none" w="med" len="med"/>
+                      <a:tailEnd type="none" w="med" len="med"/>
+                    </a:lnT>
+                    <a:lnB w="3810" cap="flat" cmpd="sng" algn="ctr">
+                      <a:solidFill>
+                        <a:srgbClr val="CBD5E0"/>
+                      </a:solidFill>
+                      <a:prstDash val="solid"/>
+                      <a:round/>
+                      <a:headEnd type="none" w="med" len="med"/>
+                      <a:tailEnd type="none" w="med" len="med"/>
+                    </a:lnB>
+                    <a:solidFill>
+                      <a:srgbClr val="F7FAFC"/>
+                    </a:solidFill>
+                  </a:tcPr>
+                </a:tc>
+                <a:tc>
+                  <a:txBody>
+                    <a:bodyPr/>
+                    <a:lstStyle/>
+                    <a:p>
+                      <a:pPr indent="0" marL="0">
+                        <a:buNone/>
+                      </a:pPr>
+                      <a:r>
+                        <a:rPr lang="en-US" sz="1050" b="1" dirty="0">
+                          <a:solidFill>
+                            <a:srgbClr val="718096"/>
+                          </a:solidFill>
+                          <a:latin typeface="Pretendard" pitchFamily="34" charset="0"/>
+                          <a:ea typeface="Pretendard" pitchFamily="34" charset="-122"/>
+                          <a:cs typeface="Pretendard" pitchFamily="34" charset="-120"/>
+                        </a:rPr>
+                        <a:t>이유</a:t>
+                      </a:r>
+                      <a:endParaRPr lang="en-US" sz="1050" dirty="0">
+                        <a:latin typeface="Pretendard" charset="0"/>
+                        <a:ea typeface="Pretendard" charset="0"/>
+                        <a:cs typeface="Pretendard" charset="0"/>
+                      </a:endParaRPr>
+                    </a:p>
+                  </a:txBody>
+                  <a:tcPr marL="50800" marR="50800" marT="25400" marB="25400" anchor="ctr">
+                    <a:lnL w="3810" cap="flat" cmpd="sng" algn="ctr">
+                      <a:solidFill>
+                        <a:srgbClr val="CBD5E0"/>
+                      </a:solidFill>
+                      <a:prstDash val="solid"/>
+                      <a:round/>
+                      <a:headEnd type="none" w="med" len="med"/>
+                      <a:tailEnd type="none" w="med" len="med"/>
+                    </a:lnL>
+                    <a:lnR w="3810" cap="flat" cmpd="sng" algn="ctr">
+                      <a:solidFill>
+                        <a:srgbClr val="CBD5E0"/>
+                      </a:solidFill>
+                      <a:prstDash val="solid"/>
+                      <a:round/>
+                      <a:headEnd type="none" w="med" len="med"/>
+                      <a:tailEnd type="none" w="med" len="med"/>
+                    </a:lnR>
+                    <a:lnT w="3810" cap="flat" cmpd="sng" algn="ctr">
+                      <a:solidFill>
+                        <a:srgbClr val="CBD5E0"/>
+                      </a:solidFill>
+                      <a:prstDash val="solid"/>
+                      <a:round/>
+                      <a:headEnd type="none" w="med" len="med"/>
+                      <a:tailEnd type="none" w="med" len="med"/>
+                    </a:lnT>
+                    <a:lnB w="3810" cap="flat" cmpd="sng" algn="ctr">
+                      <a:solidFill>
+                        <a:srgbClr val="CBD5E0"/>
+                      </a:solidFill>
+                      <a:prstDash val="solid"/>
+                      <a:round/>
+                      <a:headEnd type="none" w="med" len="med"/>
+                      <a:tailEnd type="none" w="med" len="med"/>
+                    </a:lnB>
+                    <a:solidFill>
+                      <a:srgbClr val="F7FAFC"/>
+                    </a:solidFill>
+                  </a:tcPr>
+                </a:tc>
+              </a:tr>
+              <a:tr h="329184">
+                <a:tc>
+                  <a:txBody>
+                    <a:bodyPr/>
+                    <a:lstStyle/>
+                    <a:p>
+                      <a:pPr indent="0" marL="0">
+                        <a:buNone/>
+                      </a:pPr>
+                      <a:r>
+                        <a:rPr lang="en-US" sz="1050" b="1" dirty="0">
+                          <a:solidFill>
+                            <a:srgbClr val="10161F"/>
+                          </a:solidFill>
+                          <a:latin typeface="Pretendard" pitchFamily="34" charset="0"/>
+                          <a:ea typeface="Pretendard" pitchFamily="34" charset="-122"/>
+                          <a:cs typeface="Pretendard" pitchFamily="34" charset="-120"/>
+                        </a:rPr>
+                        <a:t>(임대수익)</a:t>
+                      </a:r>
+                      <a:endParaRPr lang="en-US" sz="1050" dirty="0">
+                        <a:latin typeface="Pretendard" charset="0"/>
+                        <a:ea typeface="Pretendard" charset="0"/>
+                        <a:cs typeface="Pretendard" charset="0"/>
+                      </a:endParaRPr>
+                    </a:p>
+                  </a:txBody>
+                  <a:tcPr marL="50800" marR="50800" marT="25400" marB="25400" anchor="ctr">
+                    <a:lnL w="3810" cap="flat" cmpd="sng" algn="ctr">
+                      <a:solidFill>
+                        <a:srgbClr val="CBD5E0"/>
+                      </a:solidFill>
+                      <a:prstDash val="solid"/>
+                      <a:round/>
+                      <a:headEnd type="none" w="med" len="med"/>
+                      <a:tailEnd type="none" w="med" len="med"/>
+                    </a:lnL>
+                    <a:lnR w="3810" cap="flat" cmpd="sng" algn="ctr">
+                      <a:solidFill>
+                        <a:srgbClr val="CBD5E0"/>
+                      </a:solidFill>
+                      <a:prstDash val="solid"/>
+                      <a:round/>
+                      <a:headEnd type="none" w="med" len="med"/>
+                      <a:tailEnd type="none" w="med" len="med"/>
+                    </a:lnR>
+                    <a:lnT w="3810" cap="flat" cmpd="sng" algn="ctr">
+                      <a:solidFill>
+                        <a:srgbClr val="CBD5E0"/>
+                      </a:solidFill>
+                      <a:prstDash val="solid"/>
+                      <a:round/>
+                      <a:headEnd type="none" w="med" len="med"/>
+                      <a:tailEnd type="none" w="med" len="med"/>
+                    </a:lnT>
+                    <a:lnB w="3810" cap="flat" cmpd="sng" algn="ctr">
+                      <a:solidFill>
+                        <a:srgbClr val="CBD5E0"/>
+                      </a:solidFill>
+                      <a:prstDash val="solid"/>
+                      <a:round/>
+                      <a:headEnd type="none" w="med" len="med"/>
+                      <a:tailEnd type="none" w="med" len="med"/>
+                    </a:lnB>
+                    <a:solidFill>
+                      <a:srgbClr val="FFFFFF"/>
+                    </a:solidFill>
+                  </a:tcPr>
+                </a:tc>
+                <a:tc>
+                  <a:txBody>
+                    <a:bodyPr/>
+                    <a:lstStyle/>
+                    <a:p>
+                      <a:pPr indent="0" marL="0">
+                        <a:buNone/>
+                      </a:pPr>
+                      <a:r>
+                        <a:rPr lang="en-US" sz="1050" dirty="0">
+                          <a:solidFill>
+                            <a:srgbClr val="10161F"/>
+                          </a:solidFill>
+                          <a:latin typeface="Pretendard" pitchFamily="34" charset="0"/>
+                          <a:ea typeface="Pretendard" pitchFamily="34" charset="-122"/>
+                          <a:cs typeface="Pretendard" pitchFamily="34" charset="-120"/>
+                        </a:rPr>
+                        <a:t>최적합</a:t>
+                      </a:r>
+                      <a:endParaRPr lang="en-US" sz="1050" dirty="0">
+                        <a:latin typeface="Pretendard" charset="0"/>
+                        <a:ea typeface="Pretendard" charset="0"/>
+                        <a:cs typeface="Pretendard" charset="0"/>
+                      </a:endParaRPr>
+                    </a:p>
+                  </a:txBody>
+                  <a:tcPr marL="50800" marR="50800" marT="25400" marB="25400" anchor="ctr">
+                    <a:lnL w="3810" cap="flat" cmpd="sng" algn="ctr">
+                      <a:solidFill>
+                        <a:srgbClr val="CBD5E0"/>
+                      </a:solidFill>
+                      <a:prstDash val="solid"/>
+                      <a:round/>
+                      <a:headEnd type="none" w="med" len="med"/>
+                      <a:tailEnd type="none" w="med" len="med"/>
+                    </a:lnL>
+                    <a:lnR w="3810" cap="flat" cmpd="sng" algn="ctr">
+                      <a:solidFill>
+                        <a:srgbClr val="CBD5E0"/>
+                      </a:solidFill>
+                      <a:prstDash val="solid"/>
+                      <a:round/>
+                      <a:headEnd type="none" w="med" len="med"/>
+                      <a:tailEnd type="none" w="med" len="med"/>
+                    </a:lnR>
+                    <a:lnT w="3810" cap="flat" cmpd="sng" algn="ctr">
+                      <a:solidFill>
+                        <a:srgbClr val="CBD5E0"/>
+                      </a:solidFill>
+                      <a:prstDash val="solid"/>
+                      <a:round/>
+                      <a:headEnd type="none" w="med" len="med"/>
+                      <a:tailEnd type="none" w="med" len="med"/>
+                    </a:lnT>
+                    <a:lnB w="3810" cap="flat" cmpd="sng" algn="ctr">
+                      <a:solidFill>
+                        <a:srgbClr val="CBD5E0"/>
+                      </a:solidFill>
+                      <a:prstDash val="solid"/>
+                      <a:round/>
+                      <a:headEnd type="none" w="med" len="med"/>
+                      <a:tailEnd type="none" w="med" len="med"/>
+                    </a:lnB>
+                    <a:solidFill>
+                      <a:srgbClr val="FFFFFF"/>
+                    </a:solidFill>
+                  </a:tcPr>
+                </a:tc>
+                <a:tc>
+                  <a:txBody>
+                    <a:bodyPr/>
+                    <a:lstStyle/>
+                    <a:p>
+                      <a:pPr indent="0" marL="0">
+                        <a:buNone/>
+                      </a:pPr>
+                      <a:r>
+                        <a:rPr lang="en-US" sz="1050" dirty="0">
+                          <a:solidFill>
+                            <a:srgbClr val="10161F"/>
+                          </a:solidFill>
+                          <a:latin typeface="Pretendard" pitchFamily="34" charset="0"/>
+                          <a:ea typeface="Pretendard" pitchFamily="34" charset="-122"/>
+                          <a:cs typeface="Pretendard" pitchFamily="34" charset="-120"/>
+                        </a:rPr>
+                        <a:t>소형 </a:t>
+                      </a:r>
+                      <a:pPr indent="0" marL="0">
+                        <a:buNone/>
+                      </a:pPr>
+                      <a:r>
+                        <a:rPr lang="en-US" sz="1050" dirty="0">
+                          <a:solidFill>
+                            <a:srgbClr val="10161F"/>
+                          </a:solidFill>
+                          <a:latin typeface="Pretendard" pitchFamily="34" charset="0"/>
+                          <a:ea typeface="Pretendard" pitchFamily="34" charset="-122"/>
+                          <a:cs typeface="Pretendard" pitchFamily="34" charset="-120"/>
+                        </a:rPr>
+                        <a:t>빌딩 </a:t>
+                      </a:r>
+                      <a:pPr indent="0" marL="0">
+                        <a:buNone/>
+                      </a:pPr>
+                      <a:r>
+                        <a:rPr lang="en-US" sz="1050" dirty="0">
+                          <a:solidFill>
+                            <a:srgbClr val="10161F"/>
+                          </a:solidFill>
+                          <a:latin typeface="Pretendard" pitchFamily="34" charset="0"/>
+                          <a:ea typeface="Pretendard" pitchFamily="34" charset="-122"/>
+                          <a:cs typeface="Pretendard" pitchFamily="34" charset="-120"/>
+                        </a:rPr>
+                        <a:t>안정 </a:t>
+                      </a:r>
+                      <a:pPr indent="0" marL="0">
+                        <a:buNone/>
+                      </a:pPr>
+                      <a:r>
+                        <a:rPr lang="en-US" sz="1050" dirty="0">
+                          <a:solidFill>
+                            <a:srgbClr val="10161F"/>
+                          </a:solidFill>
+                          <a:latin typeface="Pretendard" pitchFamily="34" charset="0"/>
+                          <a:ea typeface="Pretendard" pitchFamily="34" charset="-122"/>
+                          <a:cs typeface="Pretendard" pitchFamily="34" charset="-120"/>
+                        </a:rPr>
+                        <a:t>수익 </a:t>
+                      </a:r>
+                      <a:pPr indent="0" marL="0">
+                        <a:buNone/>
+                      </a:pPr>
+                      <a:r>
+                        <a:rPr lang="en-US" sz="1050" dirty="0">
+                          <a:solidFill>
+                            <a:srgbClr val="10161F"/>
+                          </a:solidFill>
+                          <a:latin typeface="Pretendard" pitchFamily="34" charset="0"/>
+                          <a:ea typeface="Pretendard" pitchFamily="34" charset="-122"/>
+                          <a:cs typeface="Pretendard" pitchFamily="34" charset="-120"/>
+                        </a:rPr>
+                        <a:t>최적</a:t>
+                      </a:r>
+                      <a:endParaRPr lang="en-US" sz="1050" dirty="0">
+                        <a:latin typeface="Pretendard" charset="0"/>
+                        <a:ea typeface="Pretendard" charset="0"/>
+                        <a:cs typeface="Pretendard" charset="0"/>
+                      </a:endParaRPr>
+                    </a:p>
+                  </a:txBody>
+                  <a:tcPr marL="50800" marR="50800" marT="25400" marB="25400" anchor="ctr">
+                    <a:lnL w="3810" cap="flat" cmpd="sng" algn="ctr">
+                      <a:solidFill>
+                        <a:srgbClr val="CBD5E0"/>
+                      </a:solidFill>
+                      <a:prstDash val="solid"/>
+                      <a:round/>
+                      <a:headEnd type="none" w="med" len="med"/>
+                      <a:tailEnd type="none" w="med" len="med"/>
+                    </a:lnL>
+                    <a:lnR w="3810" cap="flat" cmpd="sng" algn="ctr">
+                      <a:solidFill>
+                        <a:srgbClr val="CBD5E0"/>
+                      </a:solidFill>
+                      <a:prstDash val="solid"/>
+                      <a:round/>
+                      <a:headEnd type="none" w="med" len="med"/>
+                      <a:tailEnd type="none" w="med" len="med"/>
+                    </a:lnR>
+                    <a:lnT w="3810" cap="flat" cmpd="sng" algn="ctr">
+                      <a:solidFill>
+                        <a:srgbClr val="CBD5E0"/>
+                      </a:solidFill>
+                      <a:prstDash val="solid"/>
+                      <a:round/>
+                      <a:headEnd type="none" w="med" len="med"/>
+                      <a:tailEnd type="none" w="med" len="med"/>
+                    </a:lnT>
+                    <a:lnB w="3810" cap="flat" cmpd="sng" algn="ctr">
+                      <a:solidFill>
+                        <a:srgbClr val="CBD5E0"/>
+                      </a:solidFill>
+                      <a:prstDash val="solid"/>
+                      <a:round/>
+                      <a:headEnd type="none" w="med" len="med"/>
+                      <a:tailEnd type="none" w="med" len="med"/>
+                    </a:lnB>
+                    <a:solidFill>
+                      <a:srgbClr val="FFFFFF"/>
+                    </a:solidFill>
+                  </a:tcPr>
+                </a:tc>
+              </a:tr>
+              <a:tr h="329184">
+                <a:tc>
+                  <a:txBody>
+                    <a:bodyPr/>
+                    <a:lstStyle/>
+                    <a:p>
+                      <a:pPr indent="0" marL="0">
+                        <a:buNone/>
+                      </a:pPr>
+                      <a:r>
+                        <a:rPr lang="en-US" sz="1050" b="1" dirty="0">
+                          <a:solidFill>
+                            <a:srgbClr val="10161F"/>
+                          </a:solidFill>
+                          <a:latin typeface="Pretendard" pitchFamily="34" charset="0"/>
+                          <a:ea typeface="Pretendard" pitchFamily="34" charset="-122"/>
+                          <a:cs typeface="Pretendard" pitchFamily="34" charset="-120"/>
+                        </a:rPr>
+                        <a:t>법인 </a:t>
+                      </a:r>
+                      <a:pPr indent="0" marL="0">
+                        <a:buNone/>
+                      </a:pPr>
+                      <a:r>
+                        <a:rPr lang="en-US" sz="1050" b="1" dirty="0">
+                          <a:solidFill>
+                            <a:srgbClr val="10161F"/>
+                          </a:solidFill>
+                          <a:latin typeface="Pretendard" pitchFamily="34" charset="0"/>
+                          <a:ea typeface="Pretendard" pitchFamily="34" charset="-122"/>
+                          <a:cs typeface="Pretendard" pitchFamily="34" charset="-120"/>
+                        </a:rPr>
+                        <a:t>사옥 </a:t>
+                      </a:r>
+                      <a:pPr indent="0" marL="0">
+                        <a:buNone/>
+                      </a:pPr>
+                      <a:r>
+                        <a:rPr lang="en-US" sz="1050" b="1" dirty="0">
+                          <a:solidFill>
+                            <a:srgbClr val="10161F"/>
+                          </a:solidFill>
+                          <a:latin typeface="Pretendard" pitchFamily="34" charset="0"/>
+                          <a:ea typeface="Pretendard" pitchFamily="34" charset="-122"/>
+                          <a:cs typeface="Pretendard" pitchFamily="34" charset="-120"/>
+                        </a:rPr>
+                        <a:t>이전</a:t>
+                      </a:r>
+                      <a:endParaRPr lang="en-US" sz="1050" dirty="0">
+                        <a:latin typeface="Pretendard" charset="0"/>
+                        <a:ea typeface="Pretendard" charset="0"/>
+                        <a:cs typeface="Pretendard" charset="0"/>
+                      </a:endParaRPr>
+                    </a:p>
+                  </a:txBody>
+                  <a:tcPr marL="50800" marR="50800" marT="25400" marB="25400" anchor="ctr">
+                    <a:lnL w="3810" cap="flat" cmpd="sng" algn="ctr">
+                      <a:solidFill>
+                        <a:srgbClr val="CBD5E0"/>
+                      </a:solidFill>
+                      <a:prstDash val="solid"/>
+                      <a:round/>
+                      <a:headEnd type="none" w="med" len="med"/>
+                      <a:tailEnd type="none" w="med" len="med"/>
+                    </a:lnL>
+                    <a:lnR w="3810" cap="flat" cmpd="sng" algn="ctr">
+                      <a:solidFill>
+                        <a:srgbClr val="CBD5E0"/>
+                      </a:solidFill>
+                      <a:prstDash val="solid"/>
+                      <a:round/>
+                      <a:headEnd type="none" w="med" len="med"/>
+                      <a:tailEnd type="none" w="med" len="med"/>
+                    </a:lnR>
+                    <a:lnT w="3810" cap="flat" cmpd="sng" algn="ctr">
+                      <a:solidFill>
+                        <a:srgbClr val="CBD5E0"/>
+                      </a:solidFill>
+                      <a:prstDash val="solid"/>
+                      <a:round/>
+                      <a:headEnd type="none" w="med" len="med"/>
+                      <a:tailEnd type="none" w="med" len="med"/>
+                    </a:lnT>
+                    <a:lnB w="3810" cap="flat" cmpd="sng" algn="ctr">
+                      <a:solidFill>
+                        <a:srgbClr val="CBD5E0"/>
+                      </a:solidFill>
+                      <a:prstDash val="solid"/>
+                      <a:round/>
+                      <a:headEnd type="none" w="med" len="med"/>
+                      <a:tailEnd type="none" w="med" len="med"/>
+                    </a:lnB>
+                    <a:solidFill>
+                      <a:srgbClr val="F7FAFC"/>
+                    </a:solidFill>
+                  </a:tcPr>
+                </a:tc>
+                <a:tc>
+                  <a:txBody>
+                    <a:bodyPr/>
+                    <a:lstStyle/>
+                    <a:p>
+                      <a:pPr indent="0" marL="0">
+                        <a:buNone/>
+                      </a:pPr>
+                      <a:r>
+                        <a:rPr lang="en-US" sz="1050" dirty="0">
+                          <a:solidFill>
+                            <a:srgbClr val="10161F"/>
+                          </a:solidFill>
+                          <a:latin typeface="Pretendard" pitchFamily="34" charset="0"/>
+                          <a:ea typeface="Pretendard" pitchFamily="34" charset="-122"/>
+                          <a:cs typeface="Pretendard" pitchFamily="34" charset="-120"/>
+                        </a:rPr>
+                        <a:t>적합</a:t>
+                      </a:r>
+                      <a:endParaRPr lang="en-US" sz="1050" dirty="0">
+                        <a:latin typeface="Pretendard" charset="0"/>
+                        <a:ea typeface="Pretendard" charset="0"/>
+                        <a:cs typeface="Pretendard" charset="0"/>
+                      </a:endParaRPr>
+                    </a:p>
+                  </a:txBody>
+                  <a:tcPr marL="50800" marR="50800" marT="25400" marB="25400" anchor="ctr">
+                    <a:lnL w="3810" cap="flat" cmpd="sng" algn="ctr">
+                      <a:solidFill>
+                        <a:srgbClr val="CBD5E0"/>
+                      </a:solidFill>
+                      <a:prstDash val="solid"/>
+                      <a:round/>
+                      <a:headEnd type="none" w="med" len="med"/>
+                      <a:tailEnd type="none" w="med" len="med"/>
+                    </a:lnL>
+                    <a:lnR w="3810" cap="flat" cmpd="sng" algn="ctr">
+                      <a:solidFill>
+                        <a:srgbClr val="CBD5E0"/>
+                      </a:solidFill>
+                      <a:prstDash val="solid"/>
+                      <a:round/>
+                      <a:headEnd type="none" w="med" len="med"/>
+                      <a:tailEnd type="none" w="med" len="med"/>
+                    </a:lnR>
+                    <a:lnT w="3810" cap="flat" cmpd="sng" algn="ctr">
+                      <a:solidFill>
+                        <a:srgbClr val="CBD5E0"/>
+                      </a:solidFill>
+                      <a:prstDash val="solid"/>
+                      <a:round/>
+                      <a:headEnd type="none" w="med" len="med"/>
+                      <a:tailEnd type="none" w="med" len="med"/>
+                    </a:lnT>
+                    <a:lnB w="3810" cap="flat" cmpd="sng" algn="ctr">
+                      <a:solidFill>
+                        <a:srgbClr val="CBD5E0"/>
+                      </a:solidFill>
+                      <a:prstDash val="solid"/>
+                      <a:round/>
+                      <a:headEnd type="none" w="med" len="med"/>
+                      <a:tailEnd type="none" w="med" len="med"/>
+                    </a:lnB>
+                    <a:solidFill>
+                      <a:srgbClr val="F7FAFC"/>
+                    </a:solidFill>
+                  </a:tcPr>
+                </a:tc>
+                <a:tc>
+                  <a:txBody>
+                    <a:bodyPr/>
+                    <a:lstStyle/>
+                    <a:p>
+                      <a:pPr indent="0" marL="0">
+                        <a:buNone/>
+                      </a:pPr>
+                      <a:r>
+                        <a:rPr lang="en-US" sz="1050" dirty="0">
+                          <a:solidFill>
+                            <a:srgbClr val="10161F"/>
+                          </a:solidFill>
+                          <a:latin typeface="Pretendard" pitchFamily="34" charset="0"/>
+                          <a:ea typeface="Pretendard" pitchFamily="34" charset="-122"/>
+                          <a:cs typeface="Pretendard" pitchFamily="34" charset="-120"/>
+                        </a:rPr>
+                        <a:t>강남권역 </a:t>
+                      </a:r>
+                      <a:pPr indent="0" marL="0">
+                        <a:buNone/>
+                      </a:pPr>
+                      <a:r>
+                        <a:rPr lang="en-US" sz="1050" dirty="0">
+                          <a:solidFill>
+                            <a:srgbClr val="10161F"/>
+                          </a:solidFill>
+                          <a:latin typeface="Pretendard" pitchFamily="34" charset="0"/>
+                          <a:ea typeface="Pretendard" pitchFamily="34" charset="-122"/>
+                          <a:cs typeface="Pretendard" pitchFamily="34" charset="-120"/>
+                        </a:rPr>
+                        <a:t>직주근접</a:t>
+                      </a:r>
+                      <a:endParaRPr lang="en-US" sz="1050" dirty="0">
+                        <a:latin typeface="Pretendard" charset="0"/>
+                        <a:ea typeface="Pretendard" charset="0"/>
+                        <a:cs typeface="Pretendard" charset="0"/>
+                      </a:endParaRPr>
+                    </a:p>
+                  </a:txBody>
+                  <a:tcPr marL="50800" marR="50800" marT="25400" marB="25400" anchor="ctr">
+                    <a:lnL w="3810" cap="flat" cmpd="sng" algn="ctr">
+                      <a:solidFill>
+                        <a:srgbClr val="CBD5E0"/>
+                      </a:solidFill>
+                      <a:prstDash val="solid"/>
+                      <a:round/>
+                      <a:headEnd type="none" w="med" len="med"/>
+                      <a:tailEnd type="none" w="med" len="med"/>
+                    </a:lnL>
+                    <a:lnR w="3810" cap="flat" cmpd="sng" algn="ctr">
+                      <a:solidFill>
+                        <a:srgbClr val="CBD5E0"/>
+                      </a:solidFill>
+                      <a:prstDash val="solid"/>
+                      <a:round/>
+                      <a:headEnd type="none" w="med" len="med"/>
+                      <a:tailEnd type="none" w="med" len="med"/>
+                    </a:lnR>
+                    <a:lnT w="3810" cap="flat" cmpd="sng" algn="ctr">
+                      <a:solidFill>
+                        <a:srgbClr val="CBD5E0"/>
+                      </a:solidFill>
+                      <a:prstDash val="solid"/>
+                      <a:round/>
+                      <a:headEnd type="none" w="med" len="med"/>
+                      <a:tailEnd type="none" w="med" len="med"/>
+                    </a:lnT>
+                    <a:lnB w="3810" cap="flat" cmpd="sng" algn="ctr">
+                      <a:solidFill>
+                        <a:srgbClr val="CBD5E0"/>
+                      </a:solidFill>
+                      <a:prstDash val="solid"/>
+                      <a:round/>
+                      <a:headEnd type="none" w="med" len="med"/>
+                      <a:tailEnd type="none" w="med" len="med"/>
+                    </a:lnB>
+                    <a:solidFill>
+                      <a:srgbClr val="F7FAFC"/>
+                    </a:solidFill>
+                  </a:tcPr>
+                </a:tc>
+              </a:tr>
+              <a:tr h="329184">
+                <a:tc>
+                  <a:txBody>
+                    <a:bodyPr/>
+                    <a:lstStyle/>
+                    <a:p>
+                      <a:pPr indent="0" marL="0">
+                        <a:buNone/>
+                      </a:pPr>
+                      <a:r>
+                        <a:rPr lang="en-US" sz="1050" b="1" dirty="0">
+                          <a:solidFill>
+                            <a:srgbClr val="10161F"/>
+                          </a:solidFill>
+                          <a:latin typeface="Pretendard" pitchFamily="34" charset="0"/>
+                          <a:ea typeface="Pretendard" pitchFamily="34" charset="-122"/>
+                          <a:cs typeface="Pretendard" pitchFamily="34" charset="-120"/>
+                        </a:rPr>
+                        <a:t>소규모 </a:t>
+                      </a:r>
+                      <a:pPr indent="0" marL="0">
+                        <a:buNone/>
+                      </a:pPr>
+                      <a:r>
+                        <a:rPr lang="en-US" sz="1050" b="1" dirty="0">
+                          <a:solidFill>
+                            <a:srgbClr val="10161F"/>
+                          </a:solidFill>
+                          <a:latin typeface="Pretendard" pitchFamily="34" charset="0"/>
+                          <a:ea typeface="Pretendard" pitchFamily="34" charset="-122"/>
+                          <a:cs typeface="Pretendard" pitchFamily="34" charset="-120"/>
+                        </a:rPr>
+                        <a:t>개발업체</a:t>
+                      </a:r>
+                      <a:endParaRPr lang="en-US" sz="1050" dirty="0">
+                        <a:latin typeface="Pretendard" charset="0"/>
+                        <a:ea typeface="Pretendard" charset="0"/>
+                        <a:cs typeface="Pretendard" charset="0"/>
+                      </a:endParaRPr>
+                    </a:p>
+                  </a:txBody>
+                  <a:tcPr marL="50800" marR="50800" marT="25400" marB="25400" anchor="ctr">
+                    <a:lnL w="3810" cap="flat" cmpd="sng" algn="ctr">
+                      <a:solidFill>
+                        <a:srgbClr val="CBD5E0"/>
+                      </a:solidFill>
+                      <a:prstDash val="solid"/>
+                      <a:round/>
+                      <a:headEnd type="none" w="med" len="med"/>
+                      <a:tailEnd type="none" w="med" len="med"/>
+                    </a:lnL>
+                    <a:lnR w="3810" cap="flat" cmpd="sng" algn="ctr">
+                      <a:solidFill>
+                        <a:srgbClr val="CBD5E0"/>
+                      </a:solidFill>
+                      <a:prstDash val="solid"/>
+                      <a:round/>
+                      <a:headEnd type="none" w="med" len="med"/>
+                      <a:tailEnd type="none" w="med" len="med"/>
+                    </a:lnR>
+                    <a:lnT w="3810" cap="flat" cmpd="sng" algn="ctr">
+                      <a:solidFill>
+                        <a:srgbClr val="CBD5E0"/>
+                      </a:solidFill>
+                      <a:prstDash val="solid"/>
+                      <a:round/>
+                      <a:headEnd type="none" w="med" len="med"/>
+                      <a:tailEnd type="none" w="med" len="med"/>
+                    </a:lnT>
+                    <a:lnB w="3810" cap="flat" cmpd="sng" algn="ctr">
+                      <a:solidFill>
+                        <a:srgbClr val="CBD5E0"/>
+                      </a:solidFill>
+                      <a:prstDash val="solid"/>
+                      <a:round/>
+                      <a:headEnd type="none" w="med" len="med"/>
+                      <a:tailEnd type="none" w="med" len="med"/>
+                    </a:lnB>
+                    <a:solidFill>
+                      <a:srgbClr val="FFFFFF"/>
+                    </a:solidFill>
+                  </a:tcPr>
+                </a:tc>
+                <a:tc>
+                  <a:txBody>
+                    <a:bodyPr/>
+                    <a:lstStyle/>
+                    <a:p>
+                      <a:pPr indent="0" marL="0">
+                        <a:buNone/>
+                      </a:pPr>
+                      <a:r>
+                        <a:rPr lang="en-US" sz="1050" dirty="0">
+                          <a:solidFill>
+                            <a:srgbClr val="10161F"/>
+                          </a:solidFill>
+                          <a:latin typeface="Pretendard" pitchFamily="34" charset="0"/>
+                          <a:ea typeface="Pretendard" pitchFamily="34" charset="-122"/>
+                          <a:cs typeface="Pretendard" pitchFamily="34" charset="-120"/>
+                        </a:rPr>
+                        <a:t>검토</a:t>
+                      </a:r>
+                      <a:endParaRPr lang="en-US" sz="1050" dirty="0">
+                        <a:latin typeface="Pretendard" charset="0"/>
+                        <a:ea typeface="Pretendard" charset="0"/>
+                        <a:cs typeface="Pretendard" charset="0"/>
+                      </a:endParaRPr>
+                    </a:p>
+                  </a:txBody>
+                  <a:tcPr marL="50800" marR="50800" marT="25400" marB="25400" anchor="ctr">
+                    <a:lnL w="3810" cap="flat" cmpd="sng" algn="ctr">
+                      <a:solidFill>
+                        <a:srgbClr val="CBD5E0"/>
+                      </a:solidFill>
+                      <a:prstDash val="solid"/>
+                      <a:round/>
+                      <a:headEnd type="none" w="med" len="med"/>
+                      <a:tailEnd type="none" w="med" len="med"/>
+                    </a:lnL>
+                    <a:lnR w="3810" cap="flat" cmpd="sng" algn="ctr">
+                      <a:solidFill>
+                        <a:srgbClr val="CBD5E0"/>
+                      </a:solidFill>
+                      <a:prstDash val="solid"/>
+                      <a:round/>
+                      <a:headEnd type="none" w="med" len="med"/>
+                      <a:tailEnd type="none" w="med" len="med"/>
+                    </a:lnR>
+                    <a:lnT w="3810" cap="flat" cmpd="sng" algn="ctr">
+                      <a:solidFill>
+                        <a:srgbClr val="CBD5E0"/>
+                      </a:solidFill>
+                      <a:prstDash val="solid"/>
+                      <a:round/>
+                      <a:headEnd type="none" w="med" len="med"/>
+                      <a:tailEnd type="none" w="med" len="med"/>
+                    </a:lnT>
+                    <a:lnB w="3810" cap="flat" cmpd="sng" algn="ctr">
+                      <a:solidFill>
+                        <a:srgbClr val="CBD5E0"/>
+                      </a:solidFill>
+                      <a:prstDash val="solid"/>
+                      <a:round/>
+                      <a:headEnd type="none" w="med" len="med"/>
+                      <a:tailEnd type="none" w="med" len="med"/>
+                    </a:lnB>
+                    <a:solidFill>
+                      <a:srgbClr val="FFFFFF"/>
+                    </a:solidFill>
+                  </a:tcPr>
+                </a:tc>
+                <a:tc>
+                  <a:txBody>
+                    <a:bodyPr/>
+                    <a:lstStyle/>
+                    <a:p>
+                      <a:pPr indent="0" marL="0">
+                        <a:buNone/>
+                      </a:pPr>
+                      <a:r>
+                        <a:rPr lang="en-US" sz="1050" dirty="0">
+                          <a:solidFill>
+                            <a:srgbClr val="10161F"/>
+                          </a:solidFill>
+                          <a:latin typeface="Pretendard" pitchFamily="34" charset="0"/>
+                          <a:ea typeface="Pretendard" pitchFamily="34" charset="-122"/>
+                          <a:cs typeface="Pretendard" pitchFamily="34" charset="-120"/>
+                        </a:rPr>
+                        <a:t>밸류업 </a:t>
+                      </a:r>
+                      <a:pPr indent="0" marL="0">
+                        <a:buNone/>
+                      </a:pPr>
+                      <a:r>
+                        <a:rPr lang="en-US" sz="1050" dirty="0">
+                          <a:solidFill>
+                            <a:srgbClr val="10161F"/>
+                          </a:solidFill>
+                          <a:latin typeface="Pretendard" pitchFamily="34" charset="0"/>
+                          <a:ea typeface="Pretendard" pitchFamily="34" charset="-122"/>
+                          <a:cs typeface="Pretendard" pitchFamily="34" charset="-120"/>
+                        </a:rPr>
+                        <a:t>후 </a:t>
+                      </a:r>
+                      <a:pPr indent="0" marL="0">
+                        <a:buNone/>
+                      </a:pPr>
+                      <a:r>
+                        <a:rPr lang="en-US" sz="1050" dirty="0">
+                          <a:solidFill>
+                            <a:srgbClr val="10161F"/>
+                          </a:solidFill>
+                          <a:latin typeface="Pretendard" pitchFamily="34" charset="0"/>
+                          <a:ea typeface="Pretendard" pitchFamily="34" charset="-122"/>
+                          <a:cs typeface="Pretendard" pitchFamily="34" charset="-120"/>
+                        </a:rPr>
+                        <a:t>매각 </a:t>
+                      </a:r>
+                      <a:pPr indent="0" marL="0">
+                        <a:buNone/>
+                      </a:pPr>
+                      <a:r>
+                        <a:rPr lang="en-US" sz="1050" dirty="0">
+                          <a:solidFill>
+                            <a:srgbClr val="10161F"/>
+                          </a:solidFill>
+                          <a:latin typeface="Pretendard" pitchFamily="34" charset="0"/>
+                          <a:ea typeface="Pretendard" pitchFamily="34" charset="-122"/>
+                          <a:cs typeface="Pretendard" pitchFamily="34" charset="-120"/>
+                        </a:rPr>
+                        <a:t>시나리오</a:t>
+                      </a:r>
+                      <a:endParaRPr lang="en-US" sz="1050" dirty="0">
+                        <a:latin typeface="Pretendard" charset="0"/>
+                        <a:ea typeface="Pretendard" charset="0"/>
+                        <a:cs typeface="Pretendard" charset="0"/>
+                      </a:endParaRPr>
+                    </a:p>
+                  </a:txBody>
+                  <a:tcPr marL="50800" marR="50800" marT="25400" marB="25400" anchor="ctr">
+                    <a:lnL w="3810" cap="flat" cmpd="sng" algn="ctr">
+                      <a:solidFill>
+                        <a:srgbClr val="CBD5E0"/>
+                      </a:solidFill>
+                      <a:prstDash val="solid"/>
+                      <a:round/>
+                      <a:headEnd type="none" w="med" len="med"/>
+                      <a:tailEnd type="none" w="med" len="med"/>
+                    </a:lnL>
+                    <a:lnR w="3810" cap="flat" cmpd="sng" algn="ctr">
+                      <a:solidFill>
+                        <a:srgbClr val="CBD5E0"/>
+                      </a:solidFill>
+                      <a:prstDash val="solid"/>
+                      <a:round/>
+                      <a:headEnd type="none" w="med" len="med"/>
+                      <a:tailEnd type="none" w="med" len="med"/>
+                    </a:lnR>
+                    <a:lnT w="3810" cap="flat" cmpd="sng" algn="ctr">
+                      <a:solidFill>
+                        <a:srgbClr val="CBD5E0"/>
+                      </a:solidFill>
+                      <a:prstDash val="solid"/>
+                      <a:round/>
+                      <a:headEnd type="none" w="med" len="med"/>
+                      <a:tailEnd type="none" w="med" len="med"/>
+                    </a:lnT>
+                    <a:lnB w="3810" cap="flat" cmpd="sng" algn="ctr">
+                      <a:solidFill>
+                        <a:srgbClr val="CBD5E0"/>
+                      </a:solidFill>
+                      <a:prstDash val="solid"/>
+                      <a:round/>
+                      <a:headEnd type="none" w="med" len="med"/>
+                      <a:tailEnd type="none" w="med" len="med"/>
+                    </a:lnB>
+                    <a:solidFill>
+                      <a:srgbClr val="FFFFFF"/>
+                    </a:solidFill>
+                  </a:tcPr>
+                </a:tc>
+              </a:tr>
+            </a:tbl>
+          </a:graphicData>
+        </a:graphic>
+      </p:graphicFrame>
+      <p:sp>
+        <p:nvSpPr>
+          <p:cNvPr id="21" name="Shape 18"/>
+          <p:cNvSpPr/>
+          <p:nvPr/>
+        </p:nvSpPr>
+        <p:spPr>
+          <a:xfrm>
+            <a:off x="566928" y="5522976"/>
+            <a:ext cx="11057839" cy="804672"/>
+          </a:xfrm>
+          <a:prstGeom prst="roundRect">
+            <a:avLst>
+              <a:gd name="adj" fmla="val 6818"/>
+            </a:avLst>
+          </a:prstGeom>
+          <a:solidFill>
+            <a:srgbClr val="F3EBDA"/>
+          </a:solidFill>
+          <a:ln w="10160">
+            <a:solidFill>
+              <a:srgbClr val="D9B668"/>
+            </a:solidFill>
+            <a:prstDash val="solid"/>
+          </a:ln>
+        </p:spPr>
+      </p:sp>
+      <p:sp>
+        <p:nvSpPr>
+          <p:cNvPr id="22" name="Text 19"/>
+          <p:cNvSpPr/>
+          <p:nvPr/>
+        </p:nvSpPr>
+        <p:spPr>
+          <a:xfrm>
+            <a:off x="749808" y="5632704"/>
+            <a:ext cx="1691640" cy="256032"/>
+          </a:xfrm>
+          <a:prstGeom prst="rect">
+            <a:avLst/>
+          </a:prstGeom>
+          <a:noFill/>
+          <a:ln/>
+        </p:spPr>
+        <p:txBody>
+          <a:bodyPr wrap="square" lIns="0" tIns="0" rIns="0" bIns="0" rtlCol="0" anchor="ctr"/>
           <a:lstStyle/>
           <a:p>
             <a:pPr indent="0" marL="0">
               <a:buNone/>
             </a:pPr>
             <a:r>
-              <a:rPr lang="en-US" sz="1100" dirty="0">
-                <a:solidFill>
-                  <a:srgbClr val="10161F"/>
+              <a:rPr lang="en-US" sz="1050" b="1" dirty="0">
+                <a:solidFill>
+                  <a:srgbClr val="977024"/>
                 </a:solidFill>
                 <a:latin typeface="Pretendard" pitchFamily="34" charset="0"/>
                 <a:ea typeface="Pretendard" pitchFamily="34" charset="-122"/>
                 <a:cs typeface="Pretendard" pitchFamily="34" charset="-120"/>
               </a:rPr>
-              <a:t>NDA 체결 → 임차인 정보 및 임대차계약서 제공</a:t>
-            </a:r>
-            <a:endParaRPr lang="en-US" sz="1100" dirty="0"/>
-          </a:p>
-        </p:txBody>
-      </p:sp>
-      <p:sp>
-        <p:nvSpPr>
-          <p:cNvPr id="17" name="Shape 15"/>
-          <p:cNvSpPr/>
-          <p:nvPr/>
-        </p:nvSpPr>
-        <p:spPr>
-          <a:xfrm>
-            <a:off x="6004408" y="3035808"/>
-            <a:ext cx="182880" cy="274320"/>
-          </a:xfrm>
-          <a:prstGeom prst="rightArrow">
-            <a:avLst/>
-          </a:prstGeom>
-          <a:solidFill>
-            <a:srgbClr val="CBD5E0"/>
-          </a:solidFill>
-          <a:ln w="6350">
-            <a:solidFill>
-              <a:srgbClr val="718096"/>
-            </a:solidFill>
-            <a:prstDash val="solid"/>
-          </a:ln>
-        </p:spPr>
-      </p:sp>
-      <p:sp>
-        <p:nvSpPr>
-          <p:cNvPr id="18" name="Shape 16"/>
-          <p:cNvSpPr/>
-          <p:nvPr/>
-        </p:nvSpPr>
-        <p:spPr>
-          <a:xfrm>
-            <a:off x="6278728" y="1572768"/>
-            <a:ext cx="2490140" cy="3200400"/>
-          </a:xfrm>
-          <a:prstGeom prst="roundRect">
-            <a:avLst>
-              <a:gd name="adj" fmla="val 2203"/>
-            </a:avLst>
-          </a:prstGeom>
-          <a:solidFill>
-            <a:srgbClr val="F7FAFC"/>
-          </a:solidFill>
-          <a:ln w="6350">
-            <a:solidFill>
-              <a:srgbClr val="CBD5E0"/>
-            </a:solidFill>
-            <a:prstDash val="solid"/>
-          </a:ln>
-        </p:spPr>
-      </p:sp>
-      <p:sp>
-        <p:nvSpPr>
-          <p:cNvPr id="19" name="Shape 17"/>
-          <p:cNvSpPr/>
-          <p:nvPr/>
-        </p:nvSpPr>
-        <p:spPr>
-          <a:xfrm>
-            <a:off x="6498184" y="1792224"/>
-            <a:ext cx="438912" cy="438912"/>
-          </a:xfrm>
-          <a:prstGeom prst="ellipse">
-            <a:avLst/>
-          </a:prstGeom>
-          <a:solidFill>
-            <a:srgbClr val="B98A2E"/>
-          </a:solidFill>
-          <a:ln/>
-        </p:spPr>
-      </p:sp>
-      <p:sp>
-        <p:nvSpPr>
-          <p:cNvPr id="20" name="Text 18"/>
-          <p:cNvSpPr/>
-          <p:nvPr/>
-        </p:nvSpPr>
-        <p:spPr>
-          <a:xfrm>
-            <a:off x="6498184" y="1792224"/>
-            <a:ext cx="438912" cy="438912"/>
-          </a:xfrm>
-          <a:prstGeom prst="rect">
-            <a:avLst/>
-          </a:prstGeom>
-          <a:noFill/>
-          <a:ln/>
-        </p:spPr>
-        <p:txBody>
-          <a:bodyPr wrap="square" lIns="0" tIns="0" rIns="0" bIns="0" rtlCol="0" anchor="ctr"/>
-          <a:lstStyle/>
-          <a:p>
-            <a:pPr algn="ctr" indent="0" marL="0">
-              <a:buNone/>
-            </a:pPr>
-            <a:r>
-              <a:rPr lang="en-US" sz="1400" b="1" dirty="0">
-                <a:solidFill>
-                  <a:srgbClr val="FFFFFF"/>
-                </a:solidFill>
-                <a:latin typeface="Arial" pitchFamily="34" charset="0"/>
-                <a:ea typeface="Arial" pitchFamily="34" charset="-122"/>
-                <a:cs typeface="Arial" pitchFamily="34" charset="-120"/>
-              </a:rPr>
-              <a:t>03</a:t>
-            </a:r>
-            <a:endParaRPr lang="en-US" sz="1400" dirty="0"/>
-          </a:p>
-        </p:txBody>
-      </p:sp>
-      <p:sp>
-        <p:nvSpPr>
-          <p:cNvPr id="21" name="Text 19"/>
-          <p:cNvSpPr/>
-          <p:nvPr/>
-        </p:nvSpPr>
-        <p:spPr>
-          <a:xfrm>
-            <a:off x="6498184" y="2304288"/>
-            <a:ext cx="2051228" cy="365760"/>
-          </a:xfrm>
-          <a:prstGeom prst="rect">
-            <a:avLst/>
-          </a:prstGeom>
-          <a:noFill/>
-          <a:ln/>
-        </p:spPr>
-        <p:txBody>
-          <a:bodyPr wrap="square" rtlCol="0" anchor="ctr"/>
+              <a:t>종합 가치 제안</a:t>
+            </a:r>
+            <a:endParaRPr lang="en-US" sz="1050" dirty="0"/>
+          </a:p>
+        </p:txBody>
+      </p:sp>
+      <p:sp>
+        <p:nvSpPr>
+          <p:cNvPr id="23" name="Text 20"/>
+          <p:cNvSpPr/>
+          <p:nvPr/>
+        </p:nvSpPr>
+        <p:spPr>
+          <a:xfrm>
+            <a:off x="2487168" y="5596128"/>
+            <a:ext cx="8954719" cy="658368"/>
+          </a:xfrm>
+          <a:prstGeom prst="rect">
+            <a:avLst/>
+          </a:prstGeom>
+          <a:noFill/>
+          <a:ln/>
+        </p:spPr>
+        <p:txBody>
+          <a:bodyPr wrap="square" lIns="0" tIns="0" rIns="0" bIns="0" rtlCol="0" anchor="ctr"/>
           <a:lstStyle/>
           <a:p>
             <a:pPr indent="0" marL="0">
-              <a:buNone/>
-            </a:pPr>
-            <a:r>
-              <a:rPr lang="en-US" sz="1600" b="1" dirty="0">
+              <a:lnSpc>
+                <a:spcPct val="125000"/>
+              </a:lnSpc>
+              <a:buNone/>
+            </a:pPr>
+            <a:r>
+              <a:rPr lang="en-US" sz="1100" dirty="0">
                 <a:solidFill>
                   <a:srgbClr val="10161F"/>
                 </a:solidFill>
@@ -9731,273 +10682,45 @@
                 <a:ea typeface="Pretendard" pitchFamily="34" charset="-122"/>
                 <a:cs typeface="Pretendard" pitchFamily="34" charset="-120"/>
               </a:rPr>
-              <a:t>3단계</a:t>
-            </a:r>
-            <a:endParaRPr lang="en-US" sz="1600" dirty="0"/>
-          </a:p>
-        </p:txBody>
-      </p:sp>
-      <p:sp>
-        <p:nvSpPr>
-          <p:cNvPr id="22" name="Text 20"/>
-          <p:cNvSpPr/>
-          <p:nvPr/>
-        </p:nvSpPr>
-        <p:spPr>
-          <a:xfrm>
-            <a:off x="6498184" y="2761488"/>
-            <a:ext cx="2051228" cy="1828800"/>
-          </a:xfrm>
-          <a:prstGeom prst="rect">
-            <a:avLst/>
-          </a:prstGeom>
-          <a:noFill/>
-          <a:ln/>
-        </p:spPr>
-        <p:txBody>
-          <a:bodyPr wrap="square" rtlCol="0" anchor="t"/>
+              <a:t>[참고] 종합 가치 제안: 강남권역 소재 신축부지으로, 입지 및 자산 특성에 대한 상세 분석은 본문을 참조하시기 바랍니다. ### 3대 핵심 투자 포인트 (Investment Highlights) • 원금 안전판 확보: 강남권역 소재 자산으로, 대지 지분 가치 및 입지 경쟁력에 대한 분석은 자산 개요 섹션을 참조하시기 바랍니다.</a:t>
+            </a:r>
+            <a:endParaRPr lang="en-US" sz="1100" dirty="0"/>
+          </a:p>
+        </p:txBody>
+      </p:sp>
+      <p:sp>
+        <p:nvSpPr>
+          <p:cNvPr id="24" name="Text 21"/>
+          <p:cNvSpPr/>
+          <p:nvPr/>
+        </p:nvSpPr>
+        <p:spPr>
+          <a:xfrm>
+            <a:off x="566928" y="6382512"/>
+            <a:ext cx="7315200" cy="219456"/>
+          </a:xfrm>
+          <a:prstGeom prst="rect">
+            <a:avLst/>
+          </a:prstGeom>
+          <a:noFill/>
+          <a:ln/>
+        </p:spPr>
+        <p:txBody>
+          <a:bodyPr wrap="square" lIns="0" tIns="0" rIns="0" bIns="0" rtlCol="0" anchor="ctr"/>
           <a:lstStyle/>
           <a:p>
             <a:pPr indent="0" marL="0">
               <a:buNone/>
             </a:pPr>
             <a:r>
-              <a:rPr lang="en-US" sz="1100" dirty="0">
-                <a:solidFill>
-                  <a:srgbClr val="10161F"/>
+              <a:rPr lang="en-US" sz="800" dirty="0">
+                <a:solidFill>
+                  <a:srgbClr val="718096"/>
                 </a:solidFill>
                 <a:latin typeface="Pretendard" pitchFamily="34" charset="0"/>
                 <a:ea typeface="Pretendard" pitchFamily="34" charset="-122"/>
                 <a:cs typeface="Pretendard" pitchFamily="34" charset="-120"/>
               </a:rPr>
-              <a:t>현장 실사 일정 조율 → 건물 컨디션 및 설비 직접 확인</a:t>
-            </a:r>
-            <a:endParaRPr lang="en-US" sz="1100" dirty="0"/>
-          </a:p>
-        </p:txBody>
-      </p:sp>
-      <p:sp>
-        <p:nvSpPr>
-          <p:cNvPr id="23" name="Shape 21"/>
-          <p:cNvSpPr/>
-          <p:nvPr/>
-        </p:nvSpPr>
-        <p:spPr>
-          <a:xfrm>
-            <a:off x="8860307" y="3035808"/>
-            <a:ext cx="182880" cy="274320"/>
-          </a:xfrm>
-          <a:prstGeom prst="rightArrow">
-            <a:avLst/>
-          </a:prstGeom>
-          <a:solidFill>
-            <a:srgbClr val="CBD5E0"/>
-          </a:solidFill>
-          <a:ln w="6350">
-            <a:solidFill>
-              <a:srgbClr val="718096"/>
-            </a:solidFill>
-            <a:prstDash val="solid"/>
-          </a:ln>
-        </p:spPr>
-      </p:sp>
-      <p:sp>
-        <p:nvSpPr>
-          <p:cNvPr id="24" name="Shape 22"/>
-          <p:cNvSpPr/>
-          <p:nvPr/>
-        </p:nvSpPr>
-        <p:spPr>
-          <a:xfrm>
-            <a:off x="9134627" y="1572768"/>
-            <a:ext cx="2490140" cy="3200400"/>
-          </a:xfrm>
-          <a:prstGeom prst="roundRect">
-            <a:avLst>
-              <a:gd name="adj" fmla="val 2203"/>
-            </a:avLst>
-          </a:prstGeom>
-          <a:solidFill>
-            <a:srgbClr val="F7FAFC"/>
-          </a:solidFill>
-          <a:ln w="6350">
-            <a:solidFill>
-              <a:srgbClr val="CBD5E0"/>
-            </a:solidFill>
-            <a:prstDash val="solid"/>
-          </a:ln>
-        </p:spPr>
-      </p:sp>
-      <p:sp>
-        <p:nvSpPr>
-          <p:cNvPr id="25" name="Shape 23"/>
-          <p:cNvSpPr/>
-          <p:nvPr/>
-        </p:nvSpPr>
-        <p:spPr>
-          <a:xfrm>
-            <a:off x="9354083" y="1792224"/>
-            <a:ext cx="438912" cy="438912"/>
-          </a:xfrm>
-          <a:prstGeom prst="ellipse">
-            <a:avLst/>
-          </a:prstGeom>
-          <a:solidFill>
-            <a:srgbClr val="B98A2E"/>
-          </a:solidFill>
-          <a:ln/>
-        </p:spPr>
-      </p:sp>
-      <p:sp>
-        <p:nvSpPr>
-          <p:cNvPr id="26" name="Text 24"/>
-          <p:cNvSpPr/>
-          <p:nvPr/>
-        </p:nvSpPr>
-        <p:spPr>
-          <a:xfrm>
-            <a:off x="9354083" y="1792224"/>
-            <a:ext cx="438912" cy="438912"/>
-          </a:xfrm>
-          <a:prstGeom prst="rect">
-            <a:avLst/>
-          </a:prstGeom>
-          <a:noFill/>
-          <a:ln/>
-        </p:spPr>
-        <p:txBody>
-          <a:bodyPr wrap="square" lIns="0" tIns="0" rIns="0" bIns="0" rtlCol="0" anchor="ctr"/>
-          <a:lstStyle/>
-          <a:p>
-            <a:pPr algn="ctr" indent="0" marL="0">
-              <a:buNone/>
-            </a:pPr>
-            <a:r>
-              <a:rPr lang="en-US" sz="1400" b="1" dirty="0">
-                <a:solidFill>
-                  <a:srgbClr val="FFFFFF"/>
-                </a:solidFill>
-                <a:latin typeface="Arial" pitchFamily="34" charset="0"/>
-                <a:ea typeface="Arial" pitchFamily="34" charset="-122"/>
-                <a:cs typeface="Arial" pitchFamily="34" charset="-120"/>
-              </a:rPr>
-              <a:t>04</a:t>
-            </a:r>
-            <a:endParaRPr lang="en-US" sz="1400" dirty="0"/>
-          </a:p>
-        </p:txBody>
-      </p:sp>
-      <p:sp>
-        <p:nvSpPr>
-          <p:cNvPr id="27" name="Text 25"/>
-          <p:cNvSpPr/>
-          <p:nvPr/>
-        </p:nvSpPr>
-        <p:spPr>
-          <a:xfrm>
-            <a:off x="9354083" y="2304288"/>
-            <a:ext cx="2051228" cy="365760"/>
-          </a:xfrm>
-          <a:prstGeom prst="rect">
-            <a:avLst/>
-          </a:prstGeom>
-          <a:noFill/>
-          <a:ln/>
-        </p:spPr>
-        <p:txBody>
-          <a:bodyPr wrap="square" rtlCol="0" anchor="ctr"/>
-          <a:lstStyle/>
-          <a:p>
-            <a:pPr indent="0" marL="0">
-              <a:buNone/>
-            </a:pPr>
-            <a:r>
-              <a:rPr lang="en-US" sz="1600" b="1" dirty="0">
-                <a:solidFill>
-                  <a:srgbClr val="10161F"/>
-                </a:solidFill>
-                <a:latin typeface="Pretendard" pitchFamily="34" charset="0"/>
-                <a:ea typeface="Pretendard" pitchFamily="34" charset="-122"/>
-                <a:cs typeface="Pretendard" pitchFamily="34" charset="-120"/>
-              </a:rPr>
-              <a:t>4단계</a:t>
-            </a:r>
-            <a:endParaRPr lang="en-US" sz="1600" dirty="0"/>
-          </a:p>
-        </p:txBody>
-      </p:sp>
-      <p:sp>
-        <p:nvSpPr>
-          <p:cNvPr id="28" name="Text 26"/>
-          <p:cNvSpPr/>
-          <p:nvPr/>
-        </p:nvSpPr>
-        <p:spPr>
-          <a:xfrm>
-            <a:off x="9354083" y="2761488"/>
-            <a:ext cx="2051228" cy="1828800"/>
-          </a:xfrm>
-          <a:prstGeom prst="rect">
-            <a:avLst/>
-          </a:prstGeom>
-          <a:noFill/>
-          <a:ln/>
-        </p:spPr>
-        <p:txBody>
-          <a:bodyPr wrap="square" rtlCol="0" anchor="t"/>
-          <a:lstStyle/>
-          <a:p>
-            <a:pPr indent="0" marL="0">
-              <a:buNone/>
-            </a:pPr>
-            <a:r>
-              <a:rPr lang="en-US" sz="1100" dirty="0">
-                <a:solidFill>
-                  <a:srgbClr val="10161F"/>
-                </a:solidFill>
-                <a:latin typeface="Pretendard" pitchFamily="34" charset="0"/>
-                <a:ea typeface="Pretendard" pitchFamily="34" charset="-122"/>
-                <a:cs typeface="Pretendard" pitchFamily="34" charset="-120"/>
-              </a:rPr>
-              <a:t>LOI(투자의향서) 제출 → 가격 협의 개시</a:t>
-            </a:r>
-            <a:endParaRPr lang="en-US" sz="1100" dirty="0"/>
-          </a:p>
-        </p:txBody>
-      </p:sp>
-      <p:sp>
-        <p:nvSpPr>
-          <p:cNvPr id="29" name="Text 27"/>
-          <p:cNvSpPr/>
-          <p:nvPr/>
-        </p:nvSpPr>
-        <p:spPr>
-          <a:xfrm>
-            <a:off x="566928" y="6382512"/>
-            <a:ext cx="7315200" cy="219456"/>
-          </a:xfrm>
-          <a:prstGeom prst="rect">
-            <a:avLst/>
-          </a:prstGeom>
-          <a:noFill/>
-          <a:ln/>
-        </p:spPr>
-        <p:txBody>
-          <a:bodyPr wrap="square" lIns="0" tIns="0" rIns="0" bIns="0" rtlCol="0" anchor="ctr"/>
-          <a:lstStyle/>
-          <a:p>
-            <a:pPr indent="0" marL="0">
-              <a:buNone/>
-            </a:pPr>
-            <a:r>
-              <a:rPr lang="en-US" sz="800" dirty="0">
-                <a:solidFill>
-                  <a:srgbClr val="718096"/>
-                </a:solidFill>
-                <a:latin typeface="Pretendard" pitchFamily="34" charset="0"/>
-                <a:ea typeface="Pretendard" pitchFamily="34" charset="-122"/>
-                <a:cs typeface="Pretendard" pitchFamily="34" charset="-120"/>
-              </a:rPr>
               <a:t>크리딜   |   </a:t>
             </a:r>
             <a:endParaRPr lang="en-US" sz="800" dirty="0"/>
@@ -10006,7 +10729,7 @@
       </p:sp>
       <p:sp>
         <p:nvSpPr>
-          <p:cNvPr id="30" name="Text 28"/>
+          <p:cNvPr id="25" name="Text 22"/>
           <p:cNvSpPr/>
           <p:nvPr/>
         </p:nvSpPr>

--- a/docs/test/stress/e2e-outputs/development_case12_yeoksam_dev_basic.pptx
+++ b/docs/test/stress/e2e-outputs/development_case12_yeoksam_dev_basic.pptx
@@ -4762,130 +4762,7 @@
       </p:sp>
       <p:sp>
         <p:nvSpPr>
-          <p:cNvPr id="10" name="Shape 8"/>
-          <p:cNvSpPr/>
-          <p:nvPr/>
-        </p:nvSpPr>
-        <p:spPr>
-          <a:xfrm>
-            <a:off x="566928" y="2999232"/>
-            <a:ext cx="11057839" cy="1280160"/>
-          </a:xfrm>
-          <a:prstGeom prst="roundRect">
-            <a:avLst>
-              <a:gd name="adj" fmla="val 4286"/>
-            </a:avLst>
-          </a:prstGeom>
-          <a:solidFill>
-            <a:srgbClr val="BEE3F8"/>
-          </a:solidFill>
-          <a:ln/>
-        </p:spPr>
-      </p:sp>
-      <p:sp>
-        <p:nvSpPr>
-          <p:cNvPr id="11" name="Shape 9"/>
-          <p:cNvSpPr/>
-          <p:nvPr/>
-        </p:nvSpPr>
-        <p:spPr>
-          <a:xfrm>
-            <a:off x="566928" y="3054096"/>
-            <a:ext cx="36576" cy="1170432"/>
-          </a:xfrm>
-          <a:prstGeom prst="rect">
-            <a:avLst/>
-          </a:prstGeom>
-          <a:solidFill>
-            <a:srgbClr val="2B6CB0"/>
-          </a:solidFill>
-          <a:ln/>
-        </p:spPr>
-      </p:sp>
-      <p:sp>
-        <p:nvSpPr>
-          <p:cNvPr id="12" name="Text 10"/>
-          <p:cNvSpPr/>
-          <p:nvPr/>
-        </p:nvSpPr>
-        <p:spPr>
-          <a:xfrm>
-            <a:off x="749808" y="3108960"/>
-            <a:ext cx="10728655" cy="201168"/>
-          </a:xfrm>
-          <a:prstGeom prst="rect">
-            <a:avLst/>
-          </a:prstGeom>
-          <a:noFill/>
-          <a:ln/>
-        </p:spPr>
-        <p:txBody>
-          <a:bodyPr wrap="square" lIns="0" tIns="0" rIns="0" bIns="0" rtlCol="0" anchor="ctr"/>
-          <a:lstStyle/>
-          <a:p>
-            <a:pPr indent="0" marL="0">
-              <a:buNone/>
-            </a:pPr>
-            <a:r>
-              <a:rPr lang="en-US" sz="1050" b="1" dirty="0">
-                <a:solidFill>
-                  <a:srgbClr val="2B6CB0"/>
-                </a:solidFill>
-                <a:latin typeface="Pretendard" pitchFamily="34" charset="0"/>
-                <a:ea typeface="Pretendard" pitchFamily="34" charset="-122"/>
-                <a:cs typeface="Pretendard" pitchFamily="34" charset="-120"/>
-              </a:rPr>
-              <a:t>신축 건축 규모 요약</a:t>
-            </a:r>
-            <a:endParaRPr lang="en-US" sz="1050" dirty="0"/>
-          </a:p>
-        </p:txBody>
-      </p:sp>
-      <p:sp>
-        <p:nvSpPr>
-          <p:cNvPr id="13" name="Text 11"/>
-          <p:cNvSpPr/>
-          <p:nvPr/>
-        </p:nvSpPr>
-        <p:spPr>
-          <a:xfrm>
-            <a:off x="749808" y="3328416"/>
-            <a:ext cx="10728655" cy="877824"/>
-          </a:xfrm>
-          <a:prstGeom prst="rect">
-            <a:avLst/>
-          </a:prstGeom>
-          <a:noFill/>
-          <a:ln/>
-        </p:spPr>
-        <p:txBody>
-          <a:bodyPr wrap="square" lIns="0" tIns="0" rIns="0" bIns="0" rtlCol="0" anchor="t"/>
-          <a:lstStyle/>
-          <a:p>
-            <a:pPr indent="0" marL="0">
-              <a:lnSpc>
-                <a:spcPct val="120000"/>
-              </a:lnSpc>
-              <a:buNone/>
-            </a:pPr>
-            <a:r>
-              <a:rPr lang="en-US" sz="930" dirty="0">
-                <a:solidFill>
-                  <a:srgbClr val="10161F"/>
-                </a:solidFill>
-                <a:latin typeface="Pretendard" pitchFamily="34" charset="0"/>
-                <a:ea typeface="Pretendard" pitchFamily="34" charset="-122"/>
-                <a:cs typeface="Pretendard" pitchFamily="34" charset="-120"/>
-              </a:rPr>
-              <a:t>{"ok":true,"mocked":true,"extractedFields":{"area_signal":"역삼","asset_type":"[건물명 비공개]","price_band":"300억","size_signal":"3000평(약 9917.4㎡)"},"extractedFacts":{"region":"역삼","exactAddressCandidate":"역삼동 742-1","assetType":"[건물명 비공개]","priceText":"300억","sizeText":"3000평(약 9917.4㎡)","currentUse":"오피스","currentUseSignal":"근린생활시설","leaseSignal":"임대중","vacancySignal":"공실없음","tenantNames":["쿠팡","네이버"],"unitRentTexts":["301호: 1500만"],"sellerMotivationText":"자산 효율화","brokerNotes":["역세권 도보 3분 이내 매물"]},"detectedSensitiveFields":["exact_address","tenant_name"],"ambiguousFields":[],"warnings":[],"areaSignal":"역삼","assetType":"[건물명 비공개]","priceBand":"300억","sizeSignal":"3000평(약 9917.4㎡)","dealType":"매각","buildingName":"역삼 [건물명 비공개]","exactAddress":"역삼동 742-1","totalFloorArea":9917.3,"buildYear":2015,"currentUseSignal":"근린생활시설","vacancySignal":"공실 없음","fitSummary":"역세권 도보 3분 이내 근생 빌딩으로 시행/사옥 매입에 최적화","cautionSummary":"주요 임차인 만기 조율 필요","hiddenFields":["exact_address","seller_motivation"],"confidence":{"areaSignal":"confirmed","assetType":"confirmed","priceBand":"ai_hypothesis","fitSummary":"ai_hypothesis"},"missingData":["sizeSignal"],"boundaryNote":"본 자료는 실거래 통계 기반 참고치입니다.","buyerType":"법인 사옥형","budgetRange":{"min":50,"max":80,"display":"50억~80억"},"preferredRegions":["강남","성수"],"assetTypes":["[건물명 비공개]","사옥용"],"purchasePurpose":"사옥용 매입","mustHave":["역세권 도보 3분 이내","주차"],"niceToHave":["테라스","루프탑"],"riskTolerance":"medium","financingNote":"자본금 50% 준비","missingQuestions":["구체적인 입주 시기가 언제인가요?","선호하는 수익률이 있나요?"],"privacyNotes":["연락처 비공개"],"fitReasons":["매수자 예산(50-80억)에 부합하는 매물입니다.","요청하신 성수/강남 권역에 해당합니다."],"cautionReasons":["요청한 용도와 달리 명도 협의가 다소 필요합니다."],"recommendedNextAction":"현장 답사 제안","kakaoMessage":"안녕하세요! 요청하신 조건에 부합하는 추천 매물이 있어 안내해 드립니다. 확인해보시고 피드백 부탁드립니다.","title":"강남 역삼역 역세권 도보 3분 이내 오피스 사옥용 빌딩 매각","shortSummary":"역삼역 도보 5분 거리의 준신축급 대형 [건물명 비공개]입니다.","dealPoints":["역세권 도보 3분 이내","사옥 최적"],"cautionPoints":["명도 조율 필요"],"hiddenInfoNotice":["보증금 및 지번은 인가 후 확인 가능"],"gateMessage":"G1 등급 등록이 필요합니다.","kakaoText":"강남 역삼역 오피스 빌딩 매각 안내입니다.","exactUnitCandidate":"101호","floor":"1층","areaSqmText":"150㎡","spaceType":"office","depositText":"5000만","monthlyRentText":"400만","maintenanceFeeText":"50만","availableFromText":"즉시입주","leaseTermMonthsText":"24","incentivesText":"렌트프리(무상임대) 2개월","restrictions":[],"landlordIdentity":"김성수","currentTenant":"스타트업","vacancyReason":"이전 확장","rentNegotiation":"협의 가능","region":"성수동","areaSqm":150,"deposit":5000,"monthlyRent":400,"maintenanceFee":50,"availableFrom":"즉시입주","leaseTermMonths":24,"incentives":{"렌트프리(무상임대)(무상임대)Months":2,"interiorSupport":"일부 인테리어 지원","freeRentDetail":"렌트프리(무상임대) 2개월 지원"},"shortSummaryLease":"성수역 도보 5분 거리 1층 리테일 상가 매물입니다."}</a:t>
-            </a:r>
-            <a:endParaRPr lang="en-US" sz="930" dirty="0"/>
-          </a:p>
-        </p:txBody>
-      </p:sp>
-      <p:sp>
-        <p:nvSpPr>
-          <p:cNvPr id="14" name="Text 12"/>
+          <p:cNvPr id="10" name="Text 8"/>
           <p:cNvSpPr/>
           <p:nvPr/>
         </p:nvSpPr>
@@ -4924,7 +4801,7 @@
       </p:sp>
       <p:sp>
         <p:nvSpPr>
-          <p:cNvPr id="15" name="Text 13"/>
+          <p:cNvPr id="11" name="Text 9"/>
           <p:cNvSpPr/>
           <p:nvPr/>
         </p:nvSpPr>
@@ -13013,130 +12890,7 @@
       </p:sp>
       <p:sp>
         <p:nvSpPr>
-          <p:cNvPr id="10" name="Shape 8"/>
-          <p:cNvSpPr/>
-          <p:nvPr/>
-        </p:nvSpPr>
-        <p:spPr>
-          <a:xfrm>
-            <a:off x="566928" y="2999232"/>
-            <a:ext cx="11057839" cy="1280160"/>
-          </a:xfrm>
-          <a:prstGeom prst="roundRect">
-            <a:avLst>
-              <a:gd name="adj" fmla="val 4286"/>
-            </a:avLst>
-          </a:prstGeom>
-          <a:solidFill>
-            <a:srgbClr val="BEE3F8"/>
-          </a:solidFill>
-          <a:ln/>
-        </p:spPr>
-      </p:sp>
-      <p:sp>
-        <p:nvSpPr>
-          <p:cNvPr id="11" name="Shape 9"/>
-          <p:cNvSpPr/>
-          <p:nvPr/>
-        </p:nvSpPr>
-        <p:spPr>
-          <a:xfrm>
-            <a:off x="566928" y="3054096"/>
-            <a:ext cx="36576" cy="1170432"/>
-          </a:xfrm>
-          <a:prstGeom prst="rect">
-            <a:avLst/>
-          </a:prstGeom>
-          <a:solidFill>
-            <a:srgbClr val="2B6CB0"/>
-          </a:solidFill>
-          <a:ln/>
-        </p:spPr>
-      </p:sp>
-      <p:sp>
-        <p:nvSpPr>
-          <p:cNvPr id="12" name="Text 10"/>
-          <p:cNvSpPr/>
-          <p:nvPr/>
-        </p:nvSpPr>
-        <p:spPr>
-          <a:xfrm>
-            <a:off x="749808" y="3108960"/>
-            <a:ext cx="10728655" cy="201168"/>
-          </a:xfrm>
-          <a:prstGeom prst="rect">
-            <a:avLst/>
-          </a:prstGeom>
-          <a:noFill/>
-          <a:ln/>
-        </p:spPr>
-        <p:txBody>
-          <a:bodyPr wrap="square" lIns="0" tIns="0" rIns="0" bIns="0" rtlCol="0" anchor="ctr"/>
-          <a:lstStyle/>
-          <a:p>
-            <a:pPr indent="0" marL="0">
-              <a:buNone/>
-            </a:pPr>
-            <a:r>
-              <a:rPr lang="en-US" sz="1050" b="1" dirty="0">
-                <a:solidFill>
-                  <a:srgbClr val="2B6CB0"/>
-                </a:solidFill>
-                <a:latin typeface="Pretendard" pitchFamily="34" charset="0"/>
-                <a:ea typeface="Pretendard" pitchFamily="34" charset="-122"/>
-                <a:cs typeface="Pretendard" pitchFamily="34" charset="-120"/>
-              </a:rPr>
-              <a:t>신축 건축 규모 요약</a:t>
-            </a:r>
-            <a:endParaRPr lang="en-US" sz="1050" dirty="0"/>
-          </a:p>
-        </p:txBody>
-      </p:sp>
-      <p:sp>
-        <p:nvSpPr>
-          <p:cNvPr id="13" name="Text 11"/>
-          <p:cNvSpPr/>
-          <p:nvPr/>
-        </p:nvSpPr>
-        <p:spPr>
-          <a:xfrm>
-            <a:off x="749808" y="3328416"/>
-            <a:ext cx="10728655" cy="877824"/>
-          </a:xfrm>
-          <a:prstGeom prst="rect">
-            <a:avLst/>
-          </a:prstGeom>
-          <a:noFill/>
-          <a:ln/>
-        </p:spPr>
-        <p:txBody>
-          <a:bodyPr wrap="square" lIns="0" tIns="0" rIns="0" bIns="0" rtlCol="0" anchor="t"/>
-          <a:lstStyle/>
-          <a:p>
-            <a:pPr indent="0" marL="0">
-              <a:lnSpc>
-                <a:spcPct val="120000"/>
-              </a:lnSpc>
-              <a:buNone/>
-            </a:pPr>
-            <a:r>
-              <a:rPr lang="en-US" sz="930" dirty="0">
-                <a:solidFill>
-                  <a:srgbClr val="10161F"/>
-                </a:solidFill>
-                <a:latin typeface="Pretendard" pitchFamily="34" charset="0"/>
-                <a:ea typeface="Pretendard" pitchFamily="34" charset="-122"/>
-                <a:cs typeface="Pretendard" pitchFamily="34" charset="-120"/>
-              </a:rPr>
-              <a:t>{"ok":true,"mocked":true,"extractedFields":{"area_signal":"역삼","asset_type":"[건물명 비공개]","price_band":"300억","size_signal":"3000평(약 9917.4㎡)"},"extractedFacts":{"region":"역삼","exactAddressCandidate":"역삼동 742-1","assetType":"[건물명 비공개]","priceText":"300억","sizeText":"3000평(약 9917.4㎡)","currentUse":"오피스","currentUseSignal":"근린생활시설","leaseSignal":"임대중","vacancySignal":"공실없음","tenantNames":["쿠팡","네이버"],"unitRentTexts":["301호: 1500만"],"sellerMotivationText":"자산 효율화","brokerNotes":["역세권 도보 3분 이내 매물"]},"detectedSensitiveFields":["exact_address","tenant_name"],"ambiguousFields":[],"warnings":[],"areaSignal":"역삼","assetType":"[건물명 비공개]","priceBand":"300억","sizeSignal":"3000평(약 9917.4㎡)","dealType":"매각","buildingName":"역삼 [건물명 비공개]","exactAddress":"역삼동 742-1","totalFloorArea":9917.3,"buildYear":2015,"currentUseSignal":"근린생활시설","vacancySignal":"공실 없음","fitSummary":"역세권 도보 3분 이내 근생 빌딩으로 시행/사옥 매입에 최적화","cautionSummary":"주요 임차인 만기 조율 필요","hiddenFields":["exact_address","seller_motivation"],"confidence":{"areaSignal":"confirmed","assetType":"confirmed","priceBand":"ai_hypothesis","fitSummary":"ai_hypothesis"},"missingData":["sizeSignal"],"boundaryNote":"본 자료는 실거래 통계 기반 참고치입니다.","buyerType":"법인 사옥형","budgetRange":{"min":50,"max":80,"display":"50억~80억"},"preferredRegions":["강남","성수"],"assetTypes":["[건물명 비공개]","사옥용"],"purchasePurpose":"사옥용 매입","mustHave":["역세권 도보 3분 이내","주차"],"niceToHave":["테라스","루프탑"],"riskTolerance":"medium","financingNote":"자본금 50% 준비","missingQuestions":["구체적인 입주 시기가 언제인가요?","선호하는 수익률이 있나요?"],"privacyNotes":["연락처 비공개"],"fitReasons":["매수자 예산(50-80억)에 부합하는 매물입니다.","요청하신 성수/강남 권역에 해당합니다."],"cautionReasons":["요청한 용도와 달리 명도 협의가 다소 필요합니다."],"recommendedNextAction":"현장 답사 제안","kakaoMessage":"안녕하세요! 요청하신 조건에 부합하는 추천 매물이 있어 안내해 드립니다. 확인해보시고 피드백 부탁드립니다.","title":"강남 역삼역 역세권 도보 3분 이내 오피스 사옥용 빌딩 매각","shortSummary":"역삼역 도보 5분 거리의 준신축급 대형 [건물명 비공개]입니다.","dealPoints":["역세권 도보 3분 이내","사옥 최적"],"cautionPoints":["명도 조율 필요"],"hiddenInfoNotice":["보증금 및 지번은 인가 후 확인 가능"],"gateMessage":"G1 등급 등록이 필요합니다.","kakaoText":"강남 역삼역 오피스 빌딩 매각 안내입니다.","exactUnitCandidate":"101호","floor":"1층","areaSqmText":"150㎡","spaceType":"office","depositText":"5000만","monthlyRentText":"400만","maintenanceFeeText":"50만","availableFromText":"즉시입주","leaseTermMonthsText":"24","incentivesText":"렌트프리(무상임대) 2개월","restrictions":[],"landlordIdentity":"김성수","currentTenant":"스타트업","vacancyReason":"이전 확장","rentNegotiation":"협의 가능","region":"성수동","areaSqm":150,"deposit":5000,"monthlyRent":400,"maintenanceFee":50,"availableFrom":"즉시입주","leaseTermMonths":24,"incentives":{"렌트프리(무상임대)(무상임대)Months":2,"interiorSupport":"일부 인테리어 지원","freeRentDetail":"렌트프리(무상임대) 2개월 지원"},"shortSummaryLease":"성수역 도보 5분 거리 1층 리테일 상가 매물입니다."}</a:t>
-            </a:r>
-            <a:endParaRPr lang="en-US" sz="930" dirty="0"/>
-          </a:p>
-        </p:txBody>
-      </p:sp>
-      <p:sp>
-        <p:nvSpPr>
-          <p:cNvPr id="14" name="Text 12"/>
+          <p:cNvPr id="10" name="Text 8"/>
           <p:cNvSpPr/>
           <p:nvPr/>
         </p:nvSpPr>
@@ -13175,7 +12929,7 @@
       </p:sp>
       <p:sp>
         <p:nvSpPr>
-          <p:cNvPr id="15" name="Text 13"/>
+          <p:cNvPr id="11" name="Text 9"/>
           <p:cNvSpPr/>
           <p:nvPr/>
         </p:nvSpPr>
